--- a/output/wordlabs-press-3day.pptx
+++ b/output/wordlabs-press-3day.pptx
@@ -6040,7 +6040,7 @@
                 <a:ea typeface="Calibri" pitchFamily="34" charset="-122"/>
                 <a:cs typeface="Calibri" pitchFamily="34" charset="-120"/>
               </a:rPr>
-              <a:t>She tried to </a:t>
+              <a:t>The doctor explained that too much </a:t>
             </a:r>
             <a:pPr algn="l" indent="0" marL="0">
               <a:buNone/>
@@ -6057,7 +6057,7 @@
                 <a:ea typeface="Calibri" pitchFamily="34" charset="-122"/>
                 <a:cs typeface="Calibri" pitchFamily="34" charset="-120"/>
               </a:rPr>
-              <a:t>impress</a:t>
+              <a:t>pressure</a:t>
             </a:r>
             <a:pPr algn="l" indent="0" marL="0">
               <a:buNone/>
@@ -6071,7 +6071,7 @@
                 <a:ea typeface="Calibri" pitchFamily="34" charset="-122"/>
                 <a:cs typeface="Calibri" pitchFamily="34" charset="-120"/>
               </a:rPr>
-              <a:t> her teacher by writing an </a:t>
+              <a:t> on the wound could </a:t>
             </a:r>
             <a:pPr algn="l" indent="0" marL="0">
               <a:buNone/>
@@ -6088,7 +6088,7 @@
                 <a:ea typeface="Calibri" pitchFamily="34" charset="-122"/>
                 <a:cs typeface="Calibri" pitchFamily="34" charset="-120"/>
               </a:rPr>
-              <a:t>expressive</a:t>
+              <a:t>compress</a:t>
             </a:r>
             <a:pPr algn="l" indent="0" marL="0">
               <a:buNone/>
@@ -6102,7 +6102,7 @@
                 <a:ea typeface="Calibri" pitchFamily="34" charset="-122"/>
                 <a:cs typeface="Calibri" pitchFamily="34" charset="-120"/>
               </a:rPr>
-              <a:t> poem about the ocean.</a:t>
+              <a:t> the blood vessels.</a:t>
             </a:r>
             <a:endParaRPr lang="en-US" sz="1800" dirty="0"/>
           </a:p>
@@ -6257,7 +6257,7 @@
                 <a:ea typeface="Trebuchet MS" pitchFamily="34" charset="-122"/>
                 <a:cs typeface="Trebuchet MS" pitchFamily="34" charset="-120"/>
               </a:rPr>
-              <a:t>impress</a:t>
+              <a:t>pressure</a:t>
             </a:r>
             <a:endParaRPr lang="en-US" sz="1400" dirty="0"/>
           </a:p>
@@ -6385,7 +6385,7 @@
                 <a:ea typeface="Trebuchet MS" pitchFamily="34" charset="-122"/>
                 <a:cs typeface="Trebuchet MS" pitchFamily="34" charset="-120"/>
               </a:rPr>
-              <a:t>expressive</a:t>
+              <a:t>compress</a:t>
             </a:r>
             <a:endParaRPr lang="en-US" sz="1400" dirty="0"/>
           </a:p>
@@ -6855,7 +6855,7 @@
                 <a:ea typeface="Trebuchet MS" pitchFamily="34" charset="-122"/>
                 <a:cs typeface="Trebuchet MS" pitchFamily="34" charset="-120"/>
               </a:rPr>
-              <a:t>impress</a:t>
+              <a:t>pressure</a:t>
             </a:r>
             <a:endParaRPr lang="en-US" sz="2800" dirty="0"/>
           </a:p>
@@ -7682,7 +7682,7 @@
                 <a:ea typeface="Trebuchet MS" pitchFamily="34" charset="-122"/>
                 <a:cs typeface="Trebuchet MS" pitchFamily="34" charset="-120"/>
               </a:rPr>
-              <a:t>impress</a:t>
+              <a:t>pressure</a:t>
             </a:r>
             <a:endParaRPr lang="en-US" sz="2800" dirty="0"/>
           </a:p>
@@ -7771,11 +7771,11 @@
             </a:avLst>
           </a:prstGeom>
           <a:solidFill>
-            <a:srgbClr val="DDD6FE"/>
+            <a:srgbClr val="CCFBF1"/>
           </a:solidFill>
           <a:ln w="19050">
             <a:solidFill>
-              <a:srgbClr val="7C3AED"/>
+              <a:srgbClr val="0D9488"/>
             </a:solidFill>
             <a:prstDash val="solid"/>
           </a:ln>
@@ -7815,13 +7815,13 @@
             <a:r>
               <a:rPr lang="en-US" sz="1300" b="1" dirty="0">
                 <a:solidFill>
-                  <a:srgbClr val="4C1D95"/>
+                  <a:srgbClr val="0F766E"/>
                 </a:solidFill>
                 <a:latin typeface="Trebuchet MS" pitchFamily="34" charset="0"/>
                 <a:ea typeface="Trebuchet MS" pitchFamily="34" charset="-122"/>
                 <a:cs typeface="Trebuchet MS" pitchFamily="34" charset="-120"/>
               </a:rPr>
-              <a:t>im</a:t>
+              <a:t>press</a:t>
             </a:r>
             <a:endParaRPr lang="en-US" sz="1300" dirty="0"/>
           </a:p>
@@ -7860,7 +7860,7 @@
                 <a:ea typeface="Calibri" pitchFamily="34" charset="-122"/>
                 <a:cs typeface="Calibri" pitchFamily="34" charset="-120"/>
               </a:rPr>
-              <a:t>into / upon</a:t>
+              <a:t>to push or squeeze</a:t>
             </a:r>
             <a:endParaRPr lang="en-US" sz="850" dirty="0"/>
           </a:p>
@@ -7868,46 +7868,7 @@
       </p:sp>
       <p:sp>
         <p:nvSpPr>
-          <p:cNvPr id="19" name="Text 17"/>
-          <p:cNvSpPr/>
-          <p:nvPr/>
-        </p:nvSpPr>
-        <p:spPr>
-          <a:xfrm>
-            <a:off x="2938272" y="2752344"/>
-            <a:ext cx="1828800" cy="182880"/>
-          </a:xfrm>
-          <a:prstGeom prst="rect">
-            <a:avLst/>
-          </a:prstGeom>
-          <a:noFill/>
-          <a:ln/>
-        </p:spPr>
-        <p:txBody>
-          <a:bodyPr wrap="square" lIns="0" tIns="0" rIns="0" bIns="0" rtlCol="0" anchor="t"/>
-          <a:lstStyle/>
-          <a:p>
-            <a:pPr algn="ctr" indent="0" marL="0">
-              <a:buNone/>
-            </a:pPr>
-            <a:r>
-              <a:rPr lang="en-US" sz="700" i="1" dirty="0">
-                <a:solidFill>
-                  <a:srgbClr val="94A3B8"/>
-                </a:solidFill>
-                <a:latin typeface="Calibri" pitchFamily="34" charset="0"/>
-                <a:ea typeface="Calibri" pitchFamily="34" charset="-122"/>
-                <a:cs typeface="Calibri" pitchFamily="34" charset="-120"/>
-              </a:rPr>
-              <a:t>in → im before 'm/p'</a:t>
-            </a:r>
-            <a:endParaRPr lang="en-US" sz="700" dirty="0"/>
-          </a:p>
-        </p:txBody>
-      </p:sp>
-      <p:sp>
-        <p:nvSpPr>
-          <p:cNvPr id="20" name="Shape 18"/>
+          <p:cNvPr id="19" name="Shape 17"/>
           <p:cNvSpPr/>
           <p:nvPr/>
         </p:nvSpPr>
@@ -7922,11 +7883,11 @@
             </a:avLst>
           </a:prstGeom>
           <a:solidFill>
-            <a:srgbClr val="CCFBF1"/>
+            <a:srgbClr val="FCE7F3"/>
           </a:solidFill>
           <a:ln w="19050">
             <a:solidFill>
-              <a:srgbClr val="0D9488"/>
+              <a:srgbClr val="DB2777"/>
             </a:solidFill>
             <a:prstDash val="solid"/>
           </a:ln>
@@ -7941,7 +7902,7 @@
       </p:sp>
       <p:sp>
         <p:nvSpPr>
-          <p:cNvPr id="21" name="Text 19"/>
+          <p:cNvPr id="20" name="Text 18"/>
           <p:cNvSpPr/>
           <p:nvPr/>
         </p:nvSpPr>
@@ -7966,13 +7927,13 @@
             <a:r>
               <a:rPr lang="en-US" sz="1300" b="1" dirty="0">
                 <a:solidFill>
-                  <a:srgbClr val="0F766E"/>
+                  <a:srgbClr val="9D174D"/>
                 </a:solidFill>
                 <a:latin typeface="Trebuchet MS" pitchFamily="34" charset="0"/>
                 <a:ea typeface="Trebuchet MS" pitchFamily="34" charset="-122"/>
                 <a:cs typeface="Trebuchet MS" pitchFamily="34" charset="-120"/>
               </a:rPr>
-              <a:t>press</a:t>
+              <a:t>ure</a:t>
             </a:r>
             <a:endParaRPr lang="en-US" sz="1300" dirty="0"/>
           </a:p>
@@ -7980,7 +7941,7 @@
       </p:sp>
       <p:sp>
         <p:nvSpPr>
-          <p:cNvPr id="22" name="Text 20"/>
+          <p:cNvPr id="21" name="Text 19"/>
           <p:cNvSpPr/>
           <p:nvPr/>
         </p:nvSpPr>
@@ -8011,7 +7972,7 @@
                 <a:ea typeface="Calibri" pitchFamily="34" charset="-122"/>
                 <a:cs typeface="Calibri" pitchFamily="34" charset="-120"/>
               </a:rPr>
-              <a:t>to push or squeeze</a:t>
+              <a:t>state or condition of</a:t>
             </a:r>
             <a:endParaRPr lang="en-US" sz="850" dirty="0"/>
           </a:p>
@@ -8019,7 +7980,7 @@
       </p:sp>
       <p:sp>
         <p:nvSpPr>
-          <p:cNvPr id="23" name="Shape 21"/>
+          <p:cNvPr id="22" name="Shape 20"/>
           <p:cNvSpPr/>
           <p:nvPr/>
         </p:nvSpPr>
@@ -8046,7 +8007,7 @@
       </p:sp>
       <p:sp>
         <p:nvSpPr>
-          <p:cNvPr id="24" name="Text 22"/>
+          <p:cNvPr id="23" name="Text 21"/>
           <p:cNvSpPr/>
           <p:nvPr/>
         </p:nvSpPr>
@@ -8085,7 +8046,7 @@
       </p:sp>
       <p:sp>
         <p:nvSpPr>
-          <p:cNvPr id="25" name="Shape 23"/>
+          <p:cNvPr id="24" name="Shape 22"/>
           <p:cNvSpPr/>
           <p:nvPr/>
         </p:nvSpPr>
@@ -8112,7 +8073,7 @@
       </p:sp>
       <p:sp>
         <p:nvSpPr>
-          <p:cNvPr id="26" name="Text 24"/>
+          <p:cNvPr id="25" name="Text 23"/>
           <p:cNvSpPr/>
           <p:nvPr/>
         </p:nvSpPr>
@@ -8151,7 +8112,7 @@
       </p:sp>
       <p:sp>
         <p:nvSpPr>
-          <p:cNvPr id="27" name="Shape 25"/>
+          <p:cNvPr id="26" name="Shape 24"/>
           <p:cNvSpPr/>
           <p:nvPr/>
         </p:nvSpPr>
@@ -8178,7 +8139,7 @@
       </p:sp>
       <p:sp>
         <p:nvSpPr>
-          <p:cNvPr id="28" name="Text 26"/>
+          <p:cNvPr id="27" name="Text 25"/>
           <p:cNvSpPr/>
           <p:nvPr/>
         </p:nvSpPr>
@@ -8217,7 +8178,7 @@
       </p:sp>
       <p:sp>
         <p:nvSpPr>
-          <p:cNvPr id="29" name="Shape 27"/>
+          <p:cNvPr id="28" name="Shape 26"/>
           <p:cNvSpPr/>
           <p:nvPr/>
         </p:nvSpPr>
@@ -8244,7 +8205,7 @@
       </p:sp>
       <p:sp>
         <p:nvSpPr>
-          <p:cNvPr id="30" name="Text 28"/>
+          <p:cNvPr id="29" name="Text 27"/>
           <p:cNvSpPr/>
           <p:nvPr/>
         </p:nvSpPr>
@@ -8706,7 +8667,7 @@
                 <a:ea typeface="Trebuchet MS" pitchFamily="34" charset="-122"/>
                 <a:cs typeface="Trebuchet MS" pitchFamily="34" charset="-120"/>
               </a:rPr>
-              <a:t>impress</a:t>
+              <a:t>pressure</a:t>
             </a:r>
             <a:endParaRPr lang="en-US" sz="2800" dirty="0"/>
           </a:p>
@@ -8795,11 +8756,11 @@
             </a:avLst>
           </a:prstGeom>
           <a:solidFill>
-            <a:srgbClr val="DDD6FE"/>
+            <a:srgbClr val="CCFBF1"/>
           </a:solidFill>
           <a:ln w="19050">
             <a:solidFill>
-              <a:srgbClr val="7C3AED"/>
+              <a:srgbClr val="0D9488"/>
             </a:solidFill>
             <a:prstDash val="solid"/>
           </a:ln>
@@ -8839,13 +8800,13 @@
             <a:r>
               <a:rPr lang="en-US" sz="1300" b="1" dirty="0">
                 <a:solidFill>
-                  <a:srgbClr val="4C1D95"/>
+                  <a:srgbClr val="0F766E"/>
                 </a:solidFill>
                 <a:latin typeface="Trebuchet MS" pitchFamily="34" charset="0"/>
                 <a:ea typeface="Trebuchet MS" pitchFamily="34" charset="-122"/>
                 <a:cs typeface="Trebuchet MS" pitchFamily="34" charset="-120"/>
               </a:rPr>
-              <a:t>im</a:t>
+              <a:t>press</a:t>
             </a:r>
             <a:endParaRPr lang="en-US" sz="1300" dirty="0"/>
           </a:p>
@@ -8884,7 +8845,7 @@
                 <a:ea typeface="Calibri" pitchFamily="34" charset="-122"/>
                 <a:cs typeface="Calibri" pitchFamily="34" charset="-120"/>
               </a:rPr>
-              <a:t>into / upon</a:t>
+              <a:t>to push or squeeze</a:t>
             </a:r>
             <a:endParaRPr lang="en-US" sz="850" dirty="0"/>
           </a:p>
@@ -8892,46 +8853,7 @@
       </p:sp>
       <p:sp>
         <p:nvSpPr>
-          <p:cNvPr id="19" name="Text 17"/>
-          <p:cNvSpPr/>
-          <p:nvPr/>
-        </p:nvSpPr>
-        <p:spPr>
-          <a:xfrm>
-            <a:off x="2938272" y="2752344"/>
-            <a:ext cx="1828800" cy="182880"/>
-          </a:xfrm>
-          <a:prstGeom prst="rect">
-            <a:avLst/>
-          </a:prstGeom>
-          <a:noFill/>
-          <a:ln/>
-        </p:spPr>
-        <p:txBody>
-          <a:bodyPr wrap="square" lIns="0" tIns="0" rIns="0" bIns="0" rtlCol="0" anchor="t"/>
-          <a:lstStyle/>
-          <a:p>
-            <a:pPr algn="ctr" indent="0" marL="0">
-              <a:buNone/>
-            </a:pPr>
-            <a:r>
-              <a:rPr lang="en-US" sz="700" i="1" dirty="0">
-                <a:solidFill>
-                  <a:srgbClr val="94A3B8"/>
-                </a:solidFill>
-                <a:latin typeface="Calibri" pitchFamily="34" charset="0"/>
-                <a:ea typeface="Calibri" pitchFamily="34" charset="-122"/>
-                <a:cs typeface="Calibri" pitchFamily="34" charset="-120"/>
-              </a:rPr>
-              <a:t>in → im before 'm/p'</a:t>
-            </a:r>
-            <a:endParaRPr lang="en-US" sz="700" dirty="0"/>
-          </a:p>
-        </p:txBody>
-      </p:sp>
-      <p:sp>
-        <p:nvSpPr>
-          <p:cNvPr id="20" name="Shape 18"/>
+          <p:cNvPr id="19" name="Shape 17"/>
           <p:cNvSpPr/>
           <p:nvPr/>
         </p:nvSpPr>
@@ -8946,11 +8868,11 @@
             </a:avLst>
           </a:prstGeom>
           <a:solidFill>
-            <a:srgbClr val="CCFBF1"/>
+            <a:srgbClr val="FCE7F3"/>
           </a:solidFill>
           <a:ln w="19050">
             <a:solidFill>
-              <a:srgbClr val="0D9488"/>
+              <a:srgbClr val="DB2777"/>
             </a:solidFill>
             <a:prstDash val="solid"/>
           </a:ln>
@@ -8965,7 +8887,7 @@
       </p:sp>
       <p:sp>
         <p:nvSpPr>
-          <p:cNvPr id="21" name="Text 19"/>
+          <p:cNvPr id="20" name="Text 18"/>
           <p:cNvSpPr/>
           <p:nvPr/>
         </p:nvSpPr>
@@ -8990,13 +8912,13 @@
             <a:r>
               <a:rPr lang="en-US" sz="1300" b="1" dirty="0">
                 <a:solidFill>
-                  <a:srgbClr val="0F766E"/>
+                  <a:srgbClr val="9D174D"/>
                 </a:solidFill>
                 <a:latin typeface="Trebuchet MS" pitchFamily="34" charset="0"/>
                 <a:ea typeface="Trebuchet MS" pitchFamily="34" charset="-122"/>
                 <a:cs typeface="Trebuchet MS" pitchFamily="34" charset="-120"/>
               </a:rPr>
-              <a:t>press</a:t>
+              <a:t>ure</a:t>
             </a:r>
             <a:endParaRPr lang="en-US" sz="1300" dirty="0"/>
           </a:p>
@@ -9004,7 +8926,7 @@
       </p:sp>
       <p:sp>
         <p:nvSpPr>
-          <p:cNvPr id="22" name="Text 20"/>
+          <p:cNvPr id="21" name="Text 19"/>
           <p:cNvSpPr/>
           <p:nvPr/>
         </p:nvSpPr>
@@ -9035,7 +8957,7 @@
                 <a:ea typeface="Calibri" pitchFamily="34" charset="-122"/>
                 <a:cs typeface="Calibri" pitchFamily="34" charset="-120"/>
               </a:rPr>
-              <a:t>to push or squeeze</a:t>
+              <a:t>state or condition of</a:t>
             </a:r>
             <a:endParaRPr lang="en-US" sz="850" dirty="0"/>
           </a:p>
@@ -9043,7 +8965,7 @@
       </p:sp>
       <p:sp>
         <p:nvSpPr>
-          <p:cNvPr id="23" name="Shape 21"/>
+          <p:cNvPr id="22" name="Shape 20"/>
           <p:cNvSpPr/>
           <p:nvPr/>
         </p:nvSpPr>
@@ -9070,7 +8992,7 @@
       </p:sp>
       <p:sp>
         <p:nvSpPr>
-          <p:cNvPr id="24" name="Text 22"/>
+          <p:cNvPr id="23" name="Text 21"/>
           <p:cNvSpPr/>
           <p:nvPr/>
         </p:nvSpPr>
@@ -9109,7 +9031,7 @@
       </p:sp>
       <p:sp>
         <p:nvSpPr>
-          <p:cNvPr id="25" name="Shape 23"/>
+          <p:cNvPr id="24" name="Shape 22"/>
           <p:cNvSpPr/>
           <p:nvPr/>
         </p:nvSpPr>
@@ -9136,7 +9058,7 @@
       </p:sp>
       <p:sp>
         <p:nvSpPr>
-          <p:cNvPr id="26" name="Shape 24"/>
+          <p:cNvPr id="25" name="Shape 23"/>
           <p:cNvSpPr/>
           <p:nvPr/>
         </p:nvSpPr>
@@ -9163,7 +9085,7 @@
       </p:sp>
       <p:sp>
         <p:nvSpPr>
-          <p:cNvPr id="27" name="Text 25"/>
+          <p:cNvPr id="26" name="Text 24"/>
           <p:cNvSpPr/>
           <p:nvPr/>
         </p:nvSpPr>
@@ -9194,7 +9116,7 @@
                 <a:ea typeface="Trebuchet MS" pitchFamily="34" charset="-122"/>
                 <a:cs typeface="Trebuchet MS" pitchFamily="34" charset="-120"/>
               </a:rPr>
-              <a:t>im</a:t>
+              <a:t>pres</a:t>
             </a:r>
             <a:endParaRPr lang="en-US" sz="1400" dirty="0"/>
           </a:p>
@@ -9202,7 +9124,7 @@
       </p:sp>
       <p:sp>
         <p:nvSpPr>
-          <p:cNvPr id="28" name="Text 26"/>
+          <p:cNvPr id="27" name="Text 25"/>
           <p:cNvSpPr/>
           <p:nvPr/>
         </p:nvSpPr>
@@ -9241,7 +9163,7 @@
       </p:sp>
       <p:sp>
         <p:nvSpPr>
-          <p:cNvPr id="29" name="Shape 27"/>
+          <p:cNvPr id="28" name="Shape 26"/>
           <p:cNvSpPr/>
           <p:nvPr/>
         </p:nvSpPr>
@@ -9268,7 +9190,7 @@
       </p:sp>
       <p:sp>
         <p:nvSpPr>
-          <p:cNvPr id="30" name="Text 28"/>
+          <p:cNvPr id="29" name="Text 27"/>
           <p:cNvSpPr/>
           <p:nvPr/>
         </p:nvSpPr>
@@ -9299,7 +9221,7 @@
                 <a:ea typeface="Trebuchet MS" pitchFamily="34" charset="-122"/>
                 <a:cs typeface="Trebuchet MS" pitchFamily="34" charset="-120"/>
               </a:rPr>
-              <a:t>press</a:t>
+              <a:t>sure</a:t>
             </a:r>
             <a:endParaRPr lang="en-US" sz="1400" dirty="0"/>
           </a:p>
@@ -9307,7 +9229,7 @@
       </p:sp>
       <p:sp>
         <p:nvSpPr>
-          <p:cNvPr id="31" name="Shape 29"/>
+          <p:cNvPr id="30" name="Shape 28"/>
           <p:cNvSpPr/>
           <p:nvPr/>
         </p:nvSpPr>
@@ -9334,7 +9256,7 @@
       </p:sp>
       <p:sp>
         <p:nvSpPr>
-          <p:cNvPr id="32" name="Text 30"/>
+          <p:cNvPr id="31" name="Text 29"/>
           <p:cNvSpPr/>
           <p:nvPr/>
         </p:nvSpPr>
@@ -9373,7 +9295,7 @@
       </p:sp>
       <p:sp>
         <p:nvSpPr>
-          <p:cNvPr id="33" name="Shape 31"/>
+          <p:cNvPr id="32" name="Shape 30"/>
           <p:cNvSpPr/>
           <p:nvPr/>
         </p:nvSpPr>
@@ -9400,7 +9322,7 @@
       </p:sp>
       <p:sp>
         <p:nvSpPr>
-          <p:cNvPr id="34" name="Text 32"/>
+          <p:cNvPr id="33" name="Text 31"/>
           <p:cNvSpPr/>
           <p:nvPr/>
         </p:nvSpPr>
@@ -9862,7 +9784,7 @@
                 <a:ea typeface="Trebuchet MS" pitchFamily="34" charset="-122"/>
                 <a:cs typeface="Trebuchet MS" pitchFamily="34" charset="-120"/>
               </a:rPr>
-              <a:t>impress</a:t>
+              <a:t>pressure</a:t>
             </a:r>
             <a:endParaRPr lang="en-US" sz="2800" dirty="0"/>
           </a:p>
@@ -9951,11 +9873,11 @@
             </a:avLst>
           </a:prstGeom>
           <a:solidFill>
-            <a:srgbClr val="DDD6FE"/>
+            <a:srgbClr val="CCFBF1"/>
           </a:solidFill>
           <a:ln w="19050">
             <a:solidFill>
-              <a:srgbClr val="7C3AED"/>
+              <a:srgbClr val="0D9488"/>
             </a:solidFill>
             <a:prstDash val="solid"/>
           </a:ln>
@@ -9995,13 +9917,13 @@
             <a:r>
               <a:rPr lang="en-US" sz="1300" b="1" dirty="0">
                 <a:solidFill>
-                  <a:srgbClr val="4C1D95"/>
+                  <a:srgbClr val="0F766E"/>
                 </a:solidFill>
                 <a:latin typeface="Trebuchet MS" pitchFamily="34" charset="0"/>
                 <a:ea typeface="Trebuchet MS" pitchFamily="34" charset="-122"/>
                 <a:cs typeface="Trebuchet MS" pitchFamily="34" charset="-120"/>
               </a:rPr>
-              <a:t>im</a:t>
+              <a:t>press</a:t>
             </a:r>
             <a:endParaRPr lang="en-US" sz="1300" dirty="0"/>
           </a:p>
@@ -10040,7 +9962,7 @@
                 <a:ea typeface="Calibri" pitchFamily="34" charset="-122"/>
                 <a:cs typeface="Calibri" pitchFamily="34" charset="-120"/>
               </a:rPr>
-              <a:t>into / upon</a:t>
+              <a:t>to push or squeeze</a:t>
             </a:r>
             <a:endParaRPr lang="en-US" sz="850" dirty="0"/>
           </a:p>
@@ -10048,46 +9970,7 @@
       </p:sp>
       <p:sp>
         <p:nvSpPr>
-          <p:cNvPr id="19" name="Text 17"/>
-          <p:cNvSpPr/>
-          <p:nvPr/>
-        </p:nvSpPr>
-        <p:spPr>
-          <a:xfrm>
-            <a:off x="2938272" y="2752344"/>
-            <a:ext cx="1828800" cy="182880"/>
-          </a:xfrm>
-          <a:prstGeom prst="rect">
-            <a:avLst/>
-          </a:prstGeom>
-          <a:noFill/>
-          <a:ln/>
-        </p:spPr>
-        <p:txBody>
-          <a:bodyPr wrap="square" lIns="0" tIns="0" rIns="0" bIns="0" rtlCol="0" anchor="t"/>
-          <a:lstStyle/>
-          <a:p>
-            <a:pPr algn="ctr" indent="0" marL="0">
-              <a:buNone/>
-            </a:pPr>
-            <a:r>
-              <a:rPr lang="en-US" sz="700" i="1" dirty="0">
-                <a:solidFill>
-                  <a:srgbClr val="94A3B8"/>
-                </a:solidFill>
-                <a:latin typeface="Calibri" pitchFamily="34" charset="0"/>
-                <a:ea typeface="Calibri" pitchFamily="34" charset="-122"/>
-                <a:cs typeface="Calibri" pitchFamily="34" charset="-120"/>
-              </a:rPr>
-              <a:t>in → im before 'm/p'</a:t>
-            </a:r>
-            <a:endParaRPr lang="en-US" sz="700" dirty="0"/>
-          </a:p>
-        </p:txBody>
-      </p:sp>
-      <p:sp>
-        <p:nvSpPr>
-          <p:cNvPr id="20" name="Shape 18"/>
+          <p:cNvPr id="19" name="Shape 17"/>
           <p:cNvSpPr/>
           <p:nvPr/>
         </p:nvSpPr>
@@ -10102,11 +9985,11 @@
             </a:avLst>
           </a:prstGeom>
           <a:solidFill>
-            <a:srgbClr val="CCFBF1"/>
+            <a:srgbClr val="FCE7F3"/>
           </a:solidFill>
           <a:ln w="19050">
             <a:solidFill>
-              <a:srgbClr val="0D9488"/>
+              <a:srgbClr val="DB2777"/>
             </a:solidFill>
             <a:prstDash val="solid"/>
           </a:ln>
@@ -10121,7 +10004,7 @@
       </p:sp>
       <p:sp>
         <p:nvSpPr>
-          <p:cNvPr id="21" name="Text 19"/>
+          <p:cNvPr id="20" name="Text 18"/>
           <p:cNvSpPr/>
           <p:nvPr/>
         </p:nvSpPr>
@@ -10146,13 +10029,13 @@
             <a:r>
               <a:rPr lang="en-US" sz="1300" b="1" dirty="0">
                 <a:solidFill>
-                  <a:srgbClr val="0F766E"/>
+                  <a:srgbClr val="9D174D"/>
                 </a:solidFill>
                 <a:latin typeface="Trebuchet MS" pitchFamily="34" charset="0"/>
                 <a:ea typeface="Trebuchet MS" pitchFamily="34" charset="-122"/>
                 <a:cs typeface="Trebuchet MS" pitchFamily="34" charset="-120"/>
               </a:rPr>
-              <a:t>press</a:t>
+              <a:t>ure</a:t>
             </a:r>
             <a:endParaRPr lang="en-US" sz="1300" dirty="0"/>
           </a:p>
@@ -10160,7 +10043,7 @@
       </p:sp>
       <p:sp>
         <p:nvSpPr>
-          <p:cNvPr id="22" name="Text 20"/>
+          <p:cNvPr id="21" name="Text 19"/>
           <p:cNvSpPr/>
           <p:nvPr/>
         </p:nvSpPr>
@@ -10191,7 +10074,7 @@
                 <a:ea typeface="Calibri" pitchFamily="34" charset="-122"/>
                 <a:cs typeface="Calibri" pitchFamily="34" charset="-120"/>
               </a:rPr>
-              <a:t>to push or squeeze</a:t>
+              <a:t>state or condition of</a:t>
             </a:r>
             <a:endParaRPr lang="en-US" sz="850" dirty="0"/>
           </a:p>
@@ -10199,7 +10082,7 @@
       </p:sp>
       <p:sp>
         <p:nvSpPr>
-          <p:cNvPr id="23" name="Shape 21"/>
+          <p:cNvPr id="22" name="Shape 20"/>
           <p:cNvSpPr/>
           <p:nvPr/>
         </p:nvSpPr>
@@ -10226,7 +10109,7 @@
       </p:sp>
       <p:sp>
         <p:nvSpPr>
-          <p:cNvPr id="24" name="Text 22"/>
+          <p:cNvPr id="23" name="Text 21"/>
           <p:cNvSpPr/>
           <p:nvPr/>
         </p:nvSpPr>
@@ -10265,7 +10148,7 @@
       </p:sp>
       <p:sp>
         <p:nvSpPr>
-          <p:cNvPr id="25" name="Shape 23"/>
+          <p:cNvPr id="24" name="Shape 22"/>
           <p:cNvSpPr/>
           <p:nvPr/>
         </p:nvSpPr>
@@ -10292,7 +10175,7 @@
       </p:sp>
       <p:sp>
         <p:nvSpPr>
-          <p:cNvPr id="26" name="Shape 24"/>
+          <p:cNvPr id="25" name="Shape 23"/>
           <p:cNvSpPr/>
           <p:nvPr/>
         </p:nvSpPr>
@@ -10319,7 +10202,7 @@
       </p:sp>
       <p:sp>
         <p:nvSpPr>
-          <p:cNvPr id="27" name="Text 25"/>
+          <p:cNvPr id="26" name="Text 24"/>
           <p:cNvSpPr/>
           <p:nvPr/>
         </p:nvSpPr>
@@ -10350,7 +10233,7 @@
                 <a:ea typeface="Trebuchet MS" pitchFamily="34" charset="-122"/>
                 <a:cs typeface="Trebuchet MS" pitchFamily="34" charset="-120"/>
               </a:rPr>
-              <a:t>im</a:t>
+              <a:t>pres</a:t>
             </a:r>
             <a:endParaRPr lang="en-US" sz="1400" dirty="0"/>
           </a:p>
@@ -10358,7 +10241,7 @@
       </p:sp>
       <p:sp>
         <p:nvSpPr>
-          <p:cNvPr id="28" name="Text 26"/>
+          <p:cNvPr id="27" name="Text 25"/>
           <p:cNvSpPr/>
           <p:nvPr/>
         </p:nvSpPr>
@@ -10397,7 +10280,7 @@
       </p:sp>
       <p:sp>
         <p:nvSpPr>
-          <p:cNvPr id="29" name="Shape 27"/>
+          <p:cNvPr id="28" name="Shape 26"/>
           <p:cNvSpPr/>
           <p:nvPr/>
         </p:nvSpPr>
@@ -10424,7 +10307,7 @@
       </p:sp>
       <p:sp>
         <p:nvSpPr>
-          <p:cNvPr id="30" name="Text 28"/>
+          <p:cNvPr id="29" name="Text 27"/>
           <p:cNvSpPr/>
           <p:nvPr/>
         </p:nvSpPr>
@@ -10455,7 +10338,7 @@
                 <a:ea typeface="Trebuchet MS" pitchFamily="34" charset="-122"/>
                 <a:cs typeface="Trebuchet MS" pitchFamily="34" charset="-120"/>
               </a:rPr>
-              <a:t>press</a:t>
+              <a:t>sure</a:t>
             </a:r>
             <a:endParaRPr lang="en-US" sz="1400" dirty="0"/>
           </a:p>
@@ -10463,7 +10346,7 @@
       </p:sp>
       <p:sp>
         <p:nvSpPr>
-          <p:cNvPr id="31" name="Shape 29"/>
+          <p:cNvPr id="30" name="Shape 28"/>
           <p:cNvSpPr/>
           <p:nvPr/>
         </p:nvSpPr>
@@ -10490,7 +10373,7 @@
       </p:sp>
       <p:sp>
         <p:nvSpPr>
-          <p:cNvPr id="32" name="Text 30"/>
+          <p:cNvPr id="31" name="Text 29"/>
           <p:cNvSpPr/>
           <p:nvPr/>
         </p:nvSpPr>
@@ -10529,7 +10412,7 @@
       </p:sp>
       <p:sp>
         <p:nvSpPr>
-          <p:cNvPr id="33" name="Shape 31"/>
+          <p:cNvPr id="32" name="Shape 30"/>
           <p:cNvSpPr/>
           <p:nvPr/>
         </p:nvSpPr>
@@ -10556,13 +10439,13 @@
       </p:sp>
       <p:sp>
         <p:nvSpPr>
-          <p:cNvPr id="34" name="Shape 32"/>
-          <p:cNvSpPr/>
-          <p:nvPr/>
-        </p:nvSpPr>
-        <p:spPr>
-          <a:xfrm>
-            <a:off x="2254649" y="4169664"/>
+          <p:cNvPr id="33" name="Shape 31"/>
+          <p:cNvSpPr/>
+          <p:nvPr/>
+        </p:nvSpPr>
+        <p:spPr>
+          <a:xfrm>
+            <a:off x="2427732" y="4169664"/>
             <a:ext cx="685800" cy="475488"/>
           </a:xfrm>
           <a:prstGeom prst="rect">
@@ -10583,13 +10466,13 @@
       </p:sp>
       <p:sp>
         <p:nvSpPr>
-          <p:cNvPr id="35" name="Text 33"/>
-          <p:cNvSpPr/>
-          <p:nvPr/>
-        </p:nvSpPr>
-        <p:spPr>
-          <a:xfrm>
-            <a:off x="2254649" y="4169664"/>
+          <p:cNvPr id="34" name="Text 32"/>
+          <p:cNvSpPr/>
+          <p:nvPr/>
+        </p:nvSpPr>
+        <p:spPr>
+          <a:xfrm>
+            <a:off x="2427732" y="4169664"/>
             <a:ext cx="685800" cy="475488"/>
           </a:xfrm>
           <a:prstGeom prst="rect">
@@ -10614,7 +10497,7 @@
                 <a:ea typeface="Trebuchet MS" pitchFamily="34" charset="-122"/>
                 <a:cs typeface="Trebuchet MS" pitchFamily="34" charset="-120"/>
               </a:rPr>
-              <a:t>i</a:t>
+              <a:t>p</a:t>
             </a:r>
             <a:endParaRPr lang="en-US" sz="900" dirty="0"/>
           </a:p>
@@ -10622,13 +10505,13 @@
       </p:sp>
       <p:sp>
         <p:nvSpPr>
-          <p:cNvPr id="36" name="Shape 34"/>
-          <p:cNvSpPr/>
-          <p:nvPr/>
-        </p:nvSpPr>
-        <p:spPr>
-          <a:xfrm>
-            <a:off x="3293146" y="4169664"/>
+          <p:cNvPr id="35" name="Shape 33"/>
+          <p:cNvSpPr/>
+          <p:nvPr/>
+        </p:nvSpPr>
+        <p:spPr>
+          <a:xfrm>
+            <a:off x="3639312" y="4169664"/>
             <a:ext cx="685800" cy="475488"/>
           </a:xfrm>
           <a:prstGeom prst="rect">
@@ -10649,13 +10532,13 @@
       </p:sp>
       <p:sp>
         <p:nvSpPr>
-          <p:cNvPr id="37" name="Text 35"/>
-          <p:cNvSpPr/>
-          <p:nvPr/>
-        </p:nvSpPr>
-        <p:spPr>
-          <a:xfrm>
-            <a:off x="3293146" y="4169664"/>
+          <p:cNvPr id="36" name="Text 34"/>
+          <p:cNvSpPr/>
+          <p:nvPr/>
+        </p:nvSpPr>
+        <p:spPr>
+          <a:xfrm>
+            <a:off x="3639312" y="4169664"/>
             <a:ext cx="685800" cy="475488"/>
           </a:xfrm>
           <a:prstGeom prst="rect">
@@ -10680,7 +10563,7 @@
                 <a:ea typeface="Trebuchet MS" pitchFamily="34" charset="-122"/>
                 <a:cs typeface="Trebuchet MS" pitchFamily="34" charset="-120"/>
               </a:rPr>
-              <a:t>m</a:t>
+              <a:t>r</a:t>
             </a:r>
             <a:endParaRPr lang="en-US" sz="900" dirty="0"/>
           </a:p>
@@ -10688,13 +10571,13 @@
       </p:sp>
       <p:sp>
         <p:nvSpPr>
-          <p:cNvPr id="38" name="Shape 36"/>
-          <p:cNvSpPr/>
-          <p:nvPr/>
-        </p:nvSpPr>
-        <p:spPr>
-          <a:xfrm>
-            <a:off x="4331643" y="4169664"/>
+          <p:cNvPr id="37" name="Shape 35"/>
+          <p:cNvSpPr/>
+          <p:nvPr/>
+        </p:nvSpPr>
+        <p:spPr>
+          <a:xfrm>
+            <a:off x="4850892" y="4169664"/>
             <a:ext cx="685800" cy="475488"/>
           </a:xfrm>
           <a:prstGeom prst="rect">
@@ -10715,13 +10598,13 @@
       </p:sp>
       <p:sp>
         <p:nvSpPr>
-          <p:cNvPr id="39" name="Text 37"/>
-          <p:cNvSpPr/>
-          <p:nvPr/>
-        </p:nvSpPr>
-        <p:spPr>
-          <a:xfrm>
-            <a:off x="4331643" y="4169664"/>
+          <p:cNvPr id="38" name="Text 36"/>
+          <p:cNvSpPr/>
+          <p:nvPr/>
+        </p:nvSpPr>
+        <p:spPr>
+          <a:xfrm>
+            <a:off x="4850892" y="4169664"/>
             <a:ext cx="685800" cy="475488"/>
           </a:xfrm>
           <a:prstGeom prst="rect">
@@ -10746,7 +10629,7 @@
                 <a:ea typeface="Trebuchet MS" pitchFamily="34" charset="-122"/>
                 <a:cs typeface="Trebuchet MS" pitchFamily="34" charset="-120"/>
               </a:rPr>
-              <a:t>p</a:t>
+              <a:t>e</a:t>
             </a:r>
             <a:endParaRPr lang="en-US" sz="900" dirty="0"/>
           </a:p>
@@ -10754,13 +10637,13 @@
       </p:sp>
       <p:sp>
         <p:nvSpPr>
-          <p:cNvPr id="40" name="Shape 38"/>
-          <p:cNvSpPr/>
-          <p:nvPr/>
-        </p:nvSpPr>
-        <p:spPr>
-          <a:xfrm>
-            <a:off x="5370141" y="4169664"/>
+          <p:cNvPr id="39" name="Shape 37"/>
+          <p:cNvSpPr/>
+          <p:nvPr/>
+        </p:nvSpPr>
+        <p:spPr>
+          <a:xfrm>
+            <a:off x="6062472" y="4169664"/>
             <a:ext cx="685800" cy="475488"/>
           </a:xfrm>
           <a:prstGeom prst="rect">
@@ -10781,13 +10664,13 @@
       </p:sp>
       <p:sp>
         <p:nvSpPr>
-          <p:cNvPr id="41" name="Text 39"/>
-          <p:cNvSpPr/>
-          <p:nvPr/>
-        </p:nvSpPr>
-        <p:spPr>
-          <a:xfrm>
-            <a:off x="5370141" y="4169664"/>
+          <p:cNvPr id="40" name="Text 38"/>
+          <p:cNvSpPr/>
+          <p:nvPr/>
+        </p:nvSpPr>
+        <p:spPr>
+          <a:xfrm>
+            <a:off x="6062472" y="4169664"/>
             <a:ext cx="685800" cy="475488"/>
           </a:xfrm>
           <a:prstGeom prst="rect">
@@ -10812,7 +10695,7 @@
                 <a:ea typeface="Trebuchet MS" pitchFamily="34" charset="-122"/>
                 <a:cs typeface="Trebuchet MS" pitchFamily="34" charset="-120"/>
               </a:rPr>
-              <a:t>r</a:t>
+              <a:t>ss</a:t>
             </a:r>
             <a:endParaRPr lang="en-US" sz="900" dirty="0"/>
           </a:p>
@@ -10820,13 +10703,13 @@
       </p:sp>
       <p:sp>
         <p:nvSpPr>
-          <p:cNvPr id="42" name="Shape 40"/>
-          <p:cNvSpPr/>
-          <p:nvPr/>
-        </p:nvSpPr>
-        <p:spPr>
-          <a:xfrm>
-            <a:off x="6408638" y="4169664"/>
+          <p:cNvPr id="41" name="Shape 39"/>
+          <p:cNvSpPr/>
+          <p:nvPr/>
+        </p:nvSpPr>
+        <p:spPr>
+          <a:xfrm>
+            <a:off x="7274052" y="4169664"/>
             <a:ext cx="685800" cy="475488"/>
           </a:xfrm>
           <a:prstGeom prst="rect">
@@ -10847,13 +10730,13 @@
       </p:sp>
       <p:sp>
         <p:nvSpPr>
-          <p:cNvPr id="43" name="Text 41"/>
-          <p:cNvSpPr/>
-          <p:nvPr/>
-        </p:nvSpPr>
-        <p:spPr>
-          <a:xfrm>
-            <a:off x="6408638" y="4169664"/>
+          <p:cNvPr id="42" name="Text 40"/>
+          <p:cNvSpPr/>
+          <p:nvPr/>
+        </p:nvSpPr>
+        <p:spPr>
+          <a:xfrm>
+            <a:off x="7274052" y="4169664"/>
             <a:ext cx="685800" cy="475488"/>
           </a:xfrm>
           <a:prstGeom prst="rect">
@@ -10878,73 +10761,7 @@
                 <a:ea typeface="Trebuchet MS" pitchFamily="34" charset="-122"/>
                 <a:cs typeface="Trebuchet MS" pitchFamily="34" charset="-120"/>
               </a:rPr>
-              <a:t>e</a:t>
-            </a:r>
-            <a:endParaRPr lang="en-US" sz="900" dirty="0"/>
-          </a:p>
-        </p:txBody>
-      </p:sp>
-      <p:sp>
-        <p:nvSpPr>
-          <p:cNvPr id="44" name="Shape 42"/>
-          <p:cNvSpPr/>
-          <p:nvPr/>
-        </p:nvSpPr>
-        <p:spPr>
-          <a:xfrm>
-            <a:off x="7447135" y="4169664"/>
-            <a:ext cx="685800" cy="475488"/>
-          </a:xfrm>
-          <a:prstGeom prst="rect">
-            <a:avLst>
-              <a:gd name="adj" fmla="val 7692"/>
-            </a:avLst>
-          </a:prstGeom>
-          <a:solidFill>
-            <a:srgbClr val="FFFFFF"/>
-          </a:solidFill>
-          <a:ln w="12700">
-            <a:solidFill>
-              <a:srgbClr val="DB2777"/>
-            </a:solidFill>
-            <a:prstDash val="solid"/>
-          </a:ln>
-        </p:spPr>
-      </p:sp>
-      <p:sp>
-        <p:nvSpPr>
-          <p:cNvPr id="45" name="Text 43"/>
-          <p:cNvSpPr/>
-          <p:nvPr/>
-        </p:nvSpPr>
-        <p:spPr>
-          <a:xfrm>
-            <a:off x="7447135" y="4169664"/>
-            <a:ext cx="685800" cy="475488"/>
-          </a:xfrm>
-          <a:prstGeom prst="rect">
-            <a:avLst/>
-          </a:prstGeom>
-          <a:noFill/>
-          <a:ln/>
-        </p:spPr>
-        <p:txBody>
-          <a:bodyPr wrap="square" lIns="0" tIns="0" rIns="0" bIns="0" rtlCol="0" anchor="ctr"/>
-          <a:lstStyle/>
-          <a:p>
-            <a:pPr algn="ctr" indent="0" marL="0">
-              <a:buNone/>
-            </a:pPr>
-            <a:r>
-              <a:rPr lang="en-US" sz="900" b="1" dirty="0">
-                <a:solidFill>
-                  <a:srgbClr val="9D174D"/>
-                </a:solidFill>
-                <a:latin typeface="Trebuchet MS" pitchFamily="34" charset="0"/>
-                <a:ea typeface="Trebuchet MS" pitchFamily="34" charset="-122"/>
-                <a:cs typeface="Trebuchet MS" pitchFamily="34" charset="-120"/>
-              </a:rPr>
-              <a:t>ss</a:t>
+              <a:t>ure</a:t>
             </a:r>
             <a:endParaRPr lang="en-US" sz="900" dirty="0"/>
           </a:p>
@@ -11375,7 +11192,7 @@
                 <a:ea typeface="Trebuchet MS" pitchFamily="34" charset="-122"/>
                 <a:cs typeface="Trebuchet MS" pitchFamily="34" charset="-120"/>
               </a:rPr>
-              <a:t>expressive</a:t>
+              <a:t>compress</a:t>
             </a:r>
             <a:endParaRPr lang="en-US" sz="2800" dirty="0"/>
           </a:p>
@@ -12202,7 +12019,7 @@
                 <a:ea typeface="Trebuchet MS" pitchFamily="34" charset="-122"/>
                 <a:cs typeface="Trebuchet MS" pitchFamily="34" charset="-120"/>
               </a:rPr>
-              <a:t>expressive</a:t>
+              <a:t>compress</a:t>
             </a:r>
             <a:endParaRPr lang="en-US" sz="2800" dirty="0"/>
           </a:p>
@@ -12282,7 +12099,7 @@
         </p:nvSpPr>
         <p:spPr>
           <a:xfrm>
-            <a:off x="2221992" y="2258568"/>
+            <a:off x="2938272" y="2258568"/>
             <a:ext cx="1828800" cy="292608"/>
           </a:xfrm>
           <a:prstGeom prst="rect">
@@ -12316,7 +12133,7 @@
         </p:nvSpPr>
         <p:spPr>
           <a:xfrm>
-            <a:off x="2221992" y="2258568"/>
+            <a:off x="2938272" y="2258568"/>
             <a:ext cx="1828800" cy="292608"/>
           </a:xfrm>
           <a:prstGeom prst="rect">
@@ -12341,7 +12158,7 @@
                 <a:ea typeface="Trebuchet MS" pitchFamily="34" charset="-122"/>
                 <a:cs typeface="Trebuchet MS" pitchFamily="34" charset="-120"/>
               </a:rPr>
-              <a:t>ex</a:t>
+              <a:t>com</a:t>
             </a:r>
             <a:endParaRPr lang="en-US" sz="1300" dirty="0"/>
           </a:p>
@@ -12355,7 +12172,7 @@
         </p:nvSpPr>
         <p:spPr>
           <a:xfrm>
-            <a:off x="2221992" y="2569464"/>
+            <a:off x="2938272" y="2569464"/>
             <a:ext cx="1828800" cy="201168"/>
           </a:xfrm>
           <a:prstGeom prst="rect">
@@ -12380,7 +12197,7 @@
                 <a:ea typeface="Calibri" pitchFamily="34" charset="-122"/>
                 <a:cs typeface="Calibri" pitchFamily="34" charset="-120"/>
               </a:rPr>
-              <a:t>out</a:t>
+              <a:t>together</a:t>
             </a:r>
             <a:endParaRPr lang="en-US" sz="850" dirty="0"/>
           </a:p>
@@ -12394,7 +12211,7 @@
         </p:nvSpPr>
         <p:spPr>
           <a:xfrm>
-            <a:off x="4370832" y="2258568"/>
+            <a:off x="5803392" y="2258568"/>
             <a:ext cx="1828800" cy="292608"/>
           </a:xfrm>
           <a:prstGeom prst="rect">
@@ -12428,7 +12245,7 @@
         </p:nvSpPr>
         <p:spPr>
           <a:xfrm>
-            <a:off x="4370832" y="2258568"/>
+            <a:off x="5803392" y="2258568"/>
             <a:ext cx="1828800" cy="292608"/>
           </a:xfrm>
           <a:prstGeom prst="rect">
@@ -12467,7 +12284,7 @@
         </p:nvSpPr>
         <p:spPr>
           <a:xfrm>
-            <a:off x="4370832" y="2569464"/>
+            <a:off x="5803392" y="2569464"/>
             <a:ext cx="1828800" cy="201168"/>
           </a:xfrm>
           <a:prstGeom prst="rect">
@@ -12506,30 +12323,23 @@
         </p:nvSpPr>
         <p:spPr>
           <a:xfrm>
-            <a:off x="6519672" y="2258568"/>
-            <a:ext cx="1828800" cy="292608"/>
+            <a:off x="365760" y="3273552"/>
+            <a:ext cx="1371600" cy="658368"/>
           </a:xfrm>
           <a:prstGeom prst="rect">
             <a:avLst>
-              <a:gd name="adj" fmla="val 25000"/>
+              <a:gd name="adj" fmla="val 8333"/>
             </a:avLst>
           </a:prstGeom>
           <a:solidFill>
-            <a:srgbClr val="FCE7F3"/>
-          </a:solidFill>
-          <a:ln w="19050">
-            <a:solidFill>
-              <a:srgbClr val="DB2777"/>
-            </a:solidFill>
-            <a:prstDash val="solid"/>
-          </a:ln>
-          <a:effectLst>
-            <a:outerShdw sx="100000" sy="100000" kx="0" ky="0" algn="bl" rotWithShape="0" blurRad="101600" dist="38100" dir="8100000">
-              <a:srgbClr val="000000">
-                <a:alpha val="12000"/>
-              </a:srgbClr>
-            </a:outerShdw>
-          </a:effectLst>
+            <a:srgbClr val="E2E8F0"/>
+          </a:solidFill>
+          <a:ln w="12700">
+            <a:solidFill>
+              <a:srgbClr val="E2E8F0"/>
+            </a:solidFill>
+            <a:prstDash val="solid"/>
+          </a:ln>
         </p:spPr>
       </p:sp>
       <p:sp>
@@ -12540,90 +12350,117 @@
         </p:nvSpPr>
         <p:spPr>
           <a:xfrm>
-            <a:off x="6519672" y="2258568"/>
-            <a:ext cx="1828800" cy="292608"/>
-          </a:xfrm>
-          <a:prstGeom prst="rect">
-            <a:avLst/>
-          </a:prstGeom>
-          <a:noFill/>
-          <a:ln/>
-        </p:spPr>
-        <p:txBody>
-          <a:bodyPr wrap="square" lIns="0" tIns="0" rIns="0" bIns="0" rtlCol="0" anchor="ctr"/>
-          <a:lstStyle/>
-          <a:p>
-            <a:pPr algn="ctr" indent="0" marL="0">
-              <a:buNone/>
-            </a:pPr>
-            <a:r>
-              <a:rPr lang="en-US" sz="1300" b="1" dirty="0">
-                <a:solidFill>
-                  <a:srgbClr val="9D174D"/>
+            <a:off x="365760" y="3273552"/>
+            <a:ext cx="1371600" cy="658368"/>
+          </a:xfrm>
+          <a:prstGeom prst="rect">
+            <a:avLst/>
+          </a:prstGeom>
+          <a:noFill/>
+          <a:ln/>
+        </p:spPr>
+        <p:txBody>
+          <a:bodyPr wrap="square" lIns="0" tIns="0" rIns="0" bIns="0" rtlCol="0" anchor="ctr"/>
+          <a:lstStyle/>
+          <a:p>
+            <a:pPr algn="ctr" indent="0" marL="0">
+              <a:buNone/>
+            </a:pPr>
+            <a:r>
+              <a:rPr lang="en-US" sz="1100" b="1" dirty="0">
+                <a:solidFill>
+                  <a:srgbClr val="475569"/>
                 </a:solidFill>
                 <a:latin typeface="Trebuchet MS" pitchFamily="34" charset="0"/>
                 <a:ea typeface="Trebuchet MS" pitchFamily="34" charset="-122"/>
                 <a:cs typeface="Trebuchet MS" pitchFamily="34" charset="-120"/>
               </a:rPr>
-              <a:t>ive</a:t>
-            </a:r>
-            <a:endParaRPr lang="en-US" sz="1300" dirty="0"/>
-          </a:p>
-        </p:txBody>
-      </p:sp>
-      <p:sp>
-        <p:nvSpPr>
-          <p:cNvPr id="24" name="Text 22"/>
-          <p:cNvSpPr/>
-          <p:nvPr/>
-        </p:nvSpPr>
-        <p:spPr>
-          <a:xfrm>
-            <a:off x="6519672" y="2569464"/>
-            <a:ext cx="1828800" cy="201168"/>
-          </a:xfrm>
-          <a:prstGeom prst="rect">
-            <a:avLst/>
-          </a:prstGeom>
-          <a:noFill/>
-          <a:ln/>
-        </p:spPr>
-        <p:txBody>
-          <a:bodyPr wrap="square" lIns="0" tIns="0" rIns="0" bIns="0" rtlCol="0" anchor="t"/>
-          <a:lstStyle/>
-          <a:p>
-            <a:pPr algn="ctr" indent="0" marL="0">
-              <a:buNone/>
-            </a:pPr>
-            <a:r>
-              <a:rPr lang="en-US" sz="850" dirty="0">
-                <a:solidFill>
-                  <a:srgbClr val="475569"/>
+              <a:t>Syllables</a:t>
+            </a:r>
+            <a:endParaRPr lang="en-US" sz="1100" dirty="0"/>
+          </a:p>
+        </p:txBody>
+      </p:sp>
+      <p:sp>
+        <p:nvSpPr>
+          <p:cNvPr id="24" name="Shape 22"/>
+          <p:cNvSpPr/>
+          <p:nvPr/>
+        </p:nvSpPr>
+        <p:spPr>
+          <a:xfrm>
+            <a:off x="1874520" y="3273552"/>
+            <a:ext cx="6903720" cy="658368"/>
+          </a:xfrm>
+          <a:prstGeom prst="rect">
+            <a:avLst>
+              <a:gd name="adj" fmla="val 8333"/>
+            </a:avLst>
+          </a:prstGeom>
+          <a:solidFill>
+            <a:srgbClr val="F8FAFC"/>
+          </a:solidFill>
+          <a:ln w="12700">
+            <a:solidFill>
+              <a:srgbClr val="E2E8F0"/>
+            </a:solidFill>
+            <a:prstDash val="dash"/>
+          </a:ln>
+        </p:spPr>
+      </p:sp>
+      <p:sp>
+        <p:nvSpPr>
+          <p:cNvPr id="25" name="Text 23"/>
+          <p:cNvSpPr/>
+          <p:nvPr/>
+        </p:nvSpPr>
+        <p:spPr>
+          <a:xfrm>
+            <a:off x="1874520" y="3273552"/>
+            <a:ext cx="6903720" cy="658368"/>
+          </a:xfrm>
+          <a:prstGeom prst="rect">
+            <a:avLst/>
+          </a:prstGeom>
+          <a:noFill/>
+          <a:ln/>
+        </p:spPr>
+        <p:txBody>
+          <a:bodyPr wrap="square" rtlCol="0" anchor="ctr"/>
+          <a:lstStyle/>
+          <a:p>
+            <a:pPr algn="ctr" indent="0" marL="0">
+              <a:buNone/>
+            </a:pPr>
+            <a:r>
+              <a:rPr lang="en-US" sz="1100" i="1" dirty="0">
+                <a:solidFill>
+                  <a:srgbClr val="CBD5E1"/>
                 </a:solidFill>
                 <a:latin typeface="Calibri" pitchFamily="34" charset="0"/>
                 <a:ea typeface="Calibri" pitchFamily="34" charset="-122"/>
                 <a:cs typeface="Calibri" pitchFamily="34" charset="-120"/>
               </a:rPr>
-              <a:t>having the quality of</a:t>
-            </a:r>
-            <a:endParaRPr lang="en-US" sz="850" dirty="0"/>
-          </a:p>
-        </p:txBody>
-      </p:sp>
-      <p:sp>
-        <p:nvSpPr>
-          <p:cNvPr id="25" name="Shape 23"/>
-          <p:cNvSpPr/>
-          <p:nvPr/>
-        </p:nvSpPr>
-        <p:spPr>
-          <a:xfrm>
-            <a:off x="365760" y="3273552"/>
-            <a:ext cx="1371600" cy="658368"/>
+              <a:t>Write here...</a:t>
+            </a:r>
+            <a:endParaRPr lang="en-US" sz="1100" dirty="0"/>
+          </a:p>
+        </p:txBody>
+      </p:sp>
+      <p:sp>
+        <p:nvSpPr>
+          <p:cNvPr id="26" name="Shape 24"/>
+          <p:cNvSpPr/>
+          <p:nvPr/>
+        </p:nvSpPr>
+        <p:spPr>
+          <a:xfrm>
+            <a:off x="365760" y="4096512"/>
+            <a:ext cx="1371600" cy="804672"/>
           </a:xfrm>
           <a:prstGeom prst="rect">
             <a:avLst>
-              <a:gd name="adj" fmla="val 8333"/>
+              <a:gd name="adj" fmla="val 6818"/>
             </a:avLst>
           </a:prstGeom>
           <a:solidFill>
@@ -12639,14 +12476,14 @@
       </p:sp>
       <p:sp>
         <p:nvSpPr>
-          <p:cNvPr id="26" name="Text 24"/>
-          <p:cNvSpPr/>
-          <p:nvPr/>
-        </p:nvSpPr>
-        <p:spPr>
-          <a:xfrm>
-            <a:off x="365760" y="3273552"/>
-            <a:ext cx="1371600" cy="658368"/>
+          <p:cNvPr id="27" name="Text 25"/>
+          <p:cNvSpPr/>
+          <p:nvPr/>
+        </p:nvSpPr>
+        <p:spPr>
+          <a:xfrm>
+            <a:off x="365760" y="4096512"/>
+            <a:ext cx="1371600" cy="804672"/>
           </a:xfrm>
           <a:prstGeom prst="rect">
             <a:avLst/>
@@ -12670,7 +12507,7 @@
                 <a:ea typeface="Trebuchet MS" pitchFamily="34" charset="-122"/>
                 <a:cs typeface="Trebuchet MS" pitchFamily="34" charset="-120"/>
               </a:rPr>
-              <a:t>Syllables</a:t>
+              <a:t>Phonemes</a:t>
             </a:r>
             <a:endParaRPr lang="en-US" sz="1100" dirty="0"/>
           </a:p>
@@ -12678,80 +12515,14 @@
       </p:sp>
       <p:sp>
         <p:nvSpPr>
-          <p:cNvPr id="27" name="Shape 25"/>
-          <p:cNvSpPr/>
-          <p:nvPr/>
-        </p:nvSpPr>
-        <p:spPr>
-          <a:xfrm>
-            <a:off x="1874520" y="3273552"/>
-            <a:ext cx="6903720" cy="658368"/>
-          </a:xfrm>
-          <a:prstGeom prst="rect">
-            <a:avLst>
-              <a:gd name="adj" fmla="val 8333"/>
-            </a:avLst>
-          </a:prstGeom>
-          <a:solidFill>
-            <a:srgbClr val="F8FAFC"/>
-          </a:solidFill>
-          <a:ln w="12700">
-            <a:solidFill>
-              <a:srgbClr val="E2E8F0"/>
-            </a:solidFill>
-            <a:prstDash val="dash"/>
-          </a:ln>
-        </p:spPr>
-      </p:sp>
-      <p:sp>
-        <p:nvSpPr>
-          <p:cNvPr id="28" name="Text 26"/>
-          <p:cNvSpPr/>
-          <p:nvPr/>
-        </p:nvSpPr>
-        <p:spPr>
-          <a:xfrm>
-            <a:off x="1874520" y="3273552"/>
-            <a:ext cx="6903720" cy="658368"/>
-          </a:xfrm>
-          <a:prstGeom prst="rect">
-            <a:avLst/>
-          </a:prstGeom>
-          <a:noFill/>
-          <a:ln/>
-        </p:spPr>
-        <p:txBody>
-          <a:bodyPr wrap="square" rtlCol="0" anchor="ctr"/>
-          <a:lstStyle/>
-          <a:p>
-            <a:pPr algn="ctr" indent="0" marL="0">
-              <a:buNone/>
-            </a:pPr>
-            <a:r>
-              <a:rPr lang="en-US" sz="1100" i="1" dirty="0">
-                <a:solidFill>
-                  <a:srgbClr val="CBD5E1"/>
-                </a:solidFill>
-                <a:latin typeface="Calibri" pitchFamily="34" charset="0"/>
-                <a:ea typeface="Calibri" pitchFamily="34" charset="-122"/>
-                <a:cs typeface="Calibri" pitchFamily="34" charset="-120"/>
-              </a:rPr>
-              <a:t>Write here...</a:t>
-            </a:r>
-            <a:endParaRPr lang="en-US" sz="1100" dirty="0"/>
-          </a:p>
-        </p:txBody>
-      </p:sp>
-      <p:sp>
-        <p:nvSpPr>
-          <p:cNvPr id="29" name="Shape 27"/>
-          <p:cNvSpPr/>
-          <p:nvPr/>
-        </p:nvSpPr>
-        <p:spPr>
-          <a:xfrm>
-            <a:off x="365760" y="4096512"/>
-            <a:ext cx="1371600" cy="804672"/>
+          <p:cNvPr id="28" name="Shape 26"/>
+          <p:cNvSpPr/>
+          <p:nvPr/>
+        </p:nvSpPr>
+        <p:spPr>
+          <a:xfrm>
+            <a:off x="1874520" y="4096512"/>
+            <a:ext cx="6903720" cy="804672"/>
           </a:xfrm>
           <a:prstGeom prst="rect">
             <a:avLst>
@@ -12759,85 +12530,19 @@
             </a:avLst>
           </a:prstGeom>
           <a:solidFill>
-            <a:srgbClr val="E2E8F0"/>
+            <a:srgbClr val="F8FAFC"/>
           </a:solidFill>
           <a:ln w="12700">
             <a:solidFill>
               <a:srgbClr val="E2E8F0"/>
             </a:solidFill>
-            <a:prstDash val="solid"/>
-          </a:ln>
-        </p:spPr>
-      </p:sp>
-      <p:sp>
-        <p:nvSpPr>
-          <p:cNvPr id="30" name="Text 28"/>
-          <p:cNvSpPr/>
-          <p:nvPr/>
-        </p:nvSpPr>
-        <p:spPr>
-          <a:xfrm>
-            <a:off x="365760" y="4096512"/>
-            <a:ext cx="1371600" cy="804672"/>
-          </a:xfrm>
-          <a:prstGeom prst="rect">
-            <a:avLst/>
-          </a:prstGeom>
-          <a:noFill/>
-          <a:ln/>
-        </p:spPr>
-        <p:txBody>
-          <a:bodyPr wrap="square" lIns="0" tIns="0" rIns="0" bIns="0" rtlCol="0" anchor="ctr"/>
-          <a:lstStyle/>
-          <a:p>
-            <a:pPr algn="ctr" indent="0" marL="0">
-              <a:buNone/>
-            </a:pPr>
-            <a:r>
-              <a:rPr lang="en-US" sz="1100" b="1" dirty="0">
-                <a:solidFill>
-                  <a:srgbClr val="475569"/>
-                </a:solidFill>
-                <a:latin typeface="Trebuchet MS" pitchFamily="34" charset="0"/>
-                <a:ea typeface="Trebuchet MS" pitchFamily="34" charset="-122"/>
-                <a:cs typeface="Trebuchet MS" pitchFamily="34" charset="-120"/>
-              </a:rPr>
-              <a:t>Phonemes</a:t>
-            </a:r>
-            <a:endParaRPr lang="en-US" sz="1100" dirty="0"/>
-          </a:p>
-        </p:txBody>
-      </p:sp>
-      <p:sp>
-        <p:nvSpPr>
-          <p:cNvPr id="31" name="Shape 29"/>
-          <p:cNvSpPr/>
-          <p:nvPr/>
-        </p:nvSpPr>
-        <p:spPr>
-          <a:xfrm>
-            <a:off x="1874520" y="4096512"/>
-            <a:ext cx="6903720" cy="804672"/>
-          </a:xfrm>
-          <a:prstGeom prst="rect">
-            <a:avLst>
-              <a:gd name="adj" fmla="val 6818"/>
-            </a:avLst>
-          </a:prstGeom>
-          <a:solidFill>
-            <a:srgbClr val="F8FAFC"/>
-          </a:solidFill>
-          <a:ln w="12700">
-            <a:solidFill>
-              <a:srgbClr val="E2E8F0"/>
-            </a:solidFill>
             <a:prstDash val="dash"/>
           </a:ln>
         </p:spPr>
       </p:sp>
       <p:sp>
         <p:nvSpPr>
-          <p:cNvPr id="32" name="Text 30"/>
+          <p:cNvPr id="29" name="Text 27"/>
           <p:cNvSpPr/>
           <p:nvPr/>
         </p:nvSpPr>
@@ -13299,7 +13004,7 @@
                 <a:ea typeface="Trebuchet MS" pitchFamily="34" charset="-122"/>
                 <a:cs typeface="Trebuchet MS" pitchFamily="34" charset="-120"/>
               </a:rPr>
-              <a:t>expressive</a:t>
+              <a:t>compress</a:t>
             </a:r>
             <a:endParaRPr lang="en-US" sz="2800" dirty="0"/>
           </a:p>
@@ -13379,7 +13084,7 @@
         </p:nvSpPr>
         <p:spPr>
           <a:xfrm>
-            <a:off x="2221992" y="2258568"/>
+            <a:off x="2938272" y="2258568"/>
             <a:ext cx="1828800" cy="292608"/>
           </a:xfrm>
           <a:prstGeom prst="rect">
@@ -13413,7 +13118,7 @@
         </p:nvSpPr>
         <p:spPr>
           <a:xfrm>
-            <a:off x="2221992" y="2258568"/>
+            <a:off x="2938272" y="2258568"/>
             <a:ext cx="1828800" cy="292608"/>
           </a:xfrm>
           <a:prstGeom prst="rect">
@@ -13438,7 +13143,7 @@
                 <a:ea typeface="Trebuchet MS" pitchFamily="34" charset="-122"/>
                 <a:cs typeface="Trebuchet MS" pitchFamily="34" charset="-120"/>
               </a:rPr>
-              <a:t>ex</a:t>
+              <a:t>com</a:t>
             </a:r>
             <a:endParaRPr lang="en-US" sz="1300" dirty="0"/>
           </a:p>
@@ -13452,7 +13157,7 @@
         </p:nvSpPr>
         <p:spPr>
           <a:xfrm>
-            <a:off x="2221992" y="2569464"/>
+            <a:off x="2938272" y="2569464"/>
             <a:ext cx="1828800" cy="201168"/>
           </a:xfrm>
           <a:prstGeom prst="rect">
@@ -13477,7 +13182,7 @@
                 <a:ea typeface="Calibri" pitchFamily="34" charset="-122"/>
                 <a:cs typeface="Calibri" pitchFamily="34" charset="-120"/>
               </a:rPr>
-              <a:t>out</a:t>
+              <a:t>together</a:t>
             </a:r>
             <a:endParaRPr lang="en-US" sz="850" dirty="0"/>
           </a:p>
@@ -13491,7 +13196,7 @@
         </p:nvSpPr>
         <p:spPr>
           <a:xfrm>
-            <a:off x="4370832" y="2258568"/>
+            <a:off x="5803392" y="2258568"/>
             <a:ext cx="1828800" cy="292608"/>
           </a:xfrm>
           <a:prstGeom prst="rect">
@@ -13525,7 +13230,7 @@
         </p:nvSpPr>
         <p:spPr>
           <a:xfrm>
-            <a:off x="4370832" y="2258568"/>
+            <a:off x="5803392" y="2258568"/>
             <a:ext cx="1828800" cy="292608"/>
           </a:xfrm>
           <a:prstGeom prst="rect">
@@ -13564,7 +13269,7 @@
         </p:nvSpPr>
         <p:spPr>
           <a:xfrm>
-            <a:off x="4370832" y="2569464"/>
+            <a:off x="5803392" y="2569464"/>
             <a:ext cx="1828800" cy="201168"/>
           </a:xfrm>
           <a:prstGeom prst="rect">
@@ -13603,30 +13308,23 @@
         </p:nvSpPr>
         <p:spPr>
           <a:xfrm>
-            <a:off x="6519672" y="2258568"/>
-            <a:ext cx="1828800" cy="292608"/>
+            <a:off x="365760" y="3273552"/>
+            <a:ext cx="1371600" cy="658368"/>
           </a:xfrm>
           <a:prstGeom prst="rect">
             <a:avLst>
-              <a:gd name="adj" fmla="val 25000"/>
+              <a:gd name="adj" fmla="val 8333"/>
             </a:avLst>
           </a:prstGeom>
           <a:solidFill>
-            <a:srgbClr val="FCE7F3"/>
-          </a:solidFill>
-          <a:ln w="19050">
-            <a:solidFill>
-              <a:srgbClr val="DB2777"/>
-            </a:solidFill>
-            <a:prstDash val="solid"/>
-          </a:ln>
-          <a:effectLst>
-            <a:outerShdw sx="100000" sy="100000" kx="0" ky="0" algn="bl" rotWithShape="0" blurRad="101600" dist="38100" dir="8100000">
-              <a:srgbClr val="000000">
-                <a:alpha val="12000"/>
-              </a:srgbClr>
-            </a:outerShdw>
-          </a:effectLst>
+            <a:srgbClr val="E2E8F0"/>
+          </a:solidFill>
+          <a:ln w="12700">
+            <a:solidFill>
+              <a:srgbClr val="E2E8F0"/>
+            </a:solidFill>
+            <a:prstDash val="solid"/>
+          </a:ln>
         </p:spPr>
       </p:sp>
       <p:sp>
@@ -13637,86 +13335,47 @@
         </p:nvSpPr>
         <p:spPr>
           <a:xfrm>
-            <a:off x="6519672" y="2258568"/>
-            <a:ext cx="1828800" cy="292608"/>
-          </a:xfrm>
-          <a:prstGeom prst="rect">
-            <a:avLst/>
-          </a:prstGeom>
-          <a:noFill/>
-          <a:ln/>
-        </p:spPr>
-        <p:txBody>
-          <a:bodyPr wrap="square" lIns="0" tIns="0" rIns="0" bIns="0" rtlCol="0" anchor="ctr"/>
-          <a:lstStyle/>
-          <a:p>
-            <a:pPr algn="ctr" indent="0" marL="0">
-              <a:buNone/>
-            </a:pPr>
-            <a:r>
-              <a:rPr lang="en-US" sz="1300" b="1" dirty="0">
-                <a:solidFill>
-                  <a:srgbClr val="9D174D"/>
+            <a:off x="365760" y="3273552"/>
+            <a:ext cx="1371600" cy="658368"/>
+          </a:xfrm>
+          <a:prstGeom prst="rect">
+            <a:avLst/>
+          </a:prstGeom>
+          <a:noFill/>
+          <a:ln/>
+        </p:spPr>
+        <p:txBody>
+          <a:bodyPr wrap="square" lIns="0" tIns="0" rIns="0" bIns="0" rtlCol="0" anchor="ctr"/>
+          <a:lstStyle/>
+          <a:p>
+            <a:pPr algn="ctr" indent="0" marL="0">
+              <a:buNone/>
+            </a:pPr>
+            <a:r>
+              <a:rPr lang="en-US" sz="1100" b="1" dirty="0">
+                <a:solidFill>
+                  <a:srgbClr val="475569"/>
                 </a:solidFill>
                 <a:latin typeface="Trebuchet MS" pitchFamily="34" charset="0"/>
                 <a:ea typeface="Trebuchet MS" pitchFamily="34" charset="-122"/>
                 <a:cs typeface="Trebuchet MS" pitchFamily="34" charset="-120"/>
               </a:rPr>
-              <a:t>ive</a:t>
-            </a:r>
-            <a:endParaRPr lang="en-US" sz="1300" dirty="0"/>
-          </a:p>
-        </p:txBody>
-      </p:sp>
-      <p:sp>
-        <p:nvSpPr>
-          <p:cNvPr id="24" name="Text 22"/>
-          <p:cNvSpPr/>
-          <p:nvPr/>
-        </p:nvSpPr>
-        <p:spPr>
-          <a:xfrm>
-            <a:off x="6519672" y="2569464"/>
-            <a:ext cx="1828800" cy="201168"/>
-          </a:xfrm>
-          <a:prstGeom prst="rect">
-            <a:avLst/>
-          </a:prstGeom>
-          <a:noFill/>
-          <a:ln/>
-        </p:spPr>
-        <p:txBody>
-          <a:bodyPr wrap="square" lIns="0" tIns="0" rIns="0" bIns="0" rtlCol="0" anchor="t"/>
-          <a:lstStyle/>
-          <a:p>
-            <a:pPr algn="ctr" indent="0" marL="0">
-              <a:buNone/>
-            </a:pPr>
-            <a:r>
-              <a:rPr lang="en-US" sz="850" dirty="0">
-                <a:solidFill>
-                  <a:srgbClr val="475569"/>
-                </a:solidFill>
-                <a:latin typeface="Calibri" pitchFamily="34" charset="0"/>
-                <a:ea typeface="Calibri" pitchFamily="34" charset="-122"/>
-                <a:cs typeface="Calibri" pitchFamily="34" charset="-120"/>
-              </a:rPr>
-              <a:t>having the quality of</a:t>
-            </a:r>
-            <a:endParaRPr lang="en-US" sz="850" dirty="0"/>
-          </a:p>
-        </p:txBody>
-      </p:sp>
-      <p:sp>
-        <p:nvSpPr>
-          <p:cNvPr id="25" name="Shape 23"/>
-          <p:cNvSpPr/>
-          <p:nvPr/>
-        </p:nvSpPr>
-        <p:spPr>
-          <a:xfrm>
-            <a:off x="365760" y="3273552"/>
-            <a:ext cx="1371600" cy="658368"/>
+              <a:t>Syllables</a:t>
+            </a:r>
+            <a:endParaRPr lang="en-US" sz="1100" dirty="0"/>
+          </a:p>
+        </p:txBody>
+      </p:sp>
+      <p:sp>
+        <p:nvSpPr>
+          <p:cNvPr id="24" name="Shape 22"/>
+          <p:cNvSpPr/>
+          <p:nvPr/>
+        </p:nvSpPr>
+        <p:spPr>
+          <a:xfrm>
+            <a:off x="1874520" y="3273552"/>
+            <a:ext cx="6903720" cy="658368"/>
           </a:xfrm>
           <a:prstGeom prst="rect">
             <a:avLst>
@@ -13724,11 +13383,38 @@
             </a:avLst>
           </a:prstGeom>
           <a:solidFill>
-            <a:srgbClr val="E2E8F0"/>
-          </a:solidFill>
-          <a:ln w="12700">
-            <a:solidFill>
-              <a:srgbClr val="E2E8F0"/>
+            <a:srgbClr val="CCFBF1"/>
+          </a:solidFill>
+          <a:ln w="12700">
+            <a:solidFill>
+              <a:srgbClr val="0D9488"/>
+            </a:solidFill>
+            <a:prstDash val="solid"/>
+          </a:ln>
+        </p:spPr>
+      </p:sp>
+      <p:sp>
+        <p:nvSpPr>
+          <p:cNvPr id="25" name="Shape 23"/>
+          <p:cNvSpPr/>
+          <p:nvPr/>
+        </p:nvSpPr>
+        <p:spPr>
+          <a:xfrm>
+            <a:off x="2999232" y="3364992"/>
+            <a:ext cx="1645920" cy="475488"/>
+          </a:xfrm>
+          <a:prstGeom prst="rect">
+            <a:avLst>
+              <a:gd name="adj" fmla="val 9615"/>
+            </a:avLst>
+          </a:prstGeom>
+          <a:solidFill>
+            <a:srgbClr val="FFFFFF"/>
+          </a:solidFill>
+          <a:ln w="12700">
+            <a:solidFill>
+              <a:srgbClr val="0D9488"/>
             </a:solidFill>
             <a:prstDash val="solid"/>
           </a:ln>
@@ -13742,63 +13428,75 @@
         </p:nvSpPr>
         <p:spPr>
           <a:xfrm>
-            <a:off x="365760" y="3273552"/>
-            <a:ext cx="1371600" cy="658368"/>
-          </a:xfrm>
-          <a:prstGeom prst="rect">
-            <a:avLst/>
-          </a:prstGeom>
-          <a:noFill/>
-          <a:ln/>
-        </p:spPr>
-        <p:txBody>
-          <a:bodyPr wrap="square" lIns="0" tIns="0" rIns="0" bIns="0" rtlCol="0" anchor="ctr"/>
-          <a:lstStyle/>
-          <a:p>
-            <a:pPr algn="ctr" indent="0" marL="0">
-              <a:buNone/>
-            </a:pPr>
-            <a:r>
-              <a:rPr lang="en-US" sz="1100" b="1" dirty="0">
-                <a:solidFill>
-                  <a:srgbClr val="475569"/>
+            <a:off x="2999232" y="3364992"/>
+            <a:ext cx="1645920" cy="475488"/>
+          </a:xfrm>
+          <a:prstGeom prst="rect">
+            <a:avLst/>
+          </a:prstGeom>
+          <a:noFill/>
+          <a:ln/>
+        </p:spPr>
+        <p:txBody>
+          <a:bodyPr wrap="square" lIns="0" tIns="0" rIns="0" bIns="0" rtlCol="0" anchor="ctr"/>
+          <a:lstStyle/>
+          <a:p>
+            <a:pPr algn="ctr" indent="0" marL="0">
+              <a:buNone/>
+            </a:pPr>
+            <a:r>
+              <a:rPr lang="en-US" sz="1400" b="1" dirty="0">
+                <a:solidFill>
+                  <a:srgbClr val="0D9488"/>
                 </a:solidFill>
                 <a:latin typeface="Trebuchet MS" pitchFamily="34" charset="0"/>
                 <a:ea typeface="Trebuchet MS" pitchFamily="34" charset="-122"/>
                 <a:cs typeface="Trebuchet MS" pitchFamily="34" charset="-120"/>
               </a:rPr>
-              <a:t>Syllables</a:t>
-            </a:r>
-            <a:endParaRPr lang="en-US" sz="1100" dirty="0"/>
-          </a:p>
-        </p:txBody>
-      </p:sp>
-      <p:sp>
-        <p:nvSpPr>
-          <p:cNvPr id="27" name="Shape 25"/>
-          <p:cNvSpPr/>
-          <p:nvPr/>
-        </p:nvSpPr>
-        <p:spPr>
-          <a:xfrm>
-            <a:off x="1874520" y="3273552"/>
-            <a:ext cx="6903720" cy="658368"/>
-          </a:xfrm>
-          <a:prstGeom prst="rect">
-            <a:avLst>
-              <a:gd name="adj" fmla="val 8333"/>
-            </a:avLst>
-          </a:prstGeom>
-          <a:solidFill>
-            <a:srgbClr val="CCFBF1"/>
-          </a:solidFill>
-          <a:ln w="12700">
-            <a:solidFill>
-              <a:srgbClr val="0D9488"/>
-            </a:solidFill>
-            <a:prstDash val="solid"/>
-          </a:ln>
-        </p:spPr>
+              <a:t>com</a:t>
+            </a:r>
+            <a:endParaRPr lang="en-US" sz="1400" dirty="0"/>
+          </a:p>
+        </p:txBody>
+      </p:sp>
+      <p:sp>
+        <p:nvSpPr>
+          <p:cNvPr id="27" name="Text 25"/>
+          <p:cNvSpPr/>
+          <p:nvPr/>
+        </p:nvSpPr>
+        <p:spPr>
+          <a:xfrm>
+            <a:off x="4645152" y="3364992"/>
+            <a:ext cx="1097280" cy="475488"/>
+          </a:xfrm>
+          <a:prstGeom prst="rect">
+            <a:avLst/>
+          </a:prstGeom>
+          <a:noFill/>
+          <a:ln/>
+        </p:spPr>
+        <p:txBody>
+          <a:bodyPr wrap="square" lIns="0" tIns="0" rIns="0" bIns="0" rtlCol="0" anchor="ctr"/>
+          <a:lstStyle/>
+          <a:p>
+            <a:pPr algn="ctr" indent="0" marL="0">
+              <a:buNone/>
+            </a:pPr>
+            <a:r>
+              <a:rPr lang="en-US" sz="1600" b="1" dirty="0">
+                <a:solidFill>
+                  <a:srgbClr val="0D9488"/>
+                </a:solidFill>
+                <a:latin typeface="Trebuchet MS" pitchFamily="34" charset="0"/>
+                <a:ea typeface="Trebuchet MS" pitchFamily="34" charset="-122"/>
+                <a:cs typeface="Trebuchet MS" pitchFamily="34" charset="-120"/>
+              </a:rPr>
+              <a:t>·</a:t>
+            </a:r>
+            <a:endParaRPr lang="en-US" sz="1600" dirty="0"/>
+          </a:p>
+        </p:txBody>
       </p:sp>
       <p:sp>
         <p:nvSpPr>
@@ -13808,7 +13506,7 @@
         </p:nvSpPr>
         <p:spPr>
           <a:xfrm>
-            <a:off x="2313432" y="3364992"/>
+            <a:off x="5742432" y="3364992"/>
             <a:ext cx="1645920" cy="475488"/>
           </a:xfrm>
           <a:prstGeom prst="rect">
@@ -13835,7 +13533,7 @@
         </p:nvSpPr>
         <p:spPr>
           <a:xfrm>
-            <a:off x="2313432" y="3364992"/>
+            <a:off x="5742432" y="3364992"/>
             <a:ext cx="1645920" cy="475488"/>
           </a:xfrm>
           <a:prstGeom prst="rect">
@@ -13860,7 +13558,7 @@
                 <a:ea typeface="Trebuchet MS" pitchFamily="34" charset="-122"/>
                 <a:cs typeface="Trebuchet MS" pitchFamily="34" charset="-120"/>
               </a:rPr>
-              <a:t>ex</a:t>
+              <a:t>press</a:t>
             </a:r>
             <a:endParaRPr lang="en-US" sz="1400" dirty="0"/>
           </a:p>
@@ -13868,224 +13566,80 @@
       </p:sp>
       <p:sp>
         <p:nvSpPr>
-          <p:cNvPr id="30" name="Text 28"/>
-          <p:cNvSpPr/>
-          <p:nvPr/>
-        </p:nvSpPr>
-        <p:spPr>
-          <a:xfrm>
-            <a:off x="3959352" y="3364992"/>
-            <a:ext cx="411480" cy="475488"/>
-          </a:xfrm>
-          <a:prstGeom prst="rect">
-            <a:avLst/>
-          </a:prstGeom>
-          <a:noFill/>
-          <a:ln/>
-        </p:spPr>
-        <p:txBody>
-          <a:bodyPr wrap="square" lIns="0" tIns="0" rIns="0" bIns="0" rtlCol="0" anchor="ctr"/>
-          <a:lstStyle/>
-          <a:p>
-            <a:pPr algn="ctr" indent="0" marL="0">
-              <a:buNone/>
-            </a:pPr>
-            <a:r>
-              <a:rPr lang="en-US" sz="1600" b="1" dirty="0">
-                <a:solidFill>
-                  <a:srgbClr val="0D9488"/>
+          <p:cNvPr id="30" name="Shape 28"/>
+          <p:cNvSpPr/>
+          <p:nvPr/>
+        </p:nvSpPr>
+        <p:spPr>
+          <a:xfrm>
+            <a:off x="365760" y="4096512"/>
+            <a:ext cx="1371600" cy="804672"/>
+          </a:xfrm>
+          <a:prstGeom prst="rect">
+            <a:avLst>
+              <a:gd name="adj" fmla="val 6818"/>
+            </a:avLst>
+          </a:prstGeom>
+          <a:solidFill>
+            <a:srgbClr val="E2E8F0"/>
+          </a:solidFill>
+          <a:ln w="12700">
+            <a:solidFill>
+              <a:srgbClr val="E2E8F0"/>
+            </a:solidFill>
+            <a:prstDash val="solid"/>
+          </a:ln>
+        </p:spPr>
+      </p:sp>
+      <p:sp>
+        <p:nvSpPr>
+          <p:cNvPr id="31" name="Text 29"/>
+          <p:cNvSpPr/>
+          <p:nvPr/>
+        </p:nvSpPr>
+        <p:spPr>
+          <a:xfrm>
+            <a:off x="365760" y="4096512"/>
+            <a:ext cx="1371600" cy="804672"/>
+          </a:xfrm>
+          <a:prstGeom prst="rect">
+            <a:avLst/>
+          </a:prstGeom>
+          <a:noFill/>
+          <a:ln/>
+        </p:spPr>
+        <p:txBody>
+          <a:bodyPr wrap="square" lIns="0" tIns="0" rIns="0" bIns="0" rtlCol="0" anchor="ctr"/>
+          <a:lstStyle/>
+          <a:p>
+            <a:pPr algn="ctr" indent="0" marL="0">
+              <a:buNone/>
+            </a:pPr>
+            <a:r>
+              <a:rPr lang="en-US" sz="1100" b="1" dirty="0">
+                <a:solidFill>
+                  <a:srgbClr val="475569"/>
                 </a:solidFill>
                 <a:latin typeface="Trebuchet MS" pitchFamily="34" charset="0"/>
                 <a:ea typeface="Trebuchet MS" pitchFamily="34" charset="-122"/>
                 <a:cs typeface="Trebuchet MS" pitchFamily="34" charset="-120"/>
               </a:rPr>
-              <a:t>·</a:t>
-            </a:r>
-            <a:endParaRPr lang="en-US" sz="1600" dirty="0"/>
-          </a:p>
-        </p:txBody>
-      </p:sp>
-      <p:sp>
-        <p:nvSpPr>
-          <p:cNvPr id="31" name="Shape 29"/>
-          <p:cNvSpPr/>
-          <p:nvPr/>
-        </p:nvSpPr>
-        <p:spPr>
-          <a:xfrm>
-            <a:off x="4370832" y="3364992"/>
-            <a:ext cx="1645920" cy="475488"/>
-          </a:xfrm>
-          <a:prstGeom prst="rect">
-            <a:avLst>
-              <a:gd name="adj" fmla="val 9615"/>
-            </a:avLst>
-          </a:prstGeom>
-          <a:solidFill>
-            <a:srgbClr val="FFFFFF"/>
-          </a:solidFill>
-          <a:ln w="12700">
-            <a:solidFill>
-              <a:srgbClr val="0D9488"/>
-            </a:solidFill>
-            <a:prstDash val="solid"/>
-          </a:ln>
-        </p:spPr>
-      </p:sp>
-      <p:sp>
-        <p:nvSpPr>
-          <p:cNvPr id="32" name="Text 30"/>
-          <p:cNvSpPr/>
-          <p:nvPr/>
-        </p:nvSpPr>
-        <p:spPr>
-          <a:xfrm>
-            <a:off x="4370832" y="3364992"/>
-            <a:ext cx="1645920" cy="475488"/>
-          </a:xfrm>
-          <a:prstGeom prst="rect">
-            <a:avLst/>
-          </a:prstGeom>
-          <a:noFill/>
-          <a:ln/>
-        </p:spPr>
-        <p:txBody>
-          <a:bodyPr wrap="square" lIns="0" tIns="0" rIns="0" bIns="0" rtlCol="0" anchor="ctr"/>
-          <a:lstStyle/>
-          <a:p>
-            <a:pPr algn="ctr" indent="0" marL="0">
-              <a:buNone/>
-            </a:pPr>
-            <a:r>
-              <a:rPr lang="en-US" sz="1400" b="1" dirty="0">
-                <a:solidFill>
-                  <a:srgbClr val="0D9488"/>
-                </a:solidFill>
-                <a:latin typeface="Trebuchet MS" pitchFamily="34" charset="0"/>
-                <a:ea typeface="Trebuchet MS" pitchFamily="34" charset="-122"/>
-                <a:cs typeface="Trebuchet MS" pitchFamily="34" charset="-120"/>
-              </a:rPr>
-              <a:t>press</a:t>
-            </a:r>
-            <a:endParaRPr lang="en-US" sz="1400" dirty="0"/>
-          </a:p>
-        </p:txBody>
-      </p:sp>
-      <p:sp>
-        <p:nvSpPr>
-          <p:cNvPr id="33" name="Text 31"/>
-          <p:cNvSpPr/>
-          <p:nvPr/>
-        </p:nvSpPr>
-        <p:spPr>
-          <a:xfrm>
-            <a:off x="6016752" y="3364992"/>
-            <a:ext cx="411480" cy="475488"/>
-          </a:xfrm>
-          <a:prstGeom prst="rect">
-            <a:avLst/>
-          </a:prstGeom>
-          <a:noFill/>
-          <a:ln/>
-        </p:spPr>
-        <p:txBody>
-          <a:bodyPr wrap="square" lIns="0" tIns="0" rIns="0" bIns="0" rtlCol="0" anchor="ctr"/>
-          <a:lstStyle/>
-          <a:p>
-            <a:pPr algn="ctr" indent="0" marL="0">
-              <a:buNone/>
-            </a:pPr>
-            <a:r>
-              <a:rPr lang="en-US" sz="1600" b="1" dirty="0">
-                <a:solidFill>
-                  <a:srgbClr val="0D9488"/>
-                </a:solidFill>
-                <a:latin typeface="Trebuchet MS" pitchFamily="34" charset="0"/>
-                <a:ea typeface="Trebuchet MS" pitchFamily="34" charset="-122"/>
-                <a:cs typeface="Trebuchet MS" pitchFamily="34" charset="-120"/>
-              </a:rPr>
-              <a:t>·</a:t>
-            </a:r>
-            <a:endParaRPr lang="en-US" sz="1600" dirty="0"/>
-          </a:p>
-        </p:txBody>
-      </p:sp>
-      <p:sp>
-        <p:nvSpPr>
-          <p:cNvPr id="34" name="Shape 32"/>
-          <p:cNvSpPr/>
-          <p:nvPr/>
-        </p:nvSpPr>
-        <p:spPr>
-          <a:xfrm>
-            <a:off x="6428232" y="3364992"/>
-            <a:ext cx="1645920" cy="475488"/>
-          </a:xfrm>
-          <a:prstGeom prst="rect">
-            <a:avLst>
-              <a:gd name="adj" fmla="val 9615"/>
-            </a:avLst>
-          </a:prstGeom>
-          <a:solidFill>
-            <a:srgbClr val="FFFFFF"/>
-          </a:solidFill>
-          <a:ln w="12700">
-            <a:solidFill>
-              <a:srgbClr val="0D9488"/>
-            </a:solidFill>
-            <a:prstDash val="solid"/>
-          </a:ln>
-        </p:spPr>
-      </p:sp>
-      <p:sp>
-        <p:nvSpPr>
-          <p:cNvPr id="35" name="Text 33"/>
-          <p:cNvSpPr/>
-          <p:nvPr/>
-        </p:nvSpPr>
-        <p:spPr>
-          <a:xfrm>
-            <a:off x="6428232" y="3364992"/>
-            <a:ext cx="1645920" cy="475488"/>
-          </a:xfrm>
-          <a:prstGeom prst="rect">
-            <a:avLst/>
-          </a:prstGeom>
-          <a:noFill/>
-          <a:ln/>
-        </p:spPr>
-        <p:txBody>
-          <a:bodyPr wrap="square" lIns="0" tIns="0" rIns="0" bIns="0" rtlCol="0" anchor="ctr"/>
-          <a:lstStyle/>
-          <a:p>
-            <a:pPr algn="ctr" indent="0" marL="0">
-              <a:buNone/>
-            </a:pPr>
-            <a:r>
-              <a:rPr lang="en-US" sz="1400" b="1" dirty="0">
-                <a:solidFill>
-                  <a:srgbClr val="0D9488"/>
-                </a:solidFill>
-                <a:latin typeface="Trebuchet MS" pitchFamily="34" charset="0"/>
-                <a:ea typeface="Trebuchet MS" pitchFamily="34" charset="-122"/>
-                <a:cs typeface="Trebuchet MS" pitchFamily="34" charset="-120"/>
-              </a:rPr>
-              <a:t>ive</a:t>
-            </a:r>
-            <a:endParaRPr lang="en-US" sz="1400" dirty="0"/>
-          </a:p>
-        </p:txBody>
-      </p:sp>
-      <p:sp>
-        <p:nvSpPr>
-          <p:cNvPr id="36" name="Shape 34"/>
-          <p:cNvSpPr/>
-          <p:nvPr/>
-        </p:nvSpPr>
-        <p:spPr>
-          <a:xfrm>
-            <a:off x="365760" y="4096512"/>
-            <a:ext cx="1371600" cy="804672"/>
+              <a:t>Phonemes</a:t>
+            </a:r>
+            <a:endParaRPr lang="en-US" sz="1100" dirty="0"/>
+          </a:p>
+        </p:txBody>
+      </p:sp>
+      <p:sp>
+        <p:nvSpPr>
+          <p:cNvPr id="32" name="Shape 30"/>
+          <p:cNvSpPr/>
+          <p:nvPr/>
+        </p:nvSpPr>
+        <p:spPr>
+          <a:xfrm>
+            <a:off x="1874520" y="4096512"/>
+            <a:ext cx="6903720" cy="804672"/>
           </a:xfrm>
           <a:prstGeom prst="rect">
             <a:avLst>
@@ -14093,85 +13647,19 @@
             </a:avLst>
           </a:prstGeom>
           <a:solidFill>
-            <a:srgbClr val="E2E8F0"/>
+            <a:srgbClr val="F8FAFC"/>
           </a:solidFill>
           <a:ln w="12700">
             <a:solidFill>
               <a:srgbClr val="E2E8F0"/>
             </a:solidFill>
-            <a:prstDash val="solid"/>
-          </a:ln>
-        </p:spPr>
-      </p:sp>
-      <p:sp>
-        <p:nvSpPr>
-          <p:cNvPr id="37" name="Text 35"/>
-          <p:cNvSpPr/>
-          <p:nvPr/>
-        </p:nvSpPr>
-        <p:spPr>
-          <a:xfrm>
-            <a:off x="365760" y="4096512"/>
-            <a:ext cx="1371600" cy="804672"/>
-          </a:xfrm>
-          <a:prstGeom prst="rect">
-            <a:avLst/>
-          </a:prstGeom>
-          <a:noFill/>
-          <a:ln/>
-        </p:spPr>
-        <p:txBody>
-          <a:bodyPr wrap="square" lIns="0" tIns="0" rIns="0" bIns="0" rtlCol="0" anchor="ctr"/>
-          <a:lstStyle/>
-          <a:p>
-            <a:pPr algn="ctr" indent="0" marL="0">
-              <a:buNone/>
-            </a:pPr>
-            <a:r>
-              <a:rPr lang="en-US" sz="1100" b="1" dirty="0">
-                <a:solidFill>
-                  <a:srgbClr val="475569"/>
-                </a:solidFill>
-                <a:latin typeface="Trebuchet MS" pitchFamily="34" charset="0"/>
-                <a:ea typeface="Trebuchet MS" pitchFamily="34" charset="-122"/>
-                <a:cs typeface="Trebuchet MS" pitchFamily="34" charset="-120"/>
-              </a:rPr>
-              <a:t>Phonemes</a:t>
-            </a:r>
-            <a:endParaRPr lang="en-US" sz="1100" dirty="0"/>
-          </a:p>
-        </p:txBody>
-      </p:sp>
-      <p:sp>
-        <p:nvSpPr>
-          <p:cNvPr id="38" name="Shape 36"/>
-          <p:cNvSpPr/>
-          <p:nvPr/>
-        </p:nvSpPr>
-        <p:spPr>
-          <a:xfrm>
-            <a:off x="1874520" y="4096512"/>
-            <a:ext cx="6903720" cy="804672"/>
-          </a:xfrm>
-          <a:prstGeom prst="rect">
-            <a:avLst>
-              <a:gd name="adj" fmla="val 6818"/>
-            </a:avLst>
-          </a:prstGeom>
-          <a:solidFill>
-            <a:srgbClr val="F8FAFC"/>
-          </a:solidFill>
-          <a:ln w="12700">
-            <a:solidFill>
-              <a:srgbClr val="E2E8F0"/>
-            </a:solidFill>
             <a:prstDash val="dash"/>
           </a:ln>
         </p:spPr>
       </p:sp>
       <p:sp>
         <p:nvSpPr>
-          <p:cNvPr id="39" name="Text 37"/>
+          <p:cNvPr id="33" name="Text 31"/>
           <p:cNvSpPr/>
           <p:nvPr/>
         </p:nvSpPr>
@@ -14898,7 +14386,7 @@
                 <a:ea typeface="Trebuchet MS" pitchFamily="34" charset="-122"/>
                 <a:cs typeface="Trebuchet MS" pitchFamily="34" charset="-120"/>
               </a:rPr>
-              <a:t>expressive</a:t>
+              <a:t>compress</a:t>
             </a:r>
             <a:endParaRPr lang="en-US" sz="2800" dirty="0"/>
           </a:p>
@@ -14978,7 +14466,7 @@
         </p:nvSpPr>
         <p:spPr>
           <a:xfrm>
-            <a:off x="2221992" y="2258568"/>
+            <a:off x="2938272" y="2258568"/>
             <a:ext cx="1828800" cy="292608"/>
           </a:xfrm>
           <a:prstGeom prst="rect">
@@ -15012,7 +14500,7 @@
         </p:nvSpPr>
         <p:spPr>
           <a:xfrm>
-            <a:off x="2221992" y="2258568"/>
+            <a:off x="2938272" y="2258568"/>
             <a:ext cx="1828800" cy="292608"/>
           </a:xfrm>
           <a:prstGeom prst="rect">
@@ -15037,7 +14525,7 @@
                 <a:ea typeface="Trebuchet MS" pitchFamily="34" charset="-122"/>
                 <a:cs typeface="Trebuchet MS" pitchFamily="34" charset="-120"/>
               </a:rPr>
-              <a:t>ex</a:t>
+              <a:t>com</a:t>
             </a:r>
             <a:endParaRPr lang="en-US" sz="1300" dirty="0"/>
           </a:p>
@@ -15051,7 +14539,7 @@
         </p:nvSpPr>
         <p:spPr>
           <a:xfrm>
-            <a:off x="2221992" y="2569464"/>
+            <a:off x="2938272" y="2569464"/>
             <a:ext cx="1828800" cy="201168"/>
           </a:xfrm>
           <a:prstGeom prst="rect">
@@ -15076,7 +14564,7 @@
                 <a:ea typeface="Calibri" pitchFamily="34" charset="-122"/>
                 <a:cs typeface="Calibri" pitchFamily="34" charset="-120"/>
               </a:rPr>
-              <a:t>out</a:t>
+              <a:t>together</a:t>
             </a:r>
             <a:endParaRPr lang="en-US" sz="850" dirty="0"/>
           </a:p>
@@ -15090,7 +14578,7 @@
         </p:nvSpPr>
         <p:spPr>
           <a:xfrm>
-            <a:off x="4370832" y="2258568"/>
+            <a:off x="5803392" y="2258568"/>
             <a:ext cx="1828800" cy="292608"/>
           </a:xfrm>
           <a:prstGeom prst="rect">
@@ -15124,7 +14612,7 @@
         </p:nvSpPr>
         <p:spPr>
           <a:xfrm>
-            <a:off x="4370832" y="2258568"/>
+            <a:off x="5803392" y="2258568"/>
             <a:ext cx="1828800" cy="292608"/>
           </a:xfrm>
           <a:prstGeom prst="rect">
@@ -15163,7 +14651,7 @@
         </p:nvSpPr>
         <p:spPr>
           <a:xfrm>
-            <a:off x="4370832" y="2569464"/>
+            <a:off x="5803392" y="2569464"/>
             <a:ext cx="1828800" cy="201168"/>
           </a:xfrm>
           <a:prstGeom prst="rect">
@@ -15202,30 +14690,23 @@
         </p:nvSpPr>
         <p:spPr>
           <a:xfrm>
-            <a:off x="6519672" y="2258568"/>
-            <a:ext cx="1828800" cy="292608"/>
+            <a:off x="365760" y="3273552"/>
+            <a:ext cx="1371600" cy="658368"/>
           </a:xfrm>
           <a:prstGeom prst="rect">
             <a:avLst>
-              <a:gd name="adj" fmla="val 25000"/>
+              <a:gd name="adj" fmla="val 8333"/>
             </a:avLst>
           </a:prstGeom>
           <a:solidFill>
-            <a:srgbClr val="FCE7F3"/>
-          </a:solidFill>
-          <a:ln w="19050">
-            <a:solidFill>
-              <a:srgbClr val="DB2777"/>
-            </a:solidFill>
-            <a:prstDash val="solid"/>
-          </a:ln>
-          <a:effectLst>
-            <a:outerShdw sx="100000" sy="100000" kx="0" ky="0" algn="bl" rotWithShape="0" blurRad="101600" dist="38100" dir="8100000">
-              <a:srgbClr val="000000">
-                <a:alpha val="12000"/>
-              </a:srgbClr>
-            </a:outerShdw>
-          </a:effectLst>
+            <a:srgbClr val="E2E8F0"/>
+          </a:solidFill>
+          <a:ln w="12700">
+            <a:solidFill>
+              <a:srgbClr val="E2E8F0"/>
+            </a:solidFill>
+            <a:prstDash val="solid"/>
+          </a:ln>
         </p:spPr>
       </p:sp>
       <p:sp>
@@ -15236,47 +14717,404 @@
         </p:nvSpPr>
         <p:spPr>
           <a:xfrm>
-            <a:off x="6519672" y="2258568"/>
-            <a:ext cx="1828800" cy="292608"/>
-          </a:xfrm>
-          <a:prstGeom prst="rect">
-            <a:avLst/>
-          </a:prstGeom>
-          <a:noFill/>
-          <a:ln/>
-        </p:spPr>
-        <p:txBody>
-          <a:bodyPr wrap="square" lIns="0" tIns="0" rIns="0" bIns="0" rtlCol="0" anchor="ctr"/>
-          <a:lstStyle/>
-          <a:p>
-            <a:pPr algn="ctr" indent="0" marL="0">
-              <a:buNone/>
-            </a:pPr>
-            <a:r>
-              <a:rPr lang="en-US" sz="1300" b="1" dirty="0">
-                <a:solidFill>
-                  <a:srgbClr val="9D174D"/>
+            <a:off x="365760" y="3273552"/>
+            <a:ext cx="1371600" cy="658368"/>
+          </a:xfrm>
+          <a:prstGeom prst="rect">
+            <a:avLst/>
+          </a:prstGeom>
+          <a:noFill/>
+          <a:ln/>
+        </p:spPr>
+        <p:txBody>
+          <a:bodyPr wrap="square" lIns="0" tIns="0" rIns="0" bIns="0" rtlCol="0" anchor="ctr"/>
+          <a:lstStyle/>
+          <a:p>
+            <a:pPr algn="ctr" indent="0" marL="0">
+              <a:buNone/>
+            </a:pPr>
+            <a:r>
+              <a:rPr lang="en-US" sz="1100" b="1" dirty="0">
+                <a:solidFill>
+                  <a:srgbClr val="475569"/>
                 </a:solidFill>
                 <a:latin typeface="Trebuchet MS" pitchFamily="34" charset="0"/>
                 <a:ea typeface="Trebuchet MS" pitchFamily="34" charset="-122"/>
                 <a:cs typeface="Trebuchet MS" pitchFamily="34" charset="-120"/>
               </a:rPr>
-              <a:t>ive</a:t>
-            </a:r>
-            <a:endParaRPr lang="en-US" sz="1300" dirty="0"/>
-          </a:p>
-        </p:txBody>
-      </p:sp>
-      <p:sp>
-        <p:nvSpPr>
-          <p:cNvPr id="24" name="Text 22"/>
-          <p:cNvSpPr/>
-          <p:nvPr/>
-        </p:nvSpPr>
-        <p:spPr>
-          <a:xfrm>
-            <a:off x="6519672" y="2569464"/>
-            <a:ext cx="1828800" cy="201168"/>
+              <a:t>Syllables</a:t>
+            </a:r>
+            <a:endParaRPr lang="en-US" sz="1100" dirty="0"/>
+          </a:p>
+        </p:txBody>
+      </p:sp>
+      <p:sp>
+        <p:nvSpPr>
+          <p:cNvPr id="24" name="Shape 22"/>
+          <p:cNvSpPr/>
+          <p:nvPr/>
+        </p:nvSpPr>
+        <p:spPr>
+          <a:xfrm>
+            <a:off x="1874520" y="3273552"/>
+            <a:ext cx="6903720" cy="658368"/>
+          </a:xfrm>
+          <a:prstGeom prst="rect">
+            <a:avLst>
+              <a:gd name="adj" fmla="val 8333"/>
+            </a:avLst>
+          </a:prstGeom>
+          <a:solidFill>
+            <a:srgbClr val="CCFBF1"/>
+          </a:solidFill>
+          <a:ln w="12700">
+            <a:solidFill>
+              <a:srgbClr val="0D9488"/>
+            </a:solidFill>
+            <a:prstDash val="solid"/>
+          </a:ln>
+        </p:spPr>
+      </p:sp>
+      <p:sp>
+        <p:nvSpPr>
+          <p:cNvPr id="25" name="Shape 23"/>
+          <p:cNvSpPr/>
+          <p:nvPr/>
+        </p:nvSpPr>
+        <p:spPr>
+          <a:xfrm>
+            <a:off x="2999232" y="3364992"/>
+            <a:ext cx="1645920" cy="475488"/>
+          </a:xfrm>
+          <a:prstGeom prst="rect">
+            <a:avLst>
+              <a:gd name="adj" fmla="val 9615"/>
+            </a:avLst>
+          </a:prstGeom>
+          <a:solidFill>
+            <a:srgbClr val="FFFFFF"/>
+          </a:solidFill>
+          <a:ln w="12700">
+            <a:solidFill>
+              <a:srgbClr val="0D9488"/>
+            </a:solidFill>
+            <a:prstDash val="solid"/>
+          </a:ln>
+        </p:spPr>
+      </p:sp>
+      <p:sp>
+        <p:nvSpPr>
+          <p:cNvPr id="26" name="Text 24"/>
+          <p:cNvSpPr/>
+          <p:nvPr/>
+        </p:nvSpPr>
+        <p:spPr>
+          <a:xfrm>
+            <a:off x="2999232" y="3364992"/>
+            <a:ext cx="1645920" cy="475488"/>
+          </a:xfrm>
+          <a:prstGeom prst="rect">
+            <a:avLst/>
+          </a:prstGeom>
+          <a:noFill/>
+          <a:ln/>
+        </p:spPr>
+        <p:txBody>
+          <a:bodyPr wrap="square" lIns="0" tIns="0" rIns="0" bIns="0" rtlCol="0" anchor="ctr"/>
+          <a:lstStyle/>
+          <a:p>
+            <a:pPr algn="ctr" indent="0" marL="0">
+              <a:buNone/>
+            </a:pPr>
+            <a:r>
+              <a:rPr lang="en-US" sz="1400" b="1" dirty="0">
+                <a:solidFill>
+                  <a:srgbClr val="0D9488"/>
+                </a:solidFill>
+                <a:latin typeface="Trebuchet MS" pitchFamily="34" charset="0"/>
+                <a:ea typeface="Trebuchet MS" pitchFamily="34" charset="-122"/>
+                <a:cs typeface="Trebuchet MS" pitchFamily="34" charset="-120"/>
+              </a:rPr>
+              <a:t>com</a:t>
+            </a:r>
+            <a:endParaRPr lang="en-US" sz="1400" dirty="0"/>
+          </a:p>
+        </p:txBody>
+      </p:sp>
+      <p:sp>
+        <p:nvSpPr>
+          <p:cNvPr id="27" name="Text 25"/>
+          <p:cNvSpPr/>
+          <p:nvPr/>
+        </p:nvSpPr>
+        <p:spPr>
+          <a:xfrm>
+            <a:off x="4645152" y="3364992"/>
+            <a:ext cx="1097280" cy="475488"/>
+          </a:xfrm>
+          <a:prstGeom prst="rect">
+            <a:avLst/>
+          </a:prstGeom>
+          <a:noFill/>
+          <a:ln/>
+        </p:spPr>
+        <p:txBody>
+          <a:bodyPr wrap="square" lIns="0" tIns="0" rIns="0" bIns="0" rtlCol="0" anchor="ctr"/>
+          <a:lstStyle/>
+          <a:p>
+            <a:pPr algn="ctr" indent="0" marL="0">
+              <a:buNone/>
+            </a:pPr>
+            <a:r>
+              <a:rPr lang="en-US" sz="1600" b="1" dirty="0">
+                <a:solidFill>
+                  <a:srgbClr val="0D9488"/>
+                </a:solidFill>
+                <a:latin typeface="Trebuchet MS" pitchFamily="34" charset="0"/>
+                <a:ea typeface="Trebuchet MS" pitchFamily="34" charset="-122"/>
+                <a:cs typeface="Trebuchet MS" pitchFamily="34" charset="-120"/>
+              </a:rPr>
+              <a:t>·</a:t>
+            </a:r>
+            <a:endParaRPr lang="en-US" sz="1600" dirty="0"/>
+          </a:p>
+        </p:txBody>
+      </p:sp>
+      <p:sp>
+        <p:nvSpPr>
+          <p:cNvPr id="28" name="Shape 26"/>
+          <p:cNvSpPr/>
+          <p:nvPr/>
+        </p:nvSpPr>
+        <p:spPr>
+          <a:xfrm>
+            <a:off x="5742432" y="3364992"/>
+            <a:ext cx="1645920" cy="475488"/>
+          </a:xfrm>
+          <a:prstGeom prst="rect">
+            <a:avLst>
+              <a:gd name="adj" fmla="val 9615"/>
+            </a:avLst>
+          </a:prstGeom>
+          <a:solidFill>
+            <a:srgbClr val="FFFFFF"/>
+          </a:solidFill>
+          <a:ln w="12700">
+            <a:solidFill>
+              <a:srgbClr val="0D9488"/>
+            </a:solidFill>
+            <a:prstDash val="solid"/>
+          </a:ln>
+        </p:spPr>
+      </p:sp>
+      <p:sp>
+        <p:nvSpPr>
+          <p:cNvPr id="29" name="Text 27"/>
+          <p:cNvSpPr/>
+          <p:nvPr/>
+        </p:nvSpPr>
+        <p:spPr>
+          <a:xfrm>
+            <a:off x="5742432" y="3364992"/>
+            <a:ext cx="1645920" cy="475488"/>
+          </a:xfrm>
+          <a:prstGeom prst="rect">
+            <a:avLst/>
+          </a:prstGeom>
+          <a:noFill/>
+          <a:ln/>
+        </p:spPr>
+        <p:txBody>
+          <a:bodyPr wrap="square" lIns="0" tIns="0" rIns="0" bIns="0" rtlCol="0" anchor="ctr"/>
+          <a:lstStyle/>
+          <a:p>
+            <a:pPr algn="ctr" indent="0" marL="0">
+              <a:buNone/>
+            </a:pPr>
+            <a:r>
+              <a:rPr lang="en-US" sz="1400" b="1" dirty="0">
+                <a:solidFill>
+                  <a:srgbClr val="0D9488"/>
+                </a:solidFill>
+                <a:latin typeface="Trebuchet MS" pitchFamily="34" charset="0"/>
+                <a:ea typeface="Trebuchet MS" pitchFamily="34" charset="-122"/>
+                <a:cs typeface="Trebuchet MS" pitchFamily="34" charset="-120"/>
+              </a:rPr>
+              <a:t>press</a:t>
+            </a:r>
+            <a:endParaRPr lang="en-US" sz="1400" dirty="0"/>
+          </a:p>
+        </p:txBody>
+      </p:sp>
+      <p:sp>
+        <p:nvSpPr>
+          <p:cNvPr id="30" name="Shape 28"/>
+          <p:cNvSpPr/>
+          <p:nvPr/>
+        </p:nvSpPr>
+        <p:spPr>
+          <a:xfrm>
+            <a:off x="365760" y="4096512"/>
+            <a:ext cx="1371600" cy="804672"/>
+          </a:xfrm>
+          <a:prstGeom prst="rect">
+            <a:avLst>
+              <a:gd name="adj" fmla="val 6818"/>
+            </a:avLst>
+          </a:prstGeom>
+          <a:solidFill>
+            <a:srgbClr val="E2E8F0"/>
+          </a:solidFill>
+          <a:ln w="12700">
+            <a:solidFill>
+              <a:srgbClr val="E2E8F0"/>
+            </a:solidFill>
+            <a:prstDash val="solid"/>
+          </a:ln>
+        </p:spPr>
+      </p:sp>
+      <p:sp>
+        <p:nvSpPr>
+          <p:cNvPr id="31" name="Text 29"/>
+          <p:cNvSpPr/>
+          <p:nvPr/>
+        </p:nvSpPr>
+        <p:spPr>
+          <a:xfrm>
+            <a:off x="365760" y="4096512"/>
+            <a:ext cx="1371600" cy="804672"/>
+          </a:xfrm>
+          <a:prstGeom prst="rect">
+            <a:avLst/>
+          </a:prstGeom>
+          <a:noFill/>
+          <a:ln/>
+        </p:spPr>
+        <p:txBody>
+          <a:bodyPr wrap="square" lIns="0" tIns="0" rIns="0" bIns="0" rtlCol="0" anchor="ctr"/>
+          <a:lstStyle/>
+          <a:p>
+            <a:pPr algn="ctr" indent="0" marL="0">
+              <a:buNone/>
+            </a:pPr>
+            <a:r>
+              <a:rPr lang="en-US" sz="1100" b="1" dirty="0">
+                <a:solidFill>
+                  <a:srgbClr val="475569"/>
+                </a:solidFill>
+                <a:latin typeface="Trebuchet MS" pitchFamily="34" charset="0"/>
+                <a:ea typeface="Trebuchet MS" pitchFamily="34" charset="-122"/>
+                <a:cs typeface="Trebuchet MS" pitchFamily="34" charset="-120"/>
+              </a:rPr>
+              <a:t>Phonemes</a:t>
+            </a:r>
+            <a:endParaRPr lang="en-US" sz="1100" dirty="0"/>
+          </a:p>
+        </p:txBody>
+      </p:sp>
+      <p:sp>
+        <p:nvSpPr>
+          <p:cNvPr id="32" name="Shape 30"/>
+          <p:cNvSpPr/>
+          <p:nvPr/>
+        </p:nvSpPr>
+        <p:spPr>
+          <a:xfrm>
+            <a:off x="1874520" y="4096512"/>
+            <a:ext cx="6903720" cy="804672"/>
+          </a:xfrm>
+          <a:prstGeom prst="rect">
+            <a:avLst>
+              <a:gd name="adj" fmla="val 6818"/>
+            </a:avLst>
+          </a:prstGeom>
+          <a:solidFill>
+            <a:srgbClr val="FCE7F3"/>
+          </a:solidFill>
+          <a:ln w="12700">
+            <a:solidFill>
+              <a:srgbClr val="DB2777"/>
+            </a:solidFill>
+            <a:prstDash val="solid"/>
+          </a:ln>
+        </p:spPr>
+      </p:sp>
+      <p:sp>
+        <p:nvSpPr>
+          <p:cNvPr id="33" name="Shape 31"/>
+          <p:cNvSpPr/>
+          <p:nvPr/>
+        </p:nvSpPr>
+        <p:spPr>
+          <a:xfrm>
+            <a:off x="2124837" y="4169664"/>
+            <a:ext cx="685800" cy="384048"/>
+          </a:xfrm>
+          <a:prstGeom prst="rect">
+            <a:avLst>
+              <a:gd name="adj" fmla="val 9524"/>
+            </a:avLst>
+          </a:prstGeom>
+          <a:solidFill>
+            <a:srgbClr val="FFFFFF"/>
+          </a:solidFill>
+          <a:ln w="12700">
+            <a:solidFill>
+              <a:srgbClr val="DB2777"/>
+            </a:solidFill>
+            <a:prstDash val="solid"/>
+          </a:ln>
+        </p:spPr>
+      </p:sp>
+      <p:sp>
+        <p:nvSpPr>
+          <p:cNvPr id="34" name="Text 32"/>
+          <p:cNvSpPr/>
+          <p:nvPr/>
+        </p:nvSpPr>
+        <p:spPr>
+          <a:xfrm>
+            <a:off x="2124837" y="4169664"/>
+            <a:ext cx="685800" cy="384048"/>
+          </a:xfrm>
+          <a:prstGeom prst="rect">
+            <a:avLst/>
+          </a:prstGeom>
+          <a:noFill/>
+          <a:ln/>
+        </p:spPr>
+        <p:txBody>
+          <a:bodyPr wrap="square" lIns="0" tIns="0" rIns="0" bIns="0" rtlCol="0" anchor="ctr"/>
+          <a:lstStyle/>
+          <a:p>
+            <a:pPr algn="ctr" indent="0" marL="0">
+              <a:buNone/>
+            </a:pPr>
+            <a:r>
+              <a:rPr lang="en-US" sz="900" b="1" dirty="0">
+                <a:solidFill>
+                  <a:srgbClr val="9D174D"/>
+                </a:solidFill>
+                <a:latin typeface="Trebuchet MS" pitchFamily="34" charset="0"/>
+                <a:ea typeface="Trebuchet MS" pitchFamily="34" charset="-122"/>
+                <a:cs typeface="Trebuchet MS" pitchFamily="34" charset="-120"/>
+              </a:rPr>
+              <a:t>c</a:t>
+            </a:r>
+            <a:endParaRPr lang="en-US" sz="900" dirty="0"/>
+          </a:p>
+        </p:txBody>
+      </p:sp>
+      <p:sp>
+        <p:nvSpPr>
+          <p:cNvPr id="35" name="Text 33"/>
+          <p:cNvSpPr/>
+          <p:nvPr/>
+        </p:nvSpPr>
+        <p:spPr>
+          <a:xfrm>
+            <a:off x="2124837" y="4572000"/>
+            <a:ext cx="685800" cy="219456"/>
           </a:xfrm>
           <a:prstGeom prst="rect">
             <a:avLst/>
@@ -15292,232 +15130,232 @@
               <a:buNone/>
             </a:pPr>
             <a:r>
-              <a:rPr lang="en-US" sz="850" dirty="0">
-                <a:solidFill>
-                  <a:srgbClr val="475569"/>
+              <a:rPr lang="en-US" sz="750" i="1" dirty="0">
+                <a:solidFill>
+                  <a:srgbClr val="94A3B8"/>
                 </a:solidFill>
                 <a:latin typeface="Calibri" pitchFamily="34" charset="0"/>
                 <a:ea typeface="Calibri" pitchFamily="34" charset="-122"/>
                 <a:cs typeface="Calibri" pitchFamily="34" charset="-120"/>
               </a:rPr>
-              <a:t>having the quality of</a:t>
-            </a:r>
-            <a:endParaRPr lang="en-US" sz="850" dirty="0"/>
-          </a:p>
-        </p:txBody>
-      </p:sp>
-      <p:sp>
-        <p:nvSpPr>
-          <p:cNvPr id="25" name="Shape 23"/>
-          <p:cNvSpPr/>
-          <p:nvPr/>
-        </p:nvSpPr>
-        <p:spPr>
-          <a:xfrm>
-            <a:off x="365760" y="3273552"/>
-            <a:ext cx="1371600" cy="658368"/>
+              <a:t>/k/</a:t>
+            </a:r>
+            <a:endParaRPr lang="en-US" sz="750" dirty="0"/>
+          </a:p>
+        </p:txBody>
+      </p:sp>
+      <p:sp>
+        <p:nvSpPr>
+          <p:cNvPr id="36" name="Shape 34"/>
+          <p:cNvSpPr/>
+          <p:nvPr/>
+        </p:nvSpPr>
+        <p:spPr>
+          <a:xfrm>
+            <a:off x="3033522" y="4169664"/>
+            <a:ext cx="685800" cy="384048"/>
           </a:xfrm>
           <a:prstGeom prst="rect">
             <a:avLst>
-              <a:gd name="adj" fmla="val 8333"/>
+              <a:gd name="adj" fmla="val 9524"/>
             </a:avLst>
           </a:prstGeom>
           <a:solidFill>
-            <a:srgbClr val="E2E8F0"/>
-          </a:solidFill>
-          <a:ln w="12700">
-            <a:solidFill>
-              <a:srgbClr val="E2E8F0"/>
-            </a:solidFill>
-            <a:prstDash val="solid"/>
-          </a:ln>
-        </p:spPr>
-      </p:sp>
-      <p:sp>
-        <p:nvSpPr>
-          <p:cNvPr id="26" name="Text 24"/>
-          <p:cNvSpPr/>
-          <p:nvPr/>
-        </p:nvSpPr>
-        <p:spPr>
-          <a:xfrm>
-            <a:off x="365760" y="3273552"/>
-            <a:ext cx="1371600" cy="658368"/>
-          </a:xfrm>
-          <a:prstGeom prst="rect">
-            <a:avLst/>
-          </a:prstGeom>
-          <a:noFill/>
-          <a:ln/>
-        </p:spPr>
-        <p:txBody>
-          <a:bodyPr wrap="square" lIns="0" tIns="0" rIns="0" bIns="0" rtlCol="0" anchor="ctr"/>
-          <a:lstStyle/>
-          <a:p>
-            <a:pPr algn="ctr" indent="0" marL="0">
-              <a:buNone/>
-            </a:pPr>
-            <a:r>
-              <a:rPr lang="en-US" sz="1100" b="1" dirty="0">
-                <a:solidFill>
-                  <a:srgbClr val="475569"/>
+            <a:srgbClr val="FFFFFF"/>
+          </a:solidFill>
+          <a:ln w="12700">
+            <a:solidFill>
+              <a:srgbClr val="DB2777"/>
+            </a:solidFill>
+            <a:prstDash val="solid"/>
+          </a:ln>
+        </p:spPr>
+      </p:sp>
+      <p:sp>
+        <p:nvSpPr>
+          <p:cNvPr id="37" name="Text 35"/>
+          <p:cNvSpPr/>
+          <p:nvPr/>
+        </p:nvSpPr>
+        <p:spPr>
+          <a:xfrm>
+            <a:off x="3033522" y="4169664"/>
+            <a:ext cx="685800" cy="384048"/>
+          </a:xfrm>
+          <a:prstGeom prst="rect">
+            <a:avLst/>
+          </a:prstGeom>
+          <a:noFill/>
+          <a:ln/>
+        </p:spPr>
+        <p:txBody>
+          <a:bodyPr wrap="square" lIns="0" tIns="0" rIns="0" bIns="0" rtlCol="0" anchor="ctr"/>
+          <a:lstStyle/>
+          <a:p>
+            <a:pPr algn="ctr" indent="0" marL="0">
+              <a:buNone/>
+            </a:pPr>
+            <a:r>
+              <a:rPr lang="en-US" sz="900" b="1" dirty="0">
+                <a:solidFill>
+                  <a:srgbClr val="9D174D"/>
                 </a:solidFill>
                 <a:latin typeface="Trebuchet MS" pitchFamily="34" charset="0"/>
                 <a:ea typeface="Trebuchet MS" pitchFamily="34" charset="-122"/>
                 <a:cs typeface="Trebuchet MS" pitchFamily="34" charset="-120"/>
               </a:rPr>
-              <a:t>Syllables</a:t>
-            </a:r>
-            <a:endParaRPr lang="en-US" sz="1100" dirty="0"/>
-          </a:p>
-        </p:txBody>
-      </p:sp>
-      <p:sp>
-        <p:nvSpPr>
-          <p:cNvPr id="27" name="Shape 25"/>
-          <p:cNvSpPr/>
-          <p:nvPr/>
-        </p:nvSpPr>
-        <p:spPr>
-          <a:xfrm>
-            <a:off x="1874520" y="3273552"/>
-            <a:ext cx="6903720" cy="658368"/>
+              <a:t>o</a:t>
+            </a:r>
+            <a:endParaRPr lang="en-US" sz="900" dirty="0"/>
+          </a:p>
+        </p:txBody>
+      </p:sp>
+      <p:sp>
+        <p:nvSpPr>
+          <p:cNvPr id="38" name="Shape 36"/>
+          <p:cNvSpPr/>
+          <p:nvPr/>
+        </p:nvSpPr>
+        <p:spPr>
+          <a:xfrm>
+            <a:off x="3942207" y="4169664"/>
+            <a:ext cx="685800" cy="384048"/>
           </a:xfrm>
           <a:prstGeom prst="rect">
             <a:avLst>
-              <a:gd name="adj" fmla="val 8333"/>
+              <a:gd name="adj" fmla="val 9524"/>
             </a:avLst>
           </a:prstGeom>
           <a:solidFill>
-            <a:srgbClr val="CCFBF1"/>
-          </a:solidFill>
-          <a:ln w="12700">
-            <a:solidFill>
-              <a:srgbClr val="0D9488"/>
-            </a:solidFill>
-            <a:prstDash val="solid"/>
-          </a:ln>
-        </p:spPr>
-      </p:sp>
-      <p:sp>
-        <p:nvSpPr>
-          <p:cNvPr id="28" name="Shape 26"/>
-          <p:cNvSpPr/>
-          <p:nvPr/>
-        </p:nvSpPr>
-        <p:spPr>
-          <a:xfrm>
-            <a:off x="2313432" y="3364992"/>
-            <a:ext cx="1645920" cy="475488"/>
-          </a:xfrm>
-          <a:prstGeom prst="rect">
-            <a:avLst>
-              <a:gd name="adj" fmla="val 9615"/>
-            </a:avLst>
-          </a:prstGeom>
-          <a:solidFill>
             <a:srgbClr val="FFFFFF"/>
           </a:solidFill>
           <a:ln w="12700">
             <a:solidFill>
-              <a:srgbClr val="0D9488"/>
-            </a:solidFill>
-            <a:prstDash val="solid"/>
-          </a:ln>
-        </p:spPr>
-      </p:sp>
-      <p:sp>
-        <p:nvSpPr>
-          <p:cNvPr id="29" name="Text 27"/>
-          <p:cNvSpPr/>
-          <p:nvPr/>
-        </p:nvSpPr>
-        <p:spPr>
-          <a:xfrm>
-            <a:off x="2313432" y="3364992"/>
-            <a:ext cx="1645920" cy="475488"/>
-          </a:xfrm>
-          <a:prstGeom prst="rect">
-            <a:avLst/>
-          </a:prstGeom>
-          <a:noFill/>
-          <a:ln/>
-        </p:spPr>
-        <p:txBody>
-          <a:bodyPr wrap="square" lIns="0" tIns="0" rIns="0" bIns="0" rtlCol="0" anchor="ctr"/>
-          <a:lstStyle/>
-          <a:p>
-            <a:pPr algn="ctr" indent="0" marL="0">
-              <a:buNone/>
-            </a:pPr>
-            <a:r>
-              <a:rPr lang="en-US" sz="1400" b="1" dirty="0">
-                <a:solidFill>
-                  <a:srgbClr val="0D9488"/>
+              <a:srgbClr val="DB2777"/>
+            </a:solidFill>
+            <a:prstDash val="solid"/>
+          </a:ln>
+        </p:spPr>
+      </p:sp>
+      <p:sp>
+        <p:nvSpPr>
+          <p:cNvPr id="39" name="Text 37"/>
+          <p:cNvSpPr/>
+          <p:nvPr/>
+        </p:nvSpPr>
+        <p:spPr>
+          <a:xfrm>
+            <a:off x="3942207" y="4169664"/>
+            <a:ext cx="685800" cy="384048"/>
+          </a:xfrm>
+          <a:prstGeom prst="rect">
+            <a:avLst/>
+          </a:prstGeom>
+          <a:noFill/>
+          <a:ln/>
+        </p:spPr>
+        <p:txBody>
+          <a:bodyPr wrap="square" lIns="0" tIns="0" rIns="0" bIns="0" rtlCol="0" anchor="ctr"/>
+          <a:lstStyle/>
+          <a:p>
+            <a:pPr algn="ctr" indent="0" marL="0">
+              <a:buNone/>
+            </a:pPr>
+            <a:r>
+              <a:rPr lang="en-US" sz="900" b="1" dirty="0">
+                <a:solidFill>
+                  <a:srgbClr val="9D174D"/>
                 </a:solidFill>
                 <a:latin typeface="Trebuchet MS" pitchFamily="34" charset="0"/>
                 <a:ea typeface="Trebuchet MS" pitchFamily="34" charset="-122"/>
                 <a:cs typeface="Trebuchet MS" pitchFamily="34" charset="-120"/>
               </a:rPr>
-              <a:t>ex</a:t>
-            </a:r>
-            <a:endParaRPr lang="en-US" sz="1400" dirty="0"/>
-          </a:p>
-        </p:txBody>
-      </p:sp>
-      <p:sp>
-        <p:nvSpPr>
-          <p:cNvPr id="30" name="Text 28"/>
-          <p:cNvSpPr/>
-          <p:nvPr/>
-        </p:nvSpPr>
-        <p:spPr>
-          <a:xfrm>
-            <a:off x="3959352" y="3364992"/>
-            <a:ext cx="411480" cy="475488"/>
-          </a:xfrm>
-          <a:prstGeom prst="rect">
-            <a:avLst/>
-          </a:prstGeom>
-          <a:noFill/>
-          <a:ln/>
-        </p:spPr>
-        <p:txBody>
-          <a:bodyPr wrap="square" lIns="0" tIns="0" rIns="0" bIns="0" rtlCol="0" anchor="ctr"/>
-          <a:lstStyle/>
-          <a:p>
-            <a:pPr algn="ctr" indent="0" marL="0">
-              <a:buNone/>
-            </a:pPr>
-            <a:r>
-              <a:rPr lang="en-US" sz="1600" b="1" dirty="0">
-                <a:solidFill>
-                  <a:srgbClr val="0D9488"/>
+              <a:t>m</a:t>
+            </a:r>
+            <a:endParaRPr lang="en-US" sz="900" dirty="0"/>
+          </a:p>
+        </p:txBody>
+      </p:sp>
+      <p:sp>
+        <p:nvSpPr>
+          <p:cNvPr id="40" name="Shape 38"/>
+          <p:cNvSpPr/>
+          <p:nvPr/>
+        </p:nvSpPr>
+        <p:spPr>
+          <a:xfrm>
+            <a:off x="4850892" y="4169664"/>
+            <a:ext cx="685800" cy="384048"/>
+          </a:xfrm>
+          <a:prstGeom prst="rect">
+            <a:avLst>
+              <a:gd name="adj" fmla="val 9524"/>
+            </a:avLst>
+          </a:prstGeom>
+          <a:solidFill>
+            <a:srgbClr val="FFFFFF"/>
+          </a:solidFill>
+          <a:ln w="12700">
+            <a:solidFill>
+              <a:srgbClr val="DB2777"/>
+            </a:solidFill>
+            <a:prstDash val="solid"/>
+          </a:ln>
+        </p:spPr>
+      </p:sp>
+      <p:sp>
+        <p:nvSpPr>
+          <p:cNvPr id="41" name="Text 39"/>
+          <p:cNvSpPr/>
+          <p:nvPr/>
+        </p:nvSpPr>
+        <p:spPr>
+          <a:xfrm>
+            <a:off x="4850892" y="4169664"/>
+            <a:ext cx="685800" cy="384048"/>
+          </a:xfrm>
+          <a:prstGeom prst="rect">
+            <a:avLst/>
+          </a:prstGeom>
+          <a:noFill/>
+          <a:ln/>
+        </p:spPr>
+        <p:txBody>
+          <a:bodyPr wrap="square" lIns="0" tIns="0" rIns="0" bIns="0" rtlCol="0" anchor="ctr"/>
+          <a:lstStyle/>
+          <a:p>
+            <a:pPr algn="ctr" indent="0" marL="0">
+              <a:buNone/>
+            </a:pPr>
+            <a:r>
+              <a:rPr lang="en-US" sz="900" b="1" dirty="0">
+                <a:solidFill>
+                  <a:srgbClr val="9D174D"/>
                 </a:solidFill>
                 <a:latin typeface="Trebuchet MS" pitchFamily="34" charset="0"/>
                 <a:ea typeface="Trebuchet MS" pitchFamily="34" charset="-122"/>
                 <a:cs typeface="Trebuchet MS" pitchFamily="34" charset="-120"/>
               </a:rPr>
-              <a:t>·</a:t>
-            </a:r>
-            <a:endParaRPr lang="en-US" sz="1600" dirty="0"/>
-          </a:p>
-        </p:txBody>
-      </p:sp>
-      <p:sp>
-        <p:nvSpPr>
-          <p:cNvPr id="31" name="Shape 29"/>
-          <p:cNvSpPr/>
-          <p:nvPr/>
-        </p:nvSpPr>
-        <p:spPr>
-          <a:xfrm>
-            <a:off x="4370832" y="3364992"/>
-            <a:ext cx="1645920" cy="475488"/>
+              <a:t>p</a:t>
+            </a:r>
+            <a:endParaRPr lang="en-US" sz="900" dirty="0"/>
+          </a:p>
+        </p:txBody>
+      </p:sp>
+      <p:sp>
+        <p:nvSpPr>
+          <p:cNvPr id="42" name="Shape 40"/>
+          <p:cNvSpPr/>
+          <p:nvPr/>
+        </p:nvSpPr>
+        <p:spPr>
+          <a:xfrm>
+            <a:off x="5759577" y="4169664"/>
+            <a:ext cx="685800" cy="384048"/>
           </a:xfrm>
           <a:prstGeom prst="rect">
             <a:avLst>
-              <a:gd name="adj" fmla="val 9615"/>
+              <a:gd name="adj" fmla="val 9524"/>
             </a:avLst>
           </a:prstGeom>
           <a:solidFill>
@@ -15525,104 +15363,131 @@
           </a:solidFill>
           <a:ln w="12700">
             <a:solidFill>
-              <a:srgbClr val="0D9488"/>
-            </a:solidFill>
-            <a:prstDash val="solid"/>
-          </a:ln>
-        </p:spPr>
-      </p:sp>
-      <p:sp>
-        <p:nvSpPr>
-          <p:cNvPr id="32" name="Text 30"/>
-          <p:cNvSpPr/>
-          <p:nvPr/>
-        </p:nvSpPr>
-        <p:spPr>
-          <a:xfrm>
-            <a:off x="4370832" y="3364992"/>
-            <a:ext cx="1645920" cy="475488"/>
-          </a:xfrm>
-          <a:prstGeom prst="rect">
-            <a:avLst/>
-          </a:prstGeom>
-          <a:noFill/>
-          <a:ln/>
-        </p:spPr>
-        <p:txBody>
-          <a:bodyPr wrap="square" lIns="0" tIns="0" rIns="0" bIns="0" rtlCol="0" anchor="ctr"/>
-          <a:lstStyle/>
-          <a:p>
-            <a:pPr algn="ctr" indent="0" marL="0">
-              <a:buNone/>
-            </a:pPr>
-            <a:r>
-              <a:rPr lang="en-US" sz="1400" b="1" dirty="0">
-                <a:solidFill>
-                  <a:srgbClr val="0D9488"/>
+              <a:srgbClr val="DB2777"/>
+            </a:solidFill>
+            <a:prstDash val="solid"/>
+          </a:ln>
+        </p:spPr>
+      </p:sp>
+      <p:sp>
+        <p:nvSpPr>
+          <p:cNvPr id="43" name="Text 41"/>
+          <p:cNvSpPr/>
+          <p:nvPr/>
+        </p:nvSpPr>
+        <p:spPr>
+          <a:xfrm>
+            <a:off x="5759577" y="4169664"/>
+            <a:ext cx="685800" cy="384048"/>
+          </a:xfrm>
+          <a:prstGeom prst="rect">
+            <a:avLst/>
+          </a:prstGeom>
+          <a:noFill/>
+          <a:ln/>
+        </p:spPr>
+        <p:txBody>
+          <a:bodyPr wrap="square" lIns="0" tIns="0" rIns="0" bIns="0" rtlCol="0" anchor="ctr"/>
+          <a:lstStyle/>
+          <a:p>
+            <a:pPr algn="ctr" indent="0" marL="0">
+              <a:buNone/>
+            </a:pPr>
+            <a:r>
+              <a:rPr lang="en-US" sz="900" b="1" dirty="0">
+                <a:solidFill>
+                  <a:srgbClr val="9D174D"/>
                 </a:solidFill>
                 <a:latin typeface="Trebuchet MS" pitchFamily="34" charset="0"/>
                 <a:ea typeface="Trebuchet MS" pitchFamily="34" charset="-122"/>
                 <a:cs typeface="Trebuchet MS" pitchFamily="34" charset="-120"/>
               </a:rPr>
-              <a:t>press</a:t>
-            </a:r>
-            <a:endParaRPr lang="en-US" sz="1400" dirty="0"/>
-          </a:p>
-        </p:txBody>
-      </p:sp>
-      <p:sp>
-        <p:nvSpPr>
-          <p:cNvPr id="33" name="Text 31"/>
-          <p:cNvSpPr/>
-          <p:nvPr/>
-        </p:nvSpPr>
-        <p:spPr>
-          <a:xfrm>
-            <a:off x="6016752" y="3364992"/>
-            <a:ext cx="411480" cy="475488"/>
-          </a:xfrm>
-          <a:prstGeom prst="rect">
-            <a:avLst/>
-          </a:prstGeom>
-          <a:noFill/>
-          <a:ln/>
-        </p:spPr>
-        <p:txBody>
-          <a:bodyPr wrap="square" lIns="0" tIns="0" rIns="0" bIns="0" rtlCol="0" anchor="ctr"/>
-          <a:lstStyle/>
-          <a:p>
-            <a:pPr algn="ctr" indent="0" marL="0">
-              <a:buNone/>
-            </a:pPr>
-            <a:r>
-              <a:rPr lang="en-US" sz="1600" b="1" dirty="0">
-                <a:solidFill>
-                  <a:srgbClr val="0D9488"/>
+              <a:t>r</a:t>
+            </a:r>
+            <a:endParaRPr lang="en-US" sz="900" dirty="0"/>
+          </a:p>
+        </p:txBody>
+      </p:sp>
+      <p:sp>
+        <p:nvSpPr>
+          <p:cNvPr id="44" name="Shape 42"/>
+          <p:cNvSpPr/>
+          <p:nvPr/>
+        </p:nvSpPr>
+        <p:spPr>
+          <a:xfrm>
+            <a:off x="6668262" y="4169664"/>
+            <a:ext cx="685800" cy="384048"/>
+          </a:xfrm>
+          <a:prstGeom prst="rect">
+            <a:avLst>
+              <a:gd name="adj" fmla="val 9524"/>
+            </a:avLst>
+          </a:prstGeom>
+          <a:solidFill>
+            <a:srgbClr val="FFFFFF"/>
+          </a:solidFill>
+          <a:ln w="12700">
+            <a:solidFill>
+              <a:srgbClr val="DB2777"/>
+            </a:solidFill>
+            <a:prstDash val="solid"/>
+          </a:ln>
+        </p:spPr>
+      </p:sp>
+      <p:sp>
+        <p:nvSpPr>
+          <p:cNvPr id="45" name="Text 43"/>
+          <p:cNvSpPr/>
+          <p:nvPr/>
+        </p:nvSpPr>
+        <p:spPr>
+          <a:xfrm>
+            <a:off x="6668262" y="4169664"/>
+            <a:ext cx="685800" cy="384048"/>
+          </a:xfrm>
+          <a:prstGeom prst="rect">
+            <a:avLst/>
+          </a:prstGeom>
+          <a:noFill/>
+          <a:ln/>
+        </p:spPr>
+        <p:txBody>
+          <a:bodyPr wrap="square" lIns="0" tIns="0" rIns="0" bIns="0" rtlCol="0" anchor="ctr"/>
+          <a:lstStyle/>
+          <a:p>
+            <a:pPr algn="ctr" indent="0" marL="0">
+              <a:buNone/>
+            </a:pPr>
+            <a:r>
+              <a:rPr lang="en-US" sz="900" b="1" dirty="0">
+                <a:solidFill>
+                  <a:srgbClr val="9D174D"/>
                 </a:solidFill>
                 <a:latin typeface="Trebuchet MS" pitchFamily="34" charset="0"/>
                 <a:ea typeface="Trebuchet MS" pitchFamily="34" charset="-122"/>
                 <a:cs typeface="Trebuchet MS" pitchFamily="34" charset="-120"/>
               </a:rPr>
-              <a:t>·</a:t>
-            </a:r>
-            <a:endParaRPr lang="en-US" sz="1600" dirty="0"/>
-          </a:p>
-        </p:txBody>
-      </p:sp>
-      <p:sp>
-        <p:nvSpPr>
-          <p:cNvPr id="34" name="Shape 32"/>
-          <p:cNvSpPr/>
-          <p:nvPr/>
-        </p:nvSpPr>
-        <p:spPr>
-          <a:xfrm>
-            <a:off x="6428232" y="3364992"/>
-            <a:ext cx="1645920" cy="475488"/>
+              <a:t>e</a:t>
+            </a:r>
+            <a:endParaRPr lang="en-US" sz="900" dirty="0"/>
+          </a:p>
+        </p:txBody>
+      </p:sp>
+      <p:sp>
+        <p:nvSpPr>
+          <p:cNvPr id="46" name="Shape 44"/>
+          <p:cNvSpPr/>
+          <p:nvPr/>
+        </p:nvSpPr>
+        <p:spPr>
+          <a:xfrm>
+            <a:off x="7576947" y="4169664"/>
+            <a:ext cx="685800" cy="384048"/>
           </a:xfrm>
           <a:prstGeom prst="rect">
             <a:avLst>
-              <a:gd name="adj" fmla="val 9615"/>
+              <a:gd name="adj" fmla="val 9524"/>
             </a:avLst>
           </a:prstGeom>
           <a:solidFill>
@@ -15630,667 +15495,46 @@
           </a:solidFill>
           <a:ln w="12700">
             <a:solidFill>
-              <a:srgbClr val="0D9488"/>
-            </a:solidFill>
-            <a:prstDash val="solid"/>
-          </a:ln>
-        </p:spPr>
-      </p:sp>
-      <p:sp>
-        <p:nvSpPr>
-          <p:cNvPr id="35" name="Text 33"/>
-          <p:cNvSpPr/>
-          <p:nvPr/>
-        </p:nvSpPr>
-        <p:spPr>
-          <a:xfrm>
-            <a:off x="6428232" y="3364992"/>
-            <a:ext cx="1645920" cy="475488"/>
-          </a:xfrm>
-          <a:prstGeom prst="rect">
-            <a:avLst/>
-          </a:prstGeom>
-          <a:noFill/>
-          <a:ln/>
-        </p:spPr>
-        <p:txBody>
-          <a:bodyPr wrap="square" lIns="0" tIns="0" rIns="0" bIns="0" rtlCol="0" anchor="ctr"/>
-          <a:lstStyle/>
-          <a:p>
-            <a:pPr algn="ctr" indent="0" marL="0">
-              <a:buNone/>
-            </a:pPr>
-            <a:r>
-              <a:rPr lang="en-US" sz="1400" b="1" dirty="0">
-                <a:solidFill>
-                  <a:srgbClr val="0D9488"/>
+              <a:srgbClr val="DB2777"/>
+            </a:solidFill>
+            <a:prstDash val="solid"/>
+          </a:ln>
+        </p:spPr>
+      </p:sp>
+      <p:sp>
+        <p:nvSpPr>
+          <p:cNvPr id="47" name="Text 45"/>
+          <p:cNvSpPr/>
+          <p:nvPr/>
+        </p:nvSpPr>
+        <p:spPr>
+          <a:xfrm>
+            <a:off x="7576947" y="4169664"/>
+            <a:ext cx="685800" cy="384048"/>
+          </a:xfrm>
+          <a:prstGeom prst="rect">
+            <a:avLst/>
+          </a:prstGeom>
+          <a:noFill/>
+          <a:ln/>
+        </p:spPr>
+        <p:txBody>
+          <a:bodyPr wrap="square" lIns="0" tIns="0" rIns="0" bIns="0" rtlCol="0" anchor="ctr"/>
+          <a:lstStyle/>
+          <a:p>
+            <a:pPr algn="ctr" indent="0" marL="0">
+              <a:buNone/>
+            </a:pPr>
+            <a:r>
+              <a:rPr lang="en-US" sz="900" b="1" dirty="0">
+                <a:solidFill>
+                  <a:srgbClr val="9D174D"/>
                 </a:solidFill>
                 <a:latin typeface="Trebuchet MS" pitchFamily="34" charset="0"/>
                 <a:ea typeface="Trebuchet MS" pitchFamily="34" charset="-122"/>
                 <a:cs typeface="Trebuchet MS" pitchFamily="34" charset="-120"/>
               </a:rPr>
-              <a:t>ive</a:t>
-            </a:r>
-            <a:endParaRPr lang="en-US" sz="1400" dirty="0"/>
-          </a:p>
-        </p:txBody>
-      </p:sp>
-      <p:sp>
-        <p:nvSpPr>
-          <p:cNvPr id="36" name="Shape 34"/>
-          <p:cNvSpPr/>
-          <p:nvPr/>
-        </p:nvSpPr>
-        <p:spPr>
-          <a:xfrm>
-            <a:off x="365760" y="4096512"/>
-            <a:ext cx="1371600" cy="804672"/>
-          </a:xfrm>
-          <a:prstGeom prst="rect">
-            <a:avLst>
-              <a:gd name="adj" fmla="val 6818"/>
-            </a:avLst>
-          </a:prstGeom>
-          <a:solidFill>
-            <a:srgbClr val="E2E8F0"/>
-          </a:solidFill>
-          <a:ln w="12700">
-            <a:solidFill>
-              <a:srgbClr val="E2E8F0"/>
-            </a:solidFill>
-            <a:prstDash val="solid"/>
-          </a:ln>
-        </p:spPr>
-      </p:sp>
-      <p:sp>
-        <p:nvSpPr>
-          <p:cNvPr id="37" name="Text 35"/>
-          <p:cNvSpPr/>
-          <p:nvPr/>
-        </p:nvSpPr>
-        <p:spPr>
-          <a:xfrm>
-            <a:off x="365760" y="4096512"/>
-            <a:ext cx="1371600" cy="804672"/>
-          </a:xfrm>
-          <a:prstGeom prst="rect">
-            <a:avLst/>
-          </a:prstGeom>
-          <a:noFill/>
-          <a:ln/>
-        </p:spPr>
-        <p:txBody>
-          <a:bodyPr wrap="square" lIns="0" tIns="0" rIns="0" bIns="0" rtlCol="0" anchor="ctr"/>
-          <a:lstStyle/>
-          <a:p>
-            <a:pPr algn="ctr" indent="0" marL="0">
-              <a:buNone/>
-            </a:pPr>
-            <a:r>
-              <a:rPr lang="en-US" sz="1100" b="1" dirty="0">
-                <a:solidFill>
-                  <a:srgbClr val="475569"/>
-                </a:solidFill>
-                <a:latin typeface="Trebuchet MS" pitchFamily="34" charset="0"/>
-                <a:ea typeface="Trebuchet MS" pitchFamily="34" charset="-122"/>
-                <a:cs typeface="Trebuchet MS" pitchFamily="34" charset="-120"/>
-              </a:rPr>
-              <a:t>Phonemes</a:t>
-            </a:r>
-            <a:endParaRPr lang="en-US" sz="1100" dirty="0"/>
-          </a:p>
-        </p:txBody>
-      </p:sp>
-      <p:sp>
-        <p:nvSpPr>
-          <p:cNvPr id="38" name="Shape 36"/>
-          <p:cNvSpPr/>
-          <p:nvPr/>
-        </p:nvSpPr>
-        <p:spPr>
-          <a:xfrm>
-            <a:off x="1874520" y="4096512"/>
-            <a:ext cx="6903720" cy="658368"/>
-          </a:xfrm>
-          <a:prstGeom prst="rect">
-            <a:avLst>
-              <a:gd name="adj" fmla="val 8333"/>
-            </a:avLst>
-          </a:prstGeom>
-          <a:solidFill>
-            <a:srgbClr val="FCE7F3"/>
-          </a:solidFill>
-          <a:ln w="12700">
-            <a:solidFill>
-              <a:srgbClr val="DB2777"/>
-            </a:solidFill>
-            <a:prstDash val="solid"/>
-          </a:ln>
-        </p:spPr>
-      </p:sp>
-      <p:sp>
-        <p:nvSpPr>
-          <p:cNvPr id="39" name="Shape 37"/>
-          <p:cNvSpPr/>
-          <p:nvPr/>
-        </p:nvSpPr>
-        <p:spPr>
-          <a:xfrm>
-            <a:off x="2023872" y="4169664"/>
-            <a:ext cx="685800" cy="475488"/>
-          </a:xfrm>
-          <a:prstGeom prst="rect">
-            <a:avLst>
-              <a:gd name="adj" fmla="val 7692"/>
-            </a:avLst>
-          </a:prstGeom>
-          <a:solidFill>
-            <a:srgbClr val="FFFFFF"/>
-          </a:solidFill>
-          <a:ln w="12700">
-            <a:solidFill>
-              <a:srgbClr val="DB2777"/>
-            </a:solidFill>
-            <a:prstDash val="solid"/>
-          </a:ln>
-        </p:spPr>
-      </p:sp>
-      <p:sp>
-        <p:nvSpPr>
-          <p:cNvPr id="40" name="Text 38"/>
-          <p:cNvSpPr/>
-          <p:nvPr/>
-        </p:nvSpPr>
-        <p:spPr>
-          <a:xfrm>
-            <a:off x="2023872" y="4169664"/>
-            <a:ext cx="685800" cy="475488"/>
-          </a:xfrm>
-          <a:prstGeom prst="rect">
-            <a:avLst/>
-          </a:prstGeom>
-          <a:noFill/>
-          <a:ln/>
-        </p:spPr>
-        <p:txBody>
-          <a:bodyPr wrap="square" lIns="0" tIns="0" rIns="0" bIns="0" rtlCol="0" anchor="ctr"/>
-          <a:lstStyle/>
-          <a:p>
-            <a:pPr algn="ctr" indent="0" marL="0">
-              <a:buNone/>
-            </a:pPr>
-            <a:r>
-              <a:rPr lang="en-US" sz="900" b="1" dirty="0">
-                <a:solidFill>
-                  <a:srgbClr val="9D174D"/>
-                </a:solidFill>
-                <a:latin typeface="Trebuchet MS" pitchFamily="34" charset="0"/>
-                <a:ea typeface="Trebuchet MS" pitchFamily="34" charset="-122"/>
-                <a:cs typeface="Trebuchet MS" pitchFamily="34" charset="-120"/>
-              </a:rPr>
-              <a:t>e</a:t>
-            </a:r>
-            <a:endParaRPr lang="en-US" sz="900" dirty="0"/>
-          </a:p>
-        </p:txBody>
-      </p:sp>
-      <p:sp>
-        <p:nvSpPr>
-          <p:cNvPr id="41" name="Shape 39"/>
-          <p:cNvSpPr/>
-          <p:nvPr/>
-        </p:nvSpPr>
-        <p:spPr>
-          <a:xfrm>
-            <a:off x="2831592" y="4169664"/>
-            <a:ext cx="685800" cy="475488"/>
-          </a:xfrm>
-          <a:prstGeom prst="rect">
-            <a:avLst>
-              <a:gd name="adj" fmla="val 7692"/>
-            </a:avLst>
-          </a:prstGeom>
-          <a:solidFill>
-            <a:srgbClr val="FFFFFF"/>
-          </a:solidFill>
-          <a:ln w="12700">
-            <a:solidFill>
-              <a:srgbClr val="DB2777"/>
-            </a:solidFill>
-            <a:prstDash val="solid"/>
-          </a:ln>
-        </p:spPr>
-      </p:sp>
-      <p:sp>
-        <p:nvSpPr>
-          <p:cNvPr id="42" name="Text 40"/>
-          <p:cNvSpPr/>
-          <p:nvPr/>
-        </p:nvSpPr>
-        <p:spPr>
-          <a:xfrm>
-            <a:off x="2831592" y="4169664"/>
-            <a:ext cx="685800" cy="475488"/>
-          </a:xfrm>
-          <a:prstGeom prst="rect">
-            <a:avLst/>
-          </a:prstGeom>
-          <a:noFill/>
-          <a:ln/>
-        </p:spPr>
-        <p:txBody>
-          <a:bodyPr wrap="square" lIns="0" tIns="0" rIns="0" bIns="0" rtlCol="0" anchor="ctr"/>
-          <a:lstStyle/>
-          <a:p>
-            <a:pPr algn="ctr" indent="0" marL="0">
-              <a:buNone/>
-            </a:pPr>
-            <a:r>
-              <a:rPr lang="en-US" sz="900" b="1" dirty="0">
-                <a:solidFill>
-                  <a:srgbClr val="9D174D"/>
-                </a:solidFill>
-                <a:latin typeface="Trebuchet MS" pitchFamily="34" charset="0"/>
-                <a:ea typeface="Trebuchet MS" pitchFamily="34" charset="-122"/>
-                <a:cs typeface="Trebuchet MS" pitchFamily="34" charset="-120"/>
-              </a:rPr>
-              <a:t>x</a:t>
-            </a:r>
-            <a:endParaRPr lang="en-US" sz="900" dirty="0"/>
-          </a:p>
-        </p:txBody>
-      </p:sp>
-      <p:sp>
-        <p:nvSpPr>
-          <p:cNvPr id="43" name="Shape 41"/>
-          <p:cNvSpPr/>
-          <p:nvPr/>
-        </p:nvSpPr>
-        <p:spPr>
-          <a:xfrm>
-            <a:off x="3639312" y="4169664"/>
-            <a:ext cx="685800" cy="475488"/>
-          </a:xfrm>
-          <a:prstGeom prst="rect">
-            <a:avLst>
-              <a:gd name="adj" fmla="val 7692"/>
-            </a:avLst>
-          </a:prstGeom>
-          <a:solidFill>
-            <a:srgbClr val="FFFFFF"/>
-          </a:solidFill>
-          <a:ln w="12700">
-            <a:solidFill>
-              <a:srgbClr val="DB2777"/>
-            </a:solidFill>
-            <a:prstDash val="solid"/>
-          </a:ln>
-        </p:spPr>
-      </p:sp>
-      <p:sp>
-        <p:nvSpPr>
-          <p:cNvPr id="44" name="Text 42"/>
-          <p:cNvSpPr/>
-          <p:nvPr/>
-        </p:nvSpPr>
-        <p:spPr>
-          <a:xfrm>
-            <a:off x="3639312" y="4169664"/>
-            <a:ext cx="685800" cy="475488"/>
-          </a:xfrm>
-          <a:prstGeom prst="rect">
-            <a:avLst/>
-          </a:prstGeom>
-          <a:noFill/>
-          <a:ln/>
-        </p:spPr>
-        <p:txBody>
-          <a:bodyPr wrap="square" lIns="0" tIns="0" rIns="0" bIns="0" rtlCol="0" anchor="ctr"/>
-          <a:lstStyle/>
-          <a:p>
-            <a:pPr algn="ctr" indent="0" marL="0">
-              <a:buNone/>
-            </a:pPr>
-            <a:r>
-              <a:rPr lang="en-US" sz="900" b="1" dirty="0">
-                <a:solidFill>
-                  <a:srgbClr val="9D174D"/>
-                </a:solidFill>
-                <a:latin typeface="Trebuchet MS" pitchFamily="34" charset="0"/>
-                <a:ea typeface="Trebuchet MS" pitchFamily="34" charset="-122"/>
-                <a:cs typeface="Trebuchet MS" pitchFamily="34" charset="-120"/>
-              </a:rPr>
-              <a:t>p</a:t>
-            </a:r>
-            <a:endParaRPr lang="en-US" sz="900" dirty="0"/>
-          </a:p>
-        </p:txBody>
-      </p:sp>
-      <p:sp>
-        <p:nvSpPr>
-          <p:cNvPr id="45" name="Shape 43"/>
-          <p:cNvSpPr/>
-          <p:nvPr/>
-        </p:nvSpPr>
-        <p:spPr>
-          <a:xfrm>
-            <a:off x="4447032" y="4169664"/>
-            <a:ext cx="685800" cy="475488"/>
-          </a:xfrm>
-          <a:prstGeom prst="rect">
-            <a:avLst>
-              <a:gd name="adj" fmla="val 7692"/>
-            </a:avLst>
-          </a:prstGeom>
-          <a:solidFill>
-            <a:srgbClr val="FFFFFF"/>
-          </a:solidFill>
-          <a:ln w="12700">
-            <a:solidFill>
-              <a:srgbClr val="DB2777"/>
-            </a:solidFill>
-            <a:prstDash val="solid"/>
-          </a:ln>
-        </p:spPr>
-      </p:sp>
-      <p:sp>
-        <p:nvSpPr>
-          <p:cNvPr id="46" name="Text 44"/>
-          <p:cNvSpPr/>
-          <p:nvPr/>
-        </p:nvSpPr>
-        <p:spPr>
-          <a:xfrm>
-            <a:off x="4447032" y="4169664"/>
-            <a:ext cx="685800" cy="475488"/>
-          </a:xfrm>
-          <a:prstGeom prst="rect">
-            <a:avLst/>
-          </a:prstGeom>
-          <a:noFill/>
-          <a:ln/>
-        </p:spPr>
-        <p:txBody>
-          <a:bodyPr wrap="square" lIns="0" tIns="0" rIns="0" bIns="0" rtlCol="0" anchor="ctr"/>
-          <a:lstStyle/>
-          <a:p>
-            <a:pPr algn="ctr" indent="0" marL="0">
-              <a:buNone/>
-            </a:pPr>
-            <a:r>
-              <a:rPr lang="en-US" sz="900" b="1" dirty="0">
-                <a:solidFill>
-                  <a:srgbClr val="9D174D"/>
-                </a:solidFill>
-                <a:latin typeface="Trebuchet MS" pitchFamily="34" charset="0"/>
-                <a:ea typeface="Trebuchet MS" pitchFamily="34" charset="-122"/>
-                <a:cs typeface="Trebuchet MS" pitchFamily="34" charset="-120"/>
-              </a:rPr>
-              <a:t>r</a:t>
-            </a:r>
-            <a:endParaRPr lang="en-US" sz="900" dirty="0"/>
-          </a:p>
-        </p:txBody>
-      </p:sp>
-      <p:sp>
-        <p:nvSpPr>
-          <p:cNvPr id="47" name="Shape 45"/>
-          <p:cNvSpPr/>
-          <p:nvPr/>
-        </p:nvSpPr>
-        <p:spPr>
-          <a:xfrm>
-            <a:off x="5254752" y="4169664"/>
-            <a:ext cx="685800" cy="475488"/>
-          </a:xfrm>
-          <a:prstGeom prst="rect">
-            <a:avLst>
-              <a:gd name="adj" fmla="val 7692"/>
-            </a:avLst>
-          </a:prstGeom>
-          <a:solidFill>
-            <a:srgbClr val="FFFFFF"/>
-          </a:solidFill>
-          <a:ln w="12700">
-            <a:solidFill>
-              <a:srgbClr val="DB2777"/>
-            </a:solidFill>
-            <a:prstDash val="solid"/>
-          </a:ln>
-        </p:spPr>
-      </p:sp>
-      <p:sp>
-        <p:nvSpPr>
-          <p:cNvPr id="48" name="Text 46"/>
-          <p:cNvSpPr/>
-          <p:nvPr/>
-        </p:nvSpPr>
-        <p:spPr>
-          <a:xfrm>
-            <a:off x="5254752" y="4169664"/>
-            <a:ext cx="685800" cy="475488"/>
-          </a:xfrm>
-          <a:prstGeom prst="rect">
-            <a:avLst/>
-          </a:prstGeom>
-          <a:noFill/>
-          <a:ln/>
-        </p:spPr>
-        <p:txBody>
-          <a:bodyPr wrap="square" lIns="0" tIns="0" rIns="0" bIns="0" rtlCol="0" anchor="ctr"/>
-          <a:lstStyle/>
-          <a:p>
-            <a:pPr algn="ctr" indent="0" marL="0">
-              <a:buNone/>
-            </a:pPr>
-            <a:r>
-              <a:rPr lang="en-US" sz="900" b="1" dirty="0">
-                <a:solidFill>
-                  <a:srgbClr val="9D174D"/>
-                </a:solidFill>
-                <a:latin typeface="Trebuchet MS" pitchFamily="34" charset="0"/>
-                <a:ea typeface="Trebuchet MS" pitchFamily="34" charset="-122"/>
-                <a:cs typeface="Trebuchet MS" pitchFamily="34" charset="-120"/>
-              </a:rPr>
-              <a:t>e</a:t>
-            </a:r>
-            <a:endParaRPr lang="en-US" sz="900" dirty="0"/>
-          </a:p>
-        </p:txBody>
-      </p:sp>
-      <p:sp>
-        <p:nvSpPr>
-          <p:cNvPr id="49" name="Shape 47"/>
-          <p:cNvSpPr/>
-          <p:nvPr/>
-        </p:nvSpPr>
-        <p:spPr>
-          <a:xfrm>
-            <a:off x="6062472" y="4169664"/>
-            <a:ext cx="685800" cy="475488"/>
-          </a:xfrm>
-          <a:prstGeom prst="rect">
-            <a:avLst>
-              <a:gd name="adj" fmla="val 7692"/>
-            </a:avLst>
-          </a:prstGeom>
-          <a:solidFill>
-            <a:srgbClr val="FFFFFF"/>
-          </a:solidFill>
-          <a:ln w="12700">
-            <a:solidFill>
-              <a:srgbClr val="DB2777"/>
-            </a:solidFill>
-            <a:prstDash val="solid"/>
-          </a:ln>
-        </p:spPr>
-      </p:sp>
-      <p:sp>
-        <p:nvSpPr>
-          <p:cNvPr id="50" name="Text 48"/>
-          <p:cNvSpPr/>
-          <p:nvPr/>
-        </p:nvSpPr>
-        <p:spPr>
-          <a:xfrm>
-            <a:off x="6062472" y="4169664"/>
-            <a:ext cx="685800" cy="475488"/>
-          </a:xfrm>
-          <a:prstGeom prst="rect">
-            <a:avLst/>
-          </a:prstGeom>
-          <a:noFill/>
-          <a:ln/>
-        </p:spPr>
-        <p:txBody>
-          <a:bodyPr wrap="square" lIns="0" tIns="0" rIns="0" bIns="0" rtlCol="0" anchor="ctr"/>
-          <a:lstStyle/>
-          <a:p>
-            <a:pPr algn="ctr" indent="0" marL="0">
-              <a:buNone/>
-            </a:pPr>
-            <a:r>
-              <a:rPr lang="en-US" sz="900" b="1" dirty="0">
-                <a:solidFill>
-                  <a:srgbClr val="9D174D"/>
-                </a:solidFill>
-                <a:latin typeface="Trebuchet MS" pitchFamily="34" charset="0"/>
-                <a:ea typeface="Trebuchet MS" pitchFamily="34" charset="-122"/>
-                <a:cs typeface="Trebuchet MS" pitchFamily="34" charset="-120"/>
-              </a:rPr>
               <a:t>ss</a:t>
-            </a:r>
-            <a:endParaRPr lang="en-US" sz="900" dirty="0"/>
-          </a:p>
-        </p:txBody>
-      </p:sp>
-      <p:sp>
-        <p:nvSpPr>
-          <p:cNvPr id="51" name="Shape 49"/>
-          <p:cNvSpPr/>
-          <p:nvPr/>
-        </p:nvSpPr>
-        <p:spPr>
-          <a:xfrm>
-            <a:off x="6870192" y="4169664"/>
-            <a:ext cx="685800" cy="475488"/>
-          </a:xfrm>
-          <a:prstGeom prst="rect">
-            <a:avLst>
-              <a:gd name="adj" fmla="val 7692"/>
-            </a:avLst>
-          </a:prstGeom>
-          <a:solidFill>
-            <a:srgbClr val="FFFFFF"/>
-          </a:solidFill>
-          <a:ln w="12700">
-            <a:solidFill>
-              <a:srgbClr val="DB2777"/>
-            </a:solidFill>
-            <a:prstDash val="solid"/>
-          </a:ln>
-        </p:spPr>
-      </p:sp>
-      <p:sp>
-        <p:nvSpPr>
-          <p:cNvPr id="52" name="Text 50"/>
-          <p:cNvSpPr/>
-          <p:nvPr/>
-        </p:nvSpPr>
-        <p:spPr>
-          <a:xfrm>
-            <a:off x="6870192" y="4169664"/>
-            <a:ext cx="685800" cy="475488"/>
-          </a:xfrm>
-          <a:prstGeom prst="rect">
-            <a:avLst/>
-          </a:prstGeom>
-          <a:noFill/>
-          <a:ln/>
-        </p:spPr>
-        <p:txBody>
-          <a:bodyPr wrap="square" lIns="0" tIns="0" rIns="0" bIns="0" rtlCol="0" anchor="ctr"/>
-          <a:lstStyle/>
-          <a:p>
-            <a:pPr algn="ctr" indent="0" marL="0">
-              <a:buNone/>
-            </a:pPr>
-            <a:r>
-              <a:rPr lang="en-US" sz="900" b="1" dirty="0">
-                <a:solidFill>
-                  <a:srgbClr val="9D174D"/>
-                </a:solidFill>
-                <a:latin typeface="Trebuchet MS" pitchFamily="34" charset="0"/>
-                <a:ea typeface="Trebuchet MS" pitchFamily="34" charset="-122"/>
-                <a:cs typeface="Trebuchet MS" pitchFamily="34" charset="-120"/>
-              </a:rPr>
-              <a:t>i</a:t>
-            </a:r>
-            <a:endParaRPr lang="en-US" sz="900" dirty="0"/>
-          </a:p>
-        </p:txBody>
-      </p:sp>
-      <p:sp>
-        <p:nvSpPr>
-          <p:cNvPr id="53" name="Shape 51"/>
-          <p:cNvSpPr/>
-          <p:nvPr/>
-        </p:nvSpPr>
-        <p:spPr>
-          <a:xfrm>
-            <a:off x="7677912" y="4169664"/>
-            <a:ext cx="685800" cy="475488"/>
-          </a:xfrm>
-          <a:prstGeom prst="rect">
-            <a:avLst>
-              <a:gd name="adj" fmla="val 7692"/>
-            </a:avLst>
-          </a:prstGeom>
-          <a:solidFill>
-            <a:srgbClr val="FFFFFF"/>
-          </a:solidFill>
-          <a:ln w="12700">
-            <a:solidFill>
-              <a:srgbClr val="DB2777"/>
-            </a:solidFill>
-            <a:prstDash val="solid"/>
-          </a:ln>
-        </p:spPr>
-      </p:sp>
-      <p:sp>
-        <p:nvSpPr>
-          <p:cNvPr id="54" name="Text 52"/>
-          <p:cNvSpPr/>
-          <p:nvPr/>
-        </p:nvSpPr>
-        <p:spPr>
-          <a:xfrm>
-            <a:off x="7677912" y="4169664"/>
-            <a:ext cx="685800" cy="475488"/>
-          </a:xfrm>
-          <a:prstGeom prst="rect">
-            <a:avLst/>
-          </a:prstGeom>
-          <a:noFill/>
-          <a:ln/>
-        </p:spPr>
-        <p:txBody>
-          <a:bodyPr wrap="square" lIns="0" tIns="0" rIns="0" bIns="0" rtlCol="0" anchor="ctr"/>
-          <a:lstStyle/>
-          <a:p>
-            <a:pPr algn="ctr" indent="0" marL="0">
-              <a:buNone/>
-            </a:pPr>
-            <a:r>
-              <a:rPr lang="en-US" sz="900" b="1" dirty="0">
-                <a:solidFill>
-                  <a:srgbClr val="9D174D"/>
-                </a:solidFill>
-                <a:latin typeface="Trebuchet MS" pitchFamily="34" charset="0"/>
-                <a:ea typeface="Trebuchet MS" pitchFamily="34" charset="-122"/>
-                <a:cs typeface="Trebuchet MS" pitchFamily="34" charset="-120"/>
-              </a:rPr>
-              <a:t>ve</a:t>
             </a:r>
             <a:endParaRPr lang="en-US" sz="900" dirty="0"/>
           </a:p>
@@ -17198,7 +16442,7 @@
                 <a:ea typeface="Trebuchet MS" pitchFamily="34" charset="-122"/>
                 <a:cs typeface="Trebuchet MS" pitchFamily="34" charset="-120"/>
               </a:rPr>
-              <a:t>2</a:t>
+              <a:t>0</a:t>
             </a:r>
             <a:pPr algn="ctr" indent="0" marL="0">
               <a:buNone/>
@@ -17212,7 +16456,7 @@
                 <a:ea typeface="Trebuchet MS" pitchFamily="34" charset="-122"/>
                 <a:cs typeface="Trebuchet MS" pitchFamily="34" charset="-120"/>
               </a:rPr>
-              <a:t>  punctuation marks</a:t>
+              <a:t>  punctuation mark</a:t>
             </a:r>
             <a:endParaRPr lang="en-US" sz="2800" dirty="0"/>
           </a:p>
@@ -17616,7 +16860,7 @@
                 <a:ea typeface="Calibri" pitchFamily="34" charset="-122"/>
                 <a:cs typeface="Calibri" pitchFamily="34" charset="-120"/>
               </a:rPr>
-              <a:t>When you </a:t>
+              <a:t>Her </a:t>
             </a:r>
             <a:pPr algn="l" indent="0" marL="0">
               <a:buNone/>
@@ -17633,7 +16877,7 @@
                 <a:ea typeface="Calibri" pitchFamily="34" charset="-122"/>
                 <a:cs typeface="Calibri" pitchFamily="34" charset="-120"/>
               </a:rPr>
-              <a:t>compress</a:t>
+              <a:t>impressive</a:t>
             </a:r>
             <a:pPr algn="l" indent="0" marL="0">
               <a:buNone/>
@@ -17647,7 +16891,7 @@
                 <a:ea typeface="Calibri" pitchFamily="34" charset="-122"/>
                 <a:cs typeface="Calibri" pitchFamily="34" charset="-120"/>
               </a:rPr>
-              <a:t> a file, you can </a:t>
+              <a:t> </a:t>
             </a:r>
             <a:pPr algn="l" indent="0" marL="0">
               <a:buNone/>
@@ -17678,7 +16922,7 @@
                 <a:ea typeface="Calibri" pitchFamily="34" charset="-122"/>
                 <a:cs typeface="Calibri" pitchFamily="34" charset="-120"/>
               </a:rPr>
-              <a:t> your ideas more efficiently, but too much </a:t>
+              <a:t> showed she was deeply </a:t>
             </a:r>
             <a:pPr algn="l" indent="0" marL="0">
               <a:buNone/>
@@ -17695,7 +16939,7 @@
                 <a:ea typeface="Calibri" pitchFamily="34" charset="-122"/>
                 <a:cs typeface="Calibri" pitchFamily="34" charset="-120"/>
               </a:rPr>
-              <a:t>pressure</a:t>
+              <a:t>depressed</a:t>
             </a:r>
             <a:pPr algn="l" indent="0" marL="0">
               <a:buNone/>
@@ -17709,7 +16953,7 @@
                 <a:ea typeface="Calibri" pitchFamily="34" charset="-122"/>
                 <a:cs typeface="Calibri" pitchFamily="34" charset="-120"/>
               </a:rPr>
-              <a:t> on the device may cause problems.</a:t>
+              <a:t> about losing the competition.</a:t>
             </a:r>
             <a:endParaRPr lang="en-US" sz="1800" dirty="0"/>
           </a:p>
@@ -17864,7 +17108,7 @@
                 <a:ea typeface="Trebuchet MS" pitchFamily="34" charset="-122"/>
                 <a:cs typeface="Trebuchet MS" pitchFamily="34" charset="-120"/>
               </a:rPr>
-              <a:t>compress</a:t>
+              <a:t>impressive</a:t>
             </a:r>
             <a:endParaRPr lang="en-US" sz="1400" dirty="0"/>
           </a:p>
@@ -18120,7 +17364,7 @@
                 <a:ea typeface="Trebuchet MS" pitchFamily="34" charset="-122"/>
                 <a:cs typeface="Trebuchet MS" pitchFamily="34" charset="-120"/>
               </a:rPr>
-              <a:t>pressure</a:t>
+              <a:t>depressed</a:t>
             </a:r>
             <a:endParaRPr lang="en-US" sz="1400" dirty="0"/>
           </a:p>
@@ -18590,7 +17834,7 @@
                 <a:ea typeface="Trebuchet MS" pitchFamily="34" charset="-122"/>
                 <a:cs typeface="Trebuchet MS" pitchFamily="34" charset="-120"/>
               </a:rPr>
-              <a:t>compress</a:t>
+              <a:t>impressive</a:t>
             </a:r>
             <a:endParaRPr lang="en-US" sz="2800" dirty="0"/>
           </a:p>
@@ -19417,7 +18661,7 @@
                 <a:ea typeface="Trebuchet MS" pitchFamily="34" charset="-122"/>
                 <a:cs typeface="Trebuchet MS" pitchFamily="34" charset="-120"/>
               </a:rPr>
-              <a:t>compress</a:t>
+              <a:t>impressive</a:t>
             </a:r>
             <a:endParaRPr lang="en-US" sz="2800" dirty="0"/>
           </a:p>
@@ -19497,7 +18741,7 @@
         </p:nvSpPr>
         <p:spPr>
           <a:xfrm>
-            <a:off x="2938272" y="2258568"/>
+            <a:off x="2221992" y="2258568"/>
             <a:ext cx="1828800" cy="292608"/>
           </a:xfrm>
           <a:prstGeom prst="rect">
@@ -19531,7 +18775,7 @@
         </p:nvSpPr>
         <p:spPr>
           <a:xfrm>
-            <a:off x="2938272" y="2258568"/>
+            <a:off x="2221992" y="2258568"/>
             <a:ext cx="1828800" cy="292608"/>
           </a:xfrm>
           <a:prstGeom prst="rect">
@@ -19556,7 +18800,7 @@
                 <a:ea typeface="Trebuchet MS" pitchFamily="34" charset="-122"/>
                 <a:cs typeface="Trebuchet MS" pitchFamily="34" charset="-120"/>
               </a:rPr>
-              <a:t>com</a:t>
+              <a:t>im</a:t>
             </a:r>
             <a:endParaRPr lang="en-US" sz="1300" dirty="0"/>
           </a:p>
@@ -19570,7 +18814,7 @@
         </p:nvSpPr>
         <p:spPr>
           <a:xfrm>
-            <a:off x="2938272" y="2569464"/>
+            <a:off x="2221992" y="2569464"/>
             <a:ext cx="1828800" cy="201168"/>
           </a:xfrm>
           <a:prstGeom prst="rect">
@@ -19595,7 +18839,7 @@
                 <a:ea typeface="Calibri" pitchFamily="34" charset="-122"/>
                 <a:cs typeface="Calibri" pitchFamily="34" charset="-120"/>
               </a:rPr>
-              <a:t>together / with</a:t>
+              <a:t>into</a:t>
             </a:r>
             <a:endParaRPr lang="en-US" sz="850" dirty="0"/>
           </a:p>
@@ -19609,7 +18853,7 @@
         </p:nvSpPr>
         <p:spPr>
           <a:xfrm>
-            <a:off x="5803392" y="2258568"/>
+            <a:off x="4370832" y="2258568"/>
             <a:ext cx="1828800" cy="292608"/>
           </a:xfrm>
           <a:prstGeom prst="rect">
@@ -19643,7 +18887,7 @@
         </p:nvSpPr>
         <p:spPr>
           <a:xfrm>
-            <a:off x="5803392" y="2258568"/>
+            <a:off x="4370832" y="2258568"/>
             <a:ext cx="1828800" cy="292608"/>
           </a:xfrm>
           <a:prstGeom prst="rect">
@@ -19682,7 +18926,7 @@
         </p:nvSpPr>
         <p:spPr>
           <a:xfrm>
-            <a:off x="5803392" y="2569464"/>
+            <a:off x="4370832" y="2569464"/>
             <a:ext cx="1828800" cy="201168"/>
           </a:xfrm>
           <a:prstGeom prst="rect">
@@ -19721,6 +18965,118 @@
         </p:nvSpPr>
         <p:spPr>
           <a:xfrm>
+            <a:off x="6519672" y="2258568"/>
+            <a:ext cx="1828800" cy="292608"/>
+          </a:xfrm>
+          <a:prstGeom prst="rect">
+            <a:avLst>
+              <a:gd name="adj" fmla="val 25000"/>
+            </a:avLst>
+          </a:prstGeom>
+          <a:solidFill>
+            <a:srgbClr val="FCE7F3"/>
+          </a:solidFill>
+          <a:ln w="19050">
+            <a:solidFill>
+              <a:srgbClr val="DB2777"/>
+            </a:solidFill>
+            <a:prstDash val="solid"/>
+          </a:ln>
+          <a:effectLst>
+            <a:outerShdw sx="100000" sy="100000" kx="0" ky="0" algn="bl" rotWithShape="0" blurRad="101600" dist="38100" dir="8100000">
+              <a:srgbClr val="000000">
+                <a:alpha val="12000"/>
+              </a:srgbClr>
+            </a:outerShdw>
+          </a:effectLst>
+        </p:spPr>
+      </p:sp>
+      <p:sp>
+        <p:nvSpPr>
+          <p:cNvPr id="23" name="Text 21"/>
+          <p:cNvSpPr/>
+          <p:nvPr/>
+        </p:nvSpPr>
+        <p:spPr>
+          <a:xfrm>
+            <a:off x="6519672" y="2258568"/>
+            <a:ext cx="1828800" cy="292608"/>
+          </a:xfrm>
+          <a:prstGeom prst="rect">
+            <a:avLst/>
+          </a:prstGeom>
+          <a:noFill/>
+          <a:ln/>
+        </p:spPr>
+        <p:txBody>
+          <a:bodyPr wrap="square" lIns="0" tIns="0" rIns="0" bIns="0" rtlCol="0" anchor="ctr"/>
+          <a:lstStyle/>
+          <a:p>
+            <a:pPr algn="ctr" indent="0" marL="0">
+              <a:buNone/>
+            </a:pPr>
+            <a:r>
+              <a:rPr lang="en-US" sz="1300" b="1" dirty="0">
+                <a:solidFill>
+                  <a:srgbClr val="9D174D"/>
+                </a:solidFill>
+                <a:latin typeface="Trebuchet MS" pitchFamily="34" charset="0"/>
+                <a:ea typeface="Trebuchet MS" pitchFamily="34" charset="-122"/>
+                <a:cs typeface="Trebuchet MS" pitchFamily="34" charset="-120"/>
+              </a:rPr>
+              <a:t>ive</a:t>
+            </a:r>
+            <a:endParaRPr lang="en-US" sz="1300" dirty="0"/>
+          </a:p>
+        </p:txBody>
+      </p:sp>
+      <p:sp>
+        <p:nvSpPr>
+          <p:cNvPr id="24" name="Text 22"/>
+          <p:cNvSpPr/>
+          <p:nvPr/>
+        </p:nvSpPr>
+        <p:spPr>
+          <a:xfrm>
+            <a:off x="6519672" y="2569464"/>
+            <a:ext cx="1828800" cy="201168"/>
+          </a:xfrm>
+          <a:prstGeom prst="rect">
+            <a:avLst/>
+          </a:prstGeom>
+          <a:noFill/>
+          <a:ln/>
+        </p:spPr>
+        <p:txBody>
+          <a:bodyPr wrap="square" lIns="0" tIns="0" rIns="0" bIns="0" rtlCol="0" anchor="t"/>
+          <a:lstStyle/>
+          <a:p>
+            <a:pPr algn="ctr" indent="0" marL="0">
+              <a:buNone/>
+            </a:pPr>
+            <a:r>
+              <a:rPr lang="en-US" sz="850" dirty="0">
+                <a:solidFill>
+                  <a:srgbClr val="475569"/>
+                </a:solidFill>
+                <a:latin typeface="Calibri" pitchFamily="34" charset="0"/>
+                <a:ea typeface="Calibri" pitchFamily="34" charset="-122"/>
+                <a:cs typeface="Calibri" pitchFamily="34" charset="-120"/>
+              </a:rPr>
+              <a:t>having the quality of</a:t>
+            </a:r>
+            <a:endParaRPr lang="en-US" sz="850" dirty="0"/>
+          </a:p>
+        </p:txBody>
+      </p:sp>
+      <p:sp>
+        <p:nvSpPr>
+          <p:cNvPr id="25" name="Shape 23"/>
+          <p:cNvSpPr/>
+          <p:nvPr/>
+        </p:nvSpPr>
+        <p:spPr>
+          <a:xfrm>
             <a:off x="365760" y="3273552"/>
             <a:ext cx="1371600" cy="658368"/>
           </a:xfrm>
@@ -19742,7 +19098,7 @@
       </p:sp>
       <p:sp>
         <p:nvSpPr>
-          <p:cNvPr id="23" name="Text 21"/>
+          <p:cNvPr id="26" name="Text 24"/>
           <p:cNvSpPr/>
           <p:nvPr/>
         </p:nvSpPr>
@@ -19781,7 +19137,7 @@
       </p:sp>
       <p:sp>
         <p:nvSpPr>
-          <p:cNvPr id="24" name="Shape 22"/>
+          <p:cNvPr id="27" name="Shape 25"/>
           <p:cNvSpPr/>
           <p:nvPr/>
         </p:nvSpPr>
@@ -19808,7 +19164,7 @@
       </p:sp>
       <p:sp>
         <p:nvSpPr>
-          <p:cNvPr id="25" name="Text 23"/>
+          <p:cNvPr id="28" name="Text 26"/>
           <p:cNvSpPr/>
           <p:nvPr/>
         </p:nvSpPr>
@@ -19847,7 +19203,7 @@
       </p:sp>
       <p:sp>
         <p:nvSpPr>
-          <p:cNvPr id="26" name="Shape 24"/>
+          <p:cNvPr id="29" name="Shape 27"/>
           <p:cNvSpPr/>
           <p:nvPr/>
         </p:nvSpPr>
@@ -19874,7 +19230,7 @@
       </p:sp>
       <p:sp>
         <p:nvSpPr>
-          <p:cNvPr id="27" name="Text 25"/>
+          <p:cNvPr id="30" name="Text 28"/>
           <p:cNvSpPr/>
           <p:nvPr/>
         </p:nvSpPr>
@@ -19913,7 +19269,7 @@
       </p:sp>
       <p:sp>
         <p:nvSpPr>
-          <p:cNvPr id="28" name="Shape 26"/>
+          <p:cNvPr id="31" name="Shape 29"/>
           <p:cNvSpPr/>
           <p:nvPr/>
         </p:nvSpPr>
@@ -19940,7 +19296,7 @@
       </p:sp>
       <p:sp>
         <p:nvSpPr>
-          <p:cNvPr id="29" name="Text 27"/>
+          <p:cNvPr id="32" name="Text 30"/>
           <p:cNvSpPr/>
           <p:nvPr/>
         </p:nvSpPr>
@@ -20402,7 +19758,7 @@
                 <a:ea typeface="Trebuchet MS" pitchFamily="34" charset="-122"/>
                 <a:cs typeface="Trebuchet MS" pitchFamily="34" charset="-120"/>
               </a:rPr>
-              <a:t>compress</a:t>
+              <a:t>impressive</a:t>
             </a:r>
             <a:endParaRPr lang="en-US" sz="2800" dirty="0"/>
           </a:p>
@@ -20482,7 +19838,7 @@
         </p:nvSpPr>
         <p:spPr>
           <a:xfrm>
-            <a:off x="2938272" y="2258568"/>
+            <a:off x="2221992" y="2258568"/>
             <a:ext cx="1828800" cy="292608"/>
           </a:xfrm>
           <a:prstGeom prst="rect">
@@ -20516,7 +19872,7 @@
         </p:nvSpPr>
         <p:spPr>
           <a:xfrm>
-            <a:off x="2938272" y="2258568"/>
+            <a:off x="2221992" y="2258568"/>
             <a:ext cx="1828800" cy="292608"/>
           </a:xfrm>
           <a:prstGeom prst="rect">
@@ -20541,7 +19897,7 @@
                 <a:ea typeface="Trebuchet MS" pitchFamily="34" charset="-122"/>
                 <a:cs typeface="Trebuchet MS" pitchFamily="34" charset="-120"/>
               </a:rPr>
-              <a:t>com</a:t>
+              <a:t>im</a:t>
             </a:r>
             <a:endParaRPr lang="en-US" sz="1300" dirty="0"/>
           </a:p>
@@ -20555,7 +19911,7 @@
         </p:nvSpPr>
         <p:spPr>
           <a:xfrm>
-            <a:off x="2938272" y="2569464"/>
+            <a:off x="2221992" y="2569464"/>
             <a:ext cx="1828800" cy="201168"/>
           </a:xfrm>
           <a:prstGeom prst="rect">
@@ -20580,7 +19936,7 @@
                 <a:ea typeface="Calibri" pitchFamily="34" charset="-122"/>
                 <a:cs typeface="Calibri" pitchFamily="34" charset="-120"/>
               </a:rPr>
-              <a:t>together / with</a:t>
+              <a:t>into</a:t>
             </a:r>
             <a:endParaRPr lang="en-US" sz="850" dirty="0"/>
           </a:p>
@@ -20594,7 +19950,7 @@
         </p:nvSpPr>
         <p:spPr>
           <a:xfrm>
-            <a:off x="5803392" y="2258568"/>
+            <a:off x="4370832" y="2258568"/>
             <a:ext cx="1828800" cy="292608"/>
           </a:xfrm>
           <a:prstGeom prst="rect">
@@ -20628,7 +19984,7 @@
         </p:nvSpPr>
         <p:spPr>
           <a:xfrm>
-            <a:off x="5803392" y="2258568"/>
+            <a:off x="4370832" y="2258568"/>
             <a:ext cx="1828800" cy="292608"/>
           </a:xfrm>
           <a:prstGeom prst="rect">
@@ -20667,7 +20023,7 @@
         </p:nvSpPr>
         <p:spPr>
           <a:xfrm>
-            <a:off x="5803392" y="2569464"/>
+            <a:off x="4370832" y="2569464"/>
             <a:ext cx="1828800" cy="201168"/>
           </a:xfrm>
           <a:prstGeom prst="rect">
@@ -20706,6 +20062,118 @@
         </p:nvSpPr>
         <p:spPr>
           <a:xfrm>
+            <a:off x="6519672" y="2258568"/>
+            <a:ext cx="1828800" cy="292608"/>
+          </a:xfrm>
+          <a:prstGeom prst="rect">
+            <a:avLst>
+              <a:gd name="adj" fmla="val 25000"/>
+            </a:avLst>
+          </a:prstGeom>
+          <a:solidFill>
+            <a:srgbClr val="FCE7F3"/>
+          </a:solidFill>
+          <a:ln w="19050">
+            <a:solidFill>
+              <a:srgbClr val="DB2777"/>
+            </a:solidFill>
+            <a:prstDash val="solid"/>
+          </a:ln>
+          <a:effectLst>
+            <a:outerShdw sx="100000" sy="100000" kx="0" ky="0" algn="bl" rotWithShape="0" blurRad="101600" dist="38100" dir="8100000">
+              <a:srgbClr val="000000">
+                <a:alpha val="12000"/>
+              </a:srgbClr>
+            </a:outerShdw>
+          </a:effectLst>
+        </p:spPr>
+      </p:sp>
+      <p:sp>
+        <p:nvSpPr>
+          <p:cNvPr id="23" name="Text 21"/>
+          <p:cNvSpPr/>
+          <p:nvPr/>
+        </p:nvSpPr>
+        <p:spPr>
+          <a:xfrm>
+            <a:off x="6519672" y="2258568"/>
+            <a:ext cx="1828800" cy="292608"/>
+          </a:xfrm>
+          <a:prstGeom prst="rect">
+            <a:avLst/>
+          </a:prstGeom>
+          <a:noFill/>
+          <a:ln/>
+        </p:spPr>
+        <p:txBody>
+          <a:bodyPr wrap="square" lIns="0" tIns="0" rIns="0" bIns="0" rtlCol="0" anchor="ctr"/>
+          <a:lstStyle/>
+          <a:p>
+            <a:pPr algn="ctr" indent="0" marL="0">
+              <a:buNone/>
+            </a:pPr>
+            <a:r>
+              <a:rPr lang="en-US" sz="1300" b="1" dirty="0">
+                <a:solidFill>
+                  <a:srgbClr val="9D174D"/>
+                </a:solidFill>
+                <a:latin typeface="Trebuchet MS" pitchFamily="34" charset="0"/>
+                <a:ea typeface="Trebuchet MS" pitchFamily="34" charset="-122"/>
+                <a:cs typeface="Trebuchet MS" pitchFamily="34" charset="-120"/>
+              </a:rPr>
+              <a:t>ive</a:t>
+            </a:r>
+            <a:endParaRPr lang="en-US" sz="1300" dirty="0"/>
+          </a:p>
+        </p:txBody>
+      </p:sp>
+      <p:sp>
+        <p:nvSpPr>
+          <p:cNvPr id="24" name="Text 22"/>
+          <p:cNvSpPr/>
+          <p:nvPr/>
+        </p:nvSpPr>
+        <p:spPr>
+          <a:xfrm>
+            <a:off x="6519672" y="2569464"/>
+            <a:ext cx="1828800" cy="201168"/>
+          </a:xfrm>
+          <a:prstGeom prst="rect">
+            <a:avLst/>
+          </a:prstGeom>
+          <a:noFill/>
+          <a:ln/>
+        </p:spPr>
+        <p:txBody>
+          <a:bodyPr wrap="square" lIns="0" tIns="0" rIns="0" bIns="0" rtlCol="0" anchor="t"/>
+          <a:lstStyle/>
+          <a:p>
+            <a:pPr algn="ctr" indent="0" marL="0">
+              <a:buNone/>
+            </a:pPr>
+            <a:r>
+              <a:rPr lang="en-US" sz="850" dirty="0">
+                <a:solidFill>
+                  <a:srgbClr val="475569"/>
+                </a:solidFill>
+                <a:latin typeface="Calibri" pitchFamily="34" charset="0"/>
+                <a:ea typeface="Calibri" pitchFamily="34" charset="-122"/>
+                <a:cs typeface="Calibri" pitchFamily="34" charset="-120"/>
+              </a:rPr>
+              <a:t>having the quality of</a:t>
+            </a:r>
+            <a:endParaRPr lang="en-US" sz="850" dirty="0"/>
+          </a:p>
+        </p:txBody>
+      </p:sp>
+      <p:sp>
+        <p:nvSpPr>
+          <p:cNvPr id="25" name="Shape 23"/>
+          <p:cNvSpPr/>
+          <p:nvPr/>
+        </p:nvSpPr>
+        <p:spPr>
+          <a:xfrm>
             <a:off x="365760" y="3273552"/>
             <a:ext cx="1371600" cy="658368"/>
           </a:xfrm>
@@ -20727,7 +20195,7 @@
       </p:sp>
       <p:sp>
         <p:nvSpPr>
-          <p:cNvPr id="23" name="Text 21"/>
+          <p:cNvPr id="26" name="Text 24"/>
           <p:cNvSpPr/>
           <p:nvPr/>
         </p:nvSpPr>
@@ -20766,7 +20234,7 @@
       </p:sp>
       <p:sp>
         <p:nvSpPr>
-          <p:cNvPr id="24" name="Shape 22"/>
+          <p:cNvPr id="27" name="Shape 25"/>
           <p:cNvSpPr/>
           <p:nvPr/>
         </p:nvSpPr>
@@ -20793,13 +20261,13 @@
       </p:sp>
       <p:sp>
         <p:nvSpPr>
-          <p:cNvPr id="25" name="Shape 23"/>
-          <p:cNvSpPr/>
-          <p:nvPr/>
-        </p:nvSpPr>
-        <p:spPr>
-          <a:xfrm>
-            <a:off x="2999232" y="3364992"/>
+          <p:cNvPr id="28" name="Shape 26"/>
+          <p:cNvSpPr/>
+          <p:nvPr/>
+        </p:nvSpPr>
+        <p:spPr>
+          <a:xfrm>
+            <a:off x="2313432" y="3364992"/>
             <a:ext cx="1645920" cy="475488"/>
           </a:xfrm>
           <a:prstGeom prst="rect">
@@ -20820,13 +20288,13 @@
       </p:sp>
       <p:sp>
         <p:nvSpPr>
-          <p:cNvPr id="26" name="Text 24"/>
-          <p:cNvSpPr/>
-          <p:nvPr/>
-        </p:nvSpPr>
-        <p:spPr>
-          <a:xfrm>
-            <a:off x="2999232" y="3364992"/>
+          <p:cNvPr id="29" name="Text 27"/>
+          <p:cNvSpPr/>
+          <p:nvPr/>
+        </p:nvSpPr>
+        <p:spPr>
+          <a:xfrm>
+            <a:off x="2313432" y="3364992"/>
             <a:ext cx="1645920" cy="475488"/>
           </a:xfrm>
           <a:prstGeom prst="rect">
@@ -20851,7 +20319,7 @@
                 <a:ea typeface="Trebuchet MS" pitchFamily="34" charset="-122"/>
                 <a:cs typeface="Trebuchet MS" pitchFamily="34" charset="-120"/>
               </a:rPr>
-              <a:t>com</a:t>
+              <a:t>im</a:t>
             </a:r>
             <a:endParaRPr lang="en-US" sz="1400" dirty="0"/>
           </a:p>
@@ -20859,14 +20327,14 @@
       </p:sp>
       <p:sp>
         <p:nvSpPr>
-          <p:cNvPr id="27" name="Text 25"/>
-          <p:cNvSpPr/>
-          <p:nvPr/>
-        </p:nvSpPr>
-        <p:spPr>
-          <a:xfrm>
-            <a:off x="4645152" y="3364992"/>
-            <a:ext cx="1097280" cy="475488"/>
+          <p:cNvPr id="30" name="Text 28"/>
+          <p:cNvSpPr/>
+          <p:nvPr/>
+        </p:nvSpPr>
+        <p:spPr>
+          <a:xfrm>
+            <a:off x="3959352" y="3364992"/>
+            <a:ext cx="411480" cy="475488"/>
           </a:xfrm>
           <a:prstGeom prst="rect">
             <a:avLst/>
@@ -20898,13 +20366,13 @@
       </p:sp>
       <p:sp>
         <p:nvSpPr>
-          <p:cNvPr id="28" name="Shape 26"/>
-          <p:cNvSpPr/>
-          <p:nvPr/>
-        </p:nvSpPr>
-        <p:spPr>
-          <a:xfrm>
-            <a:off x="5742432" y="3364992"/>
+          <p:cNvPr id="31" name="Shape 29"/>
+          <p:cNvSpPr/>
+          <p:nvPr/>
+        </p:nvSpPr>
+        <p:spPr>
+          <a:xfrm>
+            <a:off x="4370832" y="3364992"/>
             <a:ext cx="1645920" cy="475488"/>
           </a:xfrm>
           <a:prstGeom prst="rect">
@@ -20925,13 +20393,13 @@
       </p:sp>
       <p:sp>
         <p:nvSpPr>
-          <p:cNvPr id="29" name="Text 27"/>
-          <p:cNvSpPr/>
-          <p:nvPr/>
-        </p:nvSpPr>
-        <p:spPr>
-          <a:xfrm>
-            <a:off x="5742432" y="3364992"/>
+          <p:cNvPr id="32" name="Text 30"/>
+          <p:cNvSpPr/>
+          <p:nvPr/>
+        </p:nvSpPr>
+        <p:spPr>
+          <a:xfrm>
+            <a:off x="4370832" y="3364992"/>
             <a:ext cx="1645920" cy="475488"/>
           </a:xfrm>
           <a:prstGeom prst="rect">
@@ -20964,7 +20432,112 @@
       </p:sp>
       <p:sp>
         <p:nvSpPr>
-          <p:cNvPr id="30" name="Shape 28"/>
+          <p:cNvPr id="33" name="Text 31"/>
+          <p:cNvSpPr/>
+          <p:nvPr/>
+        </p:nvSpPr>
+        <p:spPr>
+          <a:xfrm>
+            <a:off x="6016752" y="3364992"/>
+            <a:ext cx="411480" cy="475488"/>
+          </a:xfrm>
+          <a:prstGeom prst="rect">
+            <a:avLst/>
+          </a:prstGeom>
+          <a:noFill/>
+          <a:ln/>
+        </p:spPr>
+        <p:txBody>
+          <a:bodyPr wrap="square" lIns="0" tIns="0" rIns="0" bIns="0" rtlCol="0" anchor="ctr"/>
+          <a:lstStyle/>
+          <a:p>
+            <a:pPr algn="ctr" indent="0" marL="0">
+              <a:buNone/>
+            </a:pPr>
+            <a:r>
+              <a:rPr lang="en-US" sz="1600" b="1" dirty="0">
+                <a:solidFill>
+                  <a:srgbClr val="0D9488"/>
+                </a:solidFill>
+                <a:latin typeface="Trebuchet MS" pitchFamily="34" charset="0"/>
+                <a:ea typeface="Trebuchet MS" pitchFamily="34" charset="-122"/>
+                <a:cs typeface="Trebuchet MS" pitchFamily="34" charset="-120"/>
+              </a:rPr>
+              <a:t>·</a:t>
+            </a:r>
+            <a:endParaRPr lang="en-US" sz="1600" dirty="0"/>
+          </a:p>
+        </p:txBody>
+      </p:sp>
+      <p:sp>
+        <p:nvSpPr>
+          <p:cNvPr id="34" name="Shape 32"/>
+          <p:cNvSpPr/>
+          <p:nvPr/>
+        </p:nvSpPr>
+        <p:spPr>
+          <a:xfrm>
+            <a:off x="6428232" y="3364992"/>
+            <a:ext cx="1645920" cy="475488"/>
+          </a:xfrm>
+          <a:prstGeom prst="rect">
+            <a:avLst>
+              <a:gd name="adj" fmla="val 9615"/>
+            </a:avLst>
+          </a:prstGeom>
+          <a:solidFill>
+            <a:srgbClr val="FFFFFF"/>
+          </a:solidFill>
+          <a:ln w="12700">
+            <a:solidFill>
+              <a:srgbClr val="0D9488"/>
+            </a:solidFill>
+            <a:prstDash val="solid"/>
+          </a:ln>
+        </p:spPr>
+      </p:sp>
+      <p:sp>
+        <p:nvSpPr>
+          <p:cNvPr id="35" name="Text 33"/>
+          <p:cNvSpPr/>
+          <p:nvPr/>
+        </p:nvSpPr>
+        <p:spPr>
+          <a:xfrm>
+            <a:off x="6428232" y="3364992"/>
+            <a:ext cx="1645920" cy="475488"/>
+          </a:xfrm>
+          <a:prstGeom prst="rect">
+            <a:avLst/>
+          </a:prstGeom>
+          <a:noFill/>
+          <a:ln/>
+        </p:spPr>
+        <p:txBody>
+          <a:bodyPr wrap="square" lIns="0" tIns="0" rIns="0" bIns="0" rtlCol="0" anchor="ctr"/>
+          <a:lstStyle/>
+          <a:p>
+            <a:pPr algn="ctr" indent="0" marL="0">
+              <a:buNone/>
+            </a:pPr>
+            <a:r>
+              <a:rPr lang="en-US" sz="1400" b="1" dirty="0">
+                <a:solidFill>
+                  <a:srgbClr val="0D9488"/>
+                </a:solidFill>
+                <a:latin typeface="Trebuchet MS" pitchFamily="34" charset="0"/>
+                <a:ea typeface="Trebuchet MS" pitchFamily="34" charset="-122"/>
+                <a:cs typeface="Trebuchet MS" pitchFamily="34" charset="-120"/>
+              </a:rPr>
+              <a:t>ive</a:t>
+            </a:r>
+            <a:endParaRPr lang="en-US" sz="1400" dirty="0"/>
+          </a:p>
+        </p:txBody>
+      </p:sp>
+      <p:sp>
+        <p:nvSpPr>
+          <p:cNvPr id="36" name="Shape 34"/>
           <p:cNvSpPr/>
           <p:nvPr/>
         </p:nvSpPr>
@@ -20991,7 +20564,7 @@
       </p:sp>
       <p:sp>
         <p:nvSpPr>
-          <p:cNvPr id="31" name="Text 29"/>
+          <p:cNvPr id="37" name="Text 35"/>
           <p:cNvSpPr/>
           <p:nvPr/>
         </p:nvSpPr>
@@ -21030,7 +20603,7 @@
       </p:sp>
       <p:sp>
         <p:nvSpPr>
-          <p:cNvPr id="32" name="Shape 30"/>
+          <p:cNvPr id="38" name="Shape 36"/>
           <p:cNvSpPr/>
           <p:nvPr/>
         </p:nvSpPr>
@@ -21057,7 +20630,7 @@
       </p:sp>
       <p:sp>
         <p:nvSpPr>
-          <p:cNvPr id="33" name="Text 31"/>
+          <p:cNvPr id="39" name="Text 37"/>
           <p:cNvSpPr/>
           <p:nvPr/>
         </p:nvSpPr>
@@ -21519,7 +21092,7 @@
                 <a:ea typeface="Trebuchet MS" pitchFamily="34" charset="-122"/>
                 <a:cs typeface="Trebuchet MS" pitchFamily="34" charset="-120"/>
               </a:rPr>
-              <a:t>compress</a:t>
+              <a:t>impressive</a:t>
             </a:r>
             <a:endParaRPr lang="en-US" sz="2800" dirty="0"/>
           </a:p>
@@ -21599,7 +21172,7 @@
         </p:nvSpPr>
         <p:spPr>
           <a:xfrm>
-            <a:off x="2938272" y="2258568"/>
+            <a:off x="2221992" y="2258568"/>
             <a:ext cx="1828800" cy="292608"/>
           </a:xfrm>
           <a:prstGeom prst="rect">
@@ -21633,7 +21206,7 @@
         </p:nvSpPr>
         <p:spPr>
           <a:xfrm>
-            <a:off x="2938272" y="2258568"/>
+            <a:off x="2221992" y="2258568"/>
             <a:ext cx="1828800" cy="292608"/>
           </a:xfrm>
           <a:prstGeom prst="rect">
@@ -21658,7 +21231,7 @@
                 <a:ea typeface="Trebuchet MS" pitchFamily="34" charset="-122"/>
                 <a:cs typeface="Trebuchet MS" pitchFamily="34" charset="-120"/>
               </a:rPr>
-              <a:t>com</a:t>
+              <a:t>im</a:t>
             </a:r>
             <a:endParaRPr lang="en-US" sz="1300" dirty="0"/>
           </a:p>
@@ -21672,7 +21245,7 @@
         </p:nvSpPr>
         <p:spPr>
           <a:xfrm>
-            <a:off x="2938272" y="2569464"/>
+            <a:off x="2221992" y="2569464"/>
             <a:ext cx="1828800" cy="201168"/>
           </a:xfrm>
           <a:prstGeom prst="rect">
@@ -21697,7 +21270,7 @@
                 <a:ea typeface="Calibri" pitchFamily="34" charset="-122"/>
                 <a:cs typeface="Calibri" pitchFamily="34" charset="-120"/>
               </a:rPr>
-              <a:t>together / with</a:t>
+              <a:t>into</a:t>
             </a:r>
             <a:endParaRPr lang="en-US" sz="850" dirty="0"/>
           </a:p>
@@ -21711,7 +21284,7 @@
         </p:nvSpPr>
         <p:spPr>
           <a:xfrm>
-            <a:off x="5803392" y="2258568"/>
+            <a:off x="4370832" y="2258568"/>
             <a:ext cx="1828800" cy="292608"/>
           </a:xfrm>
           <a:prstGeom prst="rect">
@@ -21745,7 +21318,7 @@
         </p:nvSpPr>
         <p:spPr>
           <a:xfrm>
-            <a:off x="5803392" y="2258568"/>
+            <a:off x="4370832" y="2258568"/>
             <a:ext cx="1828800" cy="292608"/>
           </a:xfrm>
           <a:prstGeom prst="rect">
@@ -21784,7 +21357,7 @@
         </p:nvSpPr>
         <p:spPr>
           <a:xfrm>
-            <a:off x="5803392" y="2569464"/>
+            <a:off x="4370832" y="2569464"/>
             <a:ext cx="1828800" cy="201168"/>
           </a:xfrm>
           <a:prstGeom prst="rect">
@@ -21823,6 +21396,118 @@
         </p:nvSpPr>
         <p:spPr>
           <a:xfrm>
+            <a:off x="6519672" y="2258568"/>
+            <a:ext cx="1828800" cy="292608"/>
+          </a:xfrm>
+          <a:prstGeom prst="rect">
+            <a:avLst>
+              <a:gd name="adj" fmla="val 25000"/>
+            </a:avLst>
+          </a:prstGeom>
+          <a:solidFill>
+            <a:srgbClr val="FCE7F3"/>
+          </a:solidFill>
+          <a:ln w="19050">
+            <a:solidFill>
+              <a:srgbClr val="DB2777"/>
+            </a:solidFill>
+            <a:prstDash val="solid"/>
+          </a:ln>
+          <a:effectLst>
+            <a:outerShdw sx="100000" sy="100000" kx="0" ky="0" algn="bl" rotWithShape="0" blurRad="101600" dist="38100" dir="8100000">
+              <a:srgbClr val="000000">
+                <a:alpha val="12000"/>
+              </a:srgbClr>
+            </a:outerShdw>
+          </a:effectLst>
+        </p:spPr>
+      </p:sp>
+      <p:sp>
+        <p:nvSpPr>
+          <p:cNvPr id="23" name="Text 21"/>
+          <p:cNvSpPr/>
+          <p:nvPr/>
+        </p:nvSpPr>
+        <p:spPr>
+          <a:xfrm>
+            <a:off x="6519672" y="2258568"/>
+            <a:ext cx="1828800" cy="292608"/>
+          </a:xfrm>
+          <a:prstGeom prst="rect">
+            <a:avLst/>
+          </a:prstGeom>
+          <a:noFill/>
+          <a:ln/>
+        </p:spPr>
+        <p:txBody>
+          <a:bodyPr wrap="square" lIns="0" tIns="0" rIns="0" bIns="0" rtlCol="0" anchor="ctr"/>
+          <a:lstStyle/>
+          <a:p>
+            <a:pPr algn="ctr" indent="0" marL="0">
+              <a:buNone/>
+            </a:pPr>
+            <a:r>
+              <a:rPr lang="en-US" sz="1300" b="1" dirty="0">
+                <a:solidFill>
+                  <a:srgbClr val="9D174D"/>
+                </a:solidFill>
+                <a:latin typeface="Trebuchet MS" pitchFamily="34" charset="0"/>
+                <a:ea typeface="Trebuchet MS" pitchFamily="34" charset="-122"/>
+                <a:cs typeface="Trebuchet MS" pitchFamily="34" charset="-120"/>
+              </a:rPr>
+              <a:t>ive</a:t>
+            </a:r>
+            <a:endParaRPr lang="en-US" sz="1300" dirty="0"/>
+          </a:p>
+        </p:txBody>
+      </p:sp>
+      <p:sp>
+        <p:nvSpPr>
+          <p:cNvPr id="24" name="Text 22"/>
+          <p:cNvSpPr/>
+          <p:nvPr/>
+        </p:nvSpPr>
+        <p:spPr>
+          <a:xfrm>
+            <a:off x="6519672" y="2569464"/>
+            <a:ext cx="1828800" cy="201168"/>
+          </a:xfrm>
+          <a:prstGeom prst="rect">
+            <a:avLst/>
+          </a:prstGeom>
+          <a:noFill/>
+          <a:ln/>
+        </p:spPr>
+        <p:txBody>
+          <a:bodyPr wrap="square" lIns="0" tIns="0" rIns="0" bIns="0" rtlCol="0" anchor="t"/>
+          <a:lstStyle/>
+          <a:p>
+            <a:pPr algn="ctr" indent="0" marL="0">
+              <a:buNone/>
+            </a:pPr>
+            <a:r>
+              <a:rPr lang="en-US" sz="850" dirty="0">
+                <a:solidFill>
+                  <a:srgbClr val="475569"/>
+                </a:solidFill>
+                <a:latin typeface="Calibri" pitchFamily="34" charset="0"/>
+                <a:ea typeface="Calibri" pitchFamily="34" charset="-122"/>
+                <a:cs typeface="Calibri" pitchFamily="34" charset="-120"/>
+              </a:rPr>
+              <a:t>having the quality of</a:t>
+            </a:r>
+            <a:endParaRPr lang="en-US" sz="850" dirty="0"/>
+          </a:p>
+        </p:txBody>
+      </p:sp>
+      <p:sp>
+        <p:nvSpPr>
+          <p:cNvPr id="25" name="Shape 23"/>
+          <p:cNvSpPr/>
+          <p:nvPr/>
+        </p:nvSpPr>
+        <p:spPr>
+          <a:xfrm>
             <a:off x="365760" y="3273552"/>
             <a:ext cx="1371600" cy="658368"/>
           </a:xfrm>
@@ -21844,7 +21529,7 @@
       </p:sp>
       <p:sp>
         <p:nvSpPr>
-          <p:cNvPr id="23" name="Text 21"/>
+          <p:cNvPr id="26" name="Text 24"/>
           <p:cNvSpPr/>
           <p:nvPr/>
         </p:nvSpPr>
@@ -21883,7 +21568,7 @@
       </p:sp>
       <p:sp>
         <p:nvSpPr>
-          <p:cNvPr id="24" name="Shape 22"/>
+          <p:cNvPr id="27" name="Shape 25"/>
           <p:cNvSpPr/>
           <p:nvPr/>
         </p:nvSpPr>
@@ -21910,13 +21595,13 @@
       </p:sp>
       <p:sp>
         <p:nvSpPr>
-          <p:cNvPr id="25" name="Shape 23"/>
-          <p:cNvSpPr/>
-          <p:nvPr/>
-        </p:nvSpPr>
-        <p:spPr>
-          <a:xfrm>
-            <a:off x="2999232" y="3364992"/>
+          <p:cNvPr id="28" name="Shape 26"/>
+          <p:cNvSpPr/>
+          <p:nvPr/>
+        </p:nvSpPr>
+        <p:spPr>
+          <a:xfrm>
+            <a:off x="2313432" y="3364992"/>
             <a:ext cx="1645920" cy="475488"/>
           </a:xfrm>
           <a:prstGeom prst="rect">
@@ -21937,13 +21622,13 @@
       </p:sp>
       <p:sp>
         <p:nvSpPr>
-          <p:cNvPr id="26" name="Text 24"/>
-          <p:cNvSpPr/>
-          <p:nvPr/>
-        </p:nvSpPr>
-        <p:spPr>
-          <a:xfrm>
-            <a:off x="2999232" y="3364992"/>
+          <p:cNvPr id="29" name="Text 27"/>
+          <p:cNvSpPr/>
+          <p:nvPr/>
+        </p:nvSpPr>
+        <p:spPr>
+          <a:xfrm>
+            <a:off x="2313432" y="3364992"/>
             <a:ext cx="1645920" cy="475488"/>
           </a:xfrm>
           <a:prstGeom prst="rect">
@@ -21968,7 +21653,7 @@
                 <a:ea typeface="Trebuchet MS" pitchFamily="34" charset="-122"/>
                 <a:cs typeface="Trebuchet MS" pitchFamily="34" charset="-120"/>
               </a:rPr>
-              <a:t>com</a:t>
+              <a:t>im</a:t>
             </a:r>
             <a:endParaRPr lang="en-US" sz="1400" dirty="0"/>
           </a:p>
@@ -21976,14 +21661,14 @@
       </p:sp>
       <p:sp>
         <p:nvSpPr>
-          <p:cNvPr id="27" name="Text 25"/>
-          <p:cNvSpPr/>
-          <p:nvPr/>
-        </p:nvSpPr>
-        <p:spPr>
-          <a:xfrm>
-            <a:off x="4645152" y="3364992"/>
-            <a:ext cx="1097280" cy="475488"/>
+          <p:cNvPr id="30" name="Text 28"/>
+          <p:cNvSpPr/>
+          <p:nvPr/>
+        </p:nvSpPr>
+        <p:spPr>
+          <a:xfrm>
+            <a:off x="3959352" y="3364992"/>
+            <a:ext cx="411480" cy="475488"/>
           </a:xfrm>
           <a:prstGeom prst="rect">
             <a:avLst/>
@@ -22015,13 +21700,13 @@
       </p:sp>
       <p:sp>
         <p:nvSpPr>
-          <p:cNvPr id="28" name="Shape 26"/>
-          <p:cNvSpPr/>
-          <p:nvPr/>
-        </p:nvSpPr>
-        <p:spPr>
-          <a:xfrm>
-            <a:off x="5742432" y="3364992"/>
+          <p:cNvPr id="31" name="Shape 29"/>
+          <p:cNvSpPr/>
+          <p:nvPr/>
+        </p:nvSpPr>
+        <p:spPr>
+          <a:xfrm>
+            <a:off x="4370832" y="3364992"/>
             <a:ext cx="1645920" cy="475488"/>
           </a:xfrm>
           <a:prstGeom prst="rect">
@@ -22042,13 +21727,13 @@
       </p:sp>
       <p:sp>
         <p:nvSpPr>
-          <p:cNvPr id="29" name="Text 27"/>
-          <p:cNvSpPr/>
-          <p:nvPr/>
-        </p:nvSpPr>
-        <p:spPr>
-          <a:xfrm>
-            <a:off x="5742432" y="3364992"/>
+          <p:cNvPr id="32" name="Text 30"/>
+          <p:cNvSpPr/>
+          <p:nvPr/>
+        </p:nvSpPr>
+        <p:spPr>
+          <a:xfrm>
+            <a:off x="4370832" y="3364992"/>
             <a:ext cx="1645920" cy="475488"/>
           </a:xfrm>
           <a:prstGeom prst="rect">
@@ -22081,7 +21766,112 @@
       </p:sp>
       <p:sp>
         <p:nvSpPr>
-          <p:cNvPr id="30" name="Shape 28"/>
+          <p:cNvPr id="33" name="Text 31"/>
+          <p:cNvSpPr/>
+          <p:nvPr/>
+        </p:nvSpPr>
+        <p:spPr>
+          <a:xfrm>
+            <a:off x="6016752" y="3364992"/>
+            <a:ext cx="411480" cy="475488"/>
+          </a:xfrm>
+          <a:prstGeom prst="rect">
+            <a:avLst/>
+          </a:prstGeom>
+          <a:noFill/>
+          <a:ln/>
+        </p:spPr>
+        <p:txBody>
+          <a:bodyPr wrap="square" lIns="0" tIns="0" rIns="0" bIns="0" rtlCol="0" anchor="ctr"/>
+          <a:lstStyle/>
+          <a:p>
+            <a:pPr algn="ctr" indent="0" marL="0">
+              <a:buNone/>
+            </a:pPr>
+            <a:r>
+              <a:rPr lang="en-US" sz="1600" b="1" dirty="0">
+                <a:solidFill>
+                  <a:srgbClr val="0D9488"/>
+                </a:solidFill>
+                <a:latin typeface="Trebuchet MS" pitchFamily="34" charset="0"/>
+                <a:ea typeface="Trebuchet MS" pitchFamily="34" charset="-122"/>
+                <a:cs typeface="Trebuchet MS" pitchFamily="34" charset="-120"/>
+              </a:rPr>
+              <a:t>·</a:t>
+            </a:r>
+            <a:endParaRPr lang="en-US" sz="1600" dirty="0"/>
+          </a:p>
+        </p:txBody>
+      </p:sp>
+      <p:sp>
+        <p:nvSpPr>
+          <p:cNvPr id="34" name="Shape 32"/>
+          <p:cNvSpPr/>
+          <p:nvPr/>
+        </p:nvSpPr>
+        <p:spPr>
+          <a:xfrm>
+            <a:off x="6428232" y="3364992"/>
+            <a:ext cx="1645920" cy="475488"/>
+          </a:xfrm>
+          <a:prstGeom prst="rect">
+            <a:avLst>
+              <a:gd name="adj" fmla="val 9615"/>
+            </a:avLst>
+          </a:prstGeom>
+          <a:solidFill>
+            <a:srgbClr val="FFFFFF"/>
+          </a:solidFill>
+          <a:ln w="12700">
+            <a:solidFill>
+              <a:srgbClr val="0D9488"/>
+            </a:solidFill>
+            <a:prstDash val="solid"/>
+          </a:ln>
+        </p:spPr>
+      </p:sp>
+      <p:sp>
+        <p:nvSpPr>
+          <p:cNvPr id="35" name="Text 33"/>
+          <p:cNvSpPr/>
+          <p:nvPr/>
+        </p:nvSpPr>
+        <p:spPr>
+          <a:xfrm>
+            <a:off x="6428232" y="3364992"/>
+            <a:ext cx="1645920" cy="475488"/>
+          </a:xfrm>
+          <a:prstGeom prst="rect">
+            <a:avLst/>
+          </a:prstGeom>
+          <a:noFill/>
+          <a:ln/>
+        </p:spPr>
+        <p:txBody>
+          <a:bodyPr wrap="square" lIns="0" tIns="0" rIns="0" bIns="0" rtlCol="0" anchor="ctr"/>
+          <a:lstStyle/>
+          <a:p>
+            <a:pPr algn="ctr" indent="0" marL="0">
+              <a:buNone/>
+            </a:pPr>
+            <a:r>
+              <a:rPr lang="en-US" sz="1400" b="1" dirty="0">
+                <a:solidFill>
+                  <a:srgbClr val="0D9488"/>
+                </a:solidFill>
+                <a:latin typeface="Trebuchet MS" pitchFamily="34" charset="0"/>
+                <a:ea typeface="Trebuchet MS" pitchFamily="34" charset="-122"/>
+                <a:cs typeface="Trebuchet MS" pitchFamily="34" charset="-120"/>
+              </a:rPr>
+              <a:t>ive</a:t>
+            </a:r>
+            <a:endParaRPr lang="en-US" sz="1400" dirty="0"/>
+          </a:p>
+        </p:txBody>
+      </p:sp>
+      <p:sp>
+        <p:nvSpPr>
+          <p:cNvPr id="36" name="Shape 34"/>
           <p:cNvSpPr/>
           <p:nvPr/>
         </p:nvSpPr>
@@ -22108,7 +21898,7 @@
       </p:sp>
       <p:sp>
         <p:nvSpPr>
-          <p:cNvPr id="31" name="Text 29"/>
+          <p:cNvPr id="37" name="Text 35"/>
           <p:cNvSpPr/>
           <p:nvPr/>
         </p:nvSpPr>
@@ -22147,18 +21937,18 @@
       </p:sp>
       <p:sp>
         <p:nvSpPr>
-          <p:cNvPr id="32" name="Shape 30"/>
+          <p:cNvPr id="38" name="Shape 36"/>
           <p:cNvSpPr/>
           <p:nvPr/>
         </p:nvSpPr>
         <p:spPr>
           <a:xfrm>
             <a:off x="1874520" y="4096512"/>
-            <a:ext cx="6903720" cy="804672"/>
+            <a:ext cx="6903720" cy="658368"/>
           </a:xfrm>
           <a:prstGeom prst="rect">
             <a:avLst>
-              <a:gd name="adj" fmla="val 6818"/>
+              <a:gd name="adj" fmla="val 8333"/>
             </a:avLst>
           </a:prstGeom>
           <a:solidFill>
@@ -22174,18 +21964,18 @@
       </p:sp>
       <p:sp>
         <p:nvSpPr>
-          <p:cNvPr id="33" name="Shape 31"/>
-          <p:cNvSpPr/>
-          <p:nvPr/>
-        </p:nvSpPr>
-        <p:spPr>
-          <a:xfrm>
-            <a:off x="2124837" y="4169664"/>
-            <a:ext cx="685800" cy="384048"/>
+          <p:cNvPr id="39" name="Shape 37"/>
+          <p:cNvSpPr/>
+          <p:nvPr/>
+        </p:nvSpPr>
+        <p:spPr>
+          <a:xfrm>
+            <a:off x="2023872" y="4169664"/>
+            <a:ext cx="685800" cy="475488"/>
           </a:xfrm>
           <a:prstGeom prst="rect">
             <a:avLst>
-              <a:gd name="adj" fmla="val 9524"/>
+              <a:gd name="adj" fmla="val 7692"/>
             </a:avLst>
           </a:prstGeom>
           <a:solidFill>
@@ -22201,14 +21991,14 @@
       </p:sp>
       <p:sp>
         <p:nvSpPr>
-          <p:cNvPr id="34" name="Text 32"/>
-          <p:cNvSpPr/>
-          <p:nvPr/>
-        </p:nvSpPr>
-        <p:spPr>
-          <a:xfrm>
-            <a:off x="2124837" y="4169664"/>
-            <a:ext cx="685800" cy="384048"/>
+          <p:cNvPr id="40" name="Text 38"/>
+          <p:cNvSpPr/>
+          <p:nvPr/>
+        </p:nvSpPr>
+        <p:spPr>
+          <a:xfrm>
+            <a:off x="2023872" y="4169664"/>
+            <a:ext cx="685800" cy="475488"/>
           </a:xfrm>
           <a:prstGeom prst="rect">
             <a:avLst/>
@@ -22232,7 +22022,7 @@
                 <a:ea typeface="Trebuchet MS" pitchFamily="34" charset="-122"/>
                 <a:cs typeface="Trebuchet MS" pitchFamily="34" charset="-120"/>
               </a:rPr>
-              <a:t>c</a:t>
+              <a:t>i</a:t>
             </a:r>
             <a:endParaRPr lang="en-US" sz="900" dirty="0"/>
           </a:p>
@@ -22240,57 +22030,18 @@
       </p:sp>
       <p:sp>
         <p:nvSpPr>
-          <p:cNvPr id="35" name="Text 33"/>
-          <p:cNvSpPr/>
-          <p:nvPr/>
-        </p:nvSpPr>
-        <p:spPr>
-          <a:xfrm>
-            <a:off x="2124837" y="4572000"/>
-            <a:ext cx="685800" cy="219456"/>
-          </a:xfrm>
-          <a:prstGeom prst="rect">
-            <a:avLst/>
-          </a:prstGeom>
-          <a:noFill/>
-          <a:ln/>
-        </p:spPr>
-        <p:txBody>
-          <a:bodyPr wrap="square" lIns="0" tIns="0" rIns="0" bIns="0" rtlCol="0" anchor="t"/>
-          <a:lstStyle/>
-          <a:p>
-            <a:pPr algn="ctr" indent="0" marL="0">
-              <a:buNone/>
-            </a:pPr>
-            <a:r>
-              <a:rPr lang="en-US" sz="750" i="1" dirty="0">
-                <a:solidFill>
-                  <a:srgbClr val="94A3B8"/>
-                </a:solidFill>
-                <a:latin typeface="Calibri" pitchFamily="34" charset="0"/>
-                <a:ea typeface="Calibri" pitchFamily="34" charset="-122"/>
-                <a:cs typeface="Calibri" pitchFamily="34" charset="-120"/>
-              </a:rPr>
-              <a:t>/k/</a:t>
-            </a:r>
-            <a:endParaRPr lang="en-US" sz="750" dirty="0"/>
-          </a:p>
-        </p:txBody>
-      </p:sp>
-      <p:sp>
-        <p:nvSpPr>
-          <p:cNvPr id="36" name="Shape 34"/>
-          <p:cNvSpPr/>
-          <p:nvPr/>
-        </p:nvSpPr>
-        <p:spPr>
-          <a:xfrm>
-            <a:off x="3033522" y="4169664"/>
-            <a:ext cx="685800" cy="384048"/>
+          <p:cNvPr id="41" name="Shape 39"/>
+          <p:cNvSpPr/>
+          <p:nvPr/>
+        </p:nvSpPr>
+        <p:spPr>
+          <a:xfrm>
+            <a:off x="2831592" y="4169664"/>
+            <a:ext cx="685800" cy="475488"/>
           </a:xfrm>
           <a:prstGeom prst="rect">
             <a:avLst>
-              <a:gd name="adj" fmla="val 9524"/>
+              <a:gd name="adj" fmla="val 7692"/>
             </a:avLst>
           </a:prstGeom>
           <a:solidFill>
@@ -22306,14 +22057,14 @@
       </p:sp>
       <p:sp>
         <p:nvSpPr>
-          <p:cNvPr id="37" name="Text 35"/>
-          <p:cNvSpPr/>
-          <p:nvPr/>
-        </p:nvSpPr>
-        <p:spPr>
-          <a:xfrm>
-            <a:off x="3033522" y="4169664"/>
-            <a:ext cx="685800" cy="384048"/>
+          <p:cNvPr id="42" name="Text 40"/>
+          <p:cNvSpPr/>
+          <p:nvPr/>
+        </p:nvSpPr>
+        <p:spPr>
+          <a:xfrm>
+            <a:off x="2831592" y="4169664"/>
+            <a:ext cx="685800" cy="475488"/>
           </a:xfrm>
           <a:prstGeom prst="rect">
             <a:avLst/>
@@ -22337,7 +22088,7 @@
                 <a:ea typeface="Trebuchet MS" pitchFamily="34" charset="-122"/>
                 <a:cs typeface="Trebuchet MS" pitchFamily="34" charset="-120"/>
               </a:rPr>
-              <a:t>o</a:t>
+              <a:t>m</a:t>
             </a:r>
             <a:endParaRPr lang="en-US" sz="900" dirty="0"/>
           </a:p>
@@ -22345,18 +22096,18 @@
       </p:sp>
       <p:sp>
         <p:nvSpPr>
-          <p:cNvPr id="38" name="Shape 36"/>
-          <p:cNvSpPr/>
-          <p:nvPr/>
-        </p:nvSpPr>
-        <p:spPr>
-          <a:xfrm>
-            <a:off x="3942207" y="4169664"/>
-            <a:ext cx="685800" cy="384048"/>
+          <p:cNvPr id="43" name="Shape 41"/>
+          <p:cNvSpPr/>
+          <p:nvPr/>
+        </p:nvSpPr>
+        <p:spPr>
+          <a:xfrm>
+            <a:off x="3639312" y="4169664"/>
+            <a:ext cx="685800" cy="475488"/>
           </a:xfrm>
           <a:prstGeom prst="rect">
             <a:avLst>
-              <a:gd name="adj" fmla="val 9524"/>
+              <a:gd name="adj" fmla="val 7692"/>
             </a:avLst>
           </a:prstGeom>
           <a:solidFill>
@@ -22372,14 +22123,14 @@
       </p:sp>
       <p:sp>
         <p:nvSpPr>
-          <p:cNvPr id="39" name="Text 37"/>
-          <p:cNvSpPr/>
-          <p:nvPr/>
-        </p:nvSpPr>
-        <p:spPr>
-          <a:xfrm>
-            <a:off x="3942207" y="4169664"/>
-            <a:ext cx="685800" cy="384048"/>
+          <p:cNvPr id="44" name="Text 42"/>
+          <p:cNvSpPr/>
+          <p:nvPr/>
+        </p:nvSpPr>
+        <p:spPr>
+          <a:xfrm>
+            <a:off x="3639312" y="4169664"/>
+            <a:ext cx="685800" cy="475488"/>
           </a:xfrm>
           <a:prstGeom prst="rect">
             <a:avLst/>
@@ -22403,7 +22154,7 @@
                 <a:ea typeface="Trebuchet MS" pitchFamily="34" charset="-122"/>
                 <a:cs typeface="Trebuchet MS" pitchFamily="34" charset="-120"/>
               </a:rPr>
-              <a:t>m</a:t>
+              <a:t>p</a:t>
             </a:r>
             <a:endParaRPr lang="en-US" sz="900" dirty="0"/>
           </a:p>
@@ -22411,18 +22162,18 @@
       </p:sp>
       <p:sp>
         <p:nvSpPr>
-          <p:cNvPr id="40" name="Shape 38"/>
-          <p:cNvSpPr/>
-          <p:nvPr/>
-        </p:nvSpPr>
-        <p:spPr>
-          <a:xfrm>
-            <a:off x="4850892" y="4169664"/>
-            <a:ext cx="685800" cy="384048"/>
+          <p:cNvPr id="45" name="Shape 43"/>
+          <p:cNvSpPr/>
+          <p:nvPr/>
+        </p:nvSpPr>
+        <p:spPr>
+          <a:xfrm>
+            <a:off x="4447032" y="4169664"/>
+            <a:ext cx="685800" cy="475488"/>
           </a:xfrm>
           <a:prstGeom prst="rect">
             <a:avLst>
-              <a:gd name="adj" fmla="val 9524"/>
+              <a:gd name="adj" fmla="val 7692"/>
             </a:avLst>
           </a:prstGeom>
           <a:solidFill>
@@ -22438,14 +22189,14 @@
       </p:sp>
       <p:sp>
         <p:nvSpPr>
-          <p:cNvPr id="41" name="Text 39"/>
-          <p:cNvSpPr/>
-          <p:nvPr/>
-        </p:nvSpPr>
-        <p:spPr>
-          <a:xfrm>
-            <a:off x="4850892" y="4169664"/>
-            <a:ext cx="685800" cy="384048"/>
+          <p:cNvPr id="46" name="Text 44"/>
+          <p:cNvSpPr/>
+          <p:nvPr/>
+        </p:nvSpPr>
+        <p:spPr>
+          <a:xfrm>
+            <a:off x="4447032" y="4169664"/>
+            <a:ext cx="685800" cy="475488"/>
           </a:xfrm>
           <a:prstGeom prst="rect">
             <a:avLst/>
@@ -22469,7 +22220,7 @@
                 <a:ea typeface="Trebuchet MS" pitchFamily="34" charset="-122"/>
                 <a:cs typeface="Trebuchet MS" pitchFamily="34" charset="-120"/>
               </a:rPr>
-              <a:t>p</a:t>
+              <a:t>r</a:t>
             </a:r>
             <a:endParaRPr lang="en-US" sz="900" dirty="0"/>
           </a:p>
@@ -22477,18 +22228,18 @@
       </p:sp>
       <p:sp>
         <p:nvSpPr>
-          <p:cNvPr id="42" name="Shape 40"/>
-          <p:cNvSpPr/>
-          <p:nvPr/>
-        </p:nvSpPr>
-        <p:spPr>
-          <a:xfrm>
-            <a:off x="5759577" y="4169664"/>
-            <a:ext cx="685800" cy="384048"/>
+          <p:cNvPr id="47" name="Shape 45"/>
+          <p:cNvSpPr/>
+          <p:nvPr/>
+        </p:nvSpPr>
+        <p:spPr>
+          <a:xfrm>
+            <a:off x="5254752" y="4169664"/>
+            <a:ext cx="685800" cy="475488"/>
           </a:xfrm>
           <a:prstGeom prst="rect">
             <a:avLst>
-              <a:gd name="adj" fmla="val 9524"/>
+              <a:gd name="adj" fmla="val 7692"/>
             </a:avLst>
           </a:prstGeom>
           <a:solidFill>
@@ -22504,14 +22255,14 @@
       </p:sp>
       <p:sp>
         <p:nvSpPr>
-          <p:cNvPr id="43" name="Text 41"/>
-          <p:cNvSpPr/>
-          <p:nvPr/>
-        </p:nvSpPr>
-        <p:spPr>
-          <a:xfrm>
-            <a:off x="5759577" y="4169664"/>
-            <a:ext cx="685800" cy="384048"/>
+          <p:cNvPr id="48" name="Text 46"/>
+          <p:cNvSpPr/>
+          <p:nvPr/>
+        </p:nvSpPr>
+        <p:spPr>
+          <a:xfrm>
+            <a:off x="5254752" y="4169664"/>
+            <a:ext cx="685800" cy="475488"/>
           </a:xfrm>
           <a:prstGeom prst="rect">
             <a:avLst/>
@@ -22535,7 +22286,7 @@
                 <a:ea typeface="Trebuchet MS" pitchFamily="34" charset="-122"/>
                 <a:cs typeface="Trebuchet MS" pitchFamily="34" charset="-120"/>
               </a:rPr>
-              <a:t>r</a:t>
+              <a:t>e</a:t>
             </a:r>
             <a:endParaRPr lang="en-US" sz="900" dirty="0"/>
           </a:p>
@@ -22543,18 +22294,18 @@
       </p:sp>
       <p:sp>
         <p:nvSpPr>
-          <p:cNvPr id="44" name="Shape 42"/>
-          <p:cNvSpPr/>
-          <p:nvPr/>
-        </p:nvSpPr>
-        <p:spPr>
-          <a:xfrm>
-            <a:off x="6668262" y="4169664"/>
-            <a:ext cx="685800" cy="384048"/>
+          <p:cNvPr id="49" name="Shape 47"/>
+          <p:cNvSpPr/>
+          <p:nvPr/>
+        </p:nvSpPr>
+        <p:spPr>
+          <a:xfrm>
+            <a:off x="6062472" y="4169664"/>
+            <a:ext cx="685800" cy="475488"/>
           </a:xfrm>
           <a:prstGeom prst="rect">
             <a:avLst>
-              <a:gd name="adj" fmla="val 9524"/>
+              <a:gd name="adj" fmla="val 7692"/>
             </a:avLst>
           </a:prstGeom>
           <a:solidFill>
@@ -22570,14 +22321,14 @@
       </p:sp>
       <p:sp>
         <p:nvSpPr>
-          <p:cNvPr id="45" name="Text 43"/>
-          <p:cNvSpPr/>
-          <p:nvPr/>
-        </p:nvSpPr>
-        <p:spPr>
-          <a:xfrm>
-            <a:off x="6668262" y="4169664"/>
-            <a:ext cx="685800" cy="384048"/>
+          <p:cNvPr id="50" name="Text 48"/>
+          <p:cNvSpPr/>
+          <p:nvPr/>
+        </p:nvSpPr>
+        <p:spPr>
+          <a:xfrm>
+            <a:off x="6062472" y="4169664"/>
+            <a:ext cx="685800" cy="475488"/>
           </a:xfrm>
           <a:prstGeom prst="rect">
             <a:avLst/>
@@ -22601,7 +22352,7 @@
                 <a:ea typeface="Trebuchet MS" pitchFamily="34" charset="-122"/>
                 <a:cs typeface="Trebuchet MS" pitchFamily="34" charset="-120"/>
               </a:rPr>
-              <a:t>e</a:t>
+              <a:t>ss</a:t>
             </a:r>
             <a:endParaRPr lang="en-US" sz="900" dirty="0"/>
           </a:p>
@@ -22609,18 +22360,18 @@
       </p:sp>
       <p:sp>
         <p:nvSpPr>
-          <p:cNvPr id="46" name="Shape 44"/>
-          <p:cNvSpPr/>
-          <p:nvPr/>
-        </p:nvSpPr>
-        <p:spPr>
-          <a:xfrm>
-            <a:off x="7576947" y="4169664"/>
-            <a:ext cx="685800" cy="384048"/>
+          <p:cNvPr id="51" name="Shape 49"/>
+          <p:cNvSpPr/>
+          <p:nvPr/>
+        </p:nvSpPr>
+        <p:spPr>
+          <a:xfrm>
+            <a:off x="6870192" y="4169664"/>
+            <a:ext cx="685800" cy="475488"/>
           </a:xfrm>
           <a:prstGeom prst="rect">
             <a:avLst>
-              <a:gd name="adj" fmla="val 9524"/>
+              <a:gd name="adj" fmla="val 7692"/>
             </a:avLst>
           </a:prstGeom>
           <a:solidFill>
@@ -22636,14 +22387,14 @@
       </p:sp>
       <p:sp>
         <p:nvSpPr>
-          <p:cNvPr id="47" name="Text 45"/>
-          <p:cNvSpPr/>
-          <p:nvPr/>
-        </p:nvSpPr>
-        <p:spPr>
-          <a:xfrm>
-            <a:off x="7576947" y="4169664"/>
-            <a:ext cx="685800" cy="384048"/>
+          <p:cNvPr id="52" name="Text 50"/>
+          <p:cNvSpPr/>
+          <p:nvPr/>
+        </p:nvSpPr>
+        <p:spPr>
+          <a:xfrm>
+            <a:off x="6870192" y="4169664"/>
+            <a:ext cx="685800" cy="475488"/>
           </a:xfrm>
           <a:prstGeom prst="rect">
             <a:avLst/>
@@ -22667,7 +22418,73 @@
                 <a:ea typeface="Trebuchet MS" pitchFamily="34" charset="-122"/>
                 <a:cs typeface="Trebuchet MS" pitchFamily="34" charset="-120"/>
               </a:rPr>
-              <a:t>ss</a:t>
+              <a:t>i</a:t>
+            </a:r>
+            <a:endParaRPr lang="en-US" sz="900" dirty="0"/>
+          </a:p>
+        </p:txBody>
+      </p:sp>
+      <p:sp>
+        <p:nvSpPr>
+          <p:cNvPr id="53" name="Shape 51"/>
+          <p:cNvSpPr/>
+          <p:nvPr/>
+        </p:nvSpPr>
+        <p:spPr>
+          <a:xfrm>
+            <a:off x="7677912" y="4169664"/>
+            <a:ext cx="685800" cy="475488"/>
+          </a:xfrm>
+          <a:prstGeom prst="rect">
+            <a:avLst>
+              <a:gd name="adj" fmla="val 7692"/>
+            </a:avLst>
+          </a:prstGeom>
+          <a:solidFill>
+            <a:srgbClr val="FFFFFF"/>
+          </a:solidFill>
+          <a:ln w="12700">
+            <a:solidFill>
+              <a:srgbClr val="DB2777"/>
+            </a:solidFill>
+            <a:prstDash val="solid"/>
+          </a:ln>
+        </p:spPr>
+      </p:sp>
+      <p:sp>
+        <p:nvSpPr>
+          <p:cNvPr id="54" name="Text 52"/>
+          <p:cNvSpPr/>
+          <p:nvPr/>
+        </p:nvSpPr>
+        <p:spPr>
+          <a:xfrm>
+            <a:off x="7677912" y="4169664"/>
+            <a:ext cx="685800" cy="475488"/>
+          </a:xfrm>
+          <a:prstGeom prst="rect">
+            <a:avLst/>
+          </a:prstGeom>
+          <a:noFill/>
+          <a:ln/>
+        </p:spPr>
+        <p:txBody>
+          <a:bodyPr wrap="square" lIns="0" tIns="0" rIns="0" bIns="0" rtlCol="0" anchor="ctr"/>
+          <a:lstStyle/>
+          <a:p>
+            <a:pPr algn="ctr" indent="0" marL="0">
+              <a:buNone/>
+            </a:pPr>
+            <a:r>
+              <a:rPr lang="en-US" sz="900" b="1" dirty="0">
+                <a:solidFill>
+                  <a:srgbClr val="9D174D"/>
+                </a:solidFill>
+                <a:latin typeface="Trebuchet MS" pitchFamily="34" charset="0"/>
+                <a:ea typeface="Trebuchet MS" pitchFamily="34" charset="-122"/>
+                <a:cs typeface="Trebuchet MS" pitchFamily="34" charset="-120"/>
+              </a:rPr>
+              <a:t>ve</a:t>
             </a:r>
             <a:endParaRPr lang="en-US" sz="900" dirty="0"/>
           </a:p>
@@ -27927,11 +27744,11 @@
         <p:spPr>
           <a:xfrm>
             <a:off x="1874520" y="4096512"/>
-            <a:ext cx="6903720" cy="658368"/>
+            <a:ext cx="6903720" cy="804672"/>
           </a:xfrm>
           <a:prstGeom prst="rect">
             <a:avLst>
-              <a:gd name="adj" fmla="val 8333"/>
+              <a:gd name="adj" fmla="val 6818"/>
             </a:avLst>
           </a:prstGeom>
           <a:solidFill>
@@ -27953,12 +27770,12 @@
         </p:nvSpPr>
         <p:spPr>
           <a:xfrm>
-            <a:off x="1951330" y="4169664"/>
-            <a:ext cx="676656" cy="475488"/>
+            <a:off x="2023872" y="4169664"/>
+            <a:ext cx="685800" cy="384048"/>
           </a:xfrm>
           <a:prstGeom prst="rect">
             <a:avLst>
-              <a:gd name="adj" fmla="val 7692"/>
+              <a:gd name="adj" fmla="val 9524"/>
             </a:avLst>
           </a:prstGeom>
           <a:solidFill>
@@ -27980,8 +27797,8 @@
         </p:nvSpPr>
         <p:spPr>
           <a:xfrm>
-            <a:off x="1951330" y="4169664"/>
-            <a:ext cx="676656" cy="475488"/>
+            <a:off x="2023872" y="4169664"/>
+            <a:ext cx="685800" cy="384048"/>
           </a:xfrm>
           <a:prstGeom prst="rect">
             <a:avLst/>
@@ -28019,12 +27836,12 @@
         </p:nvSpPr>
         <p:spPr>
           <a:xfrm>
-            <a:off x="2677363" y="4169664"/>
-            <a:ext cx="676656" cy="475488"/>
+            <a:off x="2831592" y="4169664"/>
+            <a:ext cx="685800" cy="384048"/>
           </a:xfrm>
           <a:prstGeom prst="rect">
             <a:avLst>
-              <a:gd name="adj" fmla="val 7692"/>
+              <a:gd name="adj" fmla="val 9524"/>
             </a:avLst>
           </a:prstGeom>
           <a:solidFill>
@@ -28046,8 +27863,8 @@
         </p:nvSpPr>
         <p:spPr>
           <a:xfrm>
-            <a:off x="2677363" y="4169664"/>
-            <a:ext cx="676656" cy="475488"/>
+            <a:off x="2831592" y="4169664"/>
+            <a:ext cx="685800" cy="384048"/>
           </a:xfrm>
           <a:prstGeom prst="rect">
             <a:avLst/>
@@ -28085,12 +27902,12 @@
         </p:nvSpPr>
         <p:spPr>
           <a:xfrm>
-            <a:off x="3403397" y="4169664"/>
-            <a:ext cx="676656" cy="475488"/>
+            <a:off x="3639312" y="4169664"/>
+            <a:ext cx="685800" cy="384048"/>
           </a:xfrm>
           <a:prstGeom prst="rect">
             <a:avLst>
-              <a:gd name="adj" fmla="val 7692"/>
+              <a:gd name="adj" fmla="val 9524"/>
             </a:avLst>
           </a:prstGeom>
           <a:solidFill>
@@ -28112,8 +27929,8 @@
         </p:nvSpPr>
         <p:spPr>
           <a:xfrm>
-            <a:off x="3403397" y="4169664"/>
-            <a:ext cx="676656" cy="475488"/>
+            <a:off x="3639312" y="4169664"/>
+            <a:ext cx="685800" cy="384048"/>
           </a:xfrm>
           <a:prstGeom prst="rect">
             <a:avLst/>
@@ -28151,12 +27968,12 @@
         </p:nvSpPr>
         <p:spPr>
           <a:xfrm>
-            <a:off x="4129430" y="4169664"/>
-            <a:ext cx="676656" cy="475488"/>
+            <a:off x="4447032" y="4169664"/>
+            <a:ext cx="685800" cy="384048"/>
           </a:xfrm>
           <a:prstGeom prst="rect">
             <a:avLst>
-              <a:gd name="adj" fmla="val 7692"/>
+              <a:gd name="adj" fmla="val 9524"/>
             </a:avLst>
           </a:prstGeom>
           <a:solidFill>
@@ -28178,8 +27995,8 @@
         </p:nvSpPr>
         <p:spPr>
           <a:xfrm>
-            <a:off x="4129430" y="4169664"/>
-            <a:ext cx="676656" cy="475488"/>
+            <a:off x="4447032" y="4169664"/>
+            <a:ext cx="685800" cy="384048"/>
           </a:xfrm>
           <a:prstGeom prst="rect">
             <a:avLst/>
@@ -28217,12 +28034,12 @@
         </p:nvSpPr>
         <p:spPr>
           <a:xfrm>
-            <a:off x="4855464" y="4169664"/>
-            <a:ext cx="676656" cy="475488"/>
+            <a:off x="5254752" y="4169664"/>
+            <a:ext cx="685800" cy="384048"/>
           </a:xfrm>
           <a:prstGeom prst="rect">
             <a:avLst>
-              <a:gd name="adj" fmla="val 7692"/>
+              <a:gd name="adj" fmla="val 9524"/>
             </a:avLst>
           </a:prstGeom>
           <a:solidFill>
@@ -28244,8 +28061,8 @@
         </p:nvSpPr>
         <p:spPr>
           <a:xfrm>
-            <a:off x="4855464" y="4169664"/>
-            <a:ext cx="676656" cy="475488"/>
+            <a:off x="5254752" y="4169664"/>
+            <a:ext cx="685800" cy="384048"/>
           </a:xfrm>
           <a:prstGeom prst="rect">
             <a:avLst/>
@@ -28283,12 +28100,12 @@
         </p:nvSpPr>
         <p:spPr>
           <a:xfrm>
-            <a:off x="5581498" y="4169664"/>
-            <a:ext cx="676656" cy="475488"/>
+            <a:off x="6062472" y="4169664"/>
+            <a:ext cx="685800" cy="384048"/>
           </a:xfrm>
           <a:prstGeom prst="rect">
             <a:avLst>
-              <a:gd name="adj" fmla="val 7692"/>
+              <a:gd name="adj" fmla="val 9524"/>
             </a:avLst>
           </a:prstGeom>
           <a:solidFill>
@@ -28310,8 +28127,8 @@
         </p:nvSpPr>
         <p:spPr>
           <a:xfrm>
-            <a:off x="5581498" y="4169664"/>
-            <a:ext cx="676656" cy="475488"/>
+            <a:off x="6062472" y="4169664"/>
+            <a:ext cx="685800" cy="384048"/>
           </a:xfrm>
           <a:prstGeom prst="rect">
             <a:avLst/>
@@ -28349,12 +28166,12 @@
         </p:nvSpPr>
         <p:spPr>
           <a:xfrm>
-            <a:off x="6307531" y="4169664"/>
-            <a:ext cx="676656" cy="475488"/>
+            <a:off x="6870192" y="4169664"/>
+            <a:ext cx="685800" cy="384048"/>
           </a:xfrm>
           <a:prstGeom prst="rect">
             <a:avLst>
-              <a:gd name="adj" fmla="val 7692"/>
+              <a:gd name="adj" fmla="val 9524"/>
             </a:avLst>
           </a:prstGeom>
           <a:solidFill>
@@ -28376,8 +28193,8 @@
         </p:nvSpPr>
         <p:spPr>
           <a:xfrm>
-            <a:off x="6307531" y="4169664"/>
-            <a:ext cx="676656" cy="475488"/>
+            <a:off x="6870192" y="4169664"/>
+            <a:ext cx="685800" cy="384048"/>
           </a:xfrm>
           <a:prstGeom prst="rect">
             <a:avLst/>
@@ -28401,7 +28218,7 @@
                 <a:ea typeface="Trebuchet MS" pitchFamily="34" charset="-122"/>
                 <a:cs typeface="Trebuchet MS" pitchFamily="34" charset="-120"/>
               </a:rPr>
-              <a:t>i</a:t>
+              <a:t>io</a:t>
             </a:r>
             <a:endParaRPr lang="en-US" sz="900" dirty="0"/>
           </a:p>
@@ -28409,18 +28226,57 @@
       </p:sp>
       <p:sp>
         <p:nvSpPr>
-          <p:cNvPr id="53" name="Shape 51"/>
-          <p:cNvSpPr/>
-          <p:nvPr/>
-        </p:nvSpPr>
-        <p:spPr>
-          <a:xfrm>
-            <a:off x="7033565" y="4169664"/>
-            <a:ext cx="676656" cy="475488"/>
+          <p:cNvPr id="53" name="Text 51"/>
+          <p:cNvSpPr/>
+          <p:nvPr/>
+        </p:nvSpPr>
+        <p:spPr>
+          <a:xfrm>
+            <a:off x="6870192" y="4572000"/>
+            <a:ext cx="685800" cy="219456"/>
+          </a:xfrm>
+          <a:prstGeom prst="rect">
+            <a:avLst/>
+          </a:prstGeom>
+          <a:noFill/>
+          <a:ln/>
+        </p:spPr>
+        <p:txBody>
+          <a:bodyPr wrap="square" lIns="0" tIns="0" rIns="0" bIns="0" rtlCol="0" anchor="t"/>
+          <a:lstStyle/>
+          <a:p>
+            <a:pPr algn="ctr" indent="0" marL="0">
+              <a:buNone/>
+            </a:pPr>
+            <a:r>
+              <a:rPr lang="en-US" sz="750" i="1" dirty="0">
+                <a:solidFill>
+                  <a:srgbClr val="94A3B8"/>
+                </a:solidFill>
+                <a:latin typeface="Calibri" pitchFamily="34" charset="0"/>
+                <a:ea typeface="Calibri" pitchFamily="34" charset="-122"/>
+                <a:cs typeface="Calibri" pitchFamily="34" charset="-120"/>
+              </a:rPr>
+              <a:t>/sh/</a:t>
+            </a:r>
+            <a:endParaRPr lang="en-US" sz="750" dirty="0"/>
+          </a:p>
+        </p:txBody>
+      </p:sp>
+      <p:sp>
+        <p:nvSpPr>
+          <p:cNvPr id="54" name="Shape 52"/>
+          <p:cNvSpPr/>
+          <p:nvPr/>
+        </p:nvSpPr>
+        <p:spPr>
+          <a:xfrm>
+            <a:off x="7677912" y="4169664"/>
+            <a:ext cx="685800" cy="384048"/>
           </a:xfrm>
           <a:prstGeom prst="rect">
             <a:avLst>
-              <a:gd name="adj" fmla="val 7692"/>
+              <a:gd name="adj" fmla="val 9524"/>
             </a:avLst>
           </a:prstGeom>
           <a:solidFill>
@@ -28436,80 +28292,14 @@
       </p:sp>
       <p:sp>
         <p:nvSpPr>
-          <p:cNvPr id="54" name="Text 52"/>
-          <p:cNvSpPr/>
-          <p:nvPr/>
-        </p:nvSpPr>
-        <p:spPr>
-          <a:xfrm>
-            <a:off x="7033565" y="4169664"/>
-            <a:ext cx="676656" cy="475488"/>
-          </a:xfrm>
-          <a:prstGeom prst="rect">
-            <a:avLst/>
-          </a:prstGeom>
-          <a:noFill/>
-          <a:ln/>
-        </p:spPr>
-        <p:txBody>
-          <a:bodyPr wrap="square" lIns="0" tIns="0" rIns="0" bIns="0" rtlCol="0" anchor="ctr"/>
-          <a:lstStyle/>
-          <a:p>
-            <a:pPr algn="ctr" indent="0" marL="0">
-              <a:buNone/>
-            </a:pPr>
-            <a:r>
-              <a:rPr lang="en-US" sz="900" b="1" dirty="0">
-                <a:solidFill>
-                  <a:srgbClr val="9D174D"/>
-                </a:solidFill>
-                <a:latin typeface="Trebuchet MS" pitchFamily="34" charset="0"/>
-                <a:ea typeface="Trebuchet MS" pitchFamily="34" charset="-122"/>
-                <a:cs typeface="Trebuchet MS" pitchFamily="34" charset="-120"/>
-              </a:rPr>
-              <a:t>o</a:t>
-            </a:r>
-            <a:endParaRPr lang="en-US" sz="900" dirty="0"/>
-          </a:p>
-        </p:txBody>
-      </p:sp>
-      <p:sp>
-        <p:nvSpPr>
-          <p:cNvPr id="55" name="Shape 53"/>
-          <p:cNvSpPr/>
-          <p:nvPr/>
-        </p:nvSpPr>
-        <p:spPr>
-          <a:xfrm>
-            <a:off x="7759598" y="4169664"/>
-            <a:ext cx="676656" cy="475488"/>
-          </a:xfrm>
-          <a:prstGeom prst="rect">
-            <a:avLst>
-              <a:gd name="adj" fmla="val 7692"/>
-            </a:avLst>
-          </a:prstGeom>
-          <a:solidFill>
-            <a:srgbClr val="FFFFFF"/>
-          </a:solidFill>
-          <a:ln w="12700">
-            <a:solidFill>
-              <a:srgbClr val="DB2777"/>
-            </a:solidFill>
-            <a:prstDash val="solid"/>
-          </a:ln>
-        </p:spPr>
-      </p:sp>
-      <p:sp>
-        <p:nvSpPr>
-          <p:cNvPr id="56" name="Text 54"/>
-          <p:cNvSpPr/>
-          <p:nvPr/>
-        </p:nvSpPr>
-        <p:spPr>
-          <a:xfrm>
-            <a:off x="7759598" y="4169664"/>
-            <a:ext cx="676656" cy="475488"/>
+          <p:cNvPr id="55" name="Text 53"/>
+          <p:cNvSpPr/>
+          <p:nvPr/>
+        </p:nvSpPr>
+        <p:spPr>
+          <a:xfrm>
+            <a:off x="7677912" y="4169664"/>
+            <a:ext cx="685800" cy="384048"/>
           </a:xfrm>
           <a:prstGeom prst="rect">
             <a:avLst/>
@@ -28964,7 +28754,7 @@
                 <a:ea typeface="Trebuchet MS" pitchFamily="34" charset="-122"/>
                 <a:cs typeface="Trebuchet MS" pitchFamily="34" charset="-120"/>
               </a:rPr>
-              <a:t>pressure</a:t>
+              <a:t>depressed</a:t>
             </a:r>
             <a:endParaRPr lang="en-US" sz="2800" dirty="0"/>
           </a:p>
@@ -29791,7 +29581,7 @@
                 <a:ea typeface="Trebuchet MS" pitchFamily="34" charset="-122"/>
                 <a:cs typeface="Trebuchet MS" pitchFamily="34" charset="-120"/>
               </a:rPr>
-              <a:t>pressure</a:t>
+              <a:t>depressed</a:t>
             </a:r>
             <a:endParaRPr lang="en-US" sz="2800" dirty="0"/>
           </a:p>
@@ -29871,7 +29661,7 @@
         </p:nvSpPr>
         <p:spPr>
           <a:xfrm>
-            <a:off x="2938272" y="2258568"/>
+            <a:off x="2221992" y="2258568"/>
             <a:ext cx="1828800" cy="292608"/>
           </a:xfrm>
           <a:prstGeom prst="rect">
@@ -29880,11 +29670,11 @@
             </a:avLst>
           </a:prstGeom>
           <a:solidFill>
-            <a:srgbClr val="CCFBF1"/>
+            <a:srgbClr val="DDD6FE"/>
           </a:solidFill>
           <a:ln w="19050">
             <a:solidFill>
-              <a:srgbClr val="0D9488"/>
+              <a:srgbClr val="7C3AED"/>
             </a:solidFill>
             <a:prstDash val="solid"/>
           </a:ln>
@@ -29905,7 +29695,7 @@
         </p:nvSpPr>
         <p:spPr>
           <a:xfrm>
-            <a:off x="2938272" y="2258568"/>
+            <a:off x="2221992" y="2258568"/>
             <a:ext cx="1828800" cy="292608"/>
           </a:xfrm>
           <a:prstGeom prst="rect">
@@ -29924,13 +29714,13 @@
             <a:r>
               <a:rPr lang="en-US" sz="1300" b="1" dirty="0">
                 <a:solidFill>
-                  <a:srgbClr val="0F766E"/>
+                  <a:srgbClr val="4C1D95"/>
                 </a:solidFill>
                 <a:latin typeface="Trebuchet MS" pitchFamily="34" charset="0"/>
                 <a:ea typeface="Trebuchet MS" pitchFamily="34" charset="-122"/>
                 <a:cs typeface="Trebuchet MS" pitchFamily="34" charset="-120"/>
               </a:rPr>
-              <a:t>press</a:t>
+              <a:t>de</a:t>
             </a:r>
             <a:endParaRPr lang="en-US" sz="1300" dirty="0"/>
           </a:p>
@@ -29944,7 +29734,7 @@
         </p:nvSpPr>
         <p:spPr>
           <a:xfrm>
-            <a:off x="2938272" y="2569464"/>
+            <a:off x="2221992" y="2569464"/>
             <a:ext cx="1828800" cy="201168"/>
           </a:xfrm>
           <a:prstGeom prst="rect">
@@ -29969,7 +29759,7 @@
                 <a:ea typeface="Calibri" pitchFamily="34" charset="-122"/>
                 <a:cs typeface="Calibri" pitchFamily="34" charset="-120"/>
               </a:rPr>
-              <a:t>to push or squeeze</a:t>
+              <a:t>down</a:t>
             </a:r>
             <a:endParaRPr lang="en-US" sz="850" dirty="0"/>
           </a:p>
@@ -29983,7 +29773,7 @@
         </p:nvSpPr>
         <p:spPr>
           <a:xfrm>
-            <a:off x="5803392" y="2258568"/>
+            <a:off x="4370832" y="2258568"/>
             <a:ext cx="1828800" cy="292608"/>
           </a:xfrm>
           <a:prstGeom prst="rect">
@@ -29992,11 +29782,11 @@
             </a:avLst>
           </a:prstGeom>
           <a:solidFill>
-            <a:srgbClr val="FCE7F3"/>
+            <a:srgbClr val="CCFBF1"/>
           </a:solidFill>
           <a:ln w="19050">
             <a:solidFill>
-              <a:srgbClr val="DB2777"/>
+              <a:srgbClr val="0D9488"/>
             </a:solidFill>
             <a:prstDash val="solid"/>
           </a:ln>
@@ -30017,7 +29807,7 @@
         </p:nvSpPr>
         <p:spPr>
           <a:xfrm>
-            <a:off x="5803392" y="2258568"/>
+            <a:off x="4370832" y="2258568"/>
             <a:ext cx="1828800" cy="292608"/>
           </a:xfrm>
           <a:prstGeom prst="rect">
@@ -30036,13 +29826,13 @@
             <a:r>
               <a:rPr lang="en-US" sz="1300" b="1" dirty="0">
                 <a:solidFill>
-                  <a:srgbClr val="9D174D"/>
+                  <a:srgbClr val="0F766E"/>
                 </a:solidFill>
                 <a:latin typeface="Trebuchet MS" pitchFamily="34" charset="0"/>
                 <a:ea typeface="Trebuchet MS" pitchFamily="34" charset="-122"/>
                 <a:cs typeface="Trebuchet MS" pitchFamily="34" charset="-120"/>
               </a:rPr>
-              <a:t>ure</a:t>
+              <a:t>press</a:t>
             </a:r>
             <a:endParaRPr lang="en-US" sz="1300" dirty="0"/>
           </a:p>
@@ -30056,7 +29846,7 @@
         </p:nvSpPr>
         <p:spPr>
           <a:xfrm>
-            <a:off x="5803392" y="2569464"/>
+            <a:off x="4370832" y="2569464"/>
             <a:ext cx="1828800" cy="201168"/>
           </a:xfrm>
           <a:prstGeom prst="rect">
@@ -30081,7 +29871,7 @@
                 <a:ea typeface="Calibri" pitchFamily="34" charset="-122"/>
                 <a:cs typeface="Calibri" pitchFamily="34" charset="-120"/>
               </a:rPr>
-              <a:t>state or condition of</a:t>
+              <a:t>to push or squeeze</a:t>
             </a:r>
             <a:endParaRPr lang="en-US" sz="850" dirty="0"/>
           </a:p>
@@ -30090,6 +29880,118 @@
       <p:sp>
         <p:nvSpPr>
           <p:cNvPr id="22" name="Shape 20"/>
+          <p:cNvSpPr/>
+          <p:nvPr/>
+        </p:nvSpPr>
+        <p:spPr>
+          <a:xfrm>
+            <a:off x="6519672" y="2258568"/>
+            <a:ext cx="1828800" cy="292608"/>
+          </a:xfrm>
+          <a:prstGeom prst="rect">
+            <a:avLst>
+              <a:gd name="adj" fmla="val 25000"/>
+            </a:avLst>
+          </a:prstGeom>
+          <a:solidFill>
+            <a:srgbClr val="FCE7F3"/>
+          </a:solidFill>
+          <a:ln w="19050">
+            <a:solidFill>
+              <a:srgbClr val="DB2777"/>
+            </a:solidFill>
+            <a:prstDash val="solid"/>
+          </a:ln>
+          <a:effectLst>
+            <a:outerShdw sx="100000" sy="100000" kx="0" ky="0" algn="bl" rotWithShape="0" blurRad="101600" dist="38100" dir="8100000">
+              <a:srgbClr val="000000">
+                <a:alpha val="12000"/>
+              </a:srgbClr>
+            </a:outerShdw>
+          </a:effectLst>
+        </p:spPr>
+      </p:sp>
+      <p:sp>
+        <p:nvSpPr>
+          <p:cNvPr id="23" name="Text 21"/>
+          <p:cNvSpPr/>
+          <p:nvPr/>
+        </p:nvSpPr>
+        <p:spPr>
+          <a:xfrm>
+            <a:off x="6519672" y="2258568"/>
+            <a:ext cx="1828800" cy="292608"/>
+          </a:xfrm>
+          <a:prstGeom prst="rect">
+            <a:avLst/>
+          </a:prstGeom>
+          <a:noFill/>
+          <a:ln/>
+        </p:spPr>
+        <p:txBody>
+          <a:bodyPr wrap="square" lIns="0" tIns="0" rIns="0" bIns="0" rtlCol="0" anchor="ctr"/>
+          <a:lstStyle/>
+          <a:p>
+            <a:pPr algn="ctr" indent="0" marL="0">
+              <a:buNone/>
+            </a:pPr>
+            <a:r>
+              <a:rPr lang="en-US" sz="1300" b="1" dirty="0">
+                <a:solidFill>
+                  <a:srgbClr val="9D174D"/>
+                </a:solidFill>
+                <a:latin typeface="Trebuchet MS" pitchFamily="34" charset="0"/>
+                <a:ea typeface="Trebuchet MS" pitchFamily="34" charset="-122"/>
+                <a:cs typeface="Trebuchet MS" pitchFamily="34" charset="-120"/>
+              </a:rPr>
+              <a:t>ed</a:t>
+            </a:r>
+            <a:endParaRPr lang="en-US" sz="1300" dirty="0"/>
+          </a:p>
+        </p:txBody>
+      </p:sp>
+      <p:sp>
+        <p:nvSpPr>
+          <p:cNvPr id="24" name="Text 22"/>
+          <p:cNvSpPr/>
+          <p:nvPr/>
+        </p:nvSpPr>
+        <p:spPr>
+          <a:xfrm>
+            <a:off x="6519672" y="2569464"/>
+            <a:ext cx="1828800" cy="201168"/>
+          </a:xfrm>
+          <a:prstGeom prst="rect">
+            <a:avLst/>
+          </a:prstGeom>
+          <a:noFill/>
+          <a:ln/>
+        </p:spPr>
+        <p:txBody>
+          <a:bodyPr wrap="square" lIns="0" tIns="0" rIns="0" bIns="0" rtlCol="0" anchor="t"/>
+          <a:lstStyle/>
+          <a:p>
+            <a:pPr algn="ctr" indent="0" marL="0">
+              <a:buNone/>
+            </a:pPr>
+            <a:r>
+              <a:rPr lang="en-US" sz="850" dirty="0">
+                <a:solidFill>
+                  <a:srgbClr val="475569"/>
+                </a:solidFill>
+                <a:latin typeface="Calibri" pitchFamily="34" charset="0"/>
+                <a:ea typeface="Calibri" pitchFamily="34" charset="-122"/>
+                <a:cs typeface="Calibri" pitchFamily="34" charset="-120"/>
+              </a:rPr>
+              <a:t>past tense</a:t>
+            </a:r>
+            <a:endParaRPr lang="en-US" sz="850" dirty="0"/>
+          </a:p>
+        </p:txBody>
+      </p:sp>
+      <p:sp>
+        <p:nvSpPr>
+          <p:cNvPr id="25" name="Shape 23"/>
           <p:cNvSpPr/>
           <p:nvPr/>
         </p:nvSpPr>
@@ -30116,7 +30018,7 @@
       </p:sp>
       <p:sp>
         <p:nvSpPr>
-          <p:cNvPr id="23" name="Text 21"/>
+          <p:cNvPr id="26" name="Text 24"/>
           <p:cNvSpPr/>
           <p:nvPr/>
         </p:nvSpPr>
@@ -30155,7 +30057,7 @@
       </p:sp>
       <p:sp>
         <p:nvSpPr>
-          <p:cNvPr id="24" name="Shape 22"/>
+          <p:cNvPr id="27" name="Shape 25"/>
           <p:cNvSpPr/>
           <p:nvPr/>
         </p:nvSpPr>
@@ -30182,7 +30084,7 @@
       </p:sp>
       <p:sp>
         <p:nvSpPr>
-          <p:cNvPr id="25" name="Text 23"/>
+          <p:cNvPr id="28" name="Text 26"/>
           <p:cNvSpPr/>
           <p:nvPr/>
         </p:nvSpPr>
@@ -30221,7 +30123,7 @@
       </p:sp>
       <p:sp>
         <p:nvSpPr>
-          <p:cNvPr id="26" name="Shape 24"/>
+          <p:cNvPr id="29" name="Shape 27"/>
           <p:cNvSpPr/>
           <p:nvPr/>
         </p:nvSpPr>
@@ -30248,7 +30150,7 @@
       </p:sp>
       <p:sp>
         <p:nvSpPr>
-          <p:cNvPr id="27" name="Text 25"/>
+          <p:cNvPr id="30" name="Text 28"/>
           <p:cNvSpPr/>
           <p:nvPr/>
         </p:nvSpPr>
@@ -30287,7 +30189,7 @@
       </p:sp>
       <p:sp>
         <p:nvSpPr>
-          <p:cNvPr id="28" name="Shape 26"/>
+          <p:cNvPr id="31" name="Shape 29"/>
           <p:cNvSpPr/>
           <p:nvPr/>
         </p:nvSpPr>
@@ -30314,7 +30216,7 @@
       </p:sp>
       <p:sp>
         <p:nvSpPr>
-          <p:cNvPr id="29" name="Text 27"/>
+          <p:cNvPr id="32" name="Text 30"/>
           <p:cNvSpPr/>
           <p:nvPr/>
         </p:nvSpPr>
@@ -30776,7 +30678,7 @@
                 <a:ea typeface="Trebuchet MS" pitchFamily="34" charset="-122"/>
                 <a:cs typeface="Trebuchet MS" pitchFamily="34" charset="-120"/>
               </a:rPr>
-              <a:t>pressure</a:t>
+              <a:t>depressed</a:t>
             </a:r>
             <a:endParaRPr lang="en-US" sz="2800" dirty="0"/>
           </a:p>
@@ -30856,7 +30758,7 @@
         </p:nvSpPr>
         <p:spPr>
           <a:xfrm>
-            <a:off x="2938272" y="2258568"/>
+            <a:off x="2221992" y="2258568"/>
             <a:ext cx="1828800" cy="292608"/>
           </a:xfrm>
           <a:prstGeom prst="rect">
@@ -30865,11 +30767,11 @@
             </a:avLst>
           </a:prstGeom>
           <a:solidFill>
-            <a:srgbClr val="CCFBF1"/>
+            <a:srgbClr val="DDD6FE"/>
           </a:solidFill>
           <a:ln w="19050">
             <a:solidFill>
-              <a:srgbClr val="0D9488"/>
+              <a:srgbClr val="7C3AED"/>
             </a:solidFill>
             <a:prstDash val="solid"/>
           </a:ln>
@@ -30890,7 +30792,7 @@
         </p:nvSpPr>
         <p:spPr>
           <a:xfrm>
-            <a:off x="2938272" y="2258568"/>
+            <a:off x="2221992" y="2258568"/>
             <a:ext cx="1828800" cy="292608"/>
           </a:xfrm>
           <a:prstGeom prst="rect">
@@ -30909,13 +30811,13 @@
             <a:r>
               <a:rPr lang="en-US" sz="1300" b="1" dirty="0">
                 <a:solidFill>
-                  <a:srgbClr val="0F766E"/>
+                  <a:srgbClr val="4C1D95"/>
                 </a:solidFill>
                 <a:latin typeface="Trebuchet MS" pitchFamily="34" charset="0"/>
                 <a:ea typeface="Trebuchet MS" pitchFamily="34" charset="-122"/>
                 <a:cs typeface="Trebuchet MS" pitchFamily="34" charset="-120"/>
               </a:rPr>
-              <a:t>press</a:t>
+              <a:t>de</a:t>
             </a:r>
             <a:endParaRPr lang="en-US" sz="1300" dirty="0"/>
           </a:p>
@@ -30929,7 +30831,7 @@
         </p:nvSpPr>
         <p:spPr>
           <a:xfrm>
-            <a:off x="2938272" y="2569464"/>
+            <a:off x="2221992" y="2569464"/>
             <a:ext cx="1828800" cy="201168"/>
           </a:xfrm>
           <a:prstGeom prst="rect">
@@ -30954,7 +30856,7 @@
                 <a:ea typeface="Calibri" pitchFamily="34" charset="-122"/>
                 <a:cs typeface="Calibri" pitchFamily="34" charset="-120"/>
               </a:rPr>
-              <a:t>to push or squeeze</a:t>
+              <a:t>down</a:t>
             </a:r>
             <a:endParaRPr lang="en-US" sz="850" dirty="0"/>
           </a:p>
@@ -30968,7 +30870,7 @@
         </p:nvSpPr>
         <p:spPr>
           <a:xfrm>
-            <a:off x="5803392" y="2258568"/>
+            <a:off x="4370832" y="2258568"/>
             <a:ext cx="1828800" cy="292608"/>
           </a:xfrm>
           <a:prstGeom prst="rect">
@@ -30977,11 +30879,11 @@
             </a:avLst>
           </a:prstGeom>
           <a:solidFill>
-            <a:srgbClr val="FCE7F3"/>
+            <a:srgbClr val="CCFBF1"/>
           </a:solidFill>
           <a:ln w="19050">
             <a:solidFill>
-              <a:srgbClr val="DB2777"/>
+              <a:srgbClr val="0D9488"/>
             </a:solidFill>
             <a:prstDash val="solid"/>
           </a:ln>
@@ -31002,7 +30904,7 @@
         </p:nvSpPr>
         <p:spPr>
           <a:xfrm>
-            <a:off x="5803392" y="2258568"/>
+            <a:off x="4370832" y="2258568"/>
             <a:ext cx="1828800" cy="292608"/>
           </a:xfrm>
           <a:prstGeom prst="rect">
@@ -31021,13 +30923,13 @@
             <a:r>
               <a:rPr lang="en-US" sz="1300" b="1" dirty="0">
                 <a:solidFill>
-                  <a:srgbClr val="9D174D"/>
+                  <a:srgbClr val="0F766E"/>
                 </a:solidFill>
                 <a:latin typeface="Trebuchet MS" pitchFamily="34" charset="0"/>
                 <a:ea typeface="Trebuchet MS" pitchFamily="34" charset="-122"/>
                 <a:cs typeface="Trebuchet MS" pitchFamily="34" charset="-120"/>
               </a:rPr>
-              <a:t>ure</a:t>
+              <a:t>press</a:t>
             </a:r>
             <a:endParaRPr lang="en-US" sz="1300" dirty="0"/>
           </a:p>
@@ -31041,7 +30943,7 @@
         </p:nvSpPr>
         <p:spPr>
           <a:xfrm>
-            <a:off x="5803392" y="2569464"/>
+            <a:off x="4370832" y="2569464"/>
             <a:ext cx="1828800" cy="201168"/>
           </a:xfrm>
           <a:prstGeom prst="rect">
@@ -31066,7 +30968,7 @@
                 <a:ea typeface="Calibri" pitchFamily="34" charset="-122"/>
                 <a:cs typeface="Calibri" pitchFamily="34" charset="-120"/>
               </a:rPr>
-              <a:t>state or condition of</a:t>
+              <a:t>to push or squeeze</a:t>
             </a:r>
             <a:endParaRPr lang="en-US" sz="850" dirty="0"/>
           </a:p>
@@ -31075,6 +30977,118 @@
       <p:sp>
         <p:nvSpPr>
           <p:cNvPr id="22" name="Shape 20"/>
+          <p:cNvSpPr/>
+          <p:nvPr/>
+        </p:nvSpPr>
+        <p:spPr>
+          <a:xfrm>
+            <a:off x="6519672" y="2258568"/>
+            <a:ext cx="1828800" cy="292608"/>
+          </a:xfrm>
+          <a:prstGeom prst="rect">
+            <a:avLst>
+              <a:gd name="adj" fmla="val 25000"/>
+            </a:avLst>
+          </a:prstGeom>
+          <a:solidFill>
+            <a:srgbClr val="FCE7F3"/>
+          </a:solidFill>
+          <a:ln w="19050">
+            <a:solidFill>
+              <a:srgbClr val="DB2777"/>
+            </a:solidFill>
+            <a:prstDash val="solid"/>
+          </a:ln>
+          <a:effectLst>
+            <a:outerShdw sx="100000" sy="100000" kx="0" ky="0" algn="bl" rotWithShape="0" blurRad="101600" dist="38100" dir="8100000">
+              <a:srgbClr val="000000">
+                <a:alpha val="12000"/>
+              </a:srgbClr>
+            </a:outerShdw>
+          </a:effectLst>
+        </p:spPr>
+      </p:sp>
+      <p:sp>
+        <p:nvSpPr>
+          <p:cNvPr id="23" name="Text 21"/>
+          <p:cNvSpPr/>
+          <p:nvPr/>
+        </p:nvSpPr>
+        <p:spPr>
+          <a:xfrm>
+            <a:off x="6519672" y="2258568"/>
+            <a:ext cx="1828800" cy="292608"/>
+          </a:xfrm>
+          <a:prstGeom prst="rect">
+            <a:avLst/>
+          </a:prstGeom>
+          <a:noFill/>
+          <a:ln/>
+        </p:spPr>
+        <p:txBody>
+          <a:bodyPr wrap="square" lIns="0" tIns="0" rIns="0" bIns="0" rtlCol="0" anchor="ctr"/>
+          <a:lstStyle/>
+          <a:p>
+            <a:pPr algn="ctr" indent="0" marL="0">
+              <a:buNone/>
+            </a:pPr>
+            <a:r>
+              <a:rPr lang="en-US" sz="1300" b="1" dirty="0">
+                <a:solidFill>
+                  <a:srgbClr val="9D174D"/>
+                </a:solidFill>
+                <a:latin typeface="Trebuchet MS" pitchFamily="34" charset="0"/>
+                <a:ea typeface="Trebuchet MS" pitchFamily="34" charset="-122"/>
+                <a:cs typeface="Trebuchet MS" pitchFamily="34" charset="-120"/>
+              </a:rPr>
+              <a:t>ed</a:t>
+            </a:r>
+            <a:endParaRPr lang="en-US" sz="1300" dirty="0"/>
+          </a:p>
+        </p:txBody>
+      </p:sp>
+      <p:sp>
+        <p:nvSpPr>
+          <p:cNvPr id="24" name="Text 22"/>
+          <p:cNvSpPr/>
+          <p:nvPr/>
+        </p:nvSpPr>
+        <p:spPr>
+          <a:xfrm>
+            <a:off x="6519672" y="2569464"/>
+            <a:ext cx="1828800" cy="201168"/>
+          </a:xfrm>
+          <a:prstGeom prst="rect">
+            <a:avLst/>
+          </a:prstGeom>
+          <a:noFill/>
+          <a:ln/>
+        </p:spPr>
+        <p:txBody>
+          <a:bodyPr wrap="square" lIns="0" tIns="0" rIns="0" bIns="0" rtlCol="0" anchor="t"/>
+          <a:lstStyle/>
+          <a:p>
+            <a:pPr algn="ctr" indent="0" marL="0">
+              <a:buNone/>
+            </a:pPr>
+            <a:r>
+              <a:rPr lang="en-US" sz="850" dirty="0">
+                <a:solidFill>
+                  <a:srgbClr val="475569"/>
+                </a:solidFill>
+                <a:latin typeface="Calibri" pitchFamily="34" charset="0"/>
+                <a:ea typeface="Calibri" pitchFamily="34" charset="-122"/>
+                <a:cs typeface="Calibri" pitchFamily="34" charset="-120"/>
+              </a:rPr>
+              <a:t>past tense</a:t>
+            </a:r>
+            <a:endParaRPr lang="en-US" sz="850" dirty="0"/>
+          </a:p>
+        </p:txBody>
+      </p:sp>
+      <p:sp>
+        <p:nvSpPr>
+          <p:cNvPr id="25" name="Shape 23"/>
           <p:cNvSpPr/>
           <p:nvPr/>
         </p:nvSpPr>
@@ -31101,7 +31115,7 @@
       </p:sp>
       <p:sp>
         <p:nvSpPr>
-          <p:cNvPr id="23" name="Text 21"/>
+          <p:cNvPr id="26" name="Text 24"/>
           <p:cNvSpPr/>
           <p:nvPr/>
         </p:nvSpPr>
@@ -31140,7 +31154,7 @@
       </p:sp>
       <p:sp>
         <p:nvSpPr>
-          <p:cNvPr id="24" name="Shape 22"/>
+          <p:cNvPr id="27" name="Shape 25"/>
           <p:cNvSpPr/>
           <p:nvPr/>
         </p:nvSpPr>
@@ -31167,7 +31181,7 @@
       </p:sp>
       <p:sp>
         <p:nvSpPr>
-          <p:cNvPr id="25" name="Shape 23"/>
+          <p:cNvPr id="28" name="Shape 26"/>
           <p:cNvSpPr/>
           <p:nvPr/>
         </p:nvSpPr>
@@ -31194,7 +31208,7 @@
       </p:sp>
       <p:sp>
         <p:nvSpPr>
-          <p:cNvPr id="26" name="Text 24"/>
+          <p:cNvPr id="29" name="Text 27"/>
           <p:cNvSpPr/>
           <p:nvPr/>
         </p:nvSpPr>
@@ -31225,7 +31239,7 @@
                 <a:ea typeface="Trebuchet MS" pitchFamily="34" charset="-122"/>
                 <a:cs typeface="Trebuchet MS" pitchFamily="34" charset="-120"/>
               </a:rPr>
-              <a:t>pres</a:t>
+              <a:t>de</a:t>
             </a:r>
             <a:endParaRPr lang="en-US" sz="1400" dirty="0"/>
           </a:p>
@@ -31233,7 +31247,7 @@
       </p:sp>
       <p:sp>
         <p:nvSpPr>
-          <p:cNvPr id="27" name="Text 25"/>
+          <p:cNvPr id="30" name="Text 28"/>
           <p:cNvSpPr/>
           <p:nvPr/>
         </p:nvSpPr>
@@ -31272,7 +31286,7 @@
       </p:sp>
       <p:sp>
         <p:nvSpPr>
-          <p:cNvPr id="28" name="Shape 26"/>
+          <p:cNvPr id="31" name="Shape 29"/>
           <p:cNvSpPr/>
           <p:nvPr/>
         </p:nvSpPr>
@@ -31299,7 +31313,7 @@
       </p:sp>
       <p:sp>
         <p:nvSpPr>
-          <p:cNvPr id="29" name="Text 27"/>
+          <p:cNvPr id="32" name="Text 30"/>
           <p:cNvSpPr/>
           <p:nvPr/>
         </p:nvSpPr>
@@ -31330,7 +31344,7 @@
                 <a:ea typeface="Trebuchet MS" pitchFamily="34" charset="-122"/>
                 <a:cs typeface="Trebuchet MS" pitchFamily="34" charset="-120"/>
               </a:rPr>
-              <a:t>sure</a:t>
+              <a:t>pressed</a:t>
             </a:r>
             <a:endParaRPr lang="en-US" sz="1400" dirty="0"/>
           </a:p>
@@ -31338,7 +31352,7 @@
       </p:sp>
       <p:sp>
         <p:nvSpPr>
-          <p:cNvPr id="30" name="Shape 28"/>
+          <p:cNvPr id="33" name="Shape 31"/>
           <p:cNvSpPr/>
           <p:nvPr/>
         </p:nvSpPr>
@@ -31365,7 +31379,7 @@
       </p:sp>
       <p:sp>
         <p:nvSpPr>
-          <p:cNvPr id="31" name="Text 29"/>
+          <p:cNvPr id="34" name="Text 32"/>
           <p:cNvSpPr/>
           <p:nvPr/>
         </p:nvSpPr>
@@ -31404,7 +31418,7 @@
       </p:sp>
       <p:sp>
         <p:nvSpPr>
-          <p:cNvPr id="32" name="Shape 30"/>
+          <p:cNvPr id="35" name="Shape 33"/>
           <p:cNvSpPr/>
           <p:nvPr/>
         </p:nvSpPr>
@@ -31431,7 +31445,7 @@
       </p:sp>
       <p:sp>
         <p:nvSpPr>
-          <p:cNvPr id="33" name="Text 31"/>
+          <p:cNvPr id="36" name="Text 34"/>
           <p:cNvSpPr/>
           <p:nvPr/>
         </p:nvSpPr>
@@ -31893,7 +31907,7 @@
                 <a:ea typeface="Trebuchet MS" pitchFamily="34" charset="-122"/>
                 <a:cs typeface="Trebuchet MS" pitchFamily="34" charset="-120"/>
               </a:rPr>
-              <a:t>pressure</a:t>
+              <a:t>depressed</a:t>
             </a:r>
             <a:endParaRPr lang="en-US" sz="2800" dirty="0"/>
           </a:p>
@@ -31973,7 +31987,7 @@
         </p:nvSpPr>
         <p:spPr>
           <a:xfrm>
-            <a:off x="2938272" y="2258568"/>
+            <a:off x="2221992" y="2258568"/>
             <a:ext cx="1828800" cy="292608"/>
           </a:xfrm>
           <a:prstGeom prst="rect">
@@ -31982,11 +31996,11 @@
             </a:avLst>
           </a:prstGeom>
           <a:solidFill>
-            <a:srgbClr val="CCFBF1"/>
+            <a:srgbClr val="DDD6FE"/>
           </a:solidFill>
           <a:ln w="19050">
             <a:solidFill>
-              <a:srgbClr val="0D9488"/>
+              <a:srgbClr val="7C3AED"/>
             </a:solidFill>
             <a:prstDash val="solid"/>
           </a:ln>
@@ -32007,7 +32021,7 @@
         </p:nvSpPr>
         <p:spPr>
           <a:xfrm>
-            <a:off x="2938272" y="2258568"/>
+            <a:off x="2221992" y="2258568"/>
             <a:ext cx="1828800" cy="292608"/>
           </a:xfrm>
           <a:prstGeom prst="rect">
@@ -32026,13 +32040,13 @@
             <a:r>
               <a:rPr lang="en-US" sz="1300" b="1" dirty="0">
                 <a:solidFill>
-                  <a:srgbClr val="0F766E"/>
+                  <a:srgbClr val="4C1D95"/>
                 </a:solidFill>
                 <a:latin typeface="Trebuchet MS" pitchFamily="34" charset="0"/>
                 <a:ea typeface="Trebuchet MS" pitchFamily="34" charset="-122"/>
                 <a:cs typeface="Trebuchet MS" pitchFamily="34" charset="-120"/>
               </a:rPr>
-              <a:t>press</a:t>
+              <a:t>de</a:t>
             </a:r>
             <a:endParaRPr lang="en-US" sz="1300" dirty="0"/>
           </a:p>
@@ -32046,7 +32060,7 @@
         </p:nvSpPr>
         <p:spPr>
           <a:xfrm>
-            <a:off x="2938272" y="2569464"/>
+            <a:off x="2221992" y="2569464"/>
             <a:ext cx="1828800" cy="201168"/>
           </a:xfrm>
           <a:prstGeom prst="rect">
@@ -32071,7 +32085,7 @@
                 <a:ea typeface="Calibri" pitchFamily="34" charset="-122"/>
                 <a:cs typeface="Calibri" pitchFamily="34" charset="-120"/>
               </a:rPr>
-              <a:t>to push or squeeze</a:t>
+              <a:t>down</a:t>
             </a:r>
             <a:endParaRPr lang="en-US" sz="850" dirty="0"/>
           </a:p>
@@ -32085,7 +32099,7 @@
         </p:nvSpPr>
         <p:spPr>
           <a:xfrm>
-            <a:off x="5803392" y="2258568"/>
+            <a:off x="4370832" y="2258568"/>
             <a:ext cx="1828800" cy="292608"/>
           </a:xfrm>
           <a:prstGeom prst="rect">
@@ -32094,11 +32108,11 @@
             </a:avLst>
           </a:prstGeom>
           <a:solidFill>
-            <a:srgbClr val="FCE7F3"/>
+            <a:srgbClr val="CCFBF1"/>
           </a:solidFill>
           <a:ln w="19050">
             <a:solidFill>
-              <a:srgbClr val="DB2777"/>
+              <a:srgbClr val="0D9488"/>
             </a:solidFill>
             <a:prstDash val="solid"/>
           </a:ln>
@@ -32119,7 +32133,7 @@
         </p:nvSpPr>
         <p:spPr>
           <a:xfrm>
-            <a:off x="5803392" y="2258568"/>
+            <a:off x="4370832" y="2258568"/>
             <a:ext cx="1828800" cy="292608"/>
           </a:xfrm>
           <a:prstGeom prst="rect">
@@ -32138,13 +32152,13 @@
             <a:r>
               <a:rPr lang="en-US" sz="1300" b="1" dirty="0">
                 <a:solidFill>
-                  <a:srgbClr val="9D174D"/>
+                  <a:srgbClr val="0F766E"/>
                 </a:solidFill>
                 <a:latin typeface="Trebuchet MS" pitchFamily="34" charset="0"/>
                 <a:ea typeface="Trebuchet MS" pitchFamily="34" charset="-122"/>
                 <a:cs typeface="Trebuchet MS" pitchFamily="34" charset="-120"/>
               </a:rPr>
-              <a:t>ure</a:t>
+              <a:t>press</a:t>
             </a:r>
             <a:endParaRPr lang="en-US" sz="1300" dirty="0"/>
           </a:p>
@@ -32158,7 +32172,7 @@
         </p:nvSpPr>
         <p:spPr>
           <a:xfrm>
-            <a:off x="5803392" y="2569464"/>
+            <a:off x="4370832" y="2569464"/>
             <a:ext cx="1828800" cy="201168"/>
           </a:xfrm>
           <a:prstGeom prst="rect">
@@ -32183,7 +32197,7 @@
                 <a:ea typeface="Calibri" pitchFamily="34" charset="-122"/>
                 <a:cs typeface="Calibri" pitchFamily="34" charset="-120"/>
               </a:rPr>
-              <a:t>state or condition of</a:t>
+              <a:t>to push or squeeze</a:t>
             </a:r>
             <a:endParaRPr lang="en-US" sz="850" dirty="0"/>
           </a:p>
@@ -32192,6 +32206,118 @@
       <p:sp>
         <p:nvSpPr>
           <p:cNvPr id="22" name="Shape 20"/>
+          <p:cNvSpPr/>
+          <p:nvPr/>
+        </p:nvSpPr>
+        <p:spPr>
+          <a:xfrm>
+            <a:off x="6519672" y="2258568"/>
+            <a:ext cx="1828800" cy="292608"/>
+          </a:xfrm>
+          <a:prstGeom prst="rect">
+            <a:avLst>
+              <a:gd name="adj" fmla="val 25000"/>
+            </a:avLst>
+          </a:prstGeom>
+          <a:solidFill>
+            <a:srgbClr val="FCE7F3"/>
+          </a:solidFill>
+          <a:ln w="19050">
+            <a:solidFill>
+              <a:srgbClr val="DB2777"/>
+            </a:solidFill>
+            <a:prstDash val="solid"/>
+          </a:ln>
+          <a:effectLst>
+            <a:outerShdw sx="100000" sy="100000" kx="0" ky="0" algn="bl" rotWithShape="0" blurRad="101600" dist="38100" dir="8100000">
+              <a:srgbClr val="000000">
+                <a:alpha val="12000"/>
+              </a:srgbClr>
+            </a:outerShdw>
+          </a:effectLst>
+        </p:spPr>
+      </p:sp>
+      <p:sp>
+        <p:nvSpPr>
+          <p:cNvPr id="23" name="Text 21"/>
+          <p:cNvSpPr/>
+          <p:nvPr/>
+        </p:nvSpPr>
+        <p:spPr>
+          <a:xfrm>
+            <a:off x="6519672" y="2258568"/>
+            <a:ext cx="1828800" cy="292608"/>
+          </a:xfrm>
+          <a:prstGeom prst="rect">
+            <a:avLst/>
+          </a:prstGeom>
+          <a:noFill/>
+          <a:ln/>
+        </p:spPr>
+        <p:txBody>
+          <a:bodyPr wrap="square" lIns="0" tIns="0" rIns="0" bIns="0" rtlCol="0" anchor="ctr"/>
+          <a:lstStyle/>
+          <a:p>
+            <a:pPr algn="ctr" indent="0" marL="0">
+              <a:buNone/>
+            </a:pPr>
+            <a:r>
+              <a:rPr lang="en-US" sz="1300" b="1" dirty="0">
+                <a:solidFill>
+                  <a:srgbClr val="9D174D"/>
+                </a:solidFill>
+                <a:latin typeface="Trebuchet MS" pitchFamily="34" charset="0"/>
+                <a:ea typeface="Trebuchet MS" pitchFamily="34" charset="-122"/>
+                <a:cs typeface="Trebuchet MS" pitchFamily="34" charset="-120"/>
+              </a:rPr>
+              <a:t>ed</a:t>
+            </a:r>
+            <a:endParaRPr lang="en-US" sz="1300" dirty="0"/>
+          </a:p>
+        </p:txBody>
+      </p:sp>
+      <p:sp>
+        <p:nvSpPr>
+          <p:cNvPr id="24" name="Text 22"/>
+          <p:cNvSpPr/>
+          <p:nvPr/>
+        </p:nvSpPr>
+        <p:spPr>
+          <a:xfrm>
+            <a:off x="6519672" y="2569464"/>
+            <a:ext cx="1828800" cy="201168"/>
+          </a:xfrm>
+          <a:prstGeom prst="rect">
+            <a:avLst/>
+          </a:prstGeom>
+          <a:noFill/>
+          <a:ln/>
+        </p:spPr>
+        <p:txBody>
+          <a:bodyPr wrap="square" lIns="0" tIns="0" rIns="0" bIns="0" rtlCol="0" anchor="t"/>
+          <a:lstStyle/>
+          <a:p>
+            <a:pPr algn="ctr" indent="0" marL="0">
+              <a:buNone/>
+            </a:pPr>
+            <a:r>
+              <a:rPr lang="en-US" sz="850" dirty="0">
+                <a:solidFill>
+                  <a:srgbClr val="475569"/>
+                </a:solidFill>
+                <a:latin typeface="Calibri" pitchFamily="34" charset="0"/>
+                <a:ea typeface="Calibri" pitchFamily="34" charset="-122"/>
+                <a:cs typeface="Calibri" pitchFamily="34" charset="-120"/>
+              </a:rPr>
+              <a:t>past tense</a:t>
+            </a:r>
+            <a:endParaRPr lang="en-US" sz="850" dirty="0"/>
+          </a:p>
+        </p:txBody>
+      </p:sp>
+      <p:sp>
+        <p:nvSpPr>
+          <p:cNvPr id="25" name="Shape 23"/>
           <p:cNvSpPr/>
           <p:nvPr/>
         </p:nvSpPr>
@@ -32218,7 +32344,7 @@
       </p:sp>
       <p:sp>
         <p:nvSpPr>
-          <p:cNvPr id="23" name="Text 21"/>
+          <p:cNvPr id="26" name="Text 24"/>
           <p:cNvSpPr/>
           <p:nvPr/>
         </p:nvSpPr>
@@ -32257,7 +32383,7 @@
       </p:sp>
       <p:sp>
         <p:nvSpPr>
-          <p:cNvPr id="24" name="Shape 22"/>
+          <p:cNvPr id="27" name="Shape 25"/>
           <p:cNvSpPr/>
           <p:nvPr/>
         </p:nvSpPr>
@@ -32284,7 +32410,7 @@
       </p:sp>
       <p:sp>
         <p:nvSpPr>
-          <p:cNvPr id="25" name="Shape 23"/>
+          <p:cNvPr id="28" name="Shape 26"/>
           <p:cNvSpPr/>
           <p:nvPr/>
         </p:nvSpPr>
@@ -32311,7 +32437,7 @@
       </p:sp>
       <p:sp>
         <p:nvSpPr>
-          <p:cNvPr id="26" name="Text 24"/>
+          <p:cNvPr id="29" name="Text 27"/>
           <p:cNvSpPr/>
           <p:nvPr/>
         </p:nvSpPr>
@@ -32342,7 +32468,7 @@
                 <a:ea typeface="Trebuchet MS" pitchFamily="34" charset="-122"/>
                 <a:cs typeface="Trebuchet MS" pitchFamily="34" charset="-120"/>
               </a:rPr>
-              <a:t>pres</a:t>
+              <a:t>de</a:t>
             </a:r>
             <a:endParaRPr lang="en-US" sz="1400" dirty="0"/>
           </a:p>
@@ -32350,7 +32476,7 @@
       </p:sp>
       <p:sp>
         <p:nvSpPr>
-          <p:cNvPr id="27" name="Text 25"/>
+          <p:cNvPr id="30" name="Text 28"/>
           <p:cNvSpPr/>
           <p:nvPr/>
         </p:nvSpPr>
@@ -32389,7 +32515,7 @@
       </p:sp>
       <p:sp>
         <p:nvSpPr>
-          <p:cNvPr id="28" name="Shape 26"/>
+          <p:cNvPr id="31" name="Shape 29"/>
           <p:cNvSpPr/>
           <p:nvPr/>
         </p:nvSpPr>
@@ -32416,7 +32542,7 @@
       </p:sp>
       <p:sp>
         <p:nvSpPr>
-          <p:cNvPr id="29" name="Text 27"/>
+          <p:cNvPr id="32" name="Text 30"/>
           <p:cNvSpPr/>
           <p:nvPr/>
         </p:nvSpPr>
@@ -32447,7 +32573,7 @@
                 <a:ea typeface="Trebuchet MS" pitchFamily="34" charset="-122"/>
                 <a:cs typeface="Trebuchet MS" pitchFamily="34" charset="-120"/>
               </a:rPr>
-              <a:t>sure</a:t>
+              <a:t>pressed</a:t>
             </a:r>
             <a:endParaRPr lang="en-US" sz="1400" dirty="0"/>
           </a:p>
@@ -32455,7 +32581,7 @@
       </p:sp>
       <p:sp>
         <p:nvSpPr>
-          <p:cNvPr id="30" name="Shape 28"/>
+          <p:cNvPr id="33" name="Shape 31"/>
           <p:cNvSpPr/>
           <p:nvPr/>
         </p:nvSpPr>
@@ -32482,7 +32608,7 @@
       </p:sp>
       <p:sp>
         <p:nvSpPr>
-          <p:cNvPr id="31" name="Text 29"/>
+          <p:cNvPr id="34" name="Text 32"/>
           <p:cNvSpPr/>
           <p:nvPr/>
         </p:nvSpPr>
@@ -32521,7 +32647,7 @@
       </p:sp>
       <p:sp>
         <p:nvSpPr>
-          <p:cNvPr id="32" name="Shape 30"/>
+          <p:cNvPr id="35" name="Shape 33"/>
           <p:cNvSpPr/>
           <p:nvPr/>
         </p:nvSpPr>
@@ -32548,13 +32674,13 @@
       </p:sp>
       <p:sp>
         <p:nvSpPr>
-          <p:cNvPr id="33" name="Shape 31"/>
-          <p:cNvSpPr/>
-          <p:nvPr/>
-        </p:nvSpPr>
-        <p:spPr>
-          <a:xfrm>
-            <a:off x="2254649" y="4169664"/>
+          <p:cNvPr id="36" name="Shape 34"/>
+          <p:cNvSpPr/>
+          <p:nvPr/>
+        </p:nvSpPr>
+        <p:spPr>
+          <a:xfrm>
+            <a:off x="2124837" y="4169664"/>
             <a:ext cx="685800" cy="475488"/>
           </a:xfrm>
           <a:prstGeom prst="rect">
@@ -32575,13 +32701,13 @@
       </p:sp>
       <p:sp>
         <p:nvSpPr>
-          <p:cNvPr id="34" name="Text 32"/>
-          <p:cNvSpPr/>
-          <p:nvPr/>
-        </p:nvSpPr>
-        <p:spPr>
-          <a:xfrm>
-            <a:off x="2254649" y="4169664"/>
+          <p:cNvPr id="37" name="Text 35"/>
+          <p:cNvSpPr/>
+          <p:nvPr/>
+        </p:nvSpPr>
+        <p:spPr>
+          <a:xfrm>
+            <a:off x="2124837" y="4169664"/>
             <a:ext cx="685800" cy="475488"/>
           </a:xfrm>
           <a:prstGeom prst="rect">
@@ -32606,7 +32732,7 @@
                 <a:ea typeface="Trebuchet MS" pitchFamily="34" charset="-122"/>
                 <a:cs typeface="Trebuchet MS" pitchFamily="34" charset="-120"/>
               </a:rPr>
-              <a:t>p</a:t>
+              <a:t>d</a:t>
             </a:r>
             <a:endParaRPr lang="en-US" sz="900" dirty="0"/>
           </a:p>
@@ -32614,13 +32740,13 @@
       </p:sp>
       <p:sp>
         <p:nvSpPr>
-          <p:cNvPr id="35" name="Shape 33"/>
-          <p:cNvSpPr/>
-          <p:nvPr/>
-        </p:nvSpPr>
-        <p:spPr>
-          <a:xfrm>
-            <a:off x="3293146" y="4169664"/>
+          <p:cNvPr id="38" name="Shape 36"/>
+          <p:cNvSpPr/>
+          <p:nvPr/>
+        </p:nvSpPr>
+        <p:spPr>
+          <a:xfrm>
+            <a:off x="3033522" y="4169664"/>
             <a:ext cx="685800" cy="475488"/>
           </a:xfrm>
           <a:prstGeom prst="rect">
@@ -32641,13 +32767,13 @@
       </p:sp>
       <p:sp>
         <p:nvSpPr>
-          <p:cNvPr id="36" name="Text 34"/>
-          <p:cNvSpPr/>
-          <p:nvPr/>
-        </p:nvSpPr>
-        <p:spPr>
-          <a:xfrm>
-            <a:off x="3293146" y="4169664"/>
+          <p:cNvPr id="39" name="Text 37"/>
+          <p:cNvSpPr/>
+          <p:nvPr/>
+        </p:nvSpPr>
+        <p:spPr>
+          <a:xfrm>
+            <a:off x="3033522" y="4169664"/>
             <a:ext cx="685800" cy="475488"/>
           </a:xfrm>
           <a:prstGeom prst="rect">
@@ -32672,7 +32798,7 @@
                 <a:ea typeface="Trebuchet MS" pitchFamily="34" charset="-122"/>
                 <a:cs typeface="Trebuchet MS" pitchFamily="34" charset="-120"/>
               </a:rPr>
-              <a:t>r</a:t>
+              <a:t>e</a:t>
             </a:r>
             <a:endParaRPr lang="en-US" sz="900" dirty="0"/>
           </a:p>
@@ -32680,13 +32806,13 @@
       </p:sp>
       <p:sp>
         <p:nvSpPr>
-          <p:cNvPr id="37" name="Shape 35"/>
-          <p:cNvSpPr/>
-          <p:nvPr/>
-        </p:nvSpPr>
-        <p:spPr>
-          <a:xfrm>
-            <a:off x="4331643" y="4169664"/>
+          <p:cNvPr id="40" name="Shape 38"/>
+          <p:cNvSpPr/>
+          <p:nvPr/>
+        </p:nvSpPr>
+        <p:spPr>
+          <a:xfrm>
+            <a:off x="3942207" y="4169664"/>
             <a:ext cx="685800" cy="475488"/>
           </a:xfrm>
           <a:prstGeom prst="rect">
@@ -32707,13 +32833,13 @@
       </p:sp>
       <p:sp>
         <p:nvSpPr>
-          <p:cNvPr id="38" name="Text 36"/>
-          <p:cNvSpPr/>
-          <p:nvPr/>
-        </p:nvSpPr>
-        <p:spPr>
-          <a:xfrm>
-            <a:off x="4331643" y="4169664"/>
+          <p:cNvPr id="41" name="Text 39"/>
+          <p:cNvSpPr/>
+          <p:nvPr/>
+        </p:nvSpPr>
+        <p:spPr>
+          <a:xfrm>
+            <a:off x="3942207" y="4169664"/>
             <a:ext cx="685800" cy="475488"/>
           </a:xfrm>
           <a:prstGeom prst="rect">
@@ -32738,7 +32864,7 @@
                 <a:ea typeface="Trebuchet MS" pitchFamily="34" charset="-122"/>
                 <a:cs typeface="Trebuchet MS" pitchFamily="34" charset="-120"/>
               </a:rPr>
-              <a:t>e</a:t>
+              <a:t>p</a:t>
             </a:r>
             <a:endParaRPr lang="en-US" sz="900" dirty="0"/>
           </a:p>
@@ -32746,13 +32872,13 @@
       </p:sp>
       <p:sp>
         <p:nvSpPr>
-          <p:cNvPr id="39" name="Shape 37"/>
-          <p:cNvSpPr/>
-          <p:nvPr/>
-        </p:nvSpPr>
-        <p:spPr>
-          <a:xfrm>
-            <a:off x="5370141" y="4169664"/>
+          <p:cNvPr id="42" name="Shape 40"/>
+          <p:cNvSpPr/>
+          <p:nvPr/>
+        </p:nvSpPr>
+        <p:spPr>
+          <a:xfrm>
+            <a:off x="4850892" y="4169664"/>
             <a:ext cx="685800" cy="475488"/>
           </a:xfrm>
           <a:prstGeom prst="rect">
@@ -32773,13 +32899,13 @@
       </p:sp>
       <p:sp>
         <p:nvSpPr>
-          <p:cNvPr id="40" name="Text 38"/>
-          <p:cNvSpPr/>
-          <p:nvPr/>
-        </p:nvSpPr>
-        <p:spPr>
-          <a:xfrm>
-            <a:off x="5370141" y="4169664"/>
+          <p:cNvPr id="43" name="Text 41"/>
+          <p:cNvSpPr/>
+          <p:nvPr/>
+        </p:nvSpPr>
+        <p:spPr>
+          <a:xfrm>
+            <a:off x="4850892" y="4169664"/>
             <a:ext cx="685800" cy="475488"/>
           </a:xfrm>
           <a:prstGeom prst="rect">
@@ -32804,7 +32930,7 @@
                 <a:ea typeface="Trebuchet MS" pitchFamily="34" charset="-122"/>
                 <a:cs typeface="Trebuchet MS" pitchFamily="34" charset="-120"/>
               </a:rPr>
-              <a:t>ss</a:t>
+              <a:t>r</a:t>
             </a:r>
             <a:endParaRPr lang="en-US" sz="900" dirty="0"/>
           </a:p>
@@ -32812,13 +32938,13 @@
       </p:sp>
       <p:sp>
         <p:nvSpPr>
-          <p:cNvPr id="41" name="Shape 39"/>
-          <p:cNvSpPr/>
-          <p:nvPr/>
-        </p:nvSpPr>
-        <p:spPr>
-          <a:xfrm>
-            <a:off x="6408638" y="4169664"/>
+          <p:cNvPr id="44" name="Shape 42"/>
+          <p:cNvSpPr/>
+          <p:nvPr/>
+        </p:nvSpPr>
+        <p:spPr>
+          <a:xfrm>
+            <a:off x="5759577" y="4169664"/>
             <a:ext cx="685800" cy="475488"/>
           </a:xfrm>
           <a:prstGeom prst="rect">
@@ -32839,13 +32965,13 @@
       </p:sp>
       <p:sp>
         <p:nvSpPr>
-          <p:cNvPr id="42" name="Text 40"/>
-          <p:cNvSpPr/>
-          <p:nvPr/>
-        </p:nvSpPr>
-        <p:spPr>
-          <a:xfrm>
-            <a:off x="6408638" y="4169664"/>
+          <p:cNvPr id="45" name="Text 43"/>
+          <p:cNvSpPr/>
+          <p:nvPr/>
+        </p:nvSpPr>
+        <p:spPr>
+          <a:xfrm>
+            <a:off x="5759577" y="4169664"/>
             <a:ext cx="685800" cy="475488"/>
           </a:xfrm>
           <a:prstGeom prst="rect">
@@ -32870,7 +32996,7 @@
                 <a:ea typeface="Trebuchet MS" pitchFamily="34" charset="-122"/>
                 <a:cs typeface="Trebuchet MS" pitchFamily="34" charset="-120"/>
               </a:rPr>
-              <a:t>u</a:t>
+              <a:t>e</a:t>
             </a:r>
             <a:endParaRPr lang="en-US" sz="900" dirty="0"/>
           </a:p>
@@ -32878,13 +33004,13 @@
       </p:sp>
       <p:sp>
         <p:nvSpPr>
-          <p:cNvPr id="43" name="Shape 41"/>
-          <p:cNvSpPr/>
-          <p:nvPr/>
-        </p:nvSpPr>
-        <p:spPr>
-          <a:xfrm>
-            <a:off x="7447135" y="4169664"/>
+          <p:cNvPr id="46" name="Shape 44"/>
+          <p:cNvSpPr/>
+          <p:nvPr/>
+        </p:nvSpPr>
+        <p:spPr>
+          <a:xfrm>
+            <a:off x="6668262" y="4169664"/>
             <a:ext cx="685800" cy="475488"/>
           </a:xfrm>
           <a:prstGeom prst="rect">
@@ -32905,13 +33031,13 @@
       </p:sp>
       <p:sp>
         <p:nvSpPr>
-          <p:cNvPr id="44" name="Text 42"/>
-          <p:cNvSpPr/>
-          <p:nvPr/>
-        </p:nvSpPr>
-        <p:spPr>
-          <a:xfrm>
-            <a:off x="7447135" y="4169664"/>
+          <p:cNvPr id="47" name="Text 45"/>
+          <p:cNvSpPr/>
+          <p:nvPr/>
+        </p:nvSpPr>
+        <p:spPr>
+          <a:xfrm>
+            <a:off x="6668262" y="4169664"/>
             <a:ext cx="685800" cy="475488"/>
           </a:xfrm>
           <a:prstGeom prst="rect">
@@ -32936,7 +33062,73 @@
                 <a:ea typeface="Trebuchet MS" pitchFamily="34" charset="-122"/>
                 <a:cs typeface="Trebuchet MS" pitchFamily="34" charset="-120"/>
               </a:rPr>
-              <a:t>re</a:t>
+              <a:t>ss</a:t>
+            </a:r>
+            <a:endParaRPr lang="en-US" sz="900" dirty="0"/>
+          </a:p>
+        </p:txBody>
+      </p:sp>
+      <p:sp>
+        <p:nvSpPr>
+          <p:cNvPr id="48" name="Shape 46"/>
+          <p:cNvSpPr/>
+          <p:nvPr/>
+        </p:nvSpPr>
+        <p:spPr>
+          <a:xfrm>
+            <a:off x="7576947" y="4169664"/>
+            <a:ext cx="685800" cy="475488"/>
+          </a:xfrm>
+          <a:prstGeom prst="rect">
+            <a:avLst>
+              <a:gd name="adj" fmla="val 7692"/>
+            </a:avLst>
+          </a:prstGeom>
+          <a:solidFill>
+            <a:srgbClr val="FFFFFF"/>
+          </a:solidFill>
+          <a:ln w="12700">
+            <a:solidFill>
+              <a:srgbClr val="DB2777"/>
+            </a:solidFill>
+            <a:prstDash val="solid"/>
+          </a:ln>
+        </p:spPr>
+      </p:sp>
+      <p:sp>
+        <p:nvSpPr>
+          <p:cNvPr id="49" name="Text 47"/>
+          <p:cNvSpPr/>
+          <p:nvPr/>
+        </p:nvSpPr>
+        <p:spPr>
+          <a:xfrm>
+            <a:off x="7576947" y="4169664"/>
+            <a:ext cx="685800" cy="475488"/>
+          </a:xfrm>
+          <a:prstGeom prst="rect">
+            <a:avLst/>
+          </a:prstGeom>
+          <a:noFill/>
+          <a:ln/>
+        </p:spPr>
+        <p:txBody>
+          <a:bodyPr wrap="square" lIns="0" tIns="0" rIns="0" bIns="0" rtlCol="0" anchor="ctr"/>
+          <a:lstStyle/>
+          <a:p>
+            <a:pPr algn="ctr" indent="0" marL="0">
+              <a:buNone/>
+            </a:pPr>
+            <a:r>
+              <a:rPr lang="en-US" sz="900" b="1" dirty="0">
+                <a:solidFill>
+                  <a:srgbClr val="9D174D"/>
+                </a:solidFill>
+                <a:latin typeface="Trebuchet MS" pitchFamily="34" charset="0"/>
+                <a:ea typeface="Trebuchet MS" pitchFamily="34" charset="-122"/>
+                <a:cs typeface="Trebuchet MS" pitchFamily="34" charset="-120"/>
+              </a:rPr>
+              <a:t>ed</a:t>
             </a:r>
             <a:endParaRPr lang="en-US" sz="900" dirty="0"/>
           </a:p>
@@ -35285,7 +35477,7 @@
                 <a:ea typeface="Trebuchet MS" pitchFamily="34" charset="-122"/>
                 <a:cs typeface="Trebuchet MS" pitchFamily="34" charset="-120"/>
               </a:rPr>
-              <a:t>-ure</a:t>
+              <a:t>-ive</a:t>
             </a:r>
             <a:endParaRPr lang="en-US" sz="1300" dirty="0"/>
           </a:p>
@@ -35438,7 +35630,7 @@
                 <a:ea typeface="Trebuchet MS" pitchFamily="34" charset="-122"/>
                 <a:cs typeface="Trebuchet MS" pitchFamily="34" charset="-120"/>
               </a:rPr>
-              <a:t>-ive</a:t>
+              <a:t>-ure</a:t>
             </a:r>
             <a:endParaRPr lang="en-US" sz="1300" dirty="0"/>
           </a:p>
@@ -35873,7 +36065,7 @@
                 <a:ea typeface="Trebuchet MS" pitchFamily="34" charset="-122"/>
                 <a:cs typeface="Trebuchet MS" pitchFamily="34" charset="-120"/>
               </a:rPr>
-              <a:t>pressure</a:t>
+              <a:t>pressing</a:t>
             </a:r>
             <a:endParaRPr lang="en-US" sz="1200" dirty="0"/>
           </a:p>
@@ -35939,7 +36131,7 @@
                 <a:ea typeface="Trebuchet MS" pitchFamily="34" charset="-122"/>
                 <a:cs typeface="Trebuchet MS" pitchFamily="34" charset="-120"/>
               </a:rPr>
-              <a:t>impression</a:t>
+              <a:t>pressure</a:t>
             </a:r>
             <a:endParaRPr lang="en-US" sz="1200" dirty="0"/>
           </a:p>
@@ -36005,7 +36197,7 @@
                 <a:ea typeface="Trebuchet MS" pitchFamily="34" charset="-122"/>
                 <a:cs typeface="Trebuchet MS" pitchFamily="34" charset="-120"/>
               </a:rPr>
-              <a:t>expressive</a:t>
+              <a:t>expression</a:t>
             </a:r>
             <a:endParaRPr lang="en-US" sz="1200" dirty="0"/>
           </a:p>
@@ -37193,7 +37385,7 @@
                 <a:ea typeface="Calibri" pitchFamily="34" charset="-122"/>
                 <a:cs typeface="Calibri" pitchFamily="34" charset="-120"/>
               </a:rPr>
-              <a:t>1.  The root 'press' comes from a Latin word meaning to push or squeeze.</a:t>
+              <a:t>1.  The prefix 'com' in 'compress' means together, so compress means to push or squeeze together.</a:t>
             </a:r>
             <a:endParaRPr lang="en-US" sz="1300" dirty="0"/>
           </a:p>
@@ -37332,7 +37524,7 @@
                 <a:ea typeface="Calibri" pitchFamily="34" charset="-122"/>
                 <a:cs typeface="Calibri" pitchFamily="34" charset="-120"/>
               </a:rPr>
-              <a:t>2.  The word 'express' means to push something back to where it started.</a:t>
+              <a:t>2.  The root 'press' is found in fewer than three common English words.</a:t>
             </a:r>
             <a:endParaRPr lang="en-US" sz="1300" dirty="0"/>
           </a:p>
@@ -37471,7 +37663,7 @@
                 <a:ea typeface="Calibri" pitchFamily="34" charset="-122"/>
                 <a:cs typeface="Calibri" pitchFamily="34" charset="-120"/>
               </a:rPr>
-              <a:t>3.  The word 'compress' contains the prefix 'com' meaning together.</a:t>
+              <a:t>3.  The root 'press' comes from a Latin word meaning to push or squeeze.</a:t>
             </a:r>
             <a:endParaRPr lang="en-US" sz="1300" dirty="0"/>
           </a:p>
@@ -37610,7 +37802,7 @@
                 <a:ea typeface="Calibri" pitchFamily="34" charset="-122"/>
                 <a:cs typeface="Calibri" pitchFamily="34" charset="-120"/>
               </a:rPr>
-              <a:t>4.  Pressure is a word that contains the root 'press'.</a:t>
+              <a:t>4.  The word 'impressive' contains the root 'press'.</a:t>
             </a:r>
             <a:endParaRPr lang="en-US" sz="1300" dirty="0"/>
           </a:p>
@@ -37749,7 +37941,7 @@
                 <a:ea typeface="Calibri" pitchFamily="34" charset="-122"/>
                 <a:cs typeface="Calibri" pitchFamily="34" charset="-120"/>
               </a:rPr>
-              <a:t>5.  The prefix 'de' in 'depress' means above or on top of.</a:t>
+              <a:t>5.  The word 'express' has nothing to do with pushing or squeezing an idea out.</a:t>
             </a:r>
             <a:endParaRPr lang="en-US" sz="1300" dirty="0"/>
           </a:p>
@@ -38718,7 +38910,7 @@
                 <a:ea typeface="Trebuchet MS" pitchFamily="34" charset="-122"/>
                 <a:cs typeface="Trebuchet MS" pitchFamily="34" charset="-120"/>
               </a:rPr>
-              <a:t>pressure</a:t>
+              <a:t>pressing</a:t>
             </a:r>
             <a:endParaRPr lang="en-US" sz="1300" dirty="0"/>
           </a:p>
@@ -38784,7 +38976,7 @@
                 <a:ea typeface="Trebuchet MS" pitchFamily="34" charset="-122"/>
                 <a:cs typeface="Trebuchet MS" pitchFamily="34" charset="-120"/>
               </a:rPr>
-              <a:t>impression</a:t>
+              <a:t>pressure</a:t>
             </a:r>
             <a:endParaRPr lang="en-US" sz="1300" dirty="0"/>
           </a:p>
@@ -39964,7 +40156,7 @@
                 <a:ea typeface="Trebuchet MS" pitchFamily="34" charset="-122"/>
                 <a:cs typeface="Trebuchet MS" pitchFamily="34" charset="-120"/>
               </a:rPr>
-              <a:t>-ure</a:t>
+              <a:t>-ive</a:t>
             </a:r>
             <a:endParaRPr lang="en-US" sz="1300" dirty="0"/>
           </a:p>
@@ -40117,7 +40309,7 @@
                 <a:ea typeface="Trebuchet MS" pitchFamily="34" charset="-122"/>
                 <a:cs typeface="Trebuchet MS" pitchFamily="34" charset="-120"/>
               </a:rPr>
-              <a:t>-ive</a:t>
+              <a:t>-ure</a:t>
             </a:r>
             <a:endParaRPr lang="en-US" sz="1300" dirty="0"/>
           </a:p>
@@ -41028,7 +41220,7 @@
                 <a:ea typeface="Calibri" pitchFamily="34" charset="-122"/>
                 <a:cs typeface="Calibri" pitchFamily="34" charset="-120"/>
               </a:rPr>
-              <a:t>To show or share your thoughts and feelings.</a:t>
+              <a:t>To show or share your feelings, thoughts or ideas with others.</a:t>
             </a:r>
             <a:endParaRPr lang="en-US" sz="1200" dirty="0"/>
           </a:p>
@@ -41167,7 +41359,7 @@
                 <a:ea typeface="Calibri" pitchFamily="34" charset="-122"/>
                 <a:cs typeface="Calibri" pitchFamily="34" charset="-120"/>
               </a:rPr>
-              <a:t>To hold back or force down feelings or actions.</a:t>
+              <a:t>To hold back or push down a feeling so it doesn't come out.</a:t>
             </a:r>
             <a:endParaRPr lang="en-US" sz="1200" dirty="0"/>
           </a:p>
@@ -41306,7 +41498,7 @@
                 <a:ea typeface="Calibri" pitchFamily="34" charset="-122"/>
                 <a:cs typeface="Calibri" pitchFamily="34" charset="-120"/>
               </a:rPr>
-              <a:t>To squeeze something together to make it smaller.</a:t>
+              <a:t>To squeeze something together to make it smaller, like squashing a sponge.</a:t>
             </a:r>
             <a:endParaRPr lang="en-US" sz="1200" dirty="0"/>
           </a:p>
@@ -41445,7 +41637,7 @@
                 <a:ea typeface="Calibri" pitchFamily="34" charset="-122"/>
                 <a:cs typeface="Calibri" pitchFamily="34" charset="-120"/>
               </a:rPr>
-              <a:t>A pushing force on something, or a feeling of stress.</a:t>
+              <a:t>Something that is very urgent and needs to be dealt with straight away.</a:t>
             </a:r>
             <a:endParaRPr lang="en-US" sz="1200" dirty="0"/>
           </a:p>
@@ -41584,7 +41776,7 @@
                 <a:ea typeface="Calibri" pitchFamily="34" charset="-122"/>
                 <a:cs typeface="Calibri" pitchFamily="34" charset="-120"/>
               </a:rPr>
-              <a:t>The effect or feeling something leaves on your mind.</a:t>
+              <a:t>A pushing force on something, or the feeling of stress when you must do something.</a:t>
             </a:r>
             <a:endParaRPr lang="en-US" sz="1200" dirty="0"/>
           </a:p>
@@ -41657,7 +41849,7 @@
                 <a:ea typeface="Trebuchet MS" pitchFamily="34" charset="-122"/>
                 <a:cs typeface="Trebuchet MS" pitchFamily="34" charset="-120"/>
               </a:rPr>
-              <a:t>pressure</a:t>
+              <a:t>pressing</a:t>
             </a:r>
             <a:endParaRPr lang="en-US" sz="1200" dirty="0"/>
           </a:p>
@@ -41723,7 +41915,7 @@
                 <a:ea typeface="Calibri" pitchFamily="34" charset="-122"/>
                 <a:cs typeface="Calibri" pitchFamily="34" charset="-120"/>
               </a:rPr>
-              <a:t>To make someone feel admiration or respect for you.</a:t>
+              <a:t>To make someone think you are really good or amazing at something.</a:t>
             </a:r>
             <a:endParaRPr lang="en-US" sz="1200" dirty="0"/>
           </a:p>
@@ -41796,7 +41988,7 @@
                 <a:ea typeface="Trebuchet MS" pitchFamily="34" charset="-122"/>
                 <a:cs typeface="Trebuchet MS" pitchFamily="34" charset="-120"/>
               </a:rPr>
-              <a:t>impression</a:t>
+              <a:t>pressure</a:t>
             </a:r>
             <a:endParaRPr lang="en-US" sz="1200" dirty="0"/>
           </a:p>
@@ -41862,7 +42054,7 @@
                 <a:ea typeface="Calibri" pitchFamily="34" charset="-122"/>
                 <a:cs typeface="Calibri" pitchFamily="34" charset="-120"/>
               </a:rPr>
-              <a:t>To push something down, or to make someone feel very sad.</a:t>
+              <a:t>To push something down, or to make someone feel very sad and hopeless.</a:t>
             </a:r>
             <a:endParaRPr lang="en-US" sz="1200" dirty="0"/>
           </a:p>
@@ -42357,7 +42549,7 @@
                 <a:ea typeface="Calibri" pitchFamily="34" charset="-122"/>
                 <a:cs typeface="Calibri" pitchFamily="34" charset="-120"/>
               </a:rPr>
-              <a:t>The doctor said to compress the wound by pressing a clean cloth firmly against it.</a:t>
+              <a:t>The scientist used a machine to compress the gas into a tiny container.</a:t>
             </a:r>
             <a:endParaRPr lang="en-US" sz="1500" dirty="0"/>
           </a:p>
@@ -42521,7 +42713,7 @@
                 <a:ea typeface="Calibri" pitchFamily="34" charset="-122"/>
                 <a:cs typeface="Calibri" pitchFamily="34" charset="-120"/>
               </a:rPr>
-              <a:t>Maya wanted to express her feelings about the poem, so she painted a colourful picture.</a:t>
+              <a:t>She could express her feelings clearly by writing them down in her journal.</a:t>
             </a:r>
             <a:endParaRPr lang="en-US" sz="1500" dirty="0"/>
           </a:p>
@@ -42685,7 +42877,7 @@
                 <a:ea typeface="Calibri" pitchFamily="34" charset="-122"/>
                 <a:cs typeface="Calibri" pitchFamily="34" charset="-120"/>
               </a:rPr>
-              <a:t>The heavy weight of the backpack put a lot of pressure on his shoulders during the long hike.</a:t>
+              <a:t>The pressure of the heavy rock slowly crushed the leaves underneath it.</a:t>
             </a:r>
             <a:endParaRPr lang="en-US" sz="1500" dirty="0"/>
           </a:p>

--- a/output/wordlabs-press-3day.pptx
+++ b/output/wordlabs-press-3day.pptx
@@ -4240,7 +4240,7 @@
                 <a:ea typeface="Calibri" pitchFamily="34" charset="-122"/>
                 <a:cs typeface="Calibri" pitchFamily="34" charset="-120"/>
               </a:rPr>
-              <a:t>"to push down or squeeze"</a:t>
+              <a:t>"press; push"</a:t>
             </a:r>
             <a:endParaRPr lang="en-US" sz="2200" dirty="0"/>
           </a:p>
@@ -4279,7 +4279,7 @@
                 <a:ea typeface="Calibri" pitchFamily="34" charset="-122"/>
                 <a:cs typeface="Calibri" pitchFamily="34" charset="-120"/>
               </a:rPr>
-              <a:t>Origin: Latin: pressare</a:t>
+              <a:t>Origin: Latin root</a:t>
             </a:r>
             <a:endParaRPr lang="en-US" sz="1300" dirty="0"/>
           </a:p>
@@ -5288,7 +5288,7 @@
                 <a:ea typeface="Calibri" pitchFamily="34" charset="-122"/>
                 <a:cs typeface="Calibri" pitchFamily="34" charset="-120"/>
               </a:rPr>
-              <a:t>Word Labs  •  wordlabs.app  •  Root: 'press' = to push down or squeeze</a:t>
+              <a:t>Word Labs  •  wordlabs.app  •  Root: 'press' = press; push</a:t>
             </a:r>
             <a:endParaRPr lang="en-US" sz="800" dirty="0"/>
           </a:p>
@@ -5928,7 +5928,7 @@
                 <a:ea typeface="Calibri" pitchFamily="34" charset="-122"/>
                 <a:cs typeface="Calibri" pitchFamily="34" charset="-120"/>
               </a:rPr>
-              <a:t>Word Labs  •  wordlabs.app  •  Root: 'press' = to push down or squeeze</a:t>
+              <a:t>Word Labs  •  wordlabs.app  •  Root: 'press' = press; push</a:t>
             </a:r>
             <a:endParaRPr lang="en-US" sz="800" dirty="0"/>
           </a:p>
@@ -6040,7 +6040,7 @@
                 <a:ea typeface="Calibri" pitchFamily="34" charset="-122"/>
                 <a:cs typeface="Calibri" pitchFamily="34" charset="-120"/>
               </a:rPr>
-              <a:t>The doctor explained that too much </a:t>
+              <a:t>He </a:t>
             </a:r>
             <a:pPr algn="l" indent="0" marL="0">
               <a:buNone/>
@@ -6057,7 +6057,7 @@
                 <a:ea typeface="Calibri" pitchFamily="34" charset="-122"/>
                 <a:cs typeface="Calibri" pitchFamily="34" charset="-120"/>
               </a:rPr>
-              <a:t>pressure</a:t>
+              <a:t>suppressed</a:t>
             </a:r>
             <a:pPr algn="l" indent="0" marL="0">
               <a:buNone/>
@@ -6071,7 +6071,7 @@
                 <a:ea typeface="Calibri" pitchFamily="34" charset="-122"/>
                 <a:cs typeface="Calibri" pitchFamily="34" charset="-120"/>
               </a:rPr>
-              <a:t> on the wound could </a:t>
+              <a:t> his anger and stayed calm. </a:t>
             </a:r>
             <a:pPr algn="l" indent="0" marL="0">
               <a:buNone/>
@@ -6088,7 +6088,7 @@
                 <a:ea typeface="Calibri" pitchFamily="34" charset="-122"/>
                 <a:cs typeface="Calibri" pitchFamily="34" charset="-120"/>
               </a:rPr>
-              <a:t>compress</a:t>
+              <a:t>Compression</a:t>
             </a:r>
             <a:pPr algn="l" indent="0" marL="0">
               <a:buNone/>
@@ -6102,7 +6102,7 @@
                 <a:ea typeface="Calibri" pitchFamily="34" charset="-122"/>
                 <a:cs typeface="Calibri" pitchFamily="34" charset="-120"/>
               </a:rPr>
-              <a:t> the blood vessels.</a:t>
+              <a:t> reduces the size of a computer file.</a:t>
             </a:r>
             <a:endParaRPr lang="en-US" sz="1800" dirty="0"/>
           </a:p>
@@ -6257,7 +6257,7 @@
                 <a:ea typeface="Trebuchet MS" pitchFamily="34" charset="-122"/>
                 <a:cs typeface="Trebuchet MS" pitchFamily="34" charset="-120"/>
               </a:rPr>
-              <a:t>pressure</a:t>
+              <a:t>suppressed</a:t>
             </a:r>
             <a:endParaRPr lang="en-US" sz="1400" dirty="0"/>
           </a:p>
@@ -6385,7 +6385,7 @@
                 <a:ea typeface="Trebuchet MS" pitchFamily="34" charset="-122"/>
                 <a:cs typeface="Trebuchet MS" pitchFamily="34" charset="-120"/>
               </a:rPr>
-              <a:t>compress</a:t>
+              <a:t>compression</a:t>
             </a:r>
             <a:endParaRPr lang="en-US" sz="1400" dirty="0"/>
           </a:p>
@@ -6716,7 +6716,7 @@
                 <a:ea typeface="Calibri" pitchFamily="34" charset="-122"/>
                 <a:cs typeface="Calibri" pitchFamily="34" charset="-120"/>
               </a:rPr>
-              <a:t>Word Labs  •  wordlabs.app  •  Root: 'press' = to push down or squeeze</a:t>
+              <a:t>Word Labs  •  wordlabs.app  •  Root: 'press' = press; push</a:t>
             </a:r>
             <a:endParaRPr lang="en-US" sz="800" dirty="0"/>
           </a:p>
@@ -6855,7 +6855,7 @@
                 <a:ea typeface="Trebuchet MS" pitchFamily="34" charset="-122"/>
                 <a:cs typeface="Trebuchet MS" pitchFamily="34" charset="-120"/>
               </a:rPr>
-              <a:t>pressure</a:t>
+              <a:t>suppressed</a:t>
             </a:r>
             <a:endParaRPr lang="en-US" sz="2800" dirty="0"/>
           </a:p>
@@ -7543,7 +7543,7 @@
                 <a:ea typeface="Calibri" pitchFamily="34" charset="-122"/>
                 <a:cs typeface="Calibri" pitchFamily="34" charset="-120"/>
               </a:rPr>
-              <a:t>Word Labs  •  wordlabs.app  •  Root: 'press' = to push down or squeeze</a:t>
+              <a:t>Word Labs  •  wordlabs.app  •  Root: 'press' = press; push</a:t>
             </a:r>
             <a:endParaRPr lang="en-US" sz="800" dirty="0"/>
           </a:p>
@@ -7682,7 +7682,7 @@
                 <a:ea typeface="Trebuchet MS" pitchFamily="34" charset="-122"/>
                 <a:cs typeface="Trebuchet MS" pitchFamily="34" charset="-120"/>
               </a:rPr>
-              <a:t>pressure</a:t>
+              <a:t>suppressed</a:t>
             </a:r>
             <a:endParaRPr lang="en-US" sz="2800" dirty="0"/>
           </a:p>
@@ -7762,7 +7762,7 @@
         </p:nvSpPr>
         <p:spPr>
           <a:xfrm>
-            <a:off x="2938272" y="2258568"/>
+            <a:off x="2221992" y="2258568"/>
             <a:ext cx="1828800" cy="292608"/>
           </a:xfrm>
           <a:prstGeom prst="rect">
@@ -7771,11 +7771,11 @@
             </a:avLst>
           </a:prstGeom>
           <a:solidFill>
-            <a:srgbClr val="CCFBF1"/>
+            <a:srgbClr val="DDD6FE"/>
           </a:solidFill>
           <a:ln w="19050">
             <a:solidFill>
-              <a:srgbClr val="0D9488"/>
+              <a:srgbClr val="7C3AED"/>
             </a:solidFill>
             <a:prstDash val="solid"/>
           </a:ln>
@@ -7796,7 +7796,7 @@
         </p:nvSpPr>
         <p:spPr>
           <a:xfrm>
-            <a:off x="2938272" y="2258568"/>
+            <a:off x="2221992" y="2258568"/>
             <a:ext cx="1828800" cy="292608"/>
           </a:xfrm>
           <a:prstGeom prst="rect">
@@ -7815,13 +7815,13 @@
             <a:r>
               <a:rPr lang="en-US" sz="1300" b="1" dirty="0">
                 <a:solidFill>
-                  <a:srgbClr val="0F766E"/>
+                  <a:srgbClr val="4C1D95"/>
                 </a:solidFill>
                 <a:latin typeface="Trebuchet MS" pitchFamily="34" charset="0"/>
                 <a:ea typeface="Trebuchet MS" pitchFamily="34" charset="-122"/>
                 <a:cs typeface="Trebuchet MS" pitchFamily="34" charset="-120"/>
               </a:rPr>
-              <a:t>press</a:t>
+              <a:t>sub</a:t>
             </a:r>
             <a:endParaRPr lang="en-US" sz="1300" dirty="0"/>
           </a:p>
@@ -7835,7 +7835,7 @@
         </p:nvSpPr>
         <p:spPr>
           <a:xfrm>
-            <a:off x="2938272" y="2569464"/>
+            <a:off x="2221992" y="2569464"/>
             <a:ext cx="1828800" cy="201168"/>
           </a:xfrm>
           <a:prstGeom prst="rect">
@@ -7860,7 +7860,7 @@
                 <a:ea typeface="Calibri" pitchFamily="34" charset="-122"/>
                 <a:cs typeface="Calibri" pitchFamily="34" charset="-120"/>
               </a:rPr>
-              <a:t>to push or squeeze</a:t>
+              <a:t>under; below</a:t>
             </a:r>
             <a:endParaRPr lang="en-US" sz="850" dirty="0"/>
           </a:p>
@@ -7874,7 +7874,7 @@
         </p:nvSpPr>
         <p:spPr>
           <a:xfrm>
-            <a:off x="5803392" y="2258568"/>
+            <a:off x="4370832" y="2258568"/>
             <a:ext cx="1828800" cy="292608"/>
           </a:xfrm>
           <a:prstGeom prst="rect">
@@ -7883,11 +7883,11 @@
             </a:avLst>
           </a:prstGeom>
           <a:solidFill>
-            <a:srgbClr val="FCE7F3"/>
+            <a:srgbClr val="CCFBF1"/>
           </a:solidFill>
           <a:ln w="19050">
             <a:solidFill>
-              <a:srgbClr val="DB2777"/>
+              <a:srgbClr val="0D9488"/>
             </a:solidFill>
             <a:prstDash val="solid"/>
           </a:ln>
@@ -7908,7 +7908,7 @@
         </p:nvSpPr>
         <p:spPr>
           <a:xfrm>
-            <a:off x="5803392" y="2258568"/>
+            <a:off x="4370832" y="2258568"/>
             <a:ext cx="1828800" cy="292608"/>
           </a:xfrm>
           <a:prstGeom prst="rect">
@@ -7927,13 +7927,13 @@
             <a:r>
               <a:rPr lang="en-US" sz="1300" b="1" dirty="0">
                 <a:solidFill>
-                  <a:srgbClr val="9D174D"/>
+                  <a:srgbClr val="0F766E"/>
                 </a:solidFill>
                 <a:latin typeface="Trebuchet MS" pitchFamily="34" charset="0"/>
                 <a:ea typeface="Trebuchet MS" pitchFamily="34" charset="-122"/>
                 <a:cs typeface="Trebuchet MS" pitchFamily="34" charset="-120"/>
               </a:rPr>
-              <a:t>ure</a:t>
+              <a:t>press</a:t>
             </a:r>
             <a:endParaRPr lang="en-US" sz="1300" dirty="0"/>
           </a:p>
@@ -7947,7 +7947,7 @@
         </p:nvSpPr>
         <p:spPr>
           <a:xfrm>
-            <a:off x="5803392" y="2569464"/>
+            <a:off x="4370832" y="2569464"/>
             <a:ext cx="1828800" cy="201168"/>
           </a:xfrm>
           <a:prstGeom prst="rect">
@@ -7972,7 +7972,7 @@
                 <a:ea typeface="Calibri" pitchFamily="34" charset="-122"/>
                 <a:cs typeface="Calibri" pitchFamily="34" charset="-120"/>
               </a:rPr>
-              <a:t>state or condition of</a:t>
+              <a:t>press; push</a:t>
             </a:r>
             <a:endParaRPr lang="en-US" sz="850" dirty="0"/>
           </a:p>
@@ -7981,6 +7981,118 @@
       <p:sp>
         <p:nvSpPr>
           <p:cNvPr id="22" name="Shape 20"/>
+          <p:cNvSpPr/>
+          <p:nvPr/>
+        </p:nvSpPr>
+        <p:spPr>
+          <a:xfrm>
+            <a:off x="6519672" y="2258568"/>
+            <a:ext cx="1828800" cy="292608"/>
+          </a:xfrm>
+          <a:prstGeom prst="rect">
+            <a:avLst>
+              <a:gd name="adj" fmla="val 25000"/>
+            </a:avLst>
+          </a:prstGeom>
+          <a:solidFill>
+            <a:srgbClr val="FCE7F3"/>
+          </a:solidFill>
+          <a:ln w="19050">
+            <a:solidFill>
+              <a:srgbClr val="DB2777"/>
+            </a:solidFill>
+            <a:prstDash val="solid"/>
+          </a:ln>
+          <a:effectLst>
+            <a:outerShdw sx="100000" sy="100000" kx="0" ky="0" algn="bl" rotWithShape="0" blurRad="101600" dist="38100" dir="8100000">
+              <a:srgbClr val="000000">
+                <a:alpha val="12000"/>
+              </a:srgbClr>
+            </a:outerShdw>
+          </a:effectLst>
+        </p:spPr>
+      </p:sp>
+      <p:sp>
+        <p:nvSpPr>
+          <p:cNvPr id="23" name="Text 21"/>
+          <p:cNvSpPr/>
+          <p:nvPr/>
+        </p:nvSpPr>
+        <p:spPr>
+          <a:xfrm>
+            <a:off x="6519672" y="2258568"/>
+            <a:ext cx="1828800" cy="292608"/>
+          </a:xfrm>
+          <a:prstGeom prst="rect">
+            <a:avLst/>
+          </a:prstGeom>
+          <a:noFill/>
+          <a:ln/>
+        </p:spPr>
+        <p:txBody>
+          <a:bodyPr wrap="square" lIns="0" tIns="0" rIns="0" bIns="0" rtlCol="0" anchor="ctr"/>
+          <a:lstStyle/>
+          <a:p>
+            <a:pPr algn="ctr" indent="0" marL="0">
+              <a:buNone/>
+            </a:pPr>
+            <a:r>
+              <a:rPr lang="en-US" sz="1300" b="1" dirty="0">
+                <a:solidFill>
+                  <a:srgbClr val="9D174D"/>
+                </a:solidFill>
+                <a:latin typeface="Trebuchet MS" pitchFamily="34" charset="0"/>
+                <a:ea typeface="Trebuchet MS" pitchFamily="34" charset="-122"/>
+                <a:cs typeface="Trebuchet MS" pitchFamily="34" charset="-120"/>
+              </a:rPr>
+              <a:t>ed</a:t>
+            </a:r>
+            <a:endParaRPr lang="en-US" sz="1300" dirty="0"/>
+          </a:p>
+        </p:txBody>
+      </p:sp>
+      <p:sp>
+        <p:nvSpPr>
+          <p:cNvPr id="24" name="Text 22"/>
+          <p:cNvSpPr/>
+          <p:nvPr/>
+        </p:nvSpPr>
+        <p:spPr>
+          <a:xfrm>
+            <a:off x="6519672" y="2569464"/>
+            <a:ext cx="1828800" cy="201168"/>
+          </a:xfrm>
+          <a:prstGeom prst="rect">
+            <a:avLst/>
+          </a:prstGeom>
+          <a:noFill/>
+          <a:ln/>
+        </p:spPr>
+        <p:txBody>
+          <a:bodyPr wrap="square" lIns="0" tIns="0" rIns="0" bIns="0" rtlCol="0" anchor="t"/>
+          <a:lstStyle/>
+          <a:p>
+            <a:pPr algn="ctr" indent="0" marL="0">
+              <a:buNone/>
+            </a:pPr>
+            <a:r>
+              <a:rPr lang="en-US" sz="850" dirty="0">
+                <a:solidFill>
+                  <a:srgbClr val="475569"/>
+                </a:solidFill>
+                <a:latin typeface="Calibri" pitchFamily="34" charset="0"/>
+                <a:ea typeface="Calibri" pitchFamily="34" charset="-122"/>
+                <a:cs typeface="Calibri" pitchFamily="34" charset="-120"/>
+              </a:rPr>
+              <a:t>past tense</a:t>
+            </a:r>
+            <a:endParaRPr lang="en-US" sz="850" dirty="0"/>
+          </a:p>
+        </p:txBody>
+      </p:sp>
+      <p:sp>
+        <p:nvSpPr>
+          <p:cNvPr id="25" name="Shape 23"/>
           <p:cNvSpPr/>
           <p:nvPr/>
         </p:nvSpPr>
@@ -8007,7 +8119,7 @@
       </p:sp>
       <p:sp>
         <p:nvSpPr>
-          <p:cNvPr id="23" name="Text 21"/>
+          <p:cNvPr id="26" name="Text 24"/>
           <p:cNvSpPr/>
           <p:nvPr/>
         </p:nvSpPr>
@@ -8046,7 +8158,7 @@
       </p:sp>
       <p:sp>
         <p:nvSpPr>
-          <p:cNvPr id="24" name="Shape 22"/>
+          <p:cNvPr id="27" name="Shape 25"/>
           <p:cNvSpPr/>
           <p:nvPr/>
         </p:nvSpPr>
@@ -8073,7 +8185,7 @@
       </p:sp>
       <p:sp>
         <p:nvSpPr>
-          <p:cNvPr id="25" name="Text 23"/>
+          <p:cNvPr id="28" name="Text 26"/>
           <p:cNvSpPr/>
           <p:nvPr/>
         </p:nvSpPr>
@@ -8112,7 +8224,7 @@
       </p:sp>
       <p:sp>
         <p:nvSpPr>
-          <p:cNvPr id="26" name="Shape 24"/>
+          <p:cNvPr id="29" name="Shape 27"/>
           <p:cNvSpPr/>
           <p:nvPr/>
         </p:nvSpPr>
@@ -8139,7 +8251,7 @@
       </p:sp>
       <p:sp>
         <p:nvSpPr>
-          <p:cNvPr id="27" name="Text 25"/>
+          <p:cNvPr id="30" name="Text 28"/>
           <p:cNvSpPr/>
           <p:nvPr/>
         </p:nvSpPr>
@@ -8178,7 +8290,7 @@
       </p:sp>
       <p:sp>
         <p:nvSpPr>
-          <p:cNvPr id="28" name="Shape 26"/>
+          <p:cNvPr id="31" name="Shape 29"/>
           <p:cNvSpPr/>
           <p:nvPr/>
         </p:nvSpPr>
@@ -8205,7 +8317,7 @@
       </p:sp>
       <p:sp>
         <p:nvSpPr>
-          <p:cNvPr id="29" name="Text 27"/>
+          <p:cNvPr id="32" name="Text 30"/>
           <p:cNvSpPr/>
           <p:nvPr/>
         </p:nvSpPr>
@@ -8528,7 +8640,7 @@
                 <a:ea typeface="Calibri" pitchFamily="34" charset="-122"/>
                 <a:cs typeface="Calibri" pitchFamily="34" charset="-120"/>
               </a:rPr>
-              <a:t>Word Labs  •  wordlabs.app  •  Root: 'press' = to push down or squeeze</a:t>
+              <a:t>Word Labs  •  wordlabs.app  •  Root: 'press' = press; push</a:t>
             </a:r>
             <a:endParaRPr lang="en-US" sz="800" dirty="0"/>
           </a:p>
@@ -8667,7 +8779,7 @@
                 <a:ea typeface="Trebuchet MS" pitchFamily="34" charset="-122"/>
                 <a:cs typeface="Trebuchet MS" pitchFamily="34" charset="-120"/>
               </a:rPr>
-              <a:t>pressure</a:t>
+              <a:t>suppressed</a:t>
             </a:r>
             <a:endParaRPr lang="en-US" sz="2800" dirty="0"/>
           </a:p>
@@ -8747,7 +8859,7 @@
         </p:nvSpPr>
         <p:spPr>
           <a:xfrm>
-            <a:off x="2938272" y="2258568"/>
+            <a:off x="2221992" y="2258568"/>
             <a:ext cx="1828800" cy="292608"/>
           </a:xfrm>
           <a:prstGeom prst="rect">
@@ -8756,11 +8868,11 @@
             </a:avLst>
           </a:prstGeom>
           <a:solidFill>
-            <a:srgbClr val="CCFBF1"/>
+            <a:srgbClr val="DDD6FE"/>
           </a:solidFill>
           <a:ln w="19050">
             <a:solidFill>
-              <a:srgbClr val="0D9488"/>
+              <a:srgbClr val="7C3AED"/>
             </a:solidFill>
             <a:prstDash val="solid"/>
           </a:ln>
@@ -8781,7 +8893,7 @@
         </p:nvSpPr>
         <p:spPr>
           <a:xfrm>
-            <a:off x="2938272" y="2258568"/>
+            <a:off x="2221992" y="2258568"/>
             <a:ext cx="1828800" cy="292608"/>
           </a:xfrm>
           <a:prstGeom prst="rect">
@@ -8800,13 +8912,13 @@
             <a:r>
               <a:rPr lang="en-US" sz="1300" b="1" dirty="0">
                 <a:solidFill>
-                  <a:srgbClr val="0F766E"/>
+                  <a:srgbClr val="4C1D95"/>
                 </a:solidFill>
                 <a:latin typeface="Trebuchet MS" pitchFamily="34" charset="0"/>
                 <a:ea typeface="Trebuchet MS" pitchFamily="34" charset="-122"/>
                 <a:cs typeface="Trebuchet MS" pitchFamily="34" charset="-120"/>
               </a:rPr>
-              <a:t>press</a:t>
+              <a:t>sub</a:t>
             </a:r>
             <a:endParaRPr lang="en-US" sz="1300" dirty="0"/>
           </a:p>
@@ -8820,7 +8932,7 @@
         </p:nvSpPr>
         <p:spPr>
           <a:xfrm>
-            <a:off x="2938272" y="2569464"/>
+            <a:off x="2221992" y="2569464"/>
             <a:ext cx="1828800" cy="201168"/>
           </a:xfrm>
           <a:prstGeom prst="rect">
@@ -8845,7 +8957,7 @@
                 <a:ea typeface="Calibri" pitchFamily="34" charset="-122"/>
                 <a:cs typeface="Calibri" pitchFamily="34" charset="-120"/>
               </a:rPr>
-              <a:t>to push or squeeze</a:t>
+              <a:t>under; below</a:t>
             </a:r>
             <a:endParaRPr lang="en-US" sz="850" dirty="0"/>
           </a:p>
@@ -8859,7 +8971,7 @@
         </p:nvSpPr>
         <p:spPr>
           <a:xfrm>
-            <a:off x="5803392" y="2258568"/>
+            <a:off x="4370832" y="2258568"/>
             <a:ext cx="1828800" cy="292608"/>
           </a:xfrm>
           <a:prstGeom prst="rect">
@@ -8868,11 +8980,11 @@
             </a:avLst>
           </a:prstGeom>
           <a:solidFill>
-            <a:srgbClr val="FCE7F3"/>
+            <a:srgbClr val="CCFBF1"/>
           </a:solidFill>
           <a:ln w="19050">
             <a:solidFill>
-              <a:srgbClr val="DB2777"/>
+              <a:srgbClr val="0D9488"/>
             </a:solidFill>
             <a:prstDash val="solid"/>
           </a:ln>
@@ -8893,7 +9005,7 @@
         </p:nvSpPr>
         <p:spPr>
           <a:xfrm>
-            <a:off x="5803392" y="2258568"/>
+            <a:off x="4370832" y="2258568"/>
             <a:ext cx="1828800" cy="292608"/>
           </a:xfrm>
           <a:prstGeom prst="rect">
@@ -8912,13 +9024,13 @@
             <a:r>
               <a:rPr lang="en-US" sz="1300" b="1" dirty="0">
                 <a:solidFill>
-                  <a:srgbClr val="9D174D"/>
+                  <a:srgbClr val="0F766E"/>
                 </a:solidFill>
                 <a:latin typeface="Trebuchet MS" pitchFamily="34" charset="0"/>
                 <a:ea typeface="Trebuchet MS" pitchFamily="34" charset="-122"/>
                 <a:cs typeface="Trebuchet MS" pitchFamily="34" charset="-120"/>
               </a:rPr>
-              <a:t>ure</a:t>
+              <a:t>press</a:t>
             </a:r>
             <a:endParaRPr lang="en-US" sz="1300" dirty="0"/>
           </a:p>
@@ -8932,7 +9044,7 @@
         </p:nvSpPr>
         <p:spPr>
           <a:xfrm>
-            <a:off x="5803392" y="2569464"/>
+            <a:off x="4370832" y="2569464"/>
             <a:ext cx="1828800" cy="201168"/>
           </a:xfrm>
           <a:prstGeom prst="rect">
@@ -8957,7 +9069,7 @@
                 <a:ea typeface="Calibri" pitchFamily="34" charset="-122"/>
                 <a:cs typeface="Calibri" pitchFamily="34" charset="-120"/>
               </a:rPr>
-              <a:t>state or condition of</a:t>
+              <a:t>press; push</a:t>
             </a:r>
             <a:endParaRPr lang="en-US" sz="850" dirty="0"/>
           </a:p>
@@ -8966,6 +9078,118 @@
       <p:sp>
         <p:nvSpPr>
           <p:cNvPr id="22" name="Shape 20"/>
+          <p:cNvSpPr/>
+          <p:nvPr/>
+        </p:nvSpPr>
+        <p:spPr>
+          <a:xfrm>
+            <a:off x="6519672" y="2258568"/>
+            <a:ext cx="1828800" cy="292608"/>
+          </a:xfrm>
+          <a:prstGeom prst="rect">
+            <a:avLst>
+              <a:gd name="adj" fmla="val 25000"/>
+            </a:avLst>
+          </a:prstGeom>
+          <a:solidFill>
+            <a:srgbClr val="FCE7F3"/>
+          </a:solidFill>
+          <a:ln w="19050">
+            <a:solidFill>
+              <a:srgbClr val="DB2777"/>
+            </a:solidFill>
+            <a:prstDash val="solid"/>
+          </a:ln>
+          <a:effectLst>
+            <a:outerShdw sx="100000" sy="100000" kx="0" ky="0" algn="bl" rotWithShape="0" blurRad="101600" dist="38100" dir="8100000">
+              <a:srgbClr val="000000">
+                <a:alpha val="12000"/>
+              </a:srgbClr>
+            </a:outerShdw>
+          </a:effectLst>
+        </p:spPr>
+      </p:sp>
+      <p:sp>
+        <p:nvSpPr>
+          <p:cNvPr id="23" name="Text 21"/>
+          <p:cNvSpPr/>
+          <p:nvPr/>
+        </p:nvSpPr>
+        <p:spPr>
+          <a:xfrm>
+            <a:off x="6519672" y="2258568"/>
+            <a:ext cx="1828800" cy="292608"/>
+          </a:xfrm>
+          <a:prstGeom prst="rect">
+            <a:avLst/>
+          </a:prstGeom>
+          <a:noFill/>
+          <a:ln/>
+        </p:spPr>
+        <p:txBody>
+          <a:bodyPr wrap="square" lIns="0" tIns="0" rIns="0" bIns="0" rtlCol="0" anchor="ctr"/>
+          <a:lstStyle/>
+          <a:p>
+            <a:pPr algn="ctr" indent="0" marL="0">
+              <a:buNone/>
+            </a:pPr>
+            <a:r>
+              <a:rPr lang="en-US" sz="1300" b="1" dirty="0">
+                <a:solidFill>
+                  <a:srgbClr val="9D174D"/>
+                </a:solidFill>
+                <a:latin typeface="Trebuchet MS" pitchFamily="34" charset="0"/>
+                <a:ea typeface="Trebuchet MS" pitchFamily="34" charset="-122"/>
+                <a:cs typeface="Trebuchet MS" pitchFamily="34" charset="-120"/>
+              </a:rPr>
+              <a:t>ed</a:t>
+            </a:r>
+            <a:endParaRPr lang="en-US" sz="1300" dirty="0"/>
+          </a:p>
+        </p:txBody>
+      </p:sp>
+      <p:sp>
+        <p:nvSpPr>
+          <p:cNvPr id="24" name="Text 22"/>
+          <p:cNvSpPr/>
+          <p:nvPr/>
+        </p:nvSpPr>
+        <p:spPr>
+          <a:xfrm>
+            <a:off x="6519672" y="2569464"/>
+            <a:ext cx="1828800" cy="201168"/>
+          </a:xfrm>
+          <a:prstGeom prst="rect">
+            <a:avLst/>
+          </a:prstGeom>
+          <a:noFill/>
+          <a:ln/>
+        </p:spPr>
+        <p:txBody>
+          <a:bodyPr wrap="square" lIns="0" tIns="0" rIns="0" bIns="0" rtlCol="0" anchor="t"/>
+          <a:lstStyle/>
+          <a:p>
+            <a:pPr algn="ctr" indent="0" marL="0">
+              <a:buNone/>
+            </a:pPr>
+            <a:r>
+              <a:rPr lang="en-US" sz="850" dirty="0">
+                <a:solidFill>
+                  <a:srgbClr val="475569"/>
+                </a:solidFill>
+                <a:latin typeface="Calibri" pitchFamily="34" charset="0"/>
+                <a:ea typeface="Calibri" pitchFamily="34" charset="-122"/>
+                <a:cs typeface="Calibri" pitchFamily="34" charset="-120"/>
+              </a:rPr>
+              <a:t>past tense</a:t>
+            </a:r>
+            <a:endParaRPr lang="en-US" sz="850" dirty="0"/>
+          </a:p>
+        </p:txBody>
+      </p:sp>
+      <p:sp>
+        <p:nvSpPr>
+          <p:cNvPr id="25" name="Shape 23"/>
           <p:cNvSpPr/>
           <p:nvPr/>
         </p:nvSpPr>
@@ -8992,7 +9216,7 @@
       </p:sp>
       <p:sp>
         <p:nvSpPr>
-          <p:cNvPr id="23" name="Text 21"/>
+          <p:cNvPr id="26" name="Text 24"/>
           <p:cNvSpPr/>
           <p:nvPr/>
         </p:nvSpPr>
@@ -9031,7 +9255,7 @@
       </p:sp>
       <p:sp>
         <p:nvSpPr>
-          <p:cNvPr id="24" name="Shape 22"/>
+          <p:cNvPr id="27" name="Shape 25"/>
           <p:cNvSpPr/>
           <p:nvPr/>
         </p:nvSpPr>
@@ -9058,7 +9282,7 @@
       </p:sp>
       <p:sp>
         <p:nvSpPr>
-          <p:cNvPr id="25" name="Shape 23"/>
+          <p:cNvPr id="28" name="Shape 26"/>
           <p:cNvSpPr/>
           <p:nvPr/>
         </p:nvSpPr>
@@ -9085,7 +9309,7 @@
       </p:sp>
       <p:sp>
         <p:nvSpPr>
-          <p:cNvPr id="26" name="Text 24"/>
+          <p:cNvPr id="29" name="Text 27"/>
           <p:cNvSpPr/>
           <p:nvPr/>
         </p:nvSpPr>
@@ -9116,7 +9340,7 @@
                 <a:ea typeface="Trebuchet MS" pitchFamily="34" charset="-122"/>
                 <a:cs typeface="Trebuchet MS" pitchFamily="34" charset="-120"/>
               </a:rPr>
-              <a:t>pres</a:t>
+              <a:t>sup</a:t>
             </a:r>
             <a:endParaRPr lang="en-US" sz="1400" dirty="0"/>
           </a:p>
@@ -9124,7 +9348,7 @@
       </p:sp>
       <p:sp>
         <p:nvSpPr>
-          <p:cNvPr id="27" name="Text 25"/>
+          <p:cNvPr id="30" name="Text 28"/>
           <p:cNvSpPr/>
           <p:nvPr/>
         </p:nvSpPr>
@@ -9163,7 +9387,7 @@
       </p:sp>
       <p:sp>
         <p:nvSpPr>
-          <p:cNvPr id="28" name="Shape 26"/>
+          <p:cNvPr id="31" name="Shape 29"/>
           <p:cNvSpPr/>
           <p:nvPr/>
         </p:nvSpPr>
@@ -9190,7 +9414,7 @@
       </p:sp>
       <p:sp>
         <p:nvSpPr>
-          <p:cNvPr id="29" name="Text 27"/>
+          <p:cNvPr id="32" name="Text 30"/>
           <p:cNvSpPr/>
           <p:nvPr/>
         </p:nvSpPr>
@@ -9221,7 +9445,7 @@
                 <a:ea typeface="Trebuchet MS" pitchFamily="34" charset="-122"/>
                 <a:cs typeface="Trebuchet MS" pitchFamily="34" charset="-120"/>
               </a:rPr>
-              <a:t>sure</a:t>
+              <a:t>pressed</a:t>
             </a:r>
             <a:endParaRPr lang="en-US" sz="1400" dirty="0"/>
           </a:p>
@@ -9229,7 +9453,7 @@
       </p:sp>
       <p:sp>
         <p:nvSpPr>
-          <p:cNvPr id="30" name="Shape 28"/>
+          <p:cNvPr id="33" name="Shape 31"/>
           <p:cNvSpPr/>
           <p:nvPr/>
         </p:nvSpPr>
@@ -9256,7 +9480,7 @@
       </p:sp>
       <p:sp>
         <p:nvSpPr>
-          <p:cNvPr id="31" name="Text 29"/>
+          <p:cNvPr id="34" name="Text 32"/>
           <p:cNvSpPr/>
           <p:nvPr/>
         </p:nvSpPr>
@@ -9295,7 +9519,7 @@
       </p:sp>
       <p:sp>
         <p:nvSpPr>
-          <p:cNvPr id="32" name="Shape 30"/>
+          <p:cNvPr id="35" name="Shape 33"/>
           <p:cNvSpPr/>
           <p:nvPr/>
         </p:nvSpPr>
@@ -9322,7 +9546,7 @@
       </p:sp>
       <p:sp>
         <p:nvSpPr>
-          <p:cNvPr id="33" name="Text 31"/>
+          <p:cNvPr id="36" name="Text 34"/>
           <p:cNvSpPr/>
           <p:nvPr/>
         </p:nvSpPr>
@@ -9645,7 +9869,7 @@
                 <a:ea typeface="Calibri" pitchFamily="34" charset="-122"/>
                 <a:cs typeface="Calibri" pitchFamily="34" charset="-120"/>
               </a:rPr>
-              <a:t>Word Labs  •  wordlabs.app  •  Root: 'press' = to push down or squeeze</a:t>
+              <a:t>Word Labs  •  wordlabs.app  •  Root: 'press' = press; push</a:t>
             </a:r>
             <a:endParaRPr lang="en-US" sz="800" dirty="0"/>
           </a:p>
@@ -9784,7 +10008,7 @@
                 <a:ea typeface="Trebuchet MS" pitchFamily="34" charset="-122"/>
                 <a:cs typeface="Trebuchet MS" pitchFamily="34" charset="-120"/>
               </a:rPr>
-              <a:t>pressure</a:t>
+              <a:t>suppressed</a:t>
             </a:r>
             <a:endParaRPr lang="en-US" sz="2800" dirty="0"/>
           </a:p>
@@ -9864,7 +10088,7 @@
         </p:nvSpPr>
         <p:spPr>
           <a:xfrm>
-            <a:off x="2938272" y="2258568"/>
+            <a:off x="2221992" y="2258568"/>
             <a:ext cx="1828800" cy="292608"/>
           </a:xfrm>
           <a:prstGeom prst="rect">
@@ -9873,11 +10097,11 @@
             </a:avLst>
           </a:prstGeom>
           <a:solidFill>
-            <a:srgbClr val="CCFBF1"/>
+            <a:srgbClr val="DDD6FE"/>
           </a:solidFill>
           <a:ln w="19050">
             <a:solidFill>
-              <a:srgbClr val="0D9488"/>
+              <a:srgbClr val="7C3AED"/>
             </a:solidFill>
             <a:prstDash val="solid"/>
           </a:ln>
@@ -9898,7 +10122,7 @@
         </p:nvSpPr>
         <p:spPr>
           <a:xfrm>
-            <a:off x="2938272" y="2258568"/>
+            <a:off x="2221992" y="2258568"/>
             <a:ext cx="1828800" cy="292608"/>
           </a:xfrm>
           <a:prstGeom prst="rect">
@@ -9917,13 +10141,13 @@
             <a:r>
               <a:rPr lang="en-US" sz="1300" b="1" dirty="0">
                 <a:solidFill>
-                  <a:srgbClr val="0F766E"/>
+                  <a:srgbClr val="4C1D95"/>
                 </a:solidFill>
                 <a:latin typeface="Trebuchet MS" pitchFamily="34" charset="0"/>
                 <a:ea typeface="Trebuchet MS" pitchFamily="34" charset="-122"/>
                 <a:cs typeface="Trebuchet MS" pitchFamily="34" charset="-120"/>
               </a:rPr>
-              <a:t>press</a:t>
+              <a:t>sub</a:t>
             </a:r>
             <a:endParaRPr lang="en-US" sz="1300" dirty="0"/>
           </a:p>
@@ -9937,7 +10161,7 @@
         </p:nvSpPr>
         <p:spPr>
           <a:xfrm>
-            <a:off x="2938272" y="2569464"/>
+            <a:off x="2221992" y="2569464"/>
             <a:ext cx="1828800" cy="201168"/>
           </a:xfrm>
           <a:prstGeom prst="rect">
@@ -9962,7 +10186,7 @@
                 <a:ea typeface="Calibri" pitchFamily="34" charset="-122"/>
                 <a:cs typeface="Calibri" pitchFamily="34" charset="-120"/>
               </a:rPr>
-              <a:t>to push or squeeze</a:t>
+              <a:t>under; below</a:t>
             </a:r>
             <a:endParaRPr lang="en-US" sz="850" dirty="0"/>
           </a:p>
@@ -9976,7 +10200,7 @@
         </p:nvSpPr>
         <p:spPr>
           <a:xfrm>
-            <a:off x="5803392" y="2258568"/>
+            <a:off x="4370832" y="2258568"/>
             <a:ext cx="1828800" cy="292608"/>
           </a:xfrm>
           <a:prstGeom prst="rect">
@@ -9985,11 +10209,11 @@
             </a:avLst>
           </a:prstGeom>
           <a:solidFill>
-            <a:srgbClr val="FCE7F3"/>
+            <a:srgbClr val="CCFBF1"/>
           </a:solidFill>
           <a:ln w="19050">
             <a:solidFill>
-              <a:srgbClr val="DB2777"/>
+              <a:srgbClr val="0D9488"/>
             </a:solidFill>
             <a:prstDash val="solid"/>
           </a:ln>
@@ -10010,7 +10234,7 @@
         </p:nvSpPr>
         <p:spPr>
           <a:xfrm>
-            <a:off x="5803392" y="2258568"/>
+            <a:off x="4370832" y="2258568"/>
             <a:ext cx="1828800" cy="292608"/>
           </a:xfrm>
           <a:prstGeom prst="rect">
@@ -10029,13 +10253,13 @@
             <a:r>
               <a:rPr lang="en-US" sz="1300" b="1" dirty="0">
                 <a:solidFill>
-                  <a:srgbClr val="9D174D"/>
+                  <a:srgbClr val="0F766E"/>
                 </a:solidFill>
                 <a:latin typeface="Trebuchet MS" pitchFamily="34" charset="0"/>
                 <a:ea typeface="Trebuchet MS" pitchFamily="34" charset="-122"/>
                 <a:cs typeface="Trebuchet MS" pitchFamily="34" charset="-120"/>
               </a:rPr>
-              <a:t>ure</a:t>
+              <a:t>press</a:t>
             </a:r>
             <a:endParaRPr lang="en-US" sz="1300" dirty="0"/>
           </a:p>
@@ -10049,7 +10273,7 @@
         </p:nvSpPr>
         <p:spPr>
           <a:xfrm>
-            <a:off x="5803392" y="2569464"/>
+            <a:off x="4370832" y="2569464"/>
             <a:ext cx="1828800" cy="201168"/>
           </a:xfrm>
           <a:prstGeom prst="rect">
@@ -10074,7 +10298,7 @@
                 <a:ea typeface="Calibri" pitchFamily="34" charset="-122"/>
                 <a:cs typeface="Calibri" pitchFamily="34" charset="-120"/>
               </a:rPr>
-              <a:t>state or condition of</a:t>
+              <a:t>press; push</a:t>
             </a:r>
             <a:endParaRPr lang="en-US" sz="850" dirty="0"/>
           </a:p>
@@ -10083,6 +10307,118 @@
       <p:sp>
         <p:nvSpPr>
           <p:cNvPr id="22" name="Shape 20"/>
+          <p:cNvSpPr/>
+          <p:nvPr/>
+        </p:nvSpPr>
+        <p:spPr>
+          <a:xfrm>
+            <a:off x="6519672" y="2258568"/>
+            <a:ext cx="1828800" cy="292608"/>
+          </a:xfrm>
+          <a:prstGeom prst="rect">
+            <a:avLst>
+              <a:gd name="adj" fmla="val 25000"/>
+            </a:avLst>
+          </a:prstGeom>
+          <a:solidFill>
+            <a:srgbClr val="FCE7F3"/>
+          </a:solidFill>
+          <a:ln w="19050">
+            <a:solidFill>
+              <a:srgbClr val="DB2777"/>
+            </a:solidFill>
+            <a:prstDash val="solid"/>
+          </a:ln>
+          <a:effectLst>
+            <a:outerShdw sx="100000" sy="100000" kx="0" ky="0" algn="bl" rotWithShape="0" blurRad="101600" dist="38100" dir="8100000">
+              <a:srgbClr val="000000">
+                <a:alpha val="12000"/>
+              </a:srgbClr>
+            </a:outerShdw>
+          </a:effectLst>
+        </p:spPr>
+      </p:sp>
+      <p:sp>
+        <p:nvSpPr>
+          <p:cNvPr id="23" name="Text 21"/>
+          <p:cNvSpPr/>
+          <p:nvPr/>
+        </p:nvSpPr>
+        <p:spPr>
+          <a:xfrm>
+            <a:off x="6519672" y="2258568"/>
+            <a:ext cx="1828800" cy="292608"/>
+          </a:xfrm>
+          <a:prstGeom prst="rect">
+            <a:avLst/>
+          </a:prstGeom>
+          <a:noFill/>
+          <a:ln/>
+        </p:spPr>
+        <p:txBody>
+          <a:bodyPr wrap="square" lIns="0" tIns="0" rIns="0" bIns="0" rtlCol="0" anchor="ctr"/>
+          <a:lstStyle/>
+          <a:p>
+            <a:pPr algn="ctr" indent="0" marL="0">
+              <a:buNone/>
+            </a:pPr>
+            <a:r>
+              <a:rPr lang="en-US" sz="1300" b="1" dirty="0">
+                <a:solidFill>
+                  <a:srgbClr val="9D174D"/>
+                </a:solidFill>
+                <a:latin typeface="Trebuchet MS" pitchFamily="34" charset="0"/>
+                <a:ea typeface="Trebuchet MS" pitchFamily="34" charset="-122"/>
+                <a:cs typeface="Trebuchet MS" pitchFamily="34" charset="-120"/>
+              </a:rPr>
+              <a:t>ed</a:t>
+            </a:r>
+            <a:endParaRPr lang="en-US" sz="1300" dirty="0"/>
+          </a:p>
+        </p:txBody>
+      </p:sp>
+      <p:sp>
+        <p:nvSpPr>
+          <p:cNvPr id="24" name="Text 22"/>
+          <p:cNvSpPr/>
+          <p:nvPr/>
+        </p:nvSpPr>
+        <p:spPr>
+          <a:xfrm>
+            <a:off x="6519672" y="2569464"/>
+            <a:ext cx="1828800" cy="201168"/>
+          </a:xfrm>
+          <a:prstGeom prst="rect">
+            <a:avLst/>
+          </a:prstGeom>
+          <a:noFill/>
+          <a:ln/>
+        </p:spPr>
+        <p:txBody>
+          <a:bodyPr wrap="square" lIns="0" tIns="0" rIns="0" bIns="0" rtlCol="0" anchor="t"/>
+          <a:lstStyle/>
+          <a:p>
+            <a:pPr algn="ctr" indent="0" marL="0">
+              <a:buNone/>
+            </a:pPr>
+            <a:r>
+              <a:rPr lang="en-US" sz="850" dirty="0">
+                <a:solidFill>
+                  <a:srgbClr val="475569"/>
+                </a:solidFill>
+                <a:latin typeface="Calibri" pitchFamily="34" charset="0"/>
+                <a:ea typeface="Calibri" pitchFamily="34" charset="-122"/>
+                <a:cs typeface="Calibri" pitchFamily="34" charset="-120"/>
+              </a:rPr>
+              <a:t>past tense</a:t>
+            </a:r>
+            <a:endParaRPr lang="en-US" sz="850" dirty="0"/>
+          </a:p>
+        </p:txBody>
+      </p:sp>
+      <p:sp>
+        <p:nvSpPr>
+          <p:cNvPr id="25" name="Shape 23"/>
           <p:cNvSpPr/>
           <p:nvPr/>
         </p:nvSpPr>
@@ -10109,7 +10445,7 @@
       </p:sp>
       <p:sp>
         <p:nvSpPr>
-          <p:cNvPr id="23" name="Text 21"/>
+          <p:cNvPr id="26" name="Text 24"/>
           <p:cNvSpPr/>
           <p:nvPr/>
         </p:nvSpPr>
@@ -10148,7 +10484,7 @@
       </p:sp>
       <p:sp>
         <p:nvSpPr>
-          <p:cNvPr id="24" name="Shape 22"/>
+          <p:cNvPr id="27" name="Shape 25"/>
           <p:cNvSpPr/>
           <p:nvPr/>
         </p:nvSpPr>
@@ -10175,7 +10511,7 @@
       </p:sp>
       <p:sp>
         <p:nvSpPr>
-          <p:cNvPr id="25" name="Shape 23"/>
+          <p:cNvPr id="28" name="Shape 26"/>
           <p:cNvSpPr/>
           <p:nvPr/>
         </p:nvSpPr>
@@ -10202,7 +10538,7 @@
       </p:sp>
       <p:sp>
         <p:nvSpPr>
-          <p:cNvPr id="26" name="Text 24"/>
+          <p:cNvPr id="29" name="Text 27"/>
           <p:cNvSpPr/>
           <p:nvPr/>
         </p:nvSpPr>
@@ -10233,7 +10569,7 @@
                 <a:ea typeface="Trebuchet MS" pitchFamily="34" charset="-122"/>
                 <a:cs typeface="Trebuchet MS" pitchFamily="34" charset="-120"/>
               </a:rPr>
-              <a:t>pres</a:t>
+              <a:t>sup</a:t>
             </a:r>
             <a:endParaRPr lang="en-US" sz="1400" dirty="0"/>
           </a:p>
@@ -10241,7 +10577,7 @@
       </p:sp>
       <p:sp>
         <p:nvSpPr>
-          <p:cNvPr id="27" name="Text 25"/>
+          <p:cNvPr id="30" name="Text 28"/>
           <p:cNvSpPr/>
           <p:nvPr/>
         </p:nvSpPr>
@@ -10280,7 +10616,7 @@
       </p:sp>
       <p:sp>
         <p:nvSpPr>
-          <p:cNvPr id="28" name="Shape 26"/>
+          <p:cNvPr id="31" name="Shape 29"/>
           <p:cNvSpPr/>
           <p:nvPr/>
         </p:nvSpPr>
@@ -10307,7 +10643,7 @@
       </p:sp>
       <p:sp>
         <p:nvSpPr>
-          <p:cNvPr id="29" name="Text 27"/>
+          <p:cNvPr id="32" name="Text 30"/>
           <p:cNvSpPr/>
           <p:nvPr/>
         </p:nvSpPr>
@@ -10338,7 +10674,7 @@
                 <a:ea typeface="Trebuchet MS" pitchFamily="34" charset="-122"/>
                 <a:cs typeface="Trebuchet MS" pitchFamily="34" charset="-120"/>
               </a:rPr>
-              <a:t>sure</a:t>
+              <a:t>pressed</a:t>
             </a:r>
             <a:endParaRPr lang="en-US" sz="1400" dirty="0"/>
           </a:p>
@@ -10346,7 +10682,7 @@
       </p:sp>
       <p:sp>
         <p:nvSpPr>
-          <p:cNvPr id="30" name="Shape 28"/>
+          <p:cNvPr id="33" name="Shape 31"/>
           <p:cNvSpPr/>
           <p:nvPr/>
         </p:nvSpPr>
@@ -10373,7 +10709,7 @@
       </p:sp>
       <p:sp>
         <p:nvSpPr>
-          <p:cNvPr id="31" name="Text 29"/>
+          <p:cNvPr id="34" name="Text 32"/>
           <p:cNvSpPr/>
           <p:nvPr/>
         </p:nvSpPr>
@@ -10412,7 +10748,7 @@
       </p:sp>
       <p:sp>
         <p:nvSpPr>
-          <p:cNvPr id="32" name="Shape 30"/>
+          <p:cNvPr id="35" name="Shape 33"/>
           <p:cNvSpPr/>
           <p:nvPr/>
         </p:nvSpPr>
@@ -10439,14 +10775,14 @@
       </p:sp>
       <p:sp>
         <p:nvSpPr>
-          <p:cNvPr id="33" name="Shape 31"/>
-          <p:cNvSpPr/>
-          <p:nvPr/>
-        </p:nvSpPr>
-        <p:spPr>
-          <a:xfrm>
-            <a:off x="2427732" y="4169664"/>
-            <a:ext cx="685800" cy="475488"/>
+          <p:cNvPr id="36" name="Shape 34"/>
+          <p:cNvSpPr/>
+          <p:nvPr/>
+        </p:nvSpPr>
+        <p:spPr>
+          <a:xfrm>
+            <a:off x="1951330" y="4169664"/>
+            <a:ext cx="676656" cy="475488"/>
           </a:xfrm>
           <a:prstGeom prst="rect">
             <a:avLst>
@@ -10466,14 +10802,14 @@
       </p:sp>
       <p:sp>
         <p:nvSpPr>
-          <p:cNvPr id="34" name="Text 32"/>
-          <p:cNvSpPr/>
-          <p:nvPr/>
-        </p:nvSpPr>
-        <p:spPr>
-          <a:xfrm>
-            <a:off x="2427732" y="4169664"/>
-            <a:ext cx="685800" cy="475488"/>
+          <p:cNvPr id="37" name="Text 35"/>
+          <p:cNvSpPr/>
+          <p:nvPr/>
+        </p:nvSpPr>
+        <p:spPr>
+          <a:xfrm>
+            <a:off x="1951330" y="4169664"/>
+            <a:ext cx="676656" cy="475488"/>
           </a:xfrm>
           <a:prstGeom prst="rect">
             <a:avLst/>
@@ -10497,7 +10833,7 @@
                 <a:ea typeface="Trebuchet MS" pitchFamily="34" charset="-122"/>
                 <a:cs typeface="Trebuchet MS" pitchFamily="34" charset="-120"/>
               </a:rPr>
-              <a:t>p</a:t>
+              <a:t>s</a:t>
             </a:r>
             <a:endParaRPr lang="en-US" sz="900" dirty="0"/>
           </a:p>
@@ -10505,14 +10841,14 @@
       </p:sp>
       <p:sp>
         <p:nvSpPr>
-          <p:cNvPr id="35" name="Shape 33"/>
-          <p:cNvSpPr/>
-          <p:nvPr/>
-        </p:nvSpPr>
-        <p:spPr>
-          <a:xfrm>
-            <a:off x="3639312" y="4169664"/>
-            <a:ext cx="685800" cy="475488"/>
+          <p:cNvPr id="38" name="Shape 36"/>
+          <p:cNvSpPr/>
+          <p:nvPr/>
+        </p:nvSpPr>
+        <p:spPr>
+          <a:xfrm>
+            <a:off x="2677363" y="4169664"/>
+            <a:ext cx="676656" cy="475488"/>
           </a:xfrm>
           <a:prstGeom prst="rect">
             <a:avLst>
@@ -10532,14 +10868,14 @@
       </p:sp>
       <p:sp>
         <p:nvSpPr>
-          <p:cNvPr id="36" name="Text 34"/>
-          <p:cNvSpPr/>
-          <p:nvPr/>
-        </p:nvSpPr>
-        <p:spPr>
-          <a:xfrm>
-            <a:off x="3639312" y="4169664"/>
-            <a:ext cx="685800" cy="475488"/>
+          <p:cNvPr id="39" name="Text 37"/>
+          <p:cNvSpPr/>
+          <p:nvPr/>
+        </p:nvSpPr>
+        <p:spPr>
+          <a:xfrm>
+            <a:off x="2677363" y="4169664"/>
+            <a:ext cx="676656" cy="475488"/>
           </a:xfrm>
           <a:prstGeom prst="rect">
             <a:avLst/>
@@ -10563,7 +10899,7 @@
                 <a:ea typeface="Trebuchet MS" pitchFamily="34" charset="-122"/>
                 <a:cs typeface="Trebuchet MS" pitchFamily="34" charset="-120"/>
               </a:rPr>
-              <a:t>r</a:t>
+              <a:t>u</a:t>
             </a:r>
             <a:endParaRPr lang="en-US" sz="900" dirty="0"/>
           </a:p>
@@ -10571,14 +10907,14 @@
       </p:sp>
       <p:sp>
         <p:nvSpPr>
-          <p:cNvPr id="37" name="Shape 35"/>
-          <p:cNvSpPr/>
-          <p:nvPr/>
-        </p:nvSpPr>
-        <p:spPr>
-          <a:xfrm>
-            <a:off x="4850892" y="4169664"/>
-            <a:ext cx="685800" cy="475488"/>
+          <p:cNvPr id="40" name="Shape 38"/>
+          <p:cNvSpPr/>
+          <p:nvPr/>
+        </p:nvSpPr>
+        <p:spPr>
+          <a:xfrm>
+            <a:off x="3403397" y="4169664"/>
+            <a:ext cx="676656" cy="475488"/>
           </a:xfrm>
           <a:prstGeom prst="rect">
             <a:avLst>
@@ -10598,14 +10934,14 @@
       </p:sp>
       <p:sp>
         <p:nvSpPr>
-          <p:cNvPr id="38" name="Text 36"/>
-          <p:cNvSpPr/>
-          <p:nvPr/>
-        </p:nvSpPr>
-        <p:spPr>
-          <a:xfrm>
-            <a:off x="4850892" y="4169664"/>
-            <a:ext cx="685800" cy="475488"/>
+          <p:cNvPr id="41" name="Text 39"/>
+          <p:cNvSpPr/>
+          <p:nvPr/>
+        </p:nvSpPr>
+        <p:spPr>
+          <a:xfrm>
+            <a:off x="3403397" y="4169664"/>
+            <a:ext cx="676656" cy="475488"/>
           </a:xfrm>
           <a:prstGeom prst="rect">
             <a:avLst/>
@@ -10629,7 +10965,7 @@
                 <a:ea typeface="Trebuchet MS" pitchFamily="34" charset="-122"/>
                 <a:cs typeface="Trebuchet MS" pitchFamily="34" charset="-120"/>
               </a:rPr>
-              <a:t>e</a:t>
+              <a:t>p</a:t>
             </a:r>
             <a:endParaRPr lang="en-US" sz="900" dirty="0"/>
           </a:p>
@@ -10637,14 +10973,14 @@
       </p:sp>
       <p:sp>
         <p:nvSpPr>
-          <p:cNvPr id="39" name="Shape 37"/>
-          <p:cNvSpPr/>
-          <p:nvPr/>
-        </p:nvSpPr>
-        <p:spPr>
-          <a:xfrm>
-            <a:off x="6062472" y="4169664"/>
-            <a:ext cx="685800" cy="475488"/>
+          <p:cNvPr id="42" name="Shape 40"/>
+          <p:cNvSpPr/>
+          <p:nvPr/>
+        </p:nvSpPr>
+        <p:spPr>
+          <a:xfrm>
+            <a:off x="4129430" y="4169664"/>
+            <a:ext cx="676656" cy="475488"/>
           </a:xfrm>
           <a:prstGeom prst="rect">
             <a:avLst>
@@ -10664,14 +11000,14 @@
       </p:sp>
       <p:sp>
         <p:nvSpPr>
-          <p:cNvPr id="40" name="Text 38"/>
-          <p:cNvSpPr/>
-          <p:nvPr/>
-        </p:nvSpPr>
-        <p:spPr>
-          <a:xfrm>
-            <a:off x="6062472" y="4169664"/>
-            <a:ext cx="685800" cy="475488"/>
+          <p:cNvPr id="43" name="Text 41"/>
+          <p:cNvSpPr/>
+          <p:nvPr/>
+        </p:nvSpPr>
+        <p:spPr>
+          <a:xfrm>
+            <a:off x="4129430" y="4169664"/>
+            <a:ext cx="676656" cy="475488"/>
           </a:xfrm>
           <a:prstGeom prst="rect">
             <a:avLst/>
@@ -10695,7 +11031,7 @@
                 <a:ea typeface="Trebuchet MS" pitchFamily="34" charset="-122"/>
                 <a:cs typeface="Trebuchet MS" pitchFamily="34" charset="-120"/>
               </a:rPr>
-              <a:t>ss</a:t>
+              <a:t>p</a:t>
             </a:r>
             <a:endParaRPr lang="en-US" sz="900" dirty="0"/>
           </a:p>
@@ -10703,14 +11039,14 @@
       </p:sp>
       <p:sp>
         <p:nvSpPr>
-          <p:cNvPr id="41" name="Shape 39"/>
-          <p:cNvSpPr/>
-          <p:nvPr/>
-        </p:nvSpPr>
-        <p:spPr>
-          <a:xfrm>
-            <a:off x="7274052" y="4169664"/>
-            <a:ext cx="685800" cy="475488"/>
+          <p:cNvPr id="44" name="Shape 42"/>
+          <p:cNvSpPr/>
+          <p:nvPr/>
+        </p:nvSpPr>
+        <p:spPr>
+          <a:xfrm>
+            <a:off x="4855464" y="4169664"/>
+            <a:ext cx="676656" cy="475488"/>
           </a:xfrm>
           <a:prstGeom prst="rect">
             <a:avLst>
@@ -10730,14 +11066,14 @@
       </p:sp>
       <p:sp>
         <p:nvSpPr>
-          <p:cNvPr id="42" name="Text 40"/>
-          <p:cNvSpPr/>
-          <p:nvPr/>
-        </p:nvSpPr>
-        <p:spPr>
-          <a:xfrm>
-            <a:off x="7274052" y="4169664"/>
-            <a:ext cx="685800" cy="475488"/>
+          <p:cNvPr id="45" name="Text 43"/>
+          <p:cNvSpPr/>
+          <p:nvPr/>
+        </p:nvSpPr>
+        <p:spPr>
+          <a:xfrm>
+            <a:off x="4855464" y="4169664"/>
+            <a:ext cx="676656" cy="475488"/>
           </a:xfrm>
           <a:prstGeom prst="rect">
             <a:avLst/>
@@ -10761,7 +11097,271 @@
                 <a:ea typeface="Trebuchet MS" pitchFamily="34" charset="-122"/>
                 <a:cs typeface="Trebuchet MS" pitchFamily="34" charset="-120"/>
               </a:rPr>
-              <a:t>ure</a:t>
+              <a:t>r</a:t>
+            </a:r>
+            <a:endParaRPr lang="en-US" sz="900" dirty="0"/>
+          </a:p>
+        </p:txBody>
+      </p:sp>
+      <p:sp>
+        <p:nvSpPr>
+          <p:cNvPr id="46" name="Shape 44"/>
+          <p:cNvSpPr/>
+          <p:nvPr/>
+        </p:nvSpPr>
+        <p:spPr>
+          <a:xfrm>
+            <a:off x="5581498" y="4169664"/>
+            <a:ext cx="676656" cy="475488"/>
+          </a:xfrm>
+          <a:prstGeom prst="rect">
+            <a:avLst>
+              <a:gd name="adj" fmla="val 7692"/>
+            </a:avLst>
+          </a:prstGeom>
+          <a:solidFill>
+            <a:srgbClr val="FFFFFF"/>
+          </a:solidFill>
+          <a:ln w="12700">
+            <a:solidFill>
+              <a:srgbClr val="DB2777"/>
+            </a:solidFill>
+            <a:prstDash val="solid"/>
+          </a:ln>
+        </p:spPr>
+      </p:sp>
+      <p:sp>
+        <p:nvSpPr>
+          <p:cNvPr id="47" name="Text 45"/>
+          <p:cNvSpPr/>
+          <p:nvPr/>
+        </p:nvSpPr>
+        <p:spPr>
+          <a:xfrm>
+            <a:off x="5581498" y="4169664"/>
+            <a:ext cx="676656" cy="475488"/>
+          </a:xfrm>
+          <a:prstGeom prst="rect">
+            <a:avLst/>
+          </a:prstGeom>
+          <a:noFill/>
+          <a:ln/>
+        </p:spPr>
+        <p:txBody>
+          <a:bodyPr wrap="square" lIns="0" tIns="0" rIns="0" bIns="0" rtlCol="0" anchor="ctr"/>
+          <a:lstStyle/>
+          <a:p>
+            <a:pPr algn="ctr" indent="0" marL="0">
+              <a:buNone/>
+            </a:pPr>
+            <a:r>
+              <a:rPr lang="en-US" sz="900" b="1" dirty="0">
+                <a:solidFill>
+                  <a:srgbClr val="9D174D"/>
+                </a:solidFill>
+                <a:latin typeface="Trebuchet MS" pitchFamily="34" charset="0"/>
+                <a:ea typeface="Trebuchet MS" pitchFamily="34" charset="-122"/>
+                <a:cs typeface="Trebuchet MS" pitchFamily="34" charset="-120"/>
+              </a:rPr>
+              <a:t>e</a:t>
+            </a:r>
+            <a:endParaRPr lang="en-US" sz="900" dirty="0"/>
+          </a:p>
+        </p:txBody>
+      </p:sp>
+      <p:sp>
+        <p:nvSpPr>
+          <p:cNvPr id="48" name="Shape 46"/>
+          <p:cNvSpPr/>
+          <p:nvPr/>
+        </p:nvSpPr>
+        <p:spPr>
+          <a:xfrm>
+            <a:off x="6307531" y="4169664"/>
+            <a:ext cx="676656" cy="475488"/>
+          </a:xfrm>
+          <a:prstGeom prst="rect">
+            <a:avLst>
+              <a:gd name="adj" fmla="val 7692"/>
+            </a:avLst>
+          </a:prstGeom>
+          <a:solidFill>
+            <a:srgbClr val="FFFFFF"/>
+          </a:solidFill>
+          <a:ln w="12700">
+            <a:solidFill>
+              <a:srgbClr val="DB2777"/>
+            </a:solidFill>
+            <a:prstDash val="solid"/>
+          </a:ln>
+        </p:spPr>
+      </p:sp>
+      <p:sp>
+        <p:nvSpPr>
+          <p:cNvPr id="49" name="Text 47"/>
+          <p:cNvSpPr/>
+          <p:nvPr/>
+        </p:nvSpPr>
+        <p:spPr>
+          <a:xfrm>
+            <a:off x="6307531" y="4169664"/>
+            <a:ext cx="676656" cy="475488"/>
+          </a:xfrm>
+          <a:prstGeom prst="rect">
+            <a:avLst/>
+          </a:prstGeom>
+          <a:noFill/>
+          <a:ln/>
+        </p:spPr>
+        <p:txBody>
+          <a:bodyPr wrap="square" lIns="0" tIns="0" rIns="0" bIns="0" rtlCol="0" anchor="ctr"/>
+          <a:lstStyle/>
+          <a:p>
+            <a:pPr algn="ctr" indent="0" marL="0">
+              <a:buNone/>
+            </a:pPr>
+            <a:r>
+              <a:rPr lang="en-US" sz="900" b="1" dirty="0">
+                <a:solidFill>
+                  <a:srgbClr val="9D174D"/>
+                </a:solidFill>
+                <a:latin typeface="Trebuchet MS" pitchFamily="34" charset="0"/>
+                <a:ea typeface="Trebuchet MS" pitchFamily="34" charset="-122"/>
+                <a:cs typeface="Trebuchet MS" pitchFamily="34" charset="-120"/>
+              </a:rPr>
+              <a:t>ss</a:t>
+            </a:r>
+            <a:endParaRPr lang="en-US" sz="900" dirty="0"/>
+          </a:p>
+        </p:txBody>
+      </p:sp>
+      <p:sp>
+        <p:nvSpPr>
+          <p:cNvPr id="50" name="Shape 48"/>
+          <p:cNvSpPr/>
+          <p:nvPr/>
+        </p:nvSpPr>
+        <p:spPr>
+          <a:xfrm>
+            <a:off x="7033565" y="4169664"/>
+            <a:ext cx="676656" cy="475488"/>
+          </a:xfrm>
+          <a:prstGeom prst="rect">
+            <a:avLst>
+              <a:gd name="adj" fmla="val 7692"/>
+            </a:avLst>
+          </a:prstGeom>
+          <a:solidFill>
+            <a:srgbClr val="FFFFFF"/>
+          </a:solidFill>
+          <a:ln w="12700">
+            <a:solidFill>
+              <a:srgbClr val="DB2777"/>
+            </a:solidFill>
+            <a:prstDash val="solid"/>
+          </a:ln>
+        </p:spPr>
+      </p:sp>
+      <p:sp>
+        <p:nvSpPr>
+          <p:cNvPr id="51" name="Text 49"/>
+          <p:cNvSpPr/>
+          <p:nvPr/>
+        </p:nvSpPr>
+        <p:spPr>
+          <a:xfrm>
+            <a:off x="7033565" y="4169664"/>
+            <a:ext cx="676656" cy="475488"/>
+          </a:xfrm>
+          <a:prstGeom prst="rect">
+            <a:avLst/>
+          </a:prstGeom>
+          <a:noFill/>
+          <a:ln/>
+        </p:spPr>
+        <p:txBody>
+          <a:bodyPr wrap="square" lIns="0" tIns="0" rIns="0" bIns="0" rtlCol="0" anchor="ctr"/>
+          <a:lstStyle/>
+          <a:p>
+            <a:pPr algn="ctr" indent="0" marL="0">
+              <a:buNone/>
+            </a:pPr>
+            <a:r>
+              <a:rPr lang="en-US" sz="900" b="1" dirty="0">
+                <a:solidFill>
+                  <a:srgbClr val="9D174D"/>
+                </a:solidFill>
+                <a:latin typeface="Trebuchet MS" pitchFamily="34" charset="0"/>
+                <a:ea typeface="Trebuchet MS" pitchFamily="34" charset="-122"/>
+                <a:cs typeface="Trebuchet MS" pitchFamily="34" charset="-120"/>
+              </a:rPr>
+              <a:t>e</a:t>
+            </a:r>
+            <a:endParaRPr lang="en-US" sz="900" dirty="0"/>
+          </a:p>
+        </p:txBody>
+      </p:sp>
+      <p:sp>
+        <p:nvSpPr>
+          <p:cNvPr id="52" name="Shape 50"/>
+          <p:cNvSpPr/>
+          <p:nvPr/>
+        </p:nvSpPr>
+        <p:spPr>
+          <a:xfrm>
+            <a:off x="7759598" y="4169664"/>
+            <a:ext cx="676656" cy="475488"/>
+          </a:xfrm>
+          <a:prstGeom prst="rect">
+            <a:avLst>
+              <a:gd name="adj" fmla="val 7692"/>
+            </a:avLst>
+          </a:prstGeom>
+          <a:solidFill>
+            <a:srgbClr val="FFFFFF"/>
+          </a:solidFill>
+          <a:ln w="12700">
+            <a:solidFill>
+              <a:srgbClr val="DB2777"/>
+            </a:solidFill>
+            <a:prstDash val="solid"/>
+          </a:ln>
+        </p:spPr>
+      </p:sp>
+      <p:sp>
+        <p:nvSpPr>
+          <p:cNvPr id="53" name="Text 51"/>
+          <p:cNvSpPr/>
+          <p:nvPr/>
+        </p:nvSpPr>
+        <p:spPr>
+          <a:xfrm>
+            <a:off x="7759598" y="4169664"/>
+            <a:ext cx="676656" cy="475488"/>
+          </a:xfrm>
+          <a:prstGeom prst="rect">
+            <a:avLst/>
+          </a:prstGeom>
+          <a:noFill/>
+          <a:ln/>
+        </p:spPr>
+        <p:txBody>
+          <a:bodyPr wrap="square" lIns="0" tIns="0" rIns="0" bIns="0" rtlCol="0" anchor="ctr"/>
+          <a:lstStyle/>
+          <a:p>
+            <a:pPr algn="ctr" indent="0" marL="0">
+              <a:buNone/>
+            </a:pPr>
+            <a:r>
+              <a:rPr lang="en-US" sz="900" b="1" dirty="0">
+                <a:solidFill>
+                  <a:srgbClr val="9D174D"/>
+                </a:solidFill>
+                <a:latin typeface="Trebuchet MS" pitchFamily="34" charset="0"/>
+                <a:ea typeface="Trebuchet MS" pitchFamily="34" charset="-122"/>
+                <a:cs typeface="Trebuchet MS" pitchFamily="34" charset="-120"/>
+              </a:rPr>
+              <a:t>d</a:t>
             </a:r>
             <a:endParaRPr lang="en-US" sz="900" dirty="0"/>
           </a:p>
@@ -11053,7 +11653,7 @@
                 <a:ea typeface="Calibri" pitchFamily="34" charset="-122"/>
                 <a:cs typeface="Calibri" pitchFamily="34" charset="-120"/>
               </a:rPr>
-              <a:t>Word Labs  •  wordlabs.app  •  Root: 'press' = to push down or squeeze</a:t>
+              <a:t>Word Labs  •  wordlabs.app  •  Root: 'press' = press; push</a:t>
             </a:r>
             <a:endParaRPr lang="en-US" sz="800" dirty="0"/>
           </a:p>
@@ -11192,7 +11792,7 @@
                 <a:ea typeface="Trebuchet MS" pitchFamily="34" charset="-122"/>
                 <a:cs typeface="Trebuchet MS" pitchFamily="34" charset="-120"/>
               </a:rPr>
-              <a:t>compress</a:t>
+              <a:t>compression</a:t>
             </a:r>
             <a:endParaRPr lang="en-US" sz="2800" dirty="0"/>
           </a:p>
@@ -11880,7 +12480,7 @@
                 <a:ea typeface="Calibri" pitchFamily="34" charset="-122"/>
                 <a:cs typeface="Calibri" pitchFamily="34" charset="-120"/>
               </a:rPr>
-              <a:t>Word Labs  •  wordlabs.app  •  Root: 'press' = to push down or squeeze</a:t>
+              <a:t>Word Labs  •  wordlabs.app  •  Root: 'press' = press; push</a:t>
             </a:r>
             <a:endParaRPr lang="en-US" sz="800" dirty="0"/>
           </a:p>
@@ -12019,7 +12619,7 @@
                 <a:ea typeface="Trebuchet MS" pitchFamily="34" charset="-122"/>
                 <a:cs typeface="Trebuchet MS" pitchFamily="34" charset="-120"/>
               </a:rPr>
-              <a:t>compress</a:t>
+              <a:t>compression</a:t>
             </a:r>
             <a:endParaRPr lang="en-US" sz="2800" dirty="0"/>
           </a:p>
@@ -12099,7 +12699,7 @@
         </p:nvSpPr>
         <p:spPr>
           <a:xfrm>
-            <a:off x="2938272" y="2258568"/>
+            <a:off x="2221992" y="2258568"/>
             <a:ext cx="1828800" cy="292608"/>
           </a:xfrm>
           <a:prstGeom prst="rect">
@@ -12133,7 +12733,7 @@
         </p:nvSpPr>
         <p:spPr>
           <a:xfrm>
-            <a:off x="2938272" y="2258568"/>
+            <a:off x="2221992" y="2258568"/>
             <a:ext cx="1828800" cy="292608"/>
           </a:xfrm>
           <a:prstGeom prst="rect">
@@ -12158,7 +12758,7 @@
                 <a:ea typeface="Trebuchet MS" pitchFamily="34" charset="-122"/>
                 <a:cs typeface="Trebuchet MS" pitchFamily="34" charset="-120"/>
               </a:rPr>
-              <a:t>com</a:t>
+              <a:t>con</a:t>
             </a:r>
             <a:endParaRPr lang="en-US" sz="1300" dirty="0"/>
           </a:p>
@@ -12172,7 +12772,7 @@
         </p:nvSpPr>
         <p:spPr>
           <a:xfrm>
-            <a:off x="2938272" y="2569464"/>
+            <a:off x="2221992" y="2569464"/>
             <a:ext cx="1828800" cy="201168"/>
           </a:xfrm>
           <a:prstGeom prst="rect">
@@ -12197,7 +12797,7 @@
                 <a:ea typeface="Calibri" pitchFamily="34" charset="-122"/>
                 <a:cs typeface="Calibri" pitchFamily="34" charset="-120"/>
               </a:rPr>
-              <a:t>together</a:t>
+              <a:t>with or together</a:t>
             </a:r>
             <a:endParaRPr lang="en-US" sz="850" dirty="0"/>
           </a:p>
@@ -12211,7 +12811,7 @@
         </p:nvSpPr>
         <p:spPr>
           <a:xfrm>
-            <a:off x="5803392" y="2258568"/>
+            <a:off x="4370832" y="2258568"/>
             <a:ext cx="1828800" cy="292608"/>
           </a:xfrm>
           <a:prstGeom prst="rect">
@@ -12245,7 +12845,7 @@
         </p:nvSpPr>
         <p:spPr>
           <a:xfrm>
-            <a:off x="5803392" y="2258568"/>
+            <a:off x="4370832" y="2258568"/>
             <a:ext cx="1828800" cy="292608"/>
           </a:xfrm>
           <a:prstGeom prst="rect">
@@ -12284,7 +12884,7 @@
         </p:nvSpPr>
         <p:spPr>
           <a:xfrm>
-            <a:off x="5803392" y="2569464"/>
+            <a:off x="4370832" y="2569464"/>
             <a:ext cx="1828800" cy="201168"/>
           </a:xfrm>
           <a:prstGeom prst="rect">
@@ -12309,7 +12909,7 @@
                 <a:ea typeface="Calibri" pitchFamily="34" charset="-122"/>
                 <a:cs typeface="Calibri" pitchFamily="34" charset="-120"/>
               </a:rPr>
-              <a:t>to push or squeeze</a:t>
+              <a:t>press; push</a:t>
             </a:r>
             <a:endParaRPr lang="en-US" sz="850" dirty="0"/>
           </a:p>
@@ -12318,6 +12918,118 @@
       <p:sp>
         <p:nvSpPr>
           <p:cNvPr id="22" name="Shape 20"/>
+          <p:cNvSpPr/>
+          <p:nvPr/>
+        </p:nvSpPr>
+        <p:spPr>
+          <a:xfrm>
+            <a:off x="6519672" y="2258568"/>
+            <a:ext cx="1828800" cy="292608"/>
+          </a:xfrm>
+          <a:prstGeom prst="rect">
+            <a:avLst>
+              <a:gd name="adj" fmla="val 25000"/>
+            </a:avLst>
+          </a:prstGeom>
+          <a:solidFill>
+            <a:srgbClr val="FCE7F3"/>
+          </a:solidFill>
+          <a:ln w="19050">
+            <a:solidFill>
+              <a:srgbClr val="DB2777"/>
+            </a:solidFill>
+            <a:prstDash val="solid"/>
+          </a:ln>
+          <a:effectLst>
+            <a:outerShdw sx="100000" sy="100000" kx="0" ky="0" algn="bl" rotWithShape="0" blurRad="101600" dist="38100" dir="8100000">
+              <a:srgbClr val="000000">
+                <a:alpha val="12000"/>
+              </a:srgbClr>
+            </a:outerShdw>
+          </a:effectLst>
+        </p:spPr>
+      </p:sp>
+      <p:sp>
+        <p:nvSpPr>
+          <p:cNvPr id="23" name="Text 21"/>
+          <p:cNvSpPr/>
+          <p:nvPr/>
+        </p:nvSpPr>
+        <p:spPr>
+          <a:xfrm>
+            <a:off x="6519672" y="2258568"/>
+            <a:ext cx="1828800" cy="292608"/>
+          </a:xfrm>
+          <a:prstGeom prst="rect">
+            <a:avLst/>
+          </a:prstGeom>
+          <a:noFill/>
+          <a:ln/>
+        </p:spPr>
+        <p:txBody>
+          <a:bodyPr wrap="square" lIns="0" tIns="0" rIns="0" bIns="0" rtlCol="0" anchor="ctr"/>
+          <a:lstStyle/>
+          <a:p>
+            <a:pPr algn="ctr" indent="0" marL="0">
+              <a:buNone/>
+            </a:pPr>
+            <a:r>
+              <a:rPr lang="en-US" sz="1300" b="1" dirty="0">
+                <a:solidFill>
+                  <a:srgbClr val="9D174D"/>
+                </a:solidFill>
+                <a:latin typeface="Trebuchet MS" pitchFamily="34" charset="0"/>
+                <a:ea typeface="Trebuchet MS" pitchFamily="34" charset="-122"/>
+                <a:cs typeface="Trebuchet MS" pitchFamily="34" charset="-120"/>
+              </a:rPr>
+              <a:t>ion</a:t>
+            </a:r>
+            <a:endParaRPr lang="en-US" sz="1300" dirty="0"/>
+          </a:p>
+        </p:txBody>
+      </p:sp>
+      <p:sp>
+        <p:nvSpPr>
+          <p:cNvPr id="24" name="Text 22"/>
+          <p:cNvSpPr/>
+          <p:nvPr/>
+        </p:nvSpPr>
+        <p:spPr>
+          <a:xfrm>
+            <a:off x="6519672" y="2569464"/>
+            <a:ext cx="1828800" cy="201168"/>
+          </a:xfrm>
+          <a:prstGeom prst="rect">
+            <a:avLst/>
+          </a:prstGeom>
+          <a:noFill/>
+          <a:ln/>
+        </p:spPr>
+        <p:txBody>
+          <a:bodyPr wrap="square" lIns="0" tIns="0" rIns="0" bIns="0" rtlCol="0" anchor="t"/>
+          <a:lstStyle/>
+          <a:p>
+            <a:pPr algn="ctr" indent="0" marL="0">
+              <a:buNone/>
+            </a:pPr>
+            <a:r>
+              <a:rPr lang="en-US" sz="850" dirty="0">
+                <a:solidFill>
+                  <a:srgbClr val="475569"/>
+                </a:solidFill>
+                <a:latin typeface="Calibri" pitchFamily="34" charset="0"/>
+                <a:ea typeface="Calibri" pitchFamily="34" charset="-122"/>
+                <a:cs typeface="Calibri" pitchFamily="34" charset="-120"/>
+              </a:rPr>
+              <a:t>act or result of</a:t>
+            </a:r>
+            <a:endParaRPr lang="en-US" sz="850" dirty="0"/>
+          </a:p>
+        </p:txBody>
+      </p:sp>
+      <p:sp>
+        <p:nvSpPr>
+          <p:cNvPr id="25" name="Shape 23"/>
           <p:cNvSpPr/>
           <p:nvPr/>
         </p:nvSpPr>
@@ -12344,7 +13056,7 @@
       </p:sp>
       <p:sp>
         <p:nvSpPr>
-          <p:cNvPr id="23" name="Text 21"/>
+          <p:cNvPr id="26" name="Text 24"/>
           <p:cNvSpPr/>
           <p:nvPr/>
         </p:nvSpPr>
@@ -12383,7 +13095,7 @@
       </p:sp>
       <p:sp>
         <p:nvSpPr>
-          <p:cNvPr id="24" name="Shape 22"/>
+          <p:cNvPr id="27" name="Shape 25"/>
           <p:cNvSpPr/>
           <p:nvPr/>
         </p:nvSpPr>
@@ -12410,7 +13122,7 @@
       </p:sp>
       <p:sp>
         <p:nvSpPr>
-          <p:cNvPr id="25" name="Text 23"/>
+          <p:cNvPr id="28" name="Text 26"/>
           <p:cNvSpPr/>
           <p:nvPr/>
         </p:nvSpPr>
@@ -12449,7 +13161,7 @@
       </p:sp>
       <p:sp>
         <p:nvSpPr>
-          <p:cNvPr id="26" name="Shape 24"/>
+          <p:cNvPr id="29" name="Shape 27"/>
           <p:cNvSpPr/>
           <p:nvPr/>
         </p:nvSpPr>
@@ -12476,7 +13188,7 @@
       </p:sp>
       <p:sp>
         <p:nvSpPr>
-          <p:cNvPr id="27" name="Text 25"/>
+          <p:cNvPr id="30" name="Text 28"/>
           <p:cNvSpPr/>
           <p:nvPr/>
         </p:nvSpPr>
@@ -12515,7 +13227,7 @@
       </p:sp>
       <p:sp>
         <p:nvSpPr>
-          <p:cNvPr id="28" name="Shape 26"/>
+          <p:cNvPr id="31" name="Shape 29"/>
           <p:cNvSpPr/>
           <p:nvPr/>
         </p:nvSpPr>
@@ -12542,7 +13254,7 @@
       </p:sp>
       <p:sp>
         <p:nvSpPr>
-          <p:cNvPr id="29" name="Text 27"/>
+          <p:cNvPr id="32" name="Text 30"/>
           <p:cNvSpPr/>
           <p:nvPr/>
         </p:nvSpPr>
@@ -12865,7 +13577,7 @@
                 <a:ea typeface="Calibri" pitchFamily="34" charset="-122"/>
                 <a:cs typeface="Calibri" pitchFamily="34" charset="-120"/>
               </a:rPr>
-              <a:t>Word Labs  •  wordlabs.app  •  Root: 'press' = to push down or squeeze</a:t>
+              <a:t>Word Labs  •  wordlabs.app  •  Root: 'press' = press; push</a:t>
             </a:r>
             <a:endParaRPr lang="en-US" sz="800" dirty="0"/>
           </a:p>
@@ -13004,7 +13716,7 @@
                 <a:ea typeface="Trebuchet MS" pitchFamily="34" charset="-122"/>
                 <a:cs typeface="Trebuchet MS" pitchFamily="34" charset="-120"/>
               </a:rPr>
-              <a:t>compress</a:t>
+              <a:t>compression</a:t>
             </a:r>
             <a:endParaRPr lang="en-US" sz="2800" dirty="0"/>
           </a:p>
@@ -13084,7 +13796,7 @@
         </p:nvSpPr>
         <p:spPr>
           <a:xfrm>
-            <a:off x="2938272" y="2258568"/>
+            <a:off x="2221992" y="2258568"/>
             <a:ext cx="1828800" cy="292608"/>
           </a:xfrm>
           <a:prstGeom prst="rect">
@@ -13118,7 +13830,7 @@
         </p:nvSpPr>
         <p:spPr>
           <a:xfrm>
-            <a:off x="2938272" y="2258568"/>
+            <a:off x="2221992" y="2258568"/>
             <a:ext cx="1828800" cy="292608"/>
           </a:xfrm>
           <a:prstGeom prst="rect">
@@ -13143,7 +13855,7 @@
                 <a:ea typeface="Trebuchet MS" pitchFamily="34" charset="-122"/>
                 <a:cs typeface="Trebuchet MS" pitchFamily="34" charset="-120"/>
               </a:rPr>
-              <a:t>com</a:t>
+              <a:t>con</a:t>
             </a:r>
             <a:endParaRPr lang="en-US" sz="1300" dirty="0"/>
           </a:p>
@@ -13157,7 +13869,7 @@
         </p:nvSpPr>
         <p:spPr>
           <a:xfrm>
-            <a:off x="2938272" y="2569464"/>
+            <a:off x="2221992" y="2569464"/>
             <a:ext cx="1828800" cy="201168"/>
           </a:xfrm>
           <a:prstGeom prst="rect">
@@ -13182,7 +13894,7 @@
                 <a:ea typeface="Calibri" pitchFamily="34" charset="-122"/>
                 <a:cs typeface="Calibri" pitchFamily="34" charset="-120"/>
               </a:rPr>
-              <a:t>together</a:t>
+              <a:t>with or together</a:t>
             </a:r>
             <a:endParaRPr lang="en-US" sz="850" dirty="0"/>
           </a:p>
@@ -13196,7 +13908,7 @@
         </p:nvSpPr>
         <p:spPr>
           <a:xfrm>
-            <a:off x="5803392" y="2258568"/>
+            <a:off x="4370832" y="2258568"/>
             <a:ext cx="1828800" cy="292608"/>
           </a:xfrm>
           <a:prstGeom prst="rect">
@@ -13230,7 +13942,7 @@
         </p:nvSpPr>
         <p:spPr>
           <a:xfrm>
-            <a:off x="5803392" y="2258568"/>
+            <a:off x="4370832" y="2258568"/>
             <a:ext cx="1828800" cy="292608"/>
           </a:xfrm>
           <a:prstGeom prst="rect">
@@ -13269,7 +13981,7 @@
         </p:nvSpPr>
         <p:spPr>
           <a:xfrm>
-            <a:off x="5803392" y="2569464"/>
+            <a:off x="4370832" y="2569464"/>
             <a:ext cx="1828800" cy="201168"/>
           </a:xfrm>
           <a:prstGeom prst="rect">
@@ -13294,7 +14006,7 @@
                 <a:ea typeface="Calibri" pitchFamily="34" charset="-122"/>
                 <a:cs typeface="Calibri" pitchFamily="34" charset="-120"/>
               </a:rPr>
-              <a:t>to push or squeeze</a:t>
+              <a:t>press; push</a:t>
             </a:r>
             <a:endParaRPr lang="en-US" sz="850" dirty="0"/>
           </a:p>
@@ -13303,6 +14015,118 @@
       <p:sp>
         <p:nvSpPr>
           <p:cNvPr id="22" name="Shape 20"/>
+          <p:cNvSpPr/>
+          <p:nvPr/>
+        </p:nvSpPr>
+        <p:spPr>
+          <a:xfrm>
+            <a:off x="6519672" y="2258568"/>
+            <a:ext cx="1828800" cy="292608"/>
+          </a:xfrm>
+          <a:prstGeom prst="rect">
+            <a:avLst>
+              <a:gd name="adj" fmla="val 25000"/>
+            </a:avLst>
+          </a:prstGeom>
+          <a:solidFill>
+            <a:srgbClr val="FCE7F3"/>
+          </a:solidFill>
+          <a:ln w="19050">
+            <a:solidFill>
+              <a:srgbClr val="DB2777"/>
+            </a:solidFill>
+            <a:prstDash val="solid"/>
+          </a:ln>
+          <a:effectLst>
+            <a:outerShdw sx="100000" sy="100000" kx="0" ky="0" algn="bl" rotWithShape="0" blurRad="101600" dist="38100" dir="8100000">
+              <a:srgbClr val="000000">
+                <a:alpha val="12000"/>
+              </a:srgbClr>
+            </a:outerShdw>
+          </a:effectLst>
+        </p:spPr>
+      </p:sp>
+      <p:sp>
+        <p:nvSpPr>
+          <p:cNvPr id="23" name="Text 21"/>
+          <p:cNvSpPr/>
+          <p:nvPr/>
+        </p:nvSpPr>
+        <p:spPr>
+          <a:xfrm>
+            <a:off x="6519672" y="2258568"/>
+            <a:ext cx="1828800" cy="292608"/>
+          </a:xfrm>
+          <a:prstGeom prst="rect">
+            <a:avLst/>
+          </a:prstGeom>
+          <a:noFill/>
+          <a:ln/>
+        </p:spPr>
+        <p:txBody>
+          <a:bodyPr wrap="square" lIns="0" tIns="0" rIns="0" bIns="0" rtlCol="0" anchor="ctr"/>
+          <a:lstStyle/>
+          <a:p>
+            <a:pPr algn="ctr" indent="0" marL="0">
+              <a:buNone/>
+            </a:pPr>
+            <a:r>
+              <a:rPr lang="en-US" sz="1300" b="1" dirty="0">
+                <a:solidFill>
+                  <a:srgbClr val="9D174D"/>
+                </a:solidFill>
+                <a:latin typeface="Trebuchet MS" pitchFamily="34" charset="0"/>
+                <a:ea typeface="Trebuchet MS" pitchFamily="34" charset="-122"/>
+                <a:cs typeface="Trebuchet MS" pitchFamily="34" charset="-120"/>
+              </a:rPr>
+              <a:t>ion</a:t>
+            </a:r>
+            <a:endParaRPr lang="en-US" sz="1300" dirty="0"/>
+          </a:p>
+        </p:txBody>
+      </p:sp>
+      <p:sp>
+        <p:nvSpPr>
+          <p:cNvPr id="24" name="Text 22"/>
+          <p:cNvSpPr/>
+          <p:nvPr/>
+        </p:nvSpPr>
+        <p:spPr>
+          <a:xfrm>
+            <a:off x="6519672" y="2569464"/>
+            <a:ext cx="1828800" cy="201168"/>
+          </a:xfrm>
+          <a:prstGeom prst="rect">
+            <a:avLst/>
+          </a:prstGeom>
+          <a:noFill/>
+          <a:ln/>
+        </p:spPr>
+        <p:txBody>
+          <a:bodyPr wrap="square" lIns="0" tIns="0" rIns="0" bIns="0" rtlCol="0" anchor="t"/>
+          <a:lstStyle/>
+          <a:p>
+            <a:pPr algn="ctr" indent="0" marL="0">
+              <a:buNone/>
+            </a:pPr>
+            <a:r>
+              <a:rPr lang="en-US" sz="850" dirty="0">
+                <a:solidFill>
+                  <a:srgbClr val="475569"/>
+                </a:solidFill>
+                <a:latin typeface="Calibri" pitchFamily="34" charset="0"/>
+                <a:ea typeface="Calibri" pitchFamily="34" charset="-122"/>
+                <a:cs typeface="Calibri" pitchFamily="34" charset="-120"/>
+              </a:rPr>
+              <a:t>act or result of</a:t>
+            </a:r>
+            <a:endParaRPr lang="en-US" sz="850" dirty="0"/>
+          </a:p>
+        </p:txBody>
+      </p:sp>
+      <p:sp>
+        <p:nvSpPr>
+          <p:cNvPr id="25" name="Shape 23"/>
           <p:cNvSpPr/>
           <p:nvPr/>
         </p:nvSpPr>
@@ -13329,7 +14153,7 @@
       </p:sp>
       <p:sp>
         <p:nvSpPr>
-          <p:cNvPr id="23" name="Text 21"/>
+          <p:cNvPr id="26" name="Text 24"/>
           <p:cNvSpPr/>
           <p:nvPr/>
         </p:nvSpPr>
@@ -13368,7 +14192,7 @@
       </p:sp>
       <p:sp>
         <p:nvSpPr>
-          <p:cNvPr id="24" name="Shape 22"/>
+          <p:cNvPr id="27" name="Shape 25"/>
           <p:cNvSpPr/>
           <p:nvPr/>
         </p:nvSpPr>
@@ -13395,13 +14219,13 @@
       </p:sp>
       <p:sp>
         <p:nvSpPr>
-          <p:cNvPr id="25" name="Shape 23"/>
-          <p:cNvSpPr/>
-          <p:nvPr/>
-        </p:nvSpPr>
-        <p:spPr>
-          <a:xfrm>
-            <a:off x="2999232" y="3364992"/>
+          <p:cNvPr id="28" name="Shape 26"/>
+          <p:cNvSpPr/>
+          <p:nvPr/>
+        </p:nvSpPr>
+        <p:spPr>
+          <a:xfrm>
+            <a:off x="2313432" y="3364992"/>
             <a:ext cx="1645920" cy="475488"/>
           </a:xfrm>
           <a:prstGeom prst="rect">
@@ -13422,13 +14246,13 @@
       </p:sp>
       <p:sp>
         <p:nvSpPr>
-          <p:cNvPr id="26" name="Text 24"/>
-          <p:cNvSpPr/>
-          <p:nvPr/>
-        </p:nvSpPr>
-        <p:spPr>
-          <a:xfrm>
-            <a:off x="2999232" y="3364992"/>
+          <p:cNvPr id="29" name="Text 27"/>
+          <p:cNvSpPr/>
+          <p:nvPr/>
+        </p:nvSpPr>
+        <p:spPr>
+          <a:xfrm>
+            <a:off x="2313432" y="3364992"/>
             <a:ext cx="1645920" cy="475488"/>
           </a:xfrm>
           <a:prstGeom prst="rect">
@@ -13461,14 +14285,14 @@
       </p:sp>
       <p:sp>
         <p:nvSpPr>
-          <p:cNvPr id="27" name="Text 25"/>
-          <p:cNvSpPr/>
-          <p:nvPr/>
-        </p:nvSpPr>
-        <p:spPr>
-          <a:xfrm>
-            <a:off x="4645152" y="3364992"/>
-            <a:ext cx="1097280" cy="475488"/>
+          <p:cNvPr id="30" name="Text 28"/>
+          <p:cNvSpPr/>
+          <p:nvPr/>
+        </p:nvSpPr>
+        <p:spPr>
+          <a:xfrm>
+            <a:off x="3959352" y="3364992"/>
+            <a:ext cx="411480" cy="475488"/>
           </a:xfrm>
           <a:prstGeom prst="rect">
             <a:avLst/>
@@ -13500,13 +14324,13 @@
       </p:sp>
       <p:sp>
         <p:nvSpPr>
-          <p:cNvPr id="28" name="Shape 26"/>
-          <p:cNvSpPr/>
-          <p:nvPr/>
-        </p:nvSpPr>
-        <p:spPr>
-          <a:xfrm>
-            <a:off x="5742432" y="3364992"/>
+          <p:cNvPr id="31" name="Shape 29"/>
+          <p:cNvSpPr/>
+          <p:nvPr/>
+        </p:nvSpPr>
+        <p:spPr>
+          <a:xfrm>
+            <a:off x="4370832" y="3364992"/>
             <a:ext cx="1645920" cy="475488"/>
           </a:xfrm>
           <a:prstGeom prst="rect">
@@ -13527,13 +14351,13 @@
       </p:sp>
       <p:sp>
         <p:nvSpPr>
-          <p:cNvPr id="29" name="Text 27"/>
-          <p:cNvSpPr/>
-          <p:nvPr/>
-        </p:nvSpPr>
-        <p:spPr>
-          <a:xfrm>
-            <a:off x="5742432" y="3364992"/>
+          <p:cNvPr id="32" name="Text 30"/>
+          <p:cNvSpPr/>
+          <p:nvPr/>
+        </p:nvSpPr>
+        <p:spPr>
+          <a:xfrm>
+            <a:off x="4370832" y="3364992"/>
             <a:ext cx="1645920" cy="475488"/>
           </a:xfrm>
           <a:prstGeom prst="rect">
@@ -13558,7 +14382,7 @@
                 <a:ea typeface="Trebuchet MS" pitchFamily="34" charset="-122"/>
                 <a:cs typeface="Trebuchet MS" pitchFamily="34" charset="-120"/>
               </a:rPr>
-              <a:t>press</a:t>
+              <a:t>pres</a:t>
             </a:r>
             <a:endParaRPr lang="en-US" sz="1400" dirty="0"/>
           </a:p>
@@ -13566,7 +14390,112 @@
       </p:sp>
       <p:sp>
         <p:nvSpPr>
-          <p:cNvPr id="30" name="Shape 28"/>
+          <p:cNvPr id="33" name="Text 31"/>
+          <p:cNvSpPr/>
+          <p:nvPr/>
+        </p:nvSpPr>
+        <p:spPr>
+          <a:xfrm>
+            <a:off x="6016752" y="3364992"/>
+            <a:ext cx="411480" cy="475488"/>
+          </a:xfrm>
+          <a:prstGeom prst="rect">
+            <a:avLst/>
+          </a:prstGeom>
+          <a:noFill/>
+          <a:ln/>
+        </p:spPr>
+        <p:txBody>
+          <a:bodyPr wrap="square" lIns="0" tIns="0" rIns="0" bIns="0" rtlCol="0" anchor="ctr"/>
+          <a:lstStyle/>
+          <a:p>
+            <a:pPr algn="ctr" indent="0" marL="0">
+              <a:buNone/>
+            </a:pPr>
+            <a:r>
+              <a:rPr lang="en-US" sz="1600" b="1" dirty="0">
+                <a:solidFill>
+                  <a:srgbClr val="0D9488"/>
+                </a:solidFill>
+                <a:latin typeface="Trebuchet MS" pitchFamily="34" charset="0"/>
+                <a:ea typeface="Trebuchet MS" pitchFamily="34" charset="-122"/>
+                <a:cs typeface="Trebuchet MS" pitchFamily="34" charset="-120"/>
+              </a:rPr>
+              <a:t>·</a:t>
+            </a:r>
+            <a:endParaRPr lang="en-US" sz="1600" dirty="0"/>
+          </a:p>
+        </p:txBody>
+      </p:sp>
+      <p:sp>
+        <p:nvSpPr>
+          <p:cNvPr id="34" name="Shape 32"/>
+          <p:cNvSpPr/>
+          <p:nvPr/>
+        </p:nvSpPr>
+        <p:spPr>
+          <a:xfrm>
+            <a:off x="6428232" y="3364992"/>
+            <a:ext cx="1645920" cy="475488"/>
+          </a:xfrm>
+          <a:prstGeom prst="rect">
+            <a:avLst>
+              <a:gd name="adj" fmla="val 9615"/>
+            </a:avLst>
+          </a:prstGeom>
+          <a:solidFill>
+            <a:srgbClr val="FFFFFF"/>
+          </a:solidFill>
+          <a:ln w="12700">
+            <a:solidFill>
+              <a:srgbClr val="0D9488"/>
+            </a:solidFill>
+            <a:prstDash val="solid"/>
+          </a:ln>
+        </p:spPr>
+      </p:sp>
+      <p:sp>
+        <p:nvSpPr>
+          <p:cNvPr id="35" name="Text 33"/>
+          <p:cNvSpPr/>
+          <p:nvPr/>
+        </p:nvSpPr>
+        <p:spPr>
+          <a:xfrm>
+            <a:off x="6428232" y="3364992"/>
+            <a:ext cx="1645920" cy="475488"/>
+          </a:xfrm>
+          <a:prstGeom prst="rect">
+            <a:avLst/>
+          </a:prstGeom>
+          <a:noFill/>
+          <a:ln/>
+        </p:spPr>
+        <p:txBody>
+          <a:bodyPr wrap="square" lIns="0" tIns="0" rIns="0" bIns="0" rtlCol="0" anchor="ctr"/>
+          <a:lstStyle/>
+          <a:p>
+            <a:pPr algn="ctr" indent="0" marL="0">
+              <a:buNone/>
+            </a:pPr>
+            <a:r>
+              <a:rPr lang="en-US" sz="1400" b="1" dirty="0">
+                <a:solidFill>
+                  <a:srgbClr val="0D9488"/>
+                </a:solidFill>
+                <a:latin typeface="Trebuchet MS" pitchFamily="34" charset="0"/>
+                <a:ea typeface="Trebuchet MS" pitchFamily="34" charset="-122"/>
+                <a:cs typeface="Trebuchet MS" pitchFamily="34" charset="-120"/>
+              </a:rPr>
+              <a:t>sion</a:t>
+            </a:r>
+            <a:endParaRPr lang="en-US" sz="1400" dirty="0"/>
+          </a:p>
+        </p:txBody>
+      </p:sp>
+      <p:sp>
+        <p:nvSpPr>
+          <p:cNvPr id="36" name="Shape 34"/>
           <p:cNvSpPr/>
           <p:nvPr/>
         </p:nvSpPr>
@@ -13593,7 +14522,7 @@
       </p:sp>
       <p:sp>
         <p:nvSpPr>
-          <p:cNvPr id="31" name="Text 29"/>
+          <p:cNvPr id="37" name="Text 35"/>
           <p:cNvSpPr/>
           <p:nvPr/>
         </p:nvSpPr>
@@ -13632,7 +14561,7 @@
       </p:sp>
       <p:sp>
         <p:nvSpPr>
-          <p:cNvPr id="32" name="Shape 30"/>
+          <p:cNvPr id="38" name="Shape 36"/>
           <p:cNvSpPr/>
           <p:nvPr/>
         </p:nvSpPr>
@@ -13659,7 +14588,7 @@
       </p:sp>
       <p:sp>
         <p:nvSpPr>
-          <p:cNvPr id="33" name="Text 31"/>
+          <p:cNvPr id="39" name="Text 37"/>
           <p:cNvSpPr/>
           <p:nvPr/>
         </p:nvSpPr>
@@ -13891,7 +14820,7 @@
                 <a:ea typeface="Calibri" pitchFamily="34" charset="-122"/>
                 <a:cs typeface="Calibri" pitchFamily="34" charset="-120"/>
               </a:rPr>
-              <a:t>Root 'press' — to push down or squeeze</a:t>
+              <a:t>Root 'press' — press; push</a:t>
             </a:r>
             <a:endParaRPr lang="en-US" sz="1600" dirty="0"/>
           </a:p>
@@ -14247,7 +15176,7 @@
                 <a:ea typeface="Calibri" pitchFamily="34" charset="-122"/>
                 <a:cs typeface="Calibri" pitchFamily="34" charset="-120"/>
               </a:rPr>
-              <a:t>Word Labs  •  wordlabs.app  •  Root: 'press' = to push down or squeeze</a:t>
+              <a:t>Word Labs  •  wordlabs.app  •  Root: 'press' = press; push</a:t>
             </a:r>
             <a:endParaRPr lang="en-US" sz="800" dirty="0"/>
           </a:p>
@@ -14386,7 +15315,7 @@
                 <a:ea typeface="Trebuchet MS" pitchFamily="34" charset="-122"/>
                 <a:cs typeface="Trebuchet MS" pitchFamily="34" charset="-120"/>
               </a:rPr>
-              <a:t>compress</a:t>
+              <a:t>compression</a:t>
             </a:r>
             <a:endParaRPr lang="en-US" sz="2800" dirty="0"/>
           </a:p>
@@ -14466,7 +15395,7 @@
         </p:nvSpPr>
         <p:spPr>
           <a:xfrm>
-            <a:off x="2938272" y="2258568"/>
+            <a:off x="2221992" y="2258568"/>
             <a:ext cx="1828800" cy="292608"/>
           </a:xfrm>
           <a:prstGeom prst="rect">
@@ -14500,7 +15429,7 @@
         </p:nvSpPr>
         <p:spPr>
           <a:xfrm>
-            <a:off x="2938272" y="2258568"/>
+            <a:off x="2221992" y="2258568"/>
             <a:ext cx="1828800" cy="292608"/>
           </a:xfrm>
           <a:prstGeom prst="rect">
@@ -14525,7 +15454,7 @@
                 <a:ea typeface="Trebuchet MS" pitchFamily="34" charset="-122"/>
                 <a:cs typeface="Trebuchet MS" pitchFamily="34" charset="-120"/>
               </a:rPr>
-              <a:t>com</a:t>
+              <a:t>con</a:t>
             </a:r>
             <a:endParaRPr lang="en-US" sz="1300" dirty="0"/>
           </a:p>
@@ -14539,7 +15468,7 @@
         </p:nvSpPr>
         <p:spPr>
           <a:xfrm>
-            <a:off x="2938272" y="2569464"/>
+            <a:off x="2221992" y="2569464"/>
             <a:ext cx="1828800" cy="201168"/>
           </a:xfrm>
           <a:prstGeom prst="rect">
@@ -14564,7 +15493,7 @@
                 <a:ea typeface="Calibri" pitchFamily="34" charset="-122"/>
                 <a:cs typeface="Calibri" pitchFamily="34" charset="-120"/>
               </a:rPr>
-              <a:t>together</a:t>
+              <a:t>with or together</a:t>
             </a:r>
             <a:endParaRPr lang="en-US" sz="850" dirty="0"/>
           </a:p>
@@ -14578,7 +15507,7 @@
         </p:nvSpPr>
         <p:spPr>
           <a:xfrm>
-            <a:off x="5803392" y="2258568"/>
+            <a:off x="4370832" y="2258568"/>
             <a:ext cx="1828800" cy="292608"/>
           </a:xfrm>
           <a:prstGeom prst="rect">
@@ -14612,7 +15541,7 @@
         </p:nvSpPr>
         <p:spPr>
           <a:xfrm>
-            <a:off x="5803392" y="2258568"/>
+            <a:off x="4370832" y="2258568"/>
             <a:ext cx="1828800" cy="292608"/>
           </a:xfrm>
           <a:prstGeom prst="rect">
@@ -14651,7 +15580,7 @@
         </p:nvSpPr>
         <p:spPr>
           <a:xfrm>
-            <a:off x="5803392" y="2569464"/>
+            <a:off x="4370832" y="2569464"/>
             <a:ext cx="1828800" cy="201168"/>
           </a:xfrm>
           <a:prstGeom prst="rect">
@@ -14676,7 +15605,7 @@
                 <a:ea typeface="Calibri" pitchFamily="34" charset="-122"/>
                 <a:cs typeface="Calibri" pitchFamily="34" charset="-120"/>
               </a:rPr>
-              <a:t>to push or squeeze</a:t>
+              <a:t>press; push</a:t>
             </a:r>
             <a:endParaRPr lang="en-US" sz="850" dirty="0"/>
           </a:p>
@@ -14685,6 +15614,118 @@
       <p:sp>
         <p:nvSpPr>
           <p:cNvPr id="22" name="Shape 20"/>
+          <p:cNvSpPr/>
+          <p:nvPr/>
+        </p:nvSpPr>
+        <p:spPr>
+          <a:xfrm>
+            <a:off x="6519672" y="2258568"/>
+            <a:ext cx="1828800" cy="292608"/>
+          </a:xfrm>
+          <a:prstGeom prst="rect">
+            <a:avLst>
+              <a:gd name="adj" fmla="val 25000"/>
+            </a:avLst>
+          </a:prstGeom>
+          <a:solidFill>
+            <a:srgbClr val="FCE7F3"/>
+          </a:solidFill>
+          <a:ln w="19050">
+            <a:solidFill>
+              <a:srgbClr val="DB2777"/>
+            </a:solidFill>
+            <a:prstDash val="solid"/>
+          </a:ln>
+          <a:effectLst>
+            <a:outerShdw sx="100000" sy="100000" kx="0" ky="0" algn="bl" rotWithShape="0" blurRad="101600" dist="38100" dir="8100000">
+              <a:srgbClr val="000000">
+                <a:alpha val="12000"/>
+              </a:srgbClr>
+            </a:outerShdw>
+          </a:effectLst>
+        </p:spPr>
+      </p:sp>
+      <p:sp>
+        <p:nvSpPr>
+          <p:cNvPr id="23" name="Text 21"/>
+          <p:cNvSpPr/>
+          <p:nvPr/>
+        </p:nvSpPr>
+        <p:spPr>
+          <a:xfrm>
+            <a:off x="6519672" y="2258568"/>
+            <a:ext cx="1828800" cy="292608"/>
+          </a:xfrm>
+          <a:prstGeom prst="rect">
+            <a:avLst/>
+          </a:prstGeom>
+          <a:noFill/>
+          <a:ln/>
+        </p:spPr>
+        <p:txBody>
+          <a:bodyPr wrap="square" lIns="0" tIns="0" rIns="0" bIns="0" rtlCol="0" anchor="ctr"/>
+          <a:lstStyle/>
+          <a:p>
+            <a:pPr algn="ctr" indent="0" marL="0">
+              <a:buNone/>
+            </a:pPr>
+            <a:r>
+              <a:rPr lang="en-US" sz="1300" b="1" dirty="0">
+                <a:solidFill>
+                  <a:srgbClr val="9D174D"/>
+                </a:solidFill>
+                <a:latin typeface="Trebuchet MS" pitchFamily="34" charset="0"/>
+                <a:ea typeface="Trebuchet MS" pitchFamily="34" charset="-122"/>
+                <a:cs typeface="Trebuchet MS" pitchFamily="34" charset="-120"/>
+              </a:rPr>
+              <a:t>ion</a:t>
+            </a:r>
+            <a:endParaRPr lang="en-US" sz="1300" dirty="0"/>
+          </a:p>
+        </p:txBody>
+      </p:sp>
+      <p:sp>
+        <p:nvSpPr>
+          <p:cNvPr id="24" name="Text 22"/>
+          <p:cNvSpPr/>
+          <p:nvPr/>
+        </p:nvSpPr>
+        <p:spPr>
+          <a:xfrm>
+            <a:off x="6519672" y="2569464"/>
+            <a:ext cx="1828800" cy="201168"/>
+          </a:xfrm>
+          <a:prstGeom prst="rect">
+            <a:avLst/>
+          </a:prstGeom>
+          <a:noFill/>
+          <a:ln/>
+        </p:spPr>
+        <p:txBody>
+          <a:bodyPr wrap="square" lIns="0" tIns="0" rIns="0" bIns="0" rtlCol="0" anchor="t"/>
+          <a:lstStyle/>
+          <a:p>
+            <a:pPr algn="ctr" indent="0" marL="0">
+              <a:buNone/>
+            </a:pPr>
+            <a:r>
+              <a:rPr lang="en-US" sz="850" dirty="0">
+                <a:solidFill>
+                  <a:srgbClr val="475569"/>
+                </a:solidFill>
+                <a:latin typeface="Calibri" pitchFamily="34" charset="0"/>
+                <a:ea typeface="Calibri" pitchFamily="34" charset="-122"/>
+                <a:cs typeface="Calibri" pitchFamily="34" charset="-120"/>
+              </a:rPr>
+              <a:t>act or result of</a:t>
+            </a:r>
+            <a:endParaRPr lang="en-US" sz="850" dirty="0"/>
+          </a:p>
+        </p:txBody>
+      </p:sp>
+      <p:sp>
+        <p:nvSpPr>
+          <p:cNvPr id="25" name="Shape 23"/>
           <p:cNvSpPr/>
           <p:nvPr/>
         </p:nvSpPr>
@@ -14711,7 +15752,7 @@
       </p:sp>
       <p:sp>
         <p:nvSpPr>
-          <p:cNvPr id="23" name="Text 21"/>
+          <p:cNvPr id="26" name="Text 24"/>
           <p:cNvSpPr/>
           <p:nvPr/>
         </p:nvSpPr>
@@ -14750,7 +15791,7 @@
       </p:sp>
       <p:sp>
         <p:nvSpPr>
-          <p:cNvPr id="24" name="Shape 22"/>
+          <p:cNvPr id="27" name="Shape 25"/>
           <p:cNvSpPr/>
           <p:nvPr/>
         </p:nvSpPr>
@@ -14777,13 +15818,13 @@
       </p:sp>
       <p:sp>
         <p:nvSpPr>
-          <p:cNvPr id="25" name="Shape 23"/>
-          <p:cNvSpPr/>
-          <p:nvPr/>
-        </p:nvSpPr>
-        <p:spPr>
-          <a:xfrm>
-            <a:off x="2999232" y="3364992"/>
+          <p:cNvPr id="28" name="Shape 26"/>
+          <p:cNvSpPr/>
+          <p:nvPr/>
+        </p:nvSpPr>
+        <p:spPr>
+          <a:xfrm>
+            <a:off x="2313432" y="3364992"/>
             <a:ext cx="1645920" cy="475488"/>
           </a:xfrm>
           <a:prstGeom prst="rect">
@@ -14804,13 +15845,13 @@
       </p:sp>
       <p:sp>
         <p:nvSpPr>
-          <p:cNvPr id="26" name="Text 24"/>
-          <p:cNvSpPr/>
-          <p:nvPr/>
-        </p:nvSpPr>
-        <p:spPr>
-          <a:xfrm>
-            <a:off x="2999232" y="3364992"/>
+          <p:cNvPr id="29" name="Text 27"/>
+          <p:cNvSpPr/>
+          <p:nvPr/>
+        </p:nvSpPr>
+        <p:spPr>
+          <a:xfrm>
+            <a:off x="2313432" y="3364992"/>
             <a:ext cx="1645920" cy="475488"/>
           </a:xfrm>
           <a:prstGeom prst="rect">
@@ -14843,14 +15884,14 @@
       </p:sp>
       <p:sp>
         <p:nvSpPr>
-          <p:cNvPr id="27" name="Text 25"/>
-          <p:cNvSpPr/>
-          <p:nvPr/>
-        </p:nvSpPr>
-        <p:spPr>
-          <a:xfrm>
-            <a:off x="4645152" y="3364992"/>
-            <a:ext cx="1097280" cy="475488"/>
+          <p:cNvPr id="30" name="Text 28"/>
+          <p:cNvSpPr/>
+          <p:nvPr/>
+        </p:nvSpPr>
+        <p:spPr>
+          <a:xfrm>
+            <a:off x="3959352" y="3364992"/>
+            <a:ext cx="411480" cy="475488"/>
           </a:xfrm>
           <a:prstGeom prst="rect">
             <a:avLst/>
@@ -14882,13 +15923,13 @@
       </p:sp>
       <p:sp>
         <p:nvSpPr>
-          <p:cNvPr id="28" name="Shape 26"/>
-          <p:cNvSpPr/>
-          <p:nvPr/>
-        </p:nvSpPr>
-        <p:spPr>
-          <a:xfrm>
-            <a:off x="5742432" y="3364992"/>
+          <p:cNvPr id="31" name="Shape 29"/>
+          <p:cNvSpPr/>
+          <p:nvPr/>
+        </p:nvSpPr>
+        <p:spPr>
+          <a:xfrm>
+            <a:off x="4370832" y="3364992"/>
             <a:ext cx="1645920" cy="475488"/>
           </a:xfrm>
           <a:prstGeom prst="rect">
@@ -14909,13 +15950,13 @@
       </p:sp>
       <p:sp>
         <p:nvSpPr>
-          <p:cNvPr id="29" name="Text 27"/>
-          <p:cNvSpPr/>
-          <p:nvPr/>
-        </p:nvSpPr>
-        <p:spPr>
-          <a:xfrm>
-            <a:off x="5742432" y="3364992"/>
+          <p:cNvPr id="32" name="Text 30"/>
+          <p:cNvSpPr/>
+          <p:nvPr/>
+        </p:nvSpPr>
+        <p:spPr>
+          <a:xfrm>
+            <a:off x="4370832" y="3364992"/>
             <a:ext cx="1645920" cy="475488"/>
           </a:xfrm>
           <a:prstGeom prst="rect">
@@ -14940,7 +15981,7 @@
                 <a:ea typeface="Trebuchet MS" pitchFamily="34" charset="-122"/>
                 <a:cs typeface="Trebuchet MS" pitchFamily="34" charset="-120"/>
               </a:rPr>
-              <a:t>press</a:t>
+              <a:t>pres</a:t>
             </a:r>
             <a:endParaRPr lang="en-US" sz="1400" dirty="0"/>
           </a:p>
@@ -14948,7 +15989,112 @@
       </p:sp>
       <p:sp>
         <p:nvSpPr>
-          <p:cNvPr id="30" name="Shape 28"/>
+          <p:cNvPr id="33" name="Text 31"/>
+          <p:cNvSpPr/>
+          <p:nvPr/>
+        </p:nvSpPr>
+        <p:spPr>
+          <a:xfrm>
+            <a:off x="6016752" y="3364992"/>
+            <a:ext cx="411480" cy="475488"/>
+          </a:xfrm>
+          <a:prstGeom prst="rect">
+            <a:avLst/>
+          </a:prstGeom>
+          <a:noFill/>
+          <a:ln/>
+        </p:spPr>
+        <p:txBody>
+          <a:bodyPr wrap="square" lIns="0" tIns="0" rIns="0" bIns="0" rtlCol="0" anchor="ctr"/>
+          <a:lstStyle/>
+          <a:p>
+            <a:pPr algn="ctr" indent="0" marL="0">
+              <a:buNone/>
+            </a:pPr>
+            <a:r>
+              <a:rPr lang="en-US" sz="1600" b="1" dirty="0">
+                <a:solidFill>
+                  <a:srgbClr val="0D9488"/>
+                </a:solidFill>
+                <a:latin typeface="Trebuchet MS" pitchFamily="34" charset="0"/>
+                <a:ea typeface="Trebuchet MS" pitchFamily="34" charset="-122"/>
+                <a:cs typeface="Trebuchet MS" pitchFamily="34" charset="-120"/>
+              </a:rPr>
+              <a:t>·</a:t>
+            </a:r>
+            <a:endParaRPr lang="en-US" sz="1600" dirty="0"/>
+          </a:p>
+        </p:txBody>
+      </p:sp>
+      <p:sp>
+        <p:nvSpPr>
+          <p:cNvPr id="34" name="Shape 32"/>
+          <p:cNvSpPr/>
+          <p:nvPr/>
+        </p:nvSpPr>
+        <p:spPr>
+          <a:xfrm>
+            <a:off x="6428232" y="3364992"/>
+            <a:ext cx="1645920" cy="475488"/>
+          </a:xfrm>
+          <a:prstGeom prst="rect">
+            <a:avLst>
+              <a:gd name="adj" fmla="val 9615"/>
+            </a:avLst>
+          </a:prstGeom>
+          <a:solidFill>
+            <a:srgbClr val="FFFFFF"/>
+          </a:solidFill>
+          <a:ln w="12700">
+            <a:solidFill>
+              <a:srgbClr val="0D9488"/>
+            </a:solidFill>
+            <a:prstDash val="solid"/>
+          </a:ln>
+        </p:spPr>
+      </p:sp>
+      <p:sp>
+        <p:nvSpPr>
+          <p:cNvPr id="35" name="Text 33"/>
+          <p:cNvSpPr/>
+          <p:nvPr/>
+        </p:nvSpPr>
+        <p:spPr>
+          <a:xfrm>
+            <a:off x="6428232" y="3364992"/>
+            <a:ext cx="1645920" cy="475488"/>
+          </a:xfrm>
+          <a:prstGeom prst="rect">
+            <a:avLst/>
+          </a:prstGeom>
+          <a:noFill/>
+          <a:ln/>
+        </p:spPr>
+        <p:txBody>
+          <a:bodyPr wrap="square" lIns="0" tIns="0" rIns="0" bIns="0" rtlCol="0" anchor="ctr"/>
+          <a:lstStyle/>
+          <a:p>
+            <a:pPr algn="ctr" indent="0" marL="0">
+              <a:buNone/>
+            </a:pPr>
+            <a:r>
+              <a:rPr lang="en-US" sz="1400" b="1" dirty="0">
+                <a:solidFill>
+                  <a:srgbClr val="0D9488"/>
+                </a:solidFill>
+                <a:latin typeface="Trebuchet MS" pitchFamily="34" charset="0"/>
+                <a:ea typeface="Trebuchet MS" pitchFamily="34" charset="-122"/>
+                <a:cs typeface="Trebuchet MS" pitchFamily="34" charset="-120"/>
+              </a:rPr>
+              <a:t>sion</a:t>
+            </a:r>
+            <a:endParaRPr lang="en-US" sz="1400" dirty="0"/>
+          </a:p>
+        </p:txBody>
+      </p:sp>
+      <p:sp>
+        <p:nvSpPr>
+          <p:cNvPr id="36" name="Shape 34"/>
           <p:cNvSpPr/>
           <p:nvPr/>
         </p:nvSpPr>
@@ -14975,7 +16121,7 @@
       </p:sp>
       <p:sp>
         <p:nvSpPr>
-          <p:cNvPr id="31" name="Text 29"/>
+          <p:cNvPr id="37" name="Text 35"/>
           <p:cNvSpPr/>
           <p:nvPr/>
         </p:nvSpPr>
@@ -15014,18 +16160,18 @@
       </p:sp>
       <p:sp>
         <p:nvSpPr>
-          <p:cNvPr id="32" name="Shape 30"/>
+          <p:cNvPr id="38" name="Shape 36"/>
           <p:cNvSpPr/>
           <p:nvPr/>
         </p:nvSpPr>
         <p:spPr>
           <a:xfrm>
             <a:off x="1874520" y="4096512"/>
-            <a:ext cx="6903720" cy="804672"/>
+            <a:ext cx="6903720" cy="658368"/>
           </a:xfrm>
           <a:prstGeom prst="rect">
             <a:avLst>
-              <a:gd name="adj" fmla="val 6818"/>
+              <a:gd name="adj" fmla="val 8333"/>
             </a:avLst>
           </a:prstGeom>
           <a:solidFill>
@@ -15041,18 +16187,18 @@
       </p:sp>
       <p:sp>
         <p:nvSpPr>
-          <p:cNvPr id="33" name="Shape 31"/>
-          <p:cNvSpPr/>
-          <p:nvPr/>
-        </p:nvSpPr>
-        <p:spPr>
-          <a:xfrm>
-            <a:off x="2124837" y="4169664"/>
-            <a:ext cx="685800" cy="384048"/>
+          <p:cNvPr id="39" name="Shape 37"/>
+          <p:cNvSpPr/>
+          <p:nvPr/>
+        </p:nvSpPr>
+        <p:spPr>
+          <a:xfrm>
+            <a:off x="1951330" y="4169664"/>
+            <a:ext cx="676656" cy="475488"/>
           </a:xfrm>
           <a:prstGeom prst="rect">
             <a:avLst>
-              <a:gd name="adj" fmla="val 9524"/>
+              <a:gd name="adj" fmla="val 7692"/>
             </a:avLst>
           </a:prstGeom>
           <a:solidFill>
@@ -15068,14 +16214,14 @@
       </p:sp>
       <p:sp>
         <p:nvSpPr>
-          <p:cNvPr id="34" name="Text 32"/>
-          <p:cNvSpPr/>
-          <p:nvPr/>
-        </p:nvSpPr>
-        <p:spPr>
-          <a:xfrm>
-            <a:off x="2124837" y="4169664"/>
-            <a:ext cx="685800" cy="384048"/>
+          <p:cNvPr id="40" name="Text 38"/>
+          <p:cNvSpPr/>
+          <p:nvPr/>
+        </p:nvSpPr>
+        <p:spPr>
+          <a:xfrm>
+            <a:off x="1951330" y="4169664"/>
+            <a:ext cx="676656" cy="475488"/>
           </a:xfrm>
           <a:prstGeom prst="rect">
             <a:avLst/>
@@ -15107,57 +16253,18 @@
       </p:sp>
       <p:sp>
         <p:nvSpPr>
-          <p:cNvPr id="35" name="Text 33"/>
-          <p:cNvSpPr/>
-          <p:nvPr/>
-        </p:nvSpPr>
-        <p:spPr>
-          <a:xfrm>
-            <a:off x="2124837" y="4572000"/>
-            <a:ext cx="685800" cy="219456"/>
-          </a:xfrm>
-          <a:prstGeom prst="rect">
-            <a:avLst/>
-          </a:prstGeom>
-          <a:noFill/>
-          <a:ln/>
-        </p:spPr>
-        <p:txBody>
-          <a:bodyPr wrap="square" lIns="0" tIns="0" rIns="0" bIns="0" rtlCol="0" anchor="t"/>
-          <a:lstStyle/>
-          <a:p>
-            <a:pPr algn="ctr" indent="0" marL="0">
-              <a:buNone/>
-            </a:pPr>
-            <a:r>
-              <a:rPr lang="en-US" sz="750" i="1" dirty="0">
-                <a:solidFill>
-                  <a:srgbClr val="94A3B8"/>
-                </a:solidFill>
-                <a:latin typeface="Calibri" pitchFamily="34" charset="0"/>
-                <a:ea typeface="Calibri" pitchFamily="34" charset="-122"/>
-                <a:cs typeface="Calibri" pitchFamily="34" charset="-120"/>
-              </a:rPr>
-              <a:t>/k/</a:t>
-            </a:r>
-            <a:endParaRPr lang="en-US" sz="750" dirty="0"/>
-          </a:p>
-        </p:txBody>
-      </p:sp>
-      <p:sp>
-        <p:nvSpPr>
-          <p:cNvPr id="36" name="Shape 34"/>
-          <p:cNvSpPr/>
-          <p:nvPr/>
-        </p:nvSpPr>
-        <p:spPr>
-          <a:xfrm>
-            <a:off x="3033522" y="4169664"/>
-            <a:ext cx="685800" cy="384048"/>
+          <p:cNvPr id="41" name="Shape 39"/>
+          <p:cNvSpPr/>
+          <p:nvPr/>
+        </p:nvSpPr>
+        <p:spPr>
+          <a:xfrm>
+            <a:off x="2677363" y="4169664"/>
+            <a:ext cx="676656" cy="475488"/>
           </a:xfrm>
           <a:prstGeom prst="rect">
             <a:avLst>
-              <a:gd name="adj" fmla="val 9524"/>
+              <a:gd name="adj" fmla="val 7692"/>
             </a:avLst>
           </a:prstGeom>
           <a:solidFill>
@@ -15173,14 +16280,14 @@
       </p:sp>
       <p:sp>
         <p:nvSpPr>
-          <p:cNvPr id="37" name="Text 35"/>
-          <p:cNvSpPr/>
-          <p:nvPr/>
-        </p:nvSpPr>
-        <p:spPr>
-          <a:xfrm>
-            <a:off x="3033522" y="4169664"/>
-            <a:ext cx="685800" cy="384048"/>
+          <p:cNvPr id="42" name="Text 40"/>
+          <p:cNvSpPr/>
+          <p:nvPr/>
+        </p:nvSpPr>
+        <p:spPr>
+          <a:xfrm>
+            <a:off x="2677363" y="4169664"/>
+            <a:ext cx="676656" cy="475488"/>
           </a:xfrm>
           <a:prstGeom prst="rect">
             <a:avLst/>
@@ -15212,18 +16319,18 @@
       </p:sp>
       <p:sp>
         <p:nvSpPr>
-          <p:cNvPr id="38" name="Shape 36"/>
-          <p:cNvSpPr/>
-          <p:nvPr/>
-        </p:nvSpPr>
-        <p:spPr>
-          <a:xfrm>
-            <a:off x="3942207" y="4169664"/>
-            <a:ext cx="685800" cy="384048"/>
+          <p:cNvPr id="43" name="Shape 41"/>
+          <p:cNvSpPr/>
+          <p:nvPr/>
+        </p:nvSpPr>
+        <p:spPr>
+          <a:xfrm>
+            <a:off x="3403397" y="4169664"/>
+            <a:ext cx="676656" cy="475488"/>
           </a:xfrm>
           <a:prstGeom prst="rect">
             <a:avLst>
-              <a:gd name="adj" fmla="val 9524"/>
+              <a:gd name="adj" fmla="val 7692"/>
             </a:avLst>
           </a:prstGeom>
           <a:solidFill>
@@ -15239,14 +16346,14 @@
       </p:sp>
       <p:sp>
         <p:nvSpPr>
-          <p:cNvPr id="39" name="Text 37"/>
-          <p:cNvSpPr/>
-          <p:nvPr/>
-        </p:nvSpPr>
-        <p:spPr>
-          <a:xfrm>
-            <a:off x="3942207" y="4169664"/>
-            <a:ext cx="685800" cy="384048"/>
+          <p:cNvPr id="44" name="Text 42"/>
+          <p:cNvSpPr/>
+          <p:nvPr/>
+        </p:nvSpPr>
+        <p:spPr>
+          <a:xfrm>
+            <a:off x="3403397" y="4169664"/>
+            <a:ext cx="676656" cy="475488"/>
           </a:xfrm>
           <a:prstGeom prst="rect">
             <a:avLst/>
@@ -15278,18 +16385,18 @@
       </p:sp>
       <p:sp>
         <p:nvSpPr>
-          <p:cNvPr id="40" name="Shape 38"/>
-          <p:cNvSpPr/>
-          <p:nvPr/>
-        </p:nvSpPr>
-        <p:spPr>
-          <a:xfrm>
-            <a:off x="4850892" y="4169664"/>
-            <a:ext cx="685800" cy="384048"/>
+          <p:cNvPr id="45" name="Shape 43"/>
+          <p:cNvSpPr/>
+          <p:nvPr/>
+        </p:nvSpPr>
+        <p:spPr>
+          <a:xfrm>
+            <a:off x="4129430" y="4169664"/>
+            <a:ext cx="676656" cy="475488"/>
           </a:xfrm>
           <a:prstGeom prst="rect">
             <a:avLst>
-              <a:gd name="adj" fmla="val 9524"/>
+              <a:gd name="adj" fmla="val 7692"/>
             </a:avLst>
           </a:prstGeom>
           <a:solidFill>
@@ -15305,14 +16412,14 @@
       </p:sp>
       <p:sp>
         <p:nvSpPr>
-          <p:cNvPr id="41" name="Text 39"/>
-          <p:cNvSpPr/>
-          <p:nvPr/>
-        </p:nvSpPr>
-        <p:spPr>
-          <a:xfrm>
-            <a:off x="4850892" y="4169664"/>
-            <a:ext cx="685800" cy="384048"/>
+          <p:cNvPr id="46" name="Text 44"/>
+          <p:cNvSpPr/>
+          <p:nvPr/>
+        </p:nvSpPr>
+        <p:spPr>
+          <a:xfrm>
+            <a:off x="4129430" y="4169664"/>
+            <a:ext cx="676656" cy="475488"/>
           </a:xfrm>
           <a:prstGeom prst="rect">
             <a:avLst/>
@@ -15344,18 +16451,18 @@
       </p:sp>
       <p:sp>
         <p:nvSpPr>
-          <p:cNvPr id="42" name="Shape 40"/>
-          <p:cNvSpPr/>
-          <p:nvPr/>
-        </p:nvSpPr>
-        <p:spPr>
-          <a:xfrm>
-            <a:off x="5759577" y="4169664"/>
-            <a:ext cx="685800" cy="384048"/>
+          <p:cNvPr id="47" name="Shape 45"/>
+          <p:cNvSpPr/>
+          <p:nvPr/>
+        </p:nvSpPr>
+        <p:spPr>
+          <a:xfrm>
+            <a:off x="4855464" y="4169664"/>
+            <a:ext cx="676656" cy="475488"/>
           </a:xfrm>
           <a:prstGeom prst="rect">
             <a:avLst>
-              <a:gd name="adj" fmla="val 9524"/>
+              <a:gd name="adj" fmla="val 7692"/>
             </a:avLst>
           </a:prstGeom>
           <a:solidFill>
@@ -15371,14 +16478,14 @@
       </p:sp>
       <p:sp>
         <p:nvSpPr>
-          <p:cNvPr id="43" name="Text 41"/>
-          <p:cNvSpPr/>
-          <p:nvPr/>
-        </p:nvSpPr>
-        <p:spPr>
-          <a:xfrm>
-            <a:off x="5759577" y="4169664"/>
-            <a:ext cx="685800" cy="384048"/>
+          <p:cNvPr id="48" name="Text 46"/>
+          <p:cNvSpPr/>
+          <p:nvPr/>
+        </p:nvSpPr>
+        <p:spPr>
+          <a:xfrm>
+            <a:off x="4855464" y="4169664"/>
+            <a:ext cx="676656" cy="475488"/>
           </a:xfrm>
           <a:prstGeom prst="rect">
             <a:avLst/>
@@ -15410,18 +16517,18 @@
       </p:sp>
       <p:sp>
         <p:nvSpPr>
-          <p:cNvPr id="44" name="Shape 42"/>
-          <p:cNvSpPr/>
-          <p:nvPr/>
-        </p:nvSpPr>
-        <p:spPr>
-          <a:xfrm>
-            <a:off x="6668262" y="4169664"/>
-            <a:ext cx="685800" cy="384048"/>
+          <p:cNvPr id="49" name="Shape 47"/>
+          <p:cNvSpPr/>
+          <p:nvPr/>
+        </p:nvSpPr>
+        <p:spPr>
+          <a:xfrm>
+            <a:off x="5581498" y="4169664"/>
+            <a:ext cx="676656" cy="475488"/>
           </a:xfrm>
           <a:prstGeom prst="rect">
             <a:avLst>
-              <a:gd name="adj" fmla="val 9524"/>
+              <a:gd name="adj" fmla="val 7692"/>
             </a:avLst>
           </a:prstGeom>
           <a:solidFill>
@@ -15437,14 +16544,14 @@
       </p:sp>
       <p:sp>
         <p:nvSpPr>
-          <p:cNvPr id="45" name="Text 43"/>
-          <p:cNvSpPr/>
-          <p:nvPr/>
-        </p:nvSpPr>
-        <p:spPr>
-          <a:xfrm>
-            <a:off x="6668262" y="4169664"/>
-            <a:ext cx="685800" cy="384048"/>
+          <p:cNvPr id="50" name="Text 48"/>
+          <p:cNvSpPr/>
+          <p:nvPr/>
+        </p:nvSpPr>
+        <p:spPr>
+          <a:xfrm>
+            <a:off x="5581498" y="4169664"/>
+            <a:ext cx="676656" cy="475488"/>
           </a:xfrm>
           <a:prstGeom prst="rect">
             <a:avLst/>
@@ -15476,18 +16583,18 @@
       </p:sp>
       <p:sp>
         <p:nvSpPr>
-          <p:cNvPr id="46" name="Shape 44"/>
-          <p:cNvSpPr/>
-          <p:nvPr/>
-        </p:nvSpPr>
-        <p:spPr>
-          <a:xfrm>
-            <a:off x="7576947" y="4169664"/>
-            <a:ext cx="685800" cy="384048"/>
+          <p:cNvPr id="51" name="Shape 49"/>
+          <p:cNvSpPr/>
+          <p:nvPr/>
+        </p:nvSpPr>
+        <p:spPr>
+          <a:xfrm>
+            <a:off x="6307531" y="4169664"/>
+            <a:ext cx="676656" cy="475488"/>
           </a:xfrm>
           <a:prstGeom prst="rect">
             <a:avLst>
-              <a:gd name="adj" fmla="val 9524"/>
+              <a:gd name="adj" fmla="val 7692"/>
             </a:avLst>
           </a:prstGeom>
           <a:solidFill>
@@ -15503,14 +16610,14 @@
       </p:sp>
       <p:sp>
         <p:nvSpPr>
-          <p:cNvPr id="47" name="Text 45"/>
-          <p:cNvSpPr/>
-          <p:nvPr/>
-        </p:nvSpPr>
-        <p:spPr>
-          <a:xfrm>
-            <a:off x="7576947" y="4169664"/>
-            <a:ext cx="685800" cy="384048"/>
+          <p:cNvPr id="52" name="Text 50"/>
+          <p:cNvSpPr/>
+          <p:nvPr/>
+        </p:nvSpPr>
+        <p:spPr>
+          <a:xfrm>
+            <a:off x="6307531" y="4169664"/>
+            <a:ext cx="676656" cy="475488"/>
           </a:xfrm>
           <a:prstGeom prst="rect">
             <a:avLst/>
@@ -15534,7 +16641,139 @@
                 <a:ea typeface="Trebuchet MS" pitchFamily="34" charset="-122"/>
                 <a:cs typeface="Trebuchet MS" pitchFamily="34" charset="-120"/>
               </a:rPr>
-              <a:t>ss</a:t>
+              <a:t>ssi</a:t>
+            </a:r>
+            <a:endParaRPr lang="en-US" sz="900" dirty="0"/>
+          </a:p>
+        </p:txBody>
+      </p:sp>
+      <p:sp>
+        <p:nvSpPr>
+          <p:cNvPr id="53" name="Shape 51"/>
+          <p:cNvSpPr/>
+          <p:nvPr/>
+        </p:nvSpPr>
+        <p:spPr>
+          <a:xfrm>
+            <a:off x="7033565" y="4169664"/>
+            <a:ext cx="676656" cy="475488"/>
+          </a:xfrm>
+          <a:prstGeom prst="rect">
+            <a:avLst>
+              <a:gd name="adj" fmla="val 7692"/>
+            </a:avLst>
+          </a:prstGeom>
+          <a:solidFill>
+            <a:srgbClr val="FFFFFF"/>
+          </a:solidFill>
+          <a:ln w="12700">
+            <a:solidFill>
+              <a:srgbClr val="DB2777"/>
+            </a:solidFill>
+            <a:prstDash val="solid"/>
+          </a:ln>
+        </p:spPr>
+      </p:sp>
+      <p:sp>
+        <p:nvSpPr>
+          <p:cNvPr id="54" name="Text 52"/>
+          <p:cNvSpPr/>
+          <p:nvPr/>
+        </p:nvSpPr>
+        <p:spPr>
+          <a:xfrm>
+            <a:off x="7033565" y="4169664"/>
+            <a:ext cx="676656" cy="475488"/>
+          </a:xfrm>
+          <a:prstGeom prst="rect">
+            <a:avLst/>
+          </a:prstGeom>
+          <a:noFill/>
+          <a:ln/>
+        </p:spPr>
+        <p:txBody>
+          <a:bodyPr wrap="square" lIns="0" tIns="0" rIns="0" bIns="0" rtlCol="0" anchor="ctr"/>
+          <a:lstStyle/>
+          <a:p>
+            <a:pPr algn="ctr" indent="0" marL="0">
+              <a:buNone/>
+            </a:pPr>
+            <a:r>
+              <a:rPr lang="en-US" sz="900" b="1" dirty="0">
+                <a:solidFill>
+                  <a:srgbClr val="9D174D"/>
+                </a:solidFill>
+                <a:latin typeface="Trebuchet MS" pitchFamily="34" charset="0"/>
+                <a:ea typeface="Trebuchet MS" pitchFamily="34" charset="-122"/>
+                <a:cs typeface="Trebuchet MS" pitchFamily="34" charset="-120"/>
+              </a:rPr>
+              <a:t>o</a:t>
+            </a:r>
+            <a:endParaRPr lang="en-US" sz="900" dirty="0"/>
+          </a:p>
+        </p:txBody>
+      </p:sp>
+      <p:sp>
+        <p:nvSpPr>
+          <p:cNvPr id="55" name="Shape 53"/>
+          <p:cNvSpPr/>
+          <p:nvPr/>
+        </p:nvSpPr>
+        <p:spPr>
+          <a:xfrm>
+            <a:off x="7759598" y="4169664"/>
+            <a:ext cx="676656" cy="475488"/>
+          </a:xfrm>
+          <a:prstGeom prst="rect">
+            <a:avLst>
+              <a:gd name="adj" fmla="val 7692"/>
+            </a:avLst>
+          </a:prstGeom>
+          <a:solidFill>
+            <a:srgbClr val="FFFFFF"/>
+          </a:solidFill>
+          <a:ln w="12700">
+            <a:solidFill>
+              <a:srgbClr val="DB2777"/>
+            </a:solidFill>
+            <a:prstDash val="solid"/>
+          </a:ln>
+        </p:spPr>
+      </p:sp>
+      <p:sp>
+        <p:nvSpPr>
+          <p:cNvPr id="56" name="Text 54"/>
+          <p:cNvSpPr/>
+          <p:nvPr/>
+        </p:nvSpPr>
+        <p:spPr>
+          <a:xfrm>
+            <a:off x="7759598" y="4169664"/>
+            <a:ext cx="676656" cy="475488"/>
+          </a:xfrm>
+          <a:prstGeom prst="rect">
+            <a:avLst/>
+          </a:prstGeom>
+          <a:noFill/>
+          <a:ln/>
+        </p:spPr>
+        <p:txBody>
+          <a:bodyPr wrap="square" lIns="0" tIns="0" rIns="0" bIns="0" rtlCol="0" anchor="ctr"/>
+          <a:lstStyle/>
+          <a:p>
+            <a:pPr algn="ctr" indent="0" marL="0">
+              <a:buNone/>
+            </a:pPr>
+            <a:r>
+              <a:rPr lang="en-US" sz="900" b="1" dirty="0">
+                <a:solidFill>
+                  <a:srgbClr val="9D174D"/>
+                </a:solidFill>
+                <a:latin typeface="Trebuchet MS" pitchFamily="34" charset="0"/>
+                <a:ea typeface="Trebuchet MS" pitchFamily="34" charset="-122"/>
+                <a:cs typeface="Trebuchet MS" pitchFamily="34" charset="-120"/>
+              </a:rPr>
+              <a:t>n</a:t>
             </a:r>
             <a:endParaRPr lang="en-US" sz="900" dirty="0"/>
           </a:p>
@@ -16108,7 +17347,7 @@
                 <a:ea typeface="Calibri" pitchFamily="34" charset="-122"/>
                 <a:cs typeface="Calibri" pitchFamily="34" charset="-120"/>
               </a:rPr>
-              <a:t>Word Labs  •  wordlabs.app  •  Root: 'press' = to push down or squeeze</a:t>
+              <a:t>Word Labs  •  wordlabs.app  •  Root: 'press' = press; push</a:t>
             </a:r>
             <a:endParaRPr lang="en-US" sz="800" dirty="0"/>
           </a:p>
@@ -16748,7 +17987,7 @@
                 <a:ea typeface="Calibri" pitchFamily="34" charset="-122"/>
                 <a:cs typeface="Calibri" pitchFamily="34" charset="-120"/>
               </a:rPr>
-              <a:t>Word Labs  •  wordlabs.app  •  Root: 'press' = to push down or squeeze</a:t>
+              <a:t>Word Labs  •  wordlabs.app  •  Root: 'press' = press; push</a:t>
             </a:r>
             <a:endParaRPr lang="en-US" sz="800" dirty="0"/>
           </a:p>
@@ -16860,7 +18099,7 @@
                 <a:ea typeface="Calibri" pitchFamily="34" charset="-122"/>
                 <a:cs typeface="Calibri" pitchFamily="34" charset="-120"/>
               </a:rPr>
-              <a:t>Her </a:t>
+              <a:t>The tour guide shared her first </a:t>
             </a:r>
             <a:pPr algn="l" indent="0" marL="0">
               <a:buNone/>
@@ -16877,7 +18116,7 @@
                 <a:ea typeface="Calibri" pitchFamily="34" charset="-122"/>
                 <a:cs typeface="Calibri" pitchFamily="34" charset="-120"/>
               </a:rPr>
-              <a:t>impressive</a:t>
+              <a:t>impressions</a:t>
             </a:r>
             <a:pPr algn="l" indent="0" marL="0">
               <a:buNone/>
@@ -16891,7 +18130,7 @@
                 <a:ea typeface="Calibri" pitchFamily="34" charset="-122"/>
                 <a:cs typeface="Calibri" pitchFamily="34" charset="-120"/>
               </a:rPr>
-              <a:t> </a:t>
+              <a:t> of the ancient ruins. The </a:t>
             </a:r>
             <a:pPr algn="l" indent="0" marL="0">
               <a:buNone/>
@@ -16908,7 +18147,7 @@
                 <a:ea typeface="Calibri" pitchFamily="34" charset="-122"/>
                 <a:cs typeface="Calibri" pitchFamily="34" charset="-120"/>
               </a:rPr>
-              <a:t>expression</a:t>
+              <a:t>suppression</a:t>
             </a:r>
             <a:pPr algn="l" indent="0" marL="0">
               <a:buNone/>
@@ -16922,7 +18161,7 @@
                 <a:ea typeface="Calibri" pitchFamily="34" charset="-122"/>
                 <a:cs typeface="Calibri" pitchFamily="34" charset="-120"/>
               </a:rPr>
-              <a:t> showed she was deeply </a:t>
+              <a:t> of the fire took several hours. The book described the </a:t>
             </a:r>
             <a:pPr algn="l" indent="0" marL="0">
               <a:buNone/>
@@ -16939,7 +18178,7 @@
                 <a:ea typeface="Calibri" pitchFamily="34" charset="-122"/>
                 <a:cs typeface="Calibri" pitchFamily="34" charset="-120"/>
               </a:rPr>
-              <a:t>depressed</a:t>
+              <a:t>oppression</a:t>
             </a:r>
             <a:pPr algn="l" indent="0" marL="0">
               <a:buNone/>
@@ -16953,7 +18192,7 @@
                 <a:ea typeface="Calibri" pitchFamily="34" charset="-122"/>
                 <a:cs typeface="Calibri" pitchFamily="34" charset="-120"/>
               </a:rPr>
-              <a:t> about losing the competition.</a:t>
+              <a:t> faced by the workers.</a:t>
             </a:r>
             <a:endParaRPr lang="en-US" sz="1800" dirty="0"/>
           </a:p>
@@ -17108,7 +18347,7 @@
                 <a:ea typeface="Trebuchet MS" pitchFamily="34" charset="-122"/>
                 <a:cs typeface="Trebuchet MS" pitchFamily="34" charset="-120"/>
               </a:rPr>
-              <a:t>impressive</a:t>
+              <a:t>impressions</a:t>
             </a:r>
             <a:endParaRPr lang="en-US" sz="1400" dirty="0"/>
           </a:p>
@@ -17236,7 +18475,7 @@
                 <a:ea typeface="Trebuchet MS" pitchFamily="34" charset="-122"/>
                 <a:cs typeface="Trebuchet MS" pitchFamily="34" charset="-120"/>
               </a:rPr>
-              <a:t>expression</a:t>
+              <a:t>suppression</a:t>
             </a:r>
             <a:endParaRPr lang="en-US" sz="1400" dirty="0"/>
           </a:p>
@@ -17364,7 +18603,7 @@
                 <a:ea typeface="Trebuchet MS" pitchFamily="34" charset="-122"/>
                 <a:cs typeface="Trebuchet MS" pitchFamily="34" charset="-120"/>
               </a:rPr>
-              <a:t>depressed</a:t>
+              <a:t>oppression</a:t>
             </a:r>
             <a:endParaRPr lang="en-US" sz="1400" dirty="0"/>
           </a:p>
@@ -17695,7 +18934,7 @@
                 <a:ea typeface="Calibri" pitchFamily="34" charset="-122"/>
                 <a:cs typeface="Calibri" pitchFamily="34" charset="-120"/>
               </a:rPr>
-              <a:t>Word Labs  •  wordlabs.app  •  Root: 'press' = to push down or squeeze</a:t>
+              <a:t>Word Labs  •  wordlabs.app  •  Root: 'press' = press; push</a:t>
             </a:r>
             <a:endParaRPr lang="en-US" sz="800" dirty="0"/>
           </a:p>
@@ -17834,7 +19073,7 @@
                 <a:ea typeface="Trebuchet MS" pitchFamily="34" charset="-122"/>
                 <a:cs typeface="Trebuchet MS" pitchFamily="34" charset="-120"/>
               </a:rPr>
-              <a:t>impressive</a:t>
+              <a:t>impressions</a:t>
             </a:r>
             <a:endParaRPr lang="en-US" sz="2800" dirty="0"/>
           </a:p>
@@ -18522,7 +19761,7 @@
                 <a:ea typeface="Calibri" pitchFamily="34" charset="-122"/>
                 <a:cs typeface="Calibri" pitchFamily="34" charset="-120"/>
               </a:rPr>
-              <a:t>Word Labs  •  wordlabs.app  •  Root: 'press' = to push down or squeeze</a:t>
+              <a:t>Word Labs  •  wordlabs.app  •  Root: 'press' = press; push</a:t>
             </a:r>
             <a:endParaRPr lang="en-US" sz="800" dirty="0"/>
           </a:p>
@@ -18661,7 +19900,7 @@
                 <a:ea typeface="Trebuchet MS" pitchFamily="34" charset="-122"/>
                 <a:cs typeface="Trebuchet MS" pitchFamily="34" charset="-120"/>
               </a:rPr>
-              <a:t>impressive</a:t>
+              <a:t>impressions</a:t>
             </a:r>
             <a:endParaRPr lang="en-US" sz="2800" dirty="0"/>
           </a:p>
@@ -18741,8 +19980,8 @@
         </p:nvSpPr>
         <p:spPr>
           <a:xfrm>
-            <a:off x="2221992" y="2258568"/>
-            <a:ext cx="1828800" cy="292608"/>
+            <a:off x="1989734" y="2258568"/>
+            <a:ext cx="1581912" cy="292608"/>
           </a:xfrm>
           <a:prstGeom prst="rect">
             <a:avLst>
@@ -18775,8 +20014,8 @@
         </p:nvSpPr>
         <p:spPr>
           <a:xfrm>
-            <a:off x="2221992" y="2258568"/>
-            <a:ext cx="1828800" cy="292608"/>
+            <a:off x="1989734" y="2258568"/>
+            <a:ext cx="1581912" cy="292608"/>
           </a:xfrm>
           <a:prstGeom prst="rect">
             <a:avLst/>
@@ -18800,7 +20039,7 @@
                 <a:ea typeface="Trebuchet MS" pitchFamily="34" charset="-122"/>
                 <a:cs typeface="Trebuchet MS" pitchFamily="34" charset="-120"/>
               </a:rPr>
-              <a:t>im</a:t>
+              <a:t>in</a:t>
             </a:r>
             <a:endParaRPr lang="en-US" sz="1300" dirty="0"/>
           </a:p>
@@ -18814,8 +20053,8 @@
         </p:nvSpPr>
         <p:spPr>
           <a:xfrm>
-            <a:off x="2221992" y="2569464"/>
-            <a:ext cx="1828800" cy="201168"/>
+            <a:off x="1989734" y="2569464"/>
+            <a:ext cx="1581912" cy="201168"/>
           </a:xfrm>
           <a:prstGeom prst="rect">
             <a:avLst/>
@@ -18839,7 +20078,7 @@
                 <a:ea typeface="Calibri" pitchFamily="34" charset="-122"/>
                 <a:cs typeface="Calibri" pitchFamily="34" charset="-120"/>
               </a:rPr>
-              <a:t>into</a:t>
+              <a:t>not; into</a:t>
             </a:r>
             <a:endParaRPr lang="en-US" sz="850" dirty="0"/>
           </a:p>
@@ -18853,8 +20092,8 @@
         </p:nvSpPr>
         <p:spPr>
           <a:xfrm>
-            <a:off x="4370832" y="2258568"/>
-            <a:ext cx="1828800" cy="292608"/>
+            <a:off x="3659429" y="2258568"/>
+            <a:ext cx="1581912" cy="292608"/>
           </a:xfrm>
           <a:prstGeom prst="rect">
             <a:avLst>
@@ -18887,8 +20126,8 @@
         </p:nvSpPr>
         <p:spPr>
           <a:xfrm>
-            <a:off x="4370832" y="2258568"/>
-            <a:ext cx="1828800" cy="292608"/>
+            <a:off x="3659429" y="2258568"/>
+            <a:ext cx="1581912" cy="292608"/>
           </a:xfrm>
           <a:prstGeom prst="rect">
             <a:avLst/>
@@ -18926,8 +20165,8 @@
         </p:nvSpPr>
         <p:spPr>
           <a:xfrm>
-            <a:off x="4370832" y="2569464"/>
-            <a:ext cx="1828800" cy="201168"/>
+            <a:off x="3659429" y="2569464"/>
+            <a:ext cx="1581912" cy="201168"/>
           </a:xfrm>
           <a:prstGeom prst="rect">
             <a:avLst/>
@@ -18951,7 +20190,7 @@
                 <a:ea typeface="Calibri" pitchFamily="34" charset="-122"/>
                 <a:cs typeface="Calibri" pitchFamily="34" charset="-120"/>
               </a:rPr>
-              <a:t>to push or squeeze</a:t>
+              <a:t>press; push</a:t>
             </a:r>
             <a:endParaRPr lang="en-US" sz="850" dirty="0"/>
           </a:p>
@@ -18965,8 +20204,8 @@
         </p:nvSpPr>
         <p:spPr>
           <a:xfrm>
-            <a:off x="6519672" y="2258568"/>
-            <a:ext cx="1828800" cy="292608"/>
+            <a:off x="5329123" y="2258568"/>
+            <a:ext cx="1581912" cy="292608"/>
           </a:xfrm>
           <a:prstGeom prst="rect">
             <a:avLst>
@@ -18999,8 +20238,8 @@
         </p:nvSpPr>
         <p:spPr>
           <a:xfrm>
-            <a:off x="6519672" y="2258568"/>
-            <a:ext cx="1828800" cy="292608"/>
+            <a:off x="5329123" y="2258568"/>
+            <a:ext cx="1581912" cy="292608"/>
           </a:xfrm>
           <a:prstGeom prst="rect">
             <a:avLst/>
@@ -19024,7 +20263,7 @@
                 <a:ea typeface="Trebuchet MS" pitchFamily="34" charset="-122"/>
                 <a:cs typeface="Trebuchet MS" pitchFamily="34" charset="-120"/>
               </a:rPr>
-              <a:t>ive</a:t>
+              <a:t>ion</a:t>
             </a:r>
             <a:endParaRPr lang="en-US" sz="1300" dirty="0"/>
           </a:p>
@@ -19038,8 +20277,8 @@
         </p:nvSpPr>
         <p:spPr>
           <a:xfrm>
-            <a:off x="6519672" y="2569464"/>
-            <a:ext cx="1828800" cy="201168"/>
+            <a:off x="5329123" y="2569464"/>
+            <a:ext cx="1581912" cy="201168"/>
           </a:xfrm>
           <a:prstGeom prst="rect">
             <a:avLst/>
@@ -19063,7 +20302,7 @@
                 <a:ea typeface="Calibri" pitchFamily="34" charset="-122"/>
                 <a:cs typeface="Calibri" pitchFamily="34" charset="-120"/>
               </a:rPr>
-              <a:t>having the quality of</a:t>
+              <a:t>act or result of</a:t>
             </a:r>
             <a:endParaRPr lang="en-US" sz="850" dirty="0"/>
           </a:p>
@@ -19072,6 +20311,118 @@
       <p:sp>
         <p:nvSpPr>
           <p:cNvPr id="25" name="Shape 23"/>
+          <p:cNvSpPr/>
+          <p:nvPr/>
+        </p:nvSpPr>
+        <p:spPr>
+          <a:xfrm>
+            <a:off x="6998818" y="2258568"/>
+            <a:ext cx="1581912" cy="292608"/>
+          </a:xfrm>
+          <a:prstGeom prst="rect">
+            <a:avLst>
+              <a:gd name="adj" fmla="val 25000"/>
+            </a:avLst>
+          </a:prstGeom>
+          <a:solidFill>
+            <a:srgbClr val="FCE7F3"/>
+          </a:solidFill>
+          <a:ln w="19050">
+            <a:solidFill>
+              <a:srgbClr val="DB2777"/>
+            </a:solidFill>
+            <a:prstDash val="solid"/>
+          </a:ln>
+          <a:effectLst>
+            <a:outerShdw sx="100000" sy="100000" kx="0" ky="0" algn="bl" rotWithShape="0" blurRad="101600" dist="38100" dir="8100000">
+              <a:srgbClr val="000000">
+                <a:alpha val="12000"/>
+              </a:srgbClr>
+            </a:outerShdw>
+          </a:effectLst>
+        </p:spPr>
+      </p:sp>
+      <p:sp>
+        <p:nvSpPr>
+          <p:cNvPr id="26" name="Text 24"/>
+          <p:cNvSpPr/>
+          <p:nvPr/>
+        </p:nvSpPr>
+        <p:spPr>
+          <a:xfrm>
+            <a:off x="6998818" y="2258568"/>
+            <a:ext cx="1581912" cy="292608"/>
+          </a:xfrm>
+          <a:prstGeom prst="rect">
+            <a:avLst/>
+          </a:prstGeom>
+          <a:noFill/>
+          <a:ln/>
+        </p:spPr>
+        <p:txBody>
+          <a:bodyPr wrap="square" lIns="0" tIns="0" rIns="0" bIns="0" rtlCol="0" anchor="ctr"/>
+          <a:lstStyle/>
+          <a:p>
+            <a:pPr algn="ctr" indent="0" marL="0">
+              <a:buNone/>
+            </a:pPr>
+            <a:r>
+              <a:rPr lang="en-US" sz="1300" b="1" dirty="0">
+                <a:solidFill>
+                  <a:srgbClr val="9D174D"/>
+                </a:solidFill>
+                <a:latin typeface="Trebuchet MS" pitchFamily="34" charset="0"/>
+                <a:ea typeface="Trebuchet MS" pitchFamily="34" charset="-122"/>
+                <a:cs typeface="Trebuchet MS" pitchFamily="34" charset="-120"/>
+              </a:rPr>
+              <a:t>s</a:t>
+            </a:r>
+            <a:endParaRPr lang="en-US" sz="1300" dirty="0"/>
+          </a:p>
+        </p:txBody>
+      </p:sp>
+      <p:sp>
+        <p:nvSpPr>
+          <p:cNvPr id="27" name="Text 25"/>
+          <p:cNvSpPr/>
+          <p:nvPr/>
+        </p:nvSpPr>
+        <p:spPr>
+          <a:xfrm>
+            <a:off x="6998818" y="2569464"/>
+            <a:ext cx="1581912" cy="201168"/>
+          </a:xfrm>
+          <a:prstGeom prst="rect">
+            <a:avLst/>
+          </a:prstGeom>
+          <a:noFill/>
+          <a:ln/>
+        </p:spPr>
+        <p:txBody>
+          <a:bodyPr wrap="square" lIns="0" tIns="0" rIns="0" bIns="0" rtlCol="0" anchor="t"/>
+          <a:lstStyle/>
+          <a:p>
+            <a:pPr algn="ctr" indent="0" marL="0">
+              <a:buNone/>
+            </a:pPr>
+            <a:r>
+              <a:rPr lang="en-US" sz="850" dirty="0">
+                <a:solidFill>
+                  <a:srgbClr val="475569"/>
+                </a:solidFill>
+                <a:latin typeface="Calibri" pitchFamily="34" charset="0"/>
+                <a:ea typeface="Calibri" pitchFamily="34" charset="-122"/>
+                <a:cs typeface="Calibri" pitchFamily="34" charset="-120"/>
+              </a:rPr>
+              <a:t>plural or present tense</a:t>
+            </a:r>
+            <a:endParaRPr lang="en-US" sz="850" dirty="0"/>
+          </a:p>
+        </p:txBody>
+      </p:sp>
+      <p:sp>
+        <p:nvSpPr>
+          <p:cNvPr id="28" name="Shape 26"/>
           <p:cNvSpPr/>
           <p:nvPr/>
         </p:nvSpPr>
@@ -19098,7 +20449,7 @@
       </p:sp>
       <p:sp>
         <p:nvSpPr>
-          <p:cNvPr id="26" name="Text 24"/>
+          <p:cNvPr id="29" name="Text 27"/>
           <p:cNvSpPr/>
           <p:nvPr/>
         </p:nvSpPr>
@@ -19137,7 +20488,7 @@
       </p:sp>
       <p:sp>
         <p:nvSpPr>
-          <p:cNvPr id="27" name="Shape 25"/>
+          <p:cNvPr id="30" name="Shape 28"/>
           <p:cNvSpPr/>
           <p:nvPr/>
         </p:nvSpPr>
@@ -19164,7 +20515,7 @@
       </p:sp>
       <p:sp>
         <p:nvSpPr>
-          <p:cNvPr id="28" name="Text 26"/>
+          <p:cNvPr id="31" name="Text 29"/>
           <p:cNvSpPr/>
           <p:nvPr/>
         </p:nvSpPr>
@@ -19203,7 +20554,7 @@
       </p:sp>
       <p:sp>
         <p:nvSpPr>
-          <p:cNvPr id="29" name="Shape 27"/>
+          <p:cNvPr id="32" name="Shape 30"/>
           <p:cNvSpPr/>
           <p:nvPr/>
         </p:nvSpPr>
@@ -19230,7 +20581,7 @@
       </p:sp>
       <p:sp>
         <p:nvSpPr>
-          <p:cNvPr id="30" name="Text 28"/>
+          <p:cNvPr id="33" name="Text 31"/>
           <p:cNvSpPr/>
           <p:nvPr/>
         </p:nvSpPr>
@@ -19269,7 +20620,7 @@
       </p:sp>
       <p:sp>
         <p:nvSpPr>
-          <p:cNvPr id="31" name="Shape 29"/>
+          <p:cNvPr id="34" name="Shape 32"/>
           <p:cNvSpPr/>
           <p:nvPr/>
         </p:nvSpPr>
@@ -19296,7 +20647,7 @@
       </p:sp>
       <p:sp>
         <p:nvSpPr>
-          <p:cNvPr id="32" name="Text 30"/>
+          <p:cNvPr id="35" name="Text 33"/>
           <p:cNvSpPr/>
           <p:nvPr/>
         </p:nvSpPr>
@@ -19619,7 +20970,7 @@
                 <a:ea typeface="Calibri" pitchFamily="34" charset="-122"/>
                 <a:cs typeface="Calibri" pitchFamily="34" charset="-120"/>
               </a:rPr>
-              <a:t>Word Labs  •  wordlabs.app  •  Root: 'press' = to push down or squeeze</a:t>
+              <a:t>Word Labs  •  wordlabs.app  •  Root: 'press' = press; push</a:t>
             </a:r>
             <a:endParaRPr lang="en-US" sz="800" dirty="0"/>
           </a:p>
@@ -19758,7 +21109,7 @@
                 <a:ea typeface="Trebuchet MS" pitchFamily="34" charset="-122"/>
                 <a:cs typeface="Trebuchet MS" pitchFamily="34" charset="-120"/>
               </a:rPr>
-              <a:t>impressive</a:t>
+              <a:t>impressions</a:t>
             </a:r>
             <a:endParaRPr lang="en-US" sz="2800" dirty="0"/>
           </a:p>
@@ -19838,8 +21189,8 @@
         </p:nvSpPr>
         <p:spPr>
           <a:xfrm>
-            <a:off x="2221992" y="2258568"/>
-            <a:ext cx="1828800" cy="292608"/>
+            <a:off x="1989734" y="2258568"/>
+            <a:ext cx="1581912" cy="292608"/>
           </a:xfrm>
           <a:prstGeom prst="rect">
             <a:avLst>
@@ -19872,8 +21223,8 @@
         </p:nvSpPr>
         <p:spPr>
           <a:xfrm>
-            <a:off x="2221992" y="2258568"/>
-            <a:ext cx="1828800" cy="292608"/>
+            <a:off x="1989734" y="2258568"/>
+            <a:ext cx="1581912" cy="292608"/>
           </a:xfrm>
           <a:prstGeom prst="rect">
             <a:avLst/>
@@ -19897,7 +21248,7 @@
                 <a:ea typeface="Trebuchet MS" pitchFamily="34" charset="-122"/>
                 <a:cs typeface="Trebuchet MS" pitchFamily="34" charset="-120"/>
               </a:rPr>
-              <a:t>im</a:t>
+              <a:t>in</a:t>
             </a:r>
             <a:endParaRPr lang="en-US" sz="1300" dirty="0"/>
           </a:p>
@@ -19911,8 +21262,8 @@
         </p:nvSpPr>
         <p:spPr>
           <a:xfrm>
-            <a:off x="2221992" y="2569464"/>
-            <a:ext cx="1828800" cy="201168"/>
+            <a:off x="1989734" y="2569464"/>
+            <a:ext cx="1581912" cy="201168"/>
           </a:xfrm>
           <a:prstGeom prst="rect">
             <a:avLst/>
@@ -19936,7 +21287,7 @@
                 <a:ea typeface="Calibri" pitchFamily="34" charset="-122"/>
                 <a:cs typeface="Calibri" pitchFamily="34" charset="-120"/>
               </a:rPr>
-              <a:t>into</a:t>
+              <a:t>not; into</a:t>
             </a:r>
             <a:endParaRPr lang="en-US" sz="850" dirty="0"/>
           </a:p>
@@ -19950,8 +21301,8 @@
         </p:nvSpPr>
         <p:spPr>
           <a:xfrm>
-            <a:off x="4370832" y="2258568"/>
-            <a:ext cx="1828800" cy="292608"/>
+            <a:off x="3659429" y="2258568"/>
+            <a:ext cx="1581912" cy="292608"/>
           </a:xfrm>
           <a:prstGeom prst="rect">
             <a:avLst>
@@ -19984,8 +21335,8 @@
         </p:nvSpPr>
         <p:spPr>
           <a:xfrm>
-            <a:off x="4370832" y="2258568"/>
-            <a:ext cx="1828800" cy="292608"/>
+            <a:off x="3659429" y="2258568"/>
+            <a:ext cx="1581912" cy="292608"/>
           </a:xfrm>
           <a:prstGeom prst="rect">
             <a:avLst/>
@@ -20023,8 +21374,8 @@
         </p:nvSpPr>
         <p:spPr>
           <a:xfrm>
-            <a:off x="4370832" y="2569464"/>
-            <a:ext cx="1828800" cy="201168"/>
+            <a:off x="3659429" y="2569464"/>
+            <a:ext cx="1581912" cy="201168"/>
           </a:xfrm>
           <a:prstGeom prst="rect">
             <a:avLst/>
@@ -20048,7 +21399,7 @@
                 <a:ea typeface="Calibri" pitchFamily="34" charset="-122"/>
                 <a:cs typeface="Calibri" pitchFamily="34" charset="-120"/>
               </a:rPr>
-              <a:t>to push or squeeze</a:t>
+              <a:t>press; push</a:t>
             </a:r>
             <a:endParaRPr lang="en-US" sz="850" dirty="0"/>
           </a:p>
@@ -20062,8 +21413,8 @@
         </p:nvSpPr>
         <p:spPr>
           <a:xfrm>
-            <a:off x="6519672" y="2258568"/>
-            <a:ext cx="1828800" cy="292608"/>
+            <a:off x="5329123" y="2258568"/>
+            <a:ext cx="1581912" cy="292608"/>
           </a:xfrm>
           <a:prstGeom prst="rect">
             <a:avLst>
@@ -20096,8 +21447,8 @@
         </p:nvSpPr>
         <p:spPr>
           <a:xfrm>
-            <a:off x="6519672" y="2258568"/>
-            <a:ext cx="1828800" cy="292608"/>
+            <a:off x="5329123" y="2258568"/>
+            <a:ext cx="1581912" cy="292608"/>
           </a:xfrm>
           <a:prstGeom prst="rect">
             <a:avLst/>
@@ -20121,7 +21472,7 @@
                 <a:ea typeface="Trebuchet MS" pitchFamily="34" charset="-122"/>
                 <a:cs typeface="Trebuchet MS" pitchFamily="34" charset="-120"/>
               </a:rPr>
-              <a:t>ive</a:t>
+              <a:t>ion</a:t>
             </a:r>
             <a:endParaRPr lang="en-US" sz="1300" dirty="0"/>
           </a:p>
@@ -20135,8 +21486,8 @@
         </p:nvSpPr>
         <p:spPr>
           <a:xfrm>
-            <a:off x="6519672" y="2569464"/>
-            <a:ext cx="1828800" cy="201168"/>
+            <a:off x="5329123" y="2569464"/>
+            <a:ext cx="1581912" cy="201168"/>
           </a:xfrm>
           <a:prstGeom prst="rect">
             <a:avLst/>
@@ -20160,7 +21511,7 @@
                 <a:ea typeface="Calibri" pitchFamily="34" charset="-122"/>
                 <a:cs typeface="Calibri" pitchFamily="34" charset="-120"/>
               </a:rPr>
-              <a:t>having the quality of</a:t>
+              <a:t>act or result of</a:t>
             </a:r>
             <a:endParaRPr lang="en-US" sz="850" dirty="0"/>
           </a:p>
@@ -20169,6 +21520,118 @@
       <p:sp>
         <p:nvSpPr>
           <p:cNvPr id="25" name="Shape 23"/>
+          <p:cNvSpPr/>
+          <p:nvPr/>
+        </p:nvSpPr>
+        <p:spPr>
+          <a:xfrm>
+            <a:off x="6998818" y="2258568"/>
+            <a:ext cx="1581912" cy="292608"/>
+          </a:xfrm>
+          <a:prstGeom prst="rect">
+            <a:avLst>
+              <a:gd name="adj" fmla="val 25000"/>
+            </a:avLst>
+          </a:prstGeom>
+          <a:solidFill>
+            <a:srgbClr val="FCE7F3"/>
+          </a:solidFill>
+          <a:ln w="19050">
+            <a:solidFill>
+              <a:srgbClr val="DB2777"/>
+            </a:solidFill>
+            <a:prstDash val="solid"/>
+          </a:ln>
+          <a:effectLst>
+            <a:outerShdw sx="100000" sy="100000" kx="0" ky="0" algn="bl" rotWithShape="0" blurRad="101600" dist="38100" dir="8100000">
+              <a:srgbClr val="000000">
+                <a:alpha val="12000"/>
+              </a:srgbClr>
+            </a:outerShdw>
+          </a:effectLst>
+        </p:spPr>
+      </p:sp>
+      <p:sp>
+        <p:nvSpPr>
+          <p:cNvPr id="26" name="Text 24"/>
+          <p:cNvSpPr/>
+          <p:nvPr/>
+        </p:nvSpPr>
+        <p:spPr>
+          <a:xfrm>
+            <a:off x="6998818" y="2258568"/>
+            <a:ext cx="1581912" cy="292608"/>
+          </a:xfrm>
+          <a:prstGeom prst="rect">
+            <a:avLst/>
+          </a:prstGeom>
+          <a:noFill/>
+          <a:ln/>
+        </p:spPr>
+        <p:txBody>
+          <a:bodyPr wrap="square" lIns="0" tIns="0" rIns="0" bIns="0" rtlCol="0" anchor="ctr"/>
+          <a:lstStyle/>
+          <a:p>
+            <a:pPr algn="ctr" indent="0" marL="0">
+              <a:buNone/>
+            </a:pPr>
+            <a:r>
+              <a:rPr lang="en-US" sz="1300" b="1" dirty="0">
+                <a:solidFill>
+                  <a:srgbClr val="9D174D"/>
+                </a:solidFill>
+                <a:latin typeface="Trebuchet MS" pitchFamily="34" charset="0"/>
+                <a:ea typeface="Trebuchet MS" pitchFamily="34" charset="-122"/>
+                <a:cs typeface="Trebuchet MS" pitchFamily="34" charset="-120"/>
+              </a:rPr>
+              <a:t>s</a:t>
+            </a:r>
+            <a:endParaRPr lang="en-US" sz="1300" dirty="0"/>
+          </a:p>
+        </p:txBody>
+      </p:sp>
+      <p:sp>
+        <p:nvSpPr>
+          <p:cNvPr id="27" name="Text 25"/>
+          <p:cNvSpPr/>
+          <p:nvPr/>
+        </p:nvSpPr>
+        <p:spPr>
+          <a:xfrm>
+            <a:off x="6998818" y="2569464"/>
+            <a:ext cx="1581912" cy="201168"/>
+          </a:xfrm>
+          <a:prstGeom prst="rect">
+            <a:avLst/>
+          </a:prstGeom>
+          <a:noFill/>
+          <a:ln/>
+        </p:spPr>
+        <p:txBody>
+          <a:bodyPr wrap="square" lIns="0" tIns="0" rIns="0" bIns="0" rtlCol="0" anchor="t"/>
+          <a:lstStyle/>
+          <a:p>
+            <a:pPr algn="ctr" indent="0" marL="0">
+              <a:buNone/>
+            </a:pPr>
+            <a:r>
+              <a:rPr lang="en-US" sz="850" dirty="0">
+                <a:solidFill>
+                  <a:srgbClr val="475569"/>
+                </a:solidFill>
+                <a:latin typeface="Calibri" pitchFamily="34" charset="0"/>
+                <a:ea typeface="Calibri" pitchFamily="34" charset="-122"/>
+                <a:cs typeface="Calibri" pitchFamily="34" charset="-120"/>
+              </a:rPr>
+              <a:t>plural or present tense</a:t>
+            </a:r>
+            <a:endParaRPr lang="en-US" sz="850" dirty="0"/>
+          </a:p>
+        </p:txBody>
+      </p:sp>
+      <p:sp>
+        <p:nvSpPr>
+          <p:cNvPr id="28" name="Shape 26"/>
           <p:cNvSpPr/>
           <p:nvPr/>
         </p:nvSpPr>
@@ -20195,7 +21658,7 @@
       </p:sp>
       <p:sp>
         <p:nvSpPr>
-          <p:cNvPr id="26" name="Text 24"/>
+          <p:cNvPr id="29" name="Text 27"/>
           <p:cNvSpPr/>
           <p:nvPr/>
         </p:nvSpPr>
@@ -20234,7 +21697,7 @@
       </p:sp>
       <p:sp>
         <p:nvSpPr>
-          <p:cNvPr id="27" name="Shape 25"/>
+          <p:cNvPr id="30" name="Shape 28"/>
           <p:cNvSpPr/>
           <p:nvPr/>
         </p:nvSpPr>
@@ -20261,7 +21724,7 @@
       </p:sp>
       <p:sp>
         <p:nvSpPr>
-          <p:cNvPr id="28" name="Shape 26"/>
+          <p:cNvPr id="31" name="Shape 29"/>
           <p:cNvSpPr/>
           <p:nvPr/>
         </p:nvSpPr>
@@ -20288,7 +21751,7 @@
       </p:sp>
       <p:sp>
         <p:nvSpPr>
-          <p:cNvPr id="29" name="Text 27"/>
+          <p:cNvPr id="32" name="Text 30"/>
           <p:cNvSpPr/>
           <p:nvPr/>
         </p:nvSpPr>
@@ -20327,7 +21790,7 @@
       </p:sp>
       <p:sp>
         <p:nvSpPr>
-          <p:cNvPr id="30" name="Text 28"/>
+          <p:cNvPr id="33" name="Text 31"/>
           <p:cNvSpPr/>
           <p:nvPr/>
         </p:nvSpPr>
@@ -20366,7 +21829,7 @@
       </p:sp>
       <p:sp>
         <p:nvSpPr>
-          <p:cNvPr id="31" name="Shape 29"/>
+          <p:cNvPr id="34" name="Shape 32"/>
           <p:cNvSpPr/>
           <p:nvPr/>
         </p:nvSpPr>
@@ -20393,7 +21856,7 @@
       </p:sp>
       <p:sp>
         <p:nvSpPr>
-          <p:cNvPr id="32" name="Text 30"/>
+          <p:cNvPr id="35" name="Text 33"/>
           <p:cNvSpPr/>
           <p:nvPr/>
         </p:nvSpPr>
@@ -20424,7 +21887,7 @@
                 <a:ea typeface="Trebuchet MS" pitchFamily="34" charset="-122"/>
                 <a:cs typeface="Trebuchet MS" pitchFamily="34" charset="-120"/>
               </a:rPr>
-              <a:t>press</a:t>
+              <a:t>pres</a:t>
             </a:r>
             <a:endParaRPr lang="en-US" sz="1400" dirty="0"/>
           </a:p>
@@ -20432,7 +21895,7 @@
       </p:sp>
       <p:sp>
         <p:nvSpPr>
-          <p:cNvPr id="33" name="Text 31"/>
+          <p:cNvPr id="36" name="Text 34"/>
           <p:cNvSpPr/>
           <p:nvPr/>
         </p:nvSpPr>
@@ -20471,7 +21934,7 @@
       </p:sp>
       <p:sp>
         <p:nvSpPr>
-          <p:cNvPr id="34" name="Shape 32"/>
+          <p:cNvPr id="37" name="Shape 35"/>
           <p:cNvSpPr/>
           <p:nvPr/>
         </p:nvSpPr>
@@ -20498,7 +21961,7 @@
       </p:sp>
       <p:sp>
         <p:nvSpPr>
-          <p:cNvPr id="35" name="Text 33"/>
+          <p:cNvPr id="38" name="Text 36"/>
           <p:cNvSpPr/>
           <p:nvPr/>
         </p:nvSpPr>
@@ -20529,7 +21992,7 @@
                 <a:ea typeface="Trebuchet MS" pitchFamily="34" charset="-122"/>
                 <a:cs typeface="Trebuchet MS" pitchFamily="34" charset="-120"/>
               </a:rPr>
-              <a:t>ive</a:t>
+              <a:t>sions</a:t>
             </a:r>
             <a:endParaRPr lang="en-US" sz="1400" dirty="0"/>
           </a:p>
@@ -20537,7 +22000,7 @@
       </p:sp>
       <p:sp>
         <p:nvSpPr>
-          <p:cNvPr id="36" name="Shape 34"/>
+          <p:cNvPr id="39" name="Shape 37"/>
           <p:cNvSpPr/>
           <p:nvPr/>
         </p:nvSpPr>
@@ -20564,7 +22027,7 @@
       </p:sp>
       <p:sp>
         <p:nvSpPr>
-          <p:cNvPr id="37" name="Text 35"/>
+          <p:cNvPr id="40" name="Text 38"/>
           <p:cNvSpPr/>
           <p:nvPr/>
         </p:nvSpPr>
@@ -20603,7 +22066,7 @@
       </p:sp>
       <p:sp>
         <p:nvSpPr>
-          <p:cNvPr id="38" name="Shape 36"/>
+          <p:cNvPr id="41" name="Shape 39"/>
           <p:cNvSpPr/>
           <p:nvPr/>
         </p:nvSpPr>
@@ -20630,7 +22093,7 @@
       </p:sp>
       <p:sp>
         <p:nvSpPr>
-          <p:cNvPr id="39" name="Text 37"/>
+          <p:cNvPr id="42" name="Text 40"/>
           <p:cNvSpPr/>
           <p:nvPr/>
         </p:nvSpPr>
@@ -20953,7 +22416,7 @@
                 <a:ea typeface="Calibri" pitchFamily="34" charset="-122"/>
                 <a:cs typeface="Calibri" pitchFamily="34" charset="-120"/>
               </a:rPr>
-              <a:t>Word Labs  •  wordlabs.app  •  Root: 'press' = to push down or squeeze</a:t>
+              <a:t>Word Labs  •  wordlabs.app  •  Root: 'press' = press; push</a:t>
             </a:r>
             <a:endParaRPr lang="en-US" sz="800" dirty="0"/>
           </a:p>
@@ -21092,7 +22555,7 @@
                 <a:ea typeface="Trebuchet MS" pitchFamily="34" charset="-122"/>
                 <a:cs typeface="Trebuchet MS" pitchFamily="34" charset="-120"/>
               </a:rPr>
-              <a:t>impressive</a:t>
+              <a:t>impressions</a:t>
             </a:r>
             <a:endParaRPr lang="en-US" sz="2800" dirty="0"/>
           </a:p>
@@ -21172,8 +22635,8 @@
         </p:nvSpPr>
         <p:spPr>
           <a:xfrm>
-            <a:off x="2221992" y="2258568"/>
-            <a:ext cx="1828800" cy="292608"/>
+            <a:off x="1989734" y="2258568"/>
+            <a:ext cx="1581912" cy="292608"/>
           </a:xfrm>
           <a:prstGeom prst="rect">
             <a:avLst>
@@ -21206,8 +22669,8 @@
         </p:nvSpPr>
         <p:spPr>
           <a:xfrm>
-            <a:off x="2221992" y="2258568"/>
-            <a:ext cx="1828800" cy="292608"/>
+            <a:off x="1989734" y="2258568"/>
+            <a:ext cx="1581912" cy="292608"/>
           </a:xfrm>
           <a:prstGeom prst="rect">
             <a:avLst/>
@@ -21231,7 +22694,7 @@
                 <a:ea typeface="Trebuchet MS" pitchFamily="34" charset="-122"/>
                 <a:cs typeface="Trebuchet MS" pitchFamily="34" charset="-120"/>
               </a:rPr>
-              <a:t>im</a:t>
+              <a:t>in</a:t>
             </a:r>
             <a:endParaRPr lang="en-US" sz="1300" dirty="0"/>
           </a:p>
@@ -21245,8 +22708,8 @@
         </p:nvSpPr>
         <p:spPr>
           <a:xfrm>
-            <a:off x="2221992" y="2569464"/>
-            <a:ext cx="1828800" cy="201168"/>
+            <a:off x="1989734" y="2569464"/>
+            <a:ext cx="1581912" cy="201168"/>
           </a:xfrm>
           <a:prstGeom prst="rect">
             <a:avLst/>
@@ -21270,7 +22733,7 @@
                 <a:ea typeface="Calibri" pitchFamily="34" charset="-122"/>
                 <a:cs typeface="Calibri" pitchFamily="34" charset="-120"/>
               </a:rPr>
-              <a:t>into</a:t>
+              <a:t>not; into</a:t>
             </a:r>
             <a:endParaRPr lang="en-US" sz="850" dirty="0"/>
           </a:p>
@@ -21284,8 +22747,8 @@
         </p:nvSpPr>
         <p:spPr>
           <a:xfrm>
-            <a:off x="4370832" y="2258568"/>
-            <a:ext cx="1828800" cy="292608"/>
+            <a:off x="3659429" y="2258568"/>
+            <a:ext cx="1581912" cy="292608"/>
           </a:xfrm>
           <a:prstGeom prst="rect">
             <a:avLst>
@@ -21318,8 +22781,8 @@
         </p:nvSpPr>
         <p:spPr>
           <a:xfrm>
-            <a:off x="4370832" y="2258568"/>
-            <a:ext cx="1828800" cy="292608"/>
+            <a:off x="3659429" y="2258568"/>
+            <a:ext cx="1581912" cy="292608"/>
           </a:xfrm>
           <a:prstGeom prst="rect">
             <a:avLst/>
@@ -21357,8 +22820,8 @@
         </p:nvSpPr>
         <p:spPr>
           <a:xfrm>
-            <a:off x="4370832" y="2569464"/>
-            <a:ext cx="1828800" cy="201168"/>
+            <a:off x="3659429" y="2569464"/>
+            <a:ext cx="1581912" cy="201168"/>
           </a:xfrm>
           <a:prstGeom prst="rect">
             <a:avLst/>
@@ -21382,7 +22845,7 @@
                 <a:ea typeface="Calibri" pitchFamily="34" charset="-122"/>
                 <a:cs typeface="Calibri" pitchFamily="34" charset="-120"/>
               </a:rPr>
-              <a:t>to push or squeeze</a:t>
+              <a:t>press; push</a:t>
             </a:r>
             <a:endParaRPr lang="en-US" sz="850" dirty="0"/>
           </a:p>
@@ -21396,8 +22859,8 @@
         </p:nvSpPr>
         <p:spPr>
           <a:xfrm>
-            <a:off x="6519672" y="2258568"/>
-            <a:ext cx="1828800" cy="292608"/>
+            <a:off x="5329123" y="2258568"/>
+            <a:ext cx="1581912" cy="292608"/>
           </a:xfrm>
           <a:prstGeom prst="rect">
             <a:avLst>
@@ -21430,8 +22893,8 @@
         </p:nvSpPr>
         <p:spPr>
           <a:xfrm>
-            <a:off x="6519672" y="2258568"/>
-            <a:ext cx="1828800" cy="292608"/>
+            <a:off x="5329123" y="2258568"/>
+            <a:ext cx="1581912" cy="292608"/>
           </a:xfrm>
           <a:prstGeom prst="rect">
             <a:avLst/>
@@ -21455,7 +22918,7 @@
                 <a:ea typeface="Trebuchet MS" pitchFamily="34" charset="-122"/>
                 <a:cs typeface="Trebuchet MS" pitchFamily="34" charset="-120"/>
               </a:rPr>
-              <a:t>ive</a:t>
+              <a:t>ion</a:t>
             </a:r>
             <a:endParaRPr lang="en-US" sz="1300" dirty="0"/>
           </a:p>
@@ -21469,8 +22932,8 @@
         </p:nvSpPr>
         <p:spPr>
           <a:xfrm>
-            <a:off x="6519672" y="2569464"/>
-            <a:ext cx="1828800" cy="201168"/>
+            <a:off x="5329123" y="2569464"/>
+            <a:ext cx="1581912" cy="201168"/>
           </a:xfrm>
           <a:prstGeom prst="rect">
             <a:avLst/>
@@ -21494,7 +22957,7 @@
                 <a:ea typeface="Calibri" pitchFamily="34" charset="-122"/>
                 <a:cs typeface="Calibri" pitchFamily="34" charset="-120"/>
               </a:rPr>
-              <a:t>having the quality of</a:t>
+              <a:t>act or result of</a:t>
             </a:r>
             <a:endParaRPr lang="en-US" sz="850" dirty="0"/>
           </a:p>
@@ -21503,6 +22966,118 @@
       <p:sp>
         <p:nvSpPr>
           <p:cNvPr id="25" name="Shape 23"/>
+          <p:cNvSpPr/>
+          <p:nvPr/>
+        </p:nvSpPr>
+        <p:spPr>
+          <a:xfrm>
+            <a:off x="6998818" y="2258568"/>
+            <a:ext cx="1581912" cy="292608"/>
+          </a:xfrm>
+          <a:prstGeom prst="rect">
+            <a:avLst>
+              <a:gd name="adj" fmla="val 25000"/>
+            </a:avLst>
+          </a:prstGeom>
+          <a:solidFill>
+            <a:srgbClr val="FCE7F3"/>
+          </a:solidFill>
+          <a:ln w="19050">
+            <a:solidFill>
+              <a:srgbClr val="DB2777"/>
+            </a:solidFill>
+            <a:prstDash val="solid"/>
+          </a:ln>
+          <a:effectLst>
+            <a:outerShdw sx="100000" sy="100000" kx="0" ky="0" algn="bl" rotWithShape="0" blurRad="101600" dist="38100" dir="8100000">
+              <a:srgbClr val="000000">
+                <a:alpha val="12000"/>
+              </a:srgbClr>
+            </a:outerShdw>
+          </a:effectLst>
+        </p:spPr>
+      </p:sp>
+      <p:sp>
+        <p:nvSpPr>
+          <p:cNvPr id="26" name="Text 24"/>
+          <p:cNvSpPr/>
+          <p:nvPr/>
+        </p:nvSpPr>
+        <p:spPr>
+          <a:xfrm>
+            <a:off x="6998818" y="2258568"/>
+            <a:ext cx="1581912" cy="292608"/>
+          </a:xfrm>
+          <a:prstGeom prst="rect">
+            <a:avLst/>
+          </a:prstGeom>
+          <a:noFill/>
+          <a:ln/>
+        </p:spPr>
+        <p:txBody>
+          <a:bodyPr wrap="square" lIns="0" tIns="0" rIns="0" bIns="0" rtlCol="0" anchor="ctr"/>
+          <a:lstStyle/>
+          <a:p>
+            <a:pPr algn="ctr" indent="0" marL="0">
+              <a:buNone/>
+            </a:pPr>
+            <a:r>
+              <a:rPr lang="en-US" sz="1300" b="1" dirty="0">
+                <a:solidFill>
+                  <a:srgbClr val="9D174D"/>
+                </a:solidFill>
+                <a:latin typeface="Trebuchet MS" pitchFamily="34" charset="0"/>
+                <a:ea typeface="Trebuchet MS" pitchFamily="34" charset="-122"/>
+                <a:cs typeface="Trebuchet MS" pitchFamily="34" charset="-120"/>
+              </a:rPr>
+              <a:t>s</a:t>
+            </a:r>
+            <a:endParaRPr lang="en-US" sz="1300" dirty="0"/>
+          </a:p>
+        </p:txBody>
+      </p:sp>
+      <p:sp>
+        <p:nvSpPr>
+          <p:cNvPr id="27" name="Text 25"/>
+          <p:cNvSpPr/>
+          <p:nvPr/>
+        </p:nvSpPr>
+        <p:spPr>
+          <a:xfrm>
+            <a:off x="6998818" y="2569464"/>
+            <a:ext cx="1581912" cy="201168"/>
+          </a:xfrm>
+          <a:prstGeom prst="rect">
+            <a:avLst/>
+          </a:prstGeom>
+          <a:noFill/>
+          <a:ln/>
+        </p:spPr>
+        <p:txBody>
+          <a:bodyPr wrap="square" lIns="0" tIns="0" rIns="0" bIns="0" rtlCol="0" anchor="t"/>
+          <a:lstStyle/>
+          <a:p>
+            <a:pPr algn="ctr" indent="0" marL="0">
+              <a:buNone/>
+            </a:pPr>
+            <a:r>
+              <a:rPr lang="en-US" sz="850" dirty="0">
+                <a:solidFill>
+                  <a:srgbClr val="475569"/>
+                </a:solidFill>
+                <a:latin typeface="Calibri" pitchFamily="34" charset="0"/>
+                <a:ea typeface="Calibri" pitchFamily="34" charset="-122"/>
+                <a:cs typeface="Calibri" pitchFamily="34" charset="-120"/>
+              </a:rPr>
+              <a:t>plural or present tense</a:t>
+            </a:r>
+            <a:endParaRPr lang="en-US" sz="850" dirty="0"/>
+          </a:p>
+        </p:txBody>
+      </p:sp>
+      <p:sp>
+        <p:nvSpPr>
+          <p:cNvPr id="28" name="Shape 26"/>
           <p:cNvSpPr/>
           <p:nvPr/>
         </p:nvSpPr>
@@ -21529,7 +23104,7 @@
       </p:sp>
       <p:sp>
         <p:nvSpPr>
-          <p:cNvPr id="26" name="Text 24"/>
+          <p:cNvPr id="29" name="Text 27"/>
           <p:cNvSpPr/>
           <p:nvPr/>
         </p:nvSpPr>
@@ -21568,7 +23143,7 @@
       </p:sp>
       <p:sp>
         <p:nvSpPr>
-          <p:cNvPr id="27" name="Shape 25"/>
+          <p:cNvPr id="30" name="Shape 28"/>
           <p:cNvSpPr/>
           <p:nvPr/>
         </p:nvSpPr>
@@ -21595,7 +23170,7 @@
       </p:sp>
       <p:sp>
         <p:nvSpPr>
-          <p:cNvPr id="28" name="Shape 26"/>
+          <p:cNvPr id="31" name="Shape 29"/>
           <p:cNvSpPr/>
           <p:nvPr/>
         </p:nvSpPr>
@@ -21622,7 +23197,7 @@
       </p:sp>
       <p:sp>
         <p:nvSpPr>
-          <p:cNvPr id="29" name="Text 27"/>
+          <p:cNvPr id="32" name="Text 30"/>
           <p:cNvSpPr/>
           <p:nvPr/>
         </p:nvSpPr>
@@ -21661,7 +23236,7 @@
       </p:sp>
       <p:sp>
         <p:nvSpPr>
-          <p:cNvPr id="30" name="Text 28"/>
+          <p:cNvPr id="33" name="Text 31"/>
           <p:cNvSpPr/>
           <p:nvPr/>
         </p:nvSpPr>
@@ -21700,7 +23275,7 @@
       </p:sp>
       <p:sp>
         <p:nvSpPr>
-          <p:cNvPr id="31" name="Shape 29"/>
+          <p:cNvPr id="34" name="Shape 32"/>
           <p:cNvSpPr/>
           <p:nvPr/>
         </p:nvSpPr>
@@ -21727,7 +23302,7 @@
       </p:sp>
       <p:sp>
         <p:nvSpPr>
-          <p:cNvPr id="32" name="Text 30"/>
+          <p:cNvPr id="35" name="Text 33"/>
           <p:cNvSpPr/>
           <p:nvPr/>
         </p:nvSpPr>
@@ -21758,7 +23333,7 @@
                 <a:ea typeface="Trebuchet MS" pitchFamily="34" charset="-122"/>
                 <a:cs typeface="Trebuchet MS" pitchFamily="34" charset="-120"/>
               </a:rPr>
-              <a:t>press</a:t>
+              <a:t>pres</a:t>
             </a:r>
             <a:endParaRPr lang="en-US" sz="1400" dirty="0"/>
           </a:p>
@@ -21766,7 +23341,7 @@
       </p:sp>
       <p:sp>
         <p:nvSpPr>
-          <p:cNvPr id="33" name="Text 31"/>
+          <p:cNvPr id="36" name="Text 34"/>
           <p:cNvSpPr/>
           <p:nvPr/>
         </p:nvSpPr>
@@ -21805,7 +23380,7 @@
       </p:sp>
       <p:sp>
         <p:nvSpPr>
-          <p:cNvPr id="34" name="Shape 32"/>
+          <p:cNvPr id="37" name="Shape 35"/>
           <p:cNvSpPr/>
           <p:nvPr/>
         </p:nvSpPr>
@@ -21832,7 +23407,7 @@
       </p:sp>
       <p:sp>
         <p:nvSpPr>
-          <p:cNvPr id="35" name="Text 33"/>
+          <p:cNvPr id="38" name="Text 36"/>
           <p:cNvSpPr/>
           <p:nvPr/>
         </p:nvSpPr>
@@ -21863,7 +23438,7 @@
                 <a:ea typeface="Trebuchet MS" pitchFamily="34" charset="-122"/>
                 <a:cs typeface="Trebuchet MS" pitchFamily="34" charset="-120"/>
               </a:rPr>
-              <a:t>ive</a:t>
+              <a:t>sions</a:t>
             </a:r>
             <a:endParaRPr lang="en-US" sz="1400" dirty="0"/>
           </a:p>
@@ -21871,7 +23446,7 @@
       </p:sp>
       <p:sp>
         <p:nvSpPr>
-          <p:cNvPr id="36" name="Shape 34"/>
+          <p:cNvPr id="39" name="Shape 37"/>
           <p:cNvSpPr/>
           <p:nvPr/>
         </p:nvSpPr>
@@ -21898,7 +23473,7 @@
       </p:sp>
       <p:sp>
         <p:nvSpPr>
-          <p:cNvPr id="37" name="Text 35"/>
+          <p:cNvPr id="40" name="Text 38"/>
           <p:cNvSpPr/>
           <p:nvPr/>
         </p:nvSpPr>
@@ -21937,7 +23512,7 @@
       </p:sp>
       <p:sp>
         <p:nvSpPr>
-          <p:cNvPr id="38" name="Shape 36"/>
+          <p:cNvPr id="41" name="Shape 39"/>
           <p:cNvSpPr/>
           <p:nvPr/>
         </p:nvSpPr>
@@ -21964,14 +23539,14 @@
       </p:sp>
       <p:sp>
         <p:nvSpPr>
-          <p:cNvPr id="39" name="Shape 37"/>
-          <p:cNvSpPr/>
-          <p:nvPr/>
-        </p:nvSpPr>
-        <p:spPr>
-          <a:xfrm>
-            <a:off x="2023872" y="4169664"/>
-            <a:ext cx="685800" cy="475488"/>
+          <p:cNvPr id="42" name="Shape 40"/>
+          <p:cNvSpPr/>
+          <p:nvPr/>
+        </p:nvSpPr>
+        <p:spPr>
+          <a:xfrm>
+            <a:off x="1951330" y="4169664"/>
+            <a:ext cx="676656" cy="475488"/>
           </a:xfrm>
           <a:prstGeom prst="rect">
             <a:avLst>
@@ -21991,14 +23566,14 @@
       </p:sp>
       <p:sp>
         <p:nvSpPr>
-          <p:cNvPr id="40" name="Text 38"/>
-          <p:cNvSpPr/>
-          <p:nvPr/>
-        </p:nvSpPr>
-        <p:spPr>
-          <a:xfrm>
-            <a:off x="2023872" y="4169664"/>
-            <a:ext cx="685800" cy="475488"/>
+          <p:cNvPr id="43" name="Text 41"/>
+          <p:cNvSpPr/>
+          <p:nvPr/>
+        </p:nvSpPr>
+        <p:spPr>
+          <a:xfrm>
+            <a:off x="1951330" y="4169664"/>
+            <a:ext cx="676656" cy="475488"/>
           </a:xfrm>
           <a:prstGeom prst="rect">
             <a:avLst/>
@@ -22030,14 +23605,14 @@
       </p:sp>
       <p:sp>
         <p:nvSpPr>
-          <p:cNvPr id="41" name="Shape 39"/>
-          <p:cNvSpPr/>
-          <p:nvPr/>
-        </p:nvSpPr>
-        <p:spPr>
-          <a:xfrm>
-            <a:off x="2831592" y="4169664"/>
-            <a:ext cx="685800" cy="475488"/>
+          <p:cNvPr id="44" name="Shape 42"/>
+          <p:cNvSpPr/>
+          <p:nvPr/>
+        </p:nvSpPr>
+        <p:spPr>
+          <a:xfrm>
+            <a:off x="2677363" y="4169664"/>
+            <a:ext cx="676656" cy="475488"/>
           </a:xfrm>
           <a:prstGeom prst="rect">
             <a:avLst>
@@ -22057,14 +23632,14 @@
       </p:sp>
       <p:sp>
         <p:nvSpPr>
-          <p:cNvPr id="42" name="Text 40"/>
-          <p:cNvSpPr/>
-          <p:nvPr/>
-        </p:nvSpPr>
-        <p:spPr>
-          <a:xfrm>
-            <a:off x="2831592" y="4169664"/>
-            <a:ext cx="685800" cy="475488"/>
+          <p:cNvPr id="45" name="Text 43"/>
+          <p:cNvSpPr/>
+          <p:nvPr/>
+        </p:nvSpPr>
+        <p:spPr>
+          <a:xfrm>
+            <a:off x="2677363" y="4169664"/>
+            <a:ext cx="676656" cy="475488"/>
           </a:xfrm>
           <a:prstGeom prst="rect">
             <a:avLst/>
@@ -22096,14 +23671,14 @@
       </p:sp>
       <p:sp>
         <p:nvSpPr>
-          <p:cNvPr id="43" name="Shape 41"/>
-          <p:cNvSpPr/>
-          <p:nvPr/>
-        </p:nvSpPr>
-        <p:spPr>
-          <a:xfrm>
-            <a:off x="3639312" y="4169664"/>
-            <a:ext cx="685800" cy="475488"/>
+          <p:cNvPr id="46" name="Shape 44"/>
+          <p:cNvSpPr/>
+          <p:nvPr/>
+        </p:nvSpPr>
+        <p:spPr>
+          <a:xfrm>
+            <a:off x="3403397" y="4169664"/>
+            <a:ext cx="676656" cy="475488"/>
           </a:xfrm>
           <a:prstGeom prst="rect">
             <a:avLst>
@@ -22123,14 +23698,14 @@
       </p:sp>
       <p:sp>
         <p:nvSpPr>
-          <p:cNvPr id="44" name="Text 42"/>
-          <p:cNvSpPr/>
-          <p:nvPr/>
-        </p:nvSpPr>
-        <p:spPr>
-          <a:xfrm>
-            <a:off x="3639312" y="4169664"/>
-            <a:ext cx="685800" cy="475488"/>
+          <p:cNvPr id="47" name="Text 45"/>
+          <p:cNvSpPr/>
+          <p:nvPr/>
+        </p:nvSpPr>
+        <p:spPr>
+          <a:xfrm>
+            <a:off x="3403397" y="4169664"/>
+            <a:ext cx="676656" cy="475488"/>
           </a:xfrm>
           <a:prstGeom prst="rect">
             <a:avLst/>
@@ -22162,14 +23737,14 @@
       </p:sp>
       <p:sp>
         <p:nvSpPr>
-          <p:cNvPr id="45" name="Shape 43"/>
-          <p:cNvSpPr/>
-          <p:nvPr/>
-        </p:nvSpPr>
-        <p:spPr>
-          <a:xfrm>
-            <a:off x="4447032" y="4169664"/>
-            <a:ext cx="685800" cy="475488"/>
+          <p:cNvPr id="48" name="Shape 46"/>
+          <p:cNvSpPr/>
+          <p:nvPr/>
+        </p:nvSpPr>
+        <p:spPr>
+          <a:xfrm>
+            <a:off x="4129430" y="4169664"/>
+            <a:ext cx="676656" cy="475488"/>
           </a:xfrm>
           <a:prstGeom prst="rect">
             <a:avLst>
@@ -22189,14 +23764,14 @@
       </p:sp>
       <p:sp>
         <p:nvSpPr>
-          <p:cNvPr id="46" name="Text 44"/>
-          <p:cNvSpPr/>
-          <p:nvPr/>
-        </p:nvSpPr>
-        <p:spPr>
-          <a:xfrm>
-            <a:off x="4447032" y="4169664"/>
-            <a:ext cx="685800" cy="475488"/>
+          <p:cNvPr id="49" name="Text 47"/>
+          <p:cNvSpPr/>
+          <p:nvPr/>
+        </p:nvSpPr>
+        <p:spPr>
+          <a:xfrm>
+            <a:off x="4129430" y="4169664"/>
+            <a:ext cx="676656" cy="475488"/>
           </a:xfrm>
           <a:prstGeom prst="rect">
             <a:avLst/>
@@ -22228,14 +23803,14 @@
       </p:sp>
       <p:sp>
         <p:nvSpPr>
-          <p:cNvPr id="47" name="Shape 45"/>
-          <p:cNvSpPr/>
-          <p:nvPr/>
-        </p:nvSpPr>
-        <p:spPr>
-          <a:xfrm>
-            <a:off x="5254752" y="4169664"/>
-            <a:ext cx="685800" cy="475488"/>
+          <p:cNvPr id="50" name="Shape 48"/>
+          <p:cNvSpPr/>
+          <p:nvPr/>
+        </p:nvSpPr>
+        <p:spPr>
+          <a:xfrm>
+            <a:off x="4855464" y="4169664"/>
+            <a:ext cx="676656" cy="475488"/>
           </a:xfrm>
           <a:prstGeom prst="rect">
             <a:avLst>
@@ -22255,14 +23830,14 @@
       </p:sp>
       <p:sp>
         <p:nvSpPr>
-          <p:cNvPr id="48" name="Text 46"/>
-          <p:cNvSpPr/>
-          <p:nvPr/>
-        </p:nvSpPr>
-        <p:spPr>
-          <a:xfrm>
-            <a:off x="5254752" y="4169664"/>
-            <a:ext cx="685800" cy="475488"/>
+          <p:cNvPr id="51" name="Text 49"/>
+          <p:cNvSpPr/>
+          <p:nvPr/>
+        </p:nvSpPr>
+        <p:spPr>
+          <a:xfrm>
+            <a:off x="4855464" y="4169664"/>
+            <a:ext cx="676656" cy="475488"/>
           </a:xfrm>
           <a:prstGeom prst="rect">
             <a:avLst/>
@@ -22294,14 +23869,14 @@
       </p:sp>
       <p:sp>
         <p:nvSpPr>
-          <p:cNvPr id="49" name="Shape 47"/>
-          <p:cNvSpPr/>
-          <p:nvPr/>
-        </p:nvSpPr>
-        <p:spPr>
-          <a:xfrm>
-            <a:off x="6062472" y="4169664"/>
-            <a:ext cx="685800" cy="475488"/>
+          <p:cNvPr id="52" name="Shape 50"/>
+          <p:cNvSpPr/>
+          <p:nvPr/>
+        </p:nvSpPr>
+        <p:spPr>
+          <a:xfrm>
+            <a:off x="5581498" y="4169664"/>
+            <a:ext cx="676656" cy="475488"/>
           </a:xfrm>
           <a:prstGeom prst="rect">
             <a:avLst>
@@ -22321,14 +23896,14 @@
       </p:sp>
       <p:sp>
         <p:nvSpPr>
-          <p:cNvPr id="50" name="Text 48"/>
-          <p:cNvSpPr/>
-          <p:nvPr/>
-        </p:nvSpPr>
-        <p:spPr>
-          <a:xfrm>
-            <a:off x="6062472" y="4169664"/>
-            <a:ext cx="685800" cy="475488"/>
+          <p:cNvPr id="53" name="Text 51"/>
+          <p:cNvSpPr/>
+          <p:nvPr/>
+        </p:nvSpPr>
+        <p:spPr>
+          <a:xfrm>
+            <a:off x="5581498" y="4169664"/>
+            <a:ext cx="676656" cy="475488"/>
           </a:xfrm>
           <a:prstGeom prst="rect">
             <a:avLst/>
@@ -22352,7 +23927,7 @@
                 <a:ea typeface="Trebuchet MS" pitchFamily="34" charset="-122"/>
                 <a:cs typeface="Trebuchet MS" pitchFamily="34" charset="-120"/>
               </a:rPr>
-              <a:t>ss</a:t>
+              <a:t>ssi</a:t>
             </a:r>
             <a:endParaRPr lang="en-US" sz="900" dirty="0"/>
           </a:p>
@@ -22360,14 +23935,14 @@
       </p:sp>
       <p:sp>
         <p:nvSpPr>
-          <p:cNvPr id="51" name="Shape 49"/>
-          <p:cNvSpPr/>
-          <p:nvPr/>
-        </p:nvSpPr>
-        <p:spPr>
-          <a:xfrm>
-            <a:off x="6870192" y="4169664"/>
-            <a:ext cx="685800" cy="475488"/>
+          <p:cNvPr id="54" name="Shape 52"/>
+          <p:cNvSpPr/>
+          <p:nvPr/>
+        </p:nvSpPr>
+        <p:spPr>
+          <a:xfrm>
+            <a:off x="6307531" y="4169664"/>
+            <a:ext cx="676656" cy="475488"/>
           </a:xfrm>
           <a:prstGeom prst="rect">
             <a:avLst>
@@ -22387,14 +23962,14 @@
       </p:sp>
       <p:sp>
         <p:nvSpPr>
-          <p:cNvPr id="52" name="Text 50"/>
-          <p:cNvSpPr/>
-          <p:nvPr/>
-        </p:nvSpPr>
-        <p:spPr>
-          <a:xfrm>
-            <a:off x="6870192" y="4169664"/>
-            <a:ext cx="685800" cy="475488"/>
+          <p:cNvPr id="55" name="Text 53"/>
+          <p:cNvSpPr/>
+          <p:nvPr/>
+        </p:nvSpPr>
+        <p:spPr>
+          <a:xfrm>
+            <a:off x="6307531" y="4169664"/>
+            <a:ext cx="676656" cy="475488"/>
           </a:xfrm>
           <a:prstGeom prst="rect">
             <a:avLst/>
@@ -22418,7 +23993,7 @@
                 <a:ea typeface="Trebuchet MS" pitchFamily="34" charset="-122"/>
                 <a:cs typeface="Trebuchet MS" pitchFamily="34" charset="-120"/>
               </a:rPr>
-              <a:t>i</a:t>
+              <a:t>o</a:t>
             </a:r>
             <a:endParaRPr lang="en-US" sz="900" dirty="0"/>
           </a:p>
@@ -22426,14 +24001,14 @@
       </p:sp>
       <p:sp>
         <p:nvSpPr>
-          <p:cNvPr id="53" name="Shape 51"/>
-          <p:cNvSpPr/>
-          <p:nvPr/>
-        </p:nvSpPr>
-        <p:spPr>
-          <a:xfrm>
-            <a:off x="7677912" y="4169664"/>
-            <a:ext cx="685800" cy="475488"/>
+          <p:cNvPr id="56" name="Shape 54"/>
+          <p:cNvSpPr/>
+          <p:nvPr/>
+        </p:nvSpPr>
+        <p:spPr>
+          <a:xfrm>
+            <a:off x="7033565" y="4169664"/>
+            <a:ext cx="676656" cy="475488"/>
           </a:xfrm>
           <a:prstGeom prst="rect">
             <a:avLst>
@@ -22453,14 +24028,14 @@
       </p:sp>
       <p:sp>
         <p:nvSpPr>
-          <p:cNvPr id="54" name="Text 52"/>
-          <p:cNvSpPr/>
-          <p:nvPr/>
-        </p:nvSpPr>
-        <p:spPr>
-          <a:xfrm>
-            <a:off x="7677912" y="4169664"/>
-            <a:ext cx="685800" cy="475488"/>
+          <p:cNvPr id="57" name="Text 55"/>
+          <p:cNvSpPr/>
+          <p:nvPr/>
+        </p:nvSpPr>
+        <p:spPr>
+          <a:xfrm>
+            <a:off x="7033565" y="4169664"/>
+            <a:ext cx="676656" cy="475488"/>
           </a:xfrm>
           <a:prstGeom prst="rect">
             <a:avLst/>
@@ -22484,7 +24059,73 @@
                 <a:ea typeface="Trebuchet MS" pitchFamily="34" charset="-122"/>
                 <a:cs typeface="Trebuchet MS" pitchFamily="34" charset="-120"/>
               </a:rPr>
-              <a:t>ve</a:t>
+              <a:t>n</a:t>
+            </a:r>
+            <a:endParaRPr lang="en-US" sz="900" dirty="0"/>
+          </a:p>
+        </p:txBody>
+      </p:sp>
+      <p:sp>
+        <p:nvSpPr>
+          <p:cNvPr id="58" name="Shape 56"/>
+          <p:cNvSpPr/>
+          <p:nvPr/>
+        </p:nvSpPr>
+        <p:spPr>
+          <a:xfrm>
+            <a:off x="7759598" y="4169664"/>
+            <a:ext cx="676656" cy="475488"/>
+          </a:xfrm>
+          <a:prstGeom prst="rect">
+            <a:avLst>
+              <a:gd name="adj" fmla="val 7692"/>
+            </a:avLst>
+          </a:prstGeom>
+          <a:solidFill>
+            <a:srgbClr val="FFFFFF"/>
+          </a:solidFill>
+          <a:ln w="12700">
+            <a:solidFill>
+              <a:srgbClr val="DB2777"/>
+            </a:solidFill>
+            <a:prstDash val="solid"/>
+          </a:ln>
+        </p:spPr>
+      </p:sp>
+      <p:sp>
+        <p:nvSpPr>
+          <p:cNvPr id="59" name="Text 57"/>
+          <p:cNvSpPr/>
+          <p:nvPr/>
+        </p:nvSpPr>
+        <p:spPr>
+          <a:xfrm>
+            <a:off x="7759598" y="4169664"/>
+            <a:ext cx="676656" cy="475488"/>
+          </a:xfrm>
+          <a:prstGeom prst="rect">
+            <a:avLst/>
+          </a:prstGeom>
+          <a:noFill/>
+          <a:ln/>
+        </p:spPr>
+        <p:txBody>
+          <a:bodyPr wrap="square" lIns="0" tIns="0" rIns="0" bIns="0" rtlCol="0" anchor="ctr"/>
+          <a:lstStyle/>
+          <a:p>
+            <a:pPr algn="ctr" indent="0" marL="0">
+              <a:buNone/>
+            </a:pPr>
+            <a:r>
+              <a:rPr lang="en-US" sz="900" b="1" dirty="0">
+                <a:solidFill>
+                  <a:srgbClr val="9D174D"/>
+                </a:solidFill>
+                <a:latin typeface="Trebuchet MS" pitchFamily="34" charset="0"/>
+                <a:ea typeface="Trebuchet MS" pitchFamily="34" charset="-122"/>
+                <a:cs typeface="Trebuchet MS" pitchFamily="34" charset="-120"/>
+              </a:rPr>
+              <a:t>s</a:t>
             </a:r>
             <a:endParaRPr lang="en-US" sz="900" dirty="0"/>
           </a:p>
@@ -22776,7 +24417,7 @@
                 <a:ea typeface="Calibri" pitchFamily="34" charset="-122"/>
                 <a:cs typeface="Calibri" pitchFamily="34" charset="-120"/>
               </a:rPr>
-              <a:t>Word Labs  •  wordlabs.app  •  Root: 'press' = to push down or squeeze</a:t>
+              <a:t>Word Labs  •  wordlabs.app  •  Root: 'press' = press; push</a:t>
             </a:r>
             <a:endParaRPr lang="en-US" sz="800" dirty="0"/>
           </a:p>
@@ -22915,7 +24556,7 @@
                 <a:ea typeface="Trebuchet MS" pitchFamily="34" charset="-122"/>
                 <a:cs typeface="Trebuchet MS" pitchFamily="34" charset="-120"/>
               </a:rPr>
-              <a:t>expression</a:t>
+              <a:t>suppression</a:t>
             </a:r>
             <a:endParaRPr lang="en-US" sz="2800" dirty="0"/>
           </a:p>
@@ -23603,7 +25244,7 @@
                 <a:ea typeface="Calibri" pitchFamily="34" charset="-122"/>
                 <a:cs typeface="Calibri" pitchFamily="34" charset="-120"/>
               </a:rPr>
-              <a:t>Word Labs  •  wordlabs.app  •  Root: 'press' = to push down or squeeze</a:t>
+              <a:t>Word Labs  •  wordlabs.app  •  Root: 'press' = press; push</a:t>
             </a:r>
             <a:endParaRPr lang="en-US" sz="800" dirty="0"/>
           </a:p>
@@ -23742,7 +25383,7 @@
                 <a:ea typeface="Trebuchet MS" pitchFamily="34" charset="-122"/>
                 <a:cs typeface="Trebuchet MS" pitchFamily="34" charset="-120"/>
               </a:rPr>
-              <a:t>expression</a:t>
+              <a:t>suppression</a:t>
             </a:r>
             <a:endParaRPr lang="en-US" sz="2800" dirty="0"/>
           </a:p>
@@ -23881,7 +25522,7 @@
                 <a:ea typeface="Trebuchet MS" pitchFamily="34" charset="-122"/>
                 <a:cs typeface="Trebuchet MS" pitchFamily="34" charset="-120"/>
               </a:rPr>
-              <a:t>ex</a:t>
+              <a:t>sub</a:t>
             </a:r>
             <a:endParaRPr lang="en-US" sz="1300" dirty="0"/>
           </a:p>
@@ -23920,7 +25561,7 @@
                 <a:ea typeface="Calibri" pitchFamily="34" charset="-122"/>
                 <a:cs typeface="Calibri" pitchFamily="34" charset="-120"/>
               </a:rPr>
-              <a:t>out</a:t>
+              <a:t>under; below</a:t>
             </a:r>
             <a:endParaRPr lang="en-US" sz="850" dirty="0"/>
           </a:p>
@@ -24032,7 +25673,7 @@
                 <a:ea typeface="Calibri" pitchFamily="34" charset="-122"/>
                 <a:cs typeface="Calibri" pitchFamily="34" charset="-120"/>
               </a:rPr>
-              <a:t>to push or squeeze</a:t>
+              <a:t>press; push</a:t>
             </a:r>
             <a:endParaRPr lang="en-US" sz="850" dirty="0"/>
           </a:p>
@@ -24700,7 +26341,7 @@
                 <a:ea typeface="Calibri" pitchFamily="34" charset="-122"/>
                 <a:cs typeface="Calibri" pitchFamily="34" charset="-120"/>
               </a:rPr>
-              <a:t>Word Labs  •  wordlabs.app  •  Root: 'press' = to push down or squeeze</a:t>
+              <a:t>Word Labs  •  wordlabs.app  •  Root: 'press' = press; push</a:t>
             </a:r>
             <a:endParaRPr lang="en-US" sz="800" dirty="0"/>
           </a:p>
@@ -24773,7 +26414,7 @@
                 <a:ea typeface="Trebuchet MS" pitchFamily="34" charset="-122"/>
                 <a:cs typeface="Trebuchet MS" pitchFamily="34" charset="-120"/>
               </a:rPr>
-              <a:t>We are learning that the root 'press' means 'to push down or squeeze'.</a:t>
+              <a:t>We are learning that the root 'press' means 'press; push'.</a:t>
             </a:r>
             <a:endParaRPr lang="en-US" sz="2000" dirty="0"/>
           </a:p>
@@ -25419,7 +27060,7 @@
                 <a:ea typeface="Calibri" pitchFamily="34" charset="-122"/>
                 <a:cs typeface="Calibri" pitchFamily="34" charset="-120"/>
               </a:rPr>
-              <a:t>Word Labs  •  wordlabs.app  •  Root: 'press' = to push down or squeeze</a:t>
+              <a:t>Word Labs  •  wordlabs.app  •  Root: 'press' = press; push</a:t>
             </a:r>
             <a:endParaRPr lang="en-US" sz="800" dirty="0"/>
           </a:p>
@@ -25558,7 +27199,7 @@
                 <a:ea typeface="Trebuchet MS" pitchFamily="34" charset="-122"/>
                 <a:cs typeface="Trebuchet MS" pitchFamily="34" charset="-120"/>
               </a:rPr>
-              <a:t>expression</a:t>
+              <a:t>suppression</a:t>
             </a:r>
             <a:endParaRPr lang="en-US" sz="2800" dirty="0"/>
           </a:p>
@@ -25697,7 +27338,7 @@
                 <a:ea typeface="Trebuchet MS" pitchFamily="34" charset="-122"/>
                 <a:cs typeface="Trebuchet MS" pitchFamily="34" charset="-120"/>
               </a:rPr>
-              <a:t>ex</a:t>
+              <a:t>sub</a:t>
             </a:r>
             <a:endParaRPr lang="en-US" sz="1300" dirty="0"/>
           </a:p>
@@ -25736,7 +27377,7 @@
                 <a:ea typeface="Calibri" pitchFamily="34" charset="-122"/>
                 <a:cs typeface="Calibri" pitchFamily="34" charset="-120"/>
               </a:rPr>
-              <a:t>out</a:t>
+              <a:t>under; below</a:t>
             </a:r>
             <a:endParaRPr lang="en-US" sz="850" dirty="0"/>
           </a:p>
@@ -25848,7 +27489,7 @@
                 <a:ea typeface="Calibri" pitchFamily="34" charset="-122"/>
                 <a:cs typeface="Calibri" pitchFamily="34" charset="-120"/>
               </a:rPr>
-              <a:t>to push or squeeze</a:t>
+              <a:t>press; push</a:t>
             </a:r>
             <a:endParaRPr lang="en-US" sz="850" dirty="0"/>
           </a:p>
@@ -26119,7 +27760,7 @@
                 <a:ea typeface="Trebuchet MS" pitchFamily="34" charset="-122"/>
                 <a:cs typeface="Trebuchet MS" pitchFamily="34" charset="-120"/>
               </a:rPr>
-              <a:t>ex</a:t>
+              <a:t>sup</a:t>
             </a:r>
             <a:endParaRPr lang="en-US" sz="1400" dirty="0"/>
           </a:p>
@@ -26224,7 +27865,7 @@
                 <a:ea typeface="Trebuchet MS" pitchFamily="34" charset="-122"/>
                 <a:cs typeface="Trebuchet MS" pitchFamily="34" charset="-120"/>
               </a:rPr>
-              <a:t>press</a:t>
+              <a:t>pres</a:t>
             </a:r>
             <a:endParaRPr lang="en-US" sz="1400" dirty="0"/>
           </a:p>
@@ -26329,7 +27970,7 @@
                 <a:ea typeface="Trebuchet MS" pitchFamily="34" charset="-122"/>
                 <a:cs typeface="Trebuchet MS" pitchFamily="34" charset="-120"/>
               </a:rPr>
-              <a:t>ion</a:t>
+              <a:t>sion</a:t>
             </a:r>
             <a:endParaRPr lang="en-US" sz="1400" dirty="0"/>
           </a:p>
@@ -26753,7 +28394,7 @@
                 <a:ea typeface="Calibri" pitchFamily="34" charset="-122"/>
                 <a:cs typeface="Calibri" pitchFamily="34" charset="-120"/>
               </a:rPr>
-              <a:t>Word Labs  •  wordlabs.app  •  Root: 'press' = to push down or squeeze</a:t>
+              <a:t>Word Labs  •  wordlabs.app  •  Root: 'press' = press; push</a:t>
             </a:r>
             <a:endParaRPr lang="en-US" sz="800" dirty="0"/>
           </a:p>
@@ -26892,7 +28533,7 @@
                 <a:ea typeface="Trebuchet MS" pitchFamily="34" charset="-122"/>
                 <a:cs typeface="Trebuchet MS" pitchFamily="34" charset="-120"/>
               </a:rPr>
-              <a:t>expression</a:t>
+              <a:t>suppression</a:t>
             </a:r>
             <a:endParaRPr lang="en-US" sz="2800" dirty="0"/>
           </a:p>
@@ -27031,7 +28672,7 @@
                 <a:ea typeface="Trebuchet MS" pitchFamily="34" charset="-122"/>
                 <a:cs typeface="Trebuchet MS" pitchFamily="34" charset="-120"/>
               </a:rPr>
-              <a:t>ex</a:t>
+              <a:t>sub</a:t>
             </a:r>
             <a:endParaRPr lang="en-US" sz="1300" dirty="0"/>
           </a:p>
@@ -27070,7 +28711,7 @@
                 <a:ea typeface="Calibri" pitchFamily="34" charset="-122"/>
                 <a:cs typeface="Calibri" pitchFamily="34" charset="-120"/>
               </a:rPr>
-              <a:t>out</a:t>
+              <a:t>under; below</a:t>
             </a:r>
             <a:endParaRPr lang="en-US" sz="850" dirty="0"/>
           </a:p>
@@ -27182,7 +28823,7 @@
                 <a:ea typeface="Calibri" pitchFamily="34" charset="-122"/>
                 <a:cs typeface="Calibri" pitchFamily="34" charset="-120"/>
               </a:rPr>
-              <a:t>to push or squeeze</a:t>
+              <a:t>press; push</a:t>
             </a:r>
             <a:endParaRPr lang="en-US" sz="850" dirty="0"/>
           </a:p>
@@ -27453,7 +29094,7 @@
                 <a:ea typeface="Trebuchet MS" pitchFamily="34" charset="-122"/>
                 <a:cs typeface="Trebuchet MS" pitchFamily="34" charset="-120"/>
               </a:rPr>
-              <a:t>ex</a:t>
+              <a:t>sup</a:t>
             </a:r>
             <a:endParaRPr lang="en-US" sz="1400" dirty="0"/>
           </a:p>
@@ -27558,7 +29199,7 @@
                 <a:ea typeface="Trebuchet MS" pitchFamily="34" charset="-122"/>
                 <a:cs typeface="Trebuchet MS" pitchFamily="34" charset="-120"/>
               </a:rPr>
-              <a:t>press</a:t>
+              <a:t>pres</a:t>
             </a:r>
             <a:endParaRPr lang="en-US" sz="1400" dirty="0"/>
           </a:p>
@@ -27663,7 +29304,7 @@
                 <a:ea typeface="Trebuchet MS" pitchFamily="34" charset="-122"/>
                 <a:cs typeface="Trebuchet MS" pitchFamily="34" charset="-120"/>
               </a:rPr>
-              <a:t>ion</a:t>
+              <a:t>sion</a:t>
             </a:r>
             <a:endParaRPr lang="en-US" sz="1400" dirty="0"/>
           </a:p>
@@ -27744,11 +29385,11 @@
         <p:spPr>
           <a:xfrm>
             <a:off x="1874520" y="4096512"/>
-            <a:ext cx="6903720" cy="804672"/>
+            <a:ext cx="6903720" cy="658368"/>
           </a:xfrm>
           <a:prstGeom prst="rect">
             <a:avLst>
-              <a:gd name="adj" fmla="val 6818"/>
+              <a:gd name="adj" fmla="val 8333"/>
             </a:avLst>
           </a:prstGeom>
           <a:solidFill>
@@ -27771,11 +29412,11 @@
         <p:spPr>
           <a:xfrm>
             <a:off x="2023872" y="4169664"/>
-            <a:ext cx="685800" cy="384048"/>
+            <a:ext cx="685800" cy="475488"/>
           </a:xfrm>
           <a:prstGeom prst="rect">
             <a:avLst>
-              <a:gd name="adj" fmla="val 9524"/>
+              <a:gd name="adj" fmla="val 7692"/>
             </a:avLst>
           </a:prstGeom>
           <a:solidFill>
@@ -27798,7 +29439,7 @@
         <p:spPr>
           <a:xfrm>
             <a:off x="2023872" y="4169664"/>
-            <a:ext cx="685800" cy="384048"/>
+            <a:ext cx="685800" cy="475488"/>
           </a:xfrm>
           <a:prstGeom prst="rect">
             <a:avLst/>
@@ -27822,7 +29463,7 @@
                 <a:ea typeface="Trebuchet MS" pitchFamily="34" charset="-122"/>
                 <a:cs typeface="Trebuchet MS" pitchFamily="34" charset="-120"/>
               </a:rPr>
-              <a:t>e</a:t>
+              <a:t>s</a:t>
             </a:r>
             <a:endParaRPr lang="en-US" sz="900" dirty="0"/>
           </a:p>
@@ -27837,11 +29478,11 @@
         <p:spPr>
           <a:xfrm>
             <a:off x="2831592" y="4169664"/>
-            <a:ext cx="685800" cy="384048"/>
+            <a:ext cx="685800" cy="475488"/>
           </a:xfrm>
           <a:prstGeom prst="rect">
             <a:avLst>
-              <a:gd name="adj" fmla="val 9524"/>
+              <a:gd name="adj" fmla="val 7692"/>
             </a:avLst>
           </a:prstGeom>
           <a:solidFill>
@@ -27864,7 +29505,7 @@
         <p:spPr>
           <a:xfrm>
             <a:off x="2831592" y="4169664"/>
-            <a:ext cx="685800" cy="384048"/>
+            <a:ext cx="685800" cy="475488"/>
           </a:xfrm>
           <a:prstGeom prst="rect">
             <a:avLst/>
@@ -27888,7 +29529,7 @@
                 <a:ea typeface="Trebuchet MS" pitchFamily="34" charset="-122"/>
                 <a:cs typeface="Trebuchet MS" pitchFamily="34" charset="-120"/>
               </a:rPr>
-              <a:t>x</a:t>
+              <a:t>u</a:t>
             </a:r>
             <a:endParaRPr lang="en-US" sz="900" dirty="0"/>
           </a:p>
@@ -27903,11 +29544,11 @@
         <p:spPr>
           <a:xfrm>
             <a:off x="3639312" y="4169664"/>
-            <a:ext cx="685800" cy="384048"/>
+            <a:ext cx="685800" cy="475488"/>
           </a:xfrm>
           <a:prstGeom prst="rect">
             <a:avLst>
-              <a:gd name="adj" fmla="val 9524"/>
+              <a:gd name="adj" fmla="val 7692"/>
             </a:avLst>
           </a:prstGeom>
           <a:solidFill>
@@ -27930,7 +29571,7 @@
         <p:spPr>
           <a:xfrm>
             <a:off x="3639312" y="4169664"/>
-            <a:ext cx="685800" cy="384048"/>
+            <a:ext cx="685800" cy="475488"/>
           </a:xfrm>
           <a:prstGeom prst="rect">
             <a:avLst/>
@@ -27954,7 +29595,7 @@
                 <a:ea typeface="Trebuchet MS" pitchFamily="34" charset="-122"/>
                 <a:cs typeface="Trebuchet MS" pitchFamily="34" charset="-120"/>
               </a:rPr>
-              <a:t>p</a:t>
+              <a:t>pp</a:t>
             </a:r>
             <a:endParaRPr lang="en-US" sz="900" dirty="0"/>
           </a:p>
@@ -27969,11 +29610,11 @@
         <p:spPr>
           <a:xfrm>
             <a:off x="4447032" y="4169664"/>
-            <a:ext cx="685800" cy="384048"/>
+            <a:ext cx="685800" cy="475488"/>
           </a:xfrm>
           <a:prstGeom prst="rect">
             <a:avLst>
-              <a:gd name="adj" fmla="val 9524"/>
+              <a:gd name="adj" fmla="val 7692"/>
             </a:avLst>
           </a:prstGeom>
           <a:solidFill>
@@ -27996,7 +29637,7 @@
         <p:spPr>
           <a:xfrm>
             <a:off x="4447032" y="4169664"/>
-            <a:ext cx="685800" cy="384048"/>
+            <a:ext cx="685800" cy="475488"/>
           </a:xfrm>
           <a:prstGeom prst="rect">
             <a:avLst/>
@@ -28035,11 +29676,11 @@
         <p:spPr>
           <a:xfrm>
             <a:off x="5254752" y="4169664"/>
-            <a:ext cx="685800" cy="384048"/>
+            <a:ext cx="685800" cy="475488"/>
           </a:xfrm>
           <a:prstGeom prst="rect">
             <a:avLst>
-              <a:gd name="adj" fmla="val 9524"/>
+              <a:gd name="adj" fmla="val 7692"/>
             </a:avLst>
           </a:prstGeom>
           <a:solidFill>
@@ -28062,7 +29703,7 @@
         <p:spPr>
           <a:xfrm>
             <a:off x="5254752" y="4169664"/>
-            <a:ext cx="685800" cy="384048"/>
+            <a:ext cx="685800" cy="475488"/>
           </a:xfrm>
           <a:prstGeom prst="rect">
             <a:avLst/>
@@ -28101,11 +29742,11 @@
         <p:spPr>
           <a:xfrm>
             <a:off x="6062472" y="4169664"/>
-            <a:ext cx="685800" cy="384048"/>
+            <a:ext cx="685800" cy="475488"/>
           </a:xfrm>
           <a:prstGeom prst="rect">
             <a:avLst>
-              <a:gd name="adj" fmla="val 9524"/>
+              <a:gd name="adj" fmla="val 7692"/>
             </a:avLst>
           </a:prstGeom>
           <a:solidFill>
@@ -28128,7 +29769,7 @@
         <p:spPr>
           <a:xfrm>
             <a:off x="6062472" y="4169664"/>
-            <a:ext cx="685800" cy="384048"/>
+            <a:ext cx="685800" cy="475488"/>
           </a:xfrm>
           <a:prstGeom prst="rect">
             <a:avLst/>
@@ -28152,7 +29793,7 @@
                 <a:ea typeface="Trebuchet MS" pitchFamily="34" charset="-122"/>
                 <a:cs typeface="Trebuchet MS" pitchFamily="34" charset="-120"/>
               </a:rPr>
-              <a:t>ss</a:t>
+              <a:t>ssi</a:t>
             </a:r>
             <a:endParaRPr lang="en-US" sz="900" dirty="0"/>
           </a:p>
@@ -28167,11 +29808,11 @@
         <p:spPr>
           <a:xfrm>
             <a:off x="6870192" y="4169664"/>
-            <a:ext cx="685800" cy="384048"/>
+            <a:ext cx="685800" cy="475488"/>
           </a:xfrm>
           <a:prstGeom prst="rect">
             <a:avLst>
-              <a:gd name="adj" fmla="val 9524"/>
+              <a:gd name="adj" fmla="val 7692"/>
             </a:avLst>
           </a:prstGeom>
           <a:solidFill>
@@ -28194,7 +29835,7 @@
         <p:spPr>
           <a:xfrm>
             <a:off x="6870192" y="4169664"/>
-            <a:ext cx="685800" cy="384048"/>
+            <a:ext cx="685800" cy="475488"/>
           </a:xfrm>
           <a:prstGeom prst="rect">
             <a:avLst/>
@@ -28218,7 +29859,7 @@
                 <a:ea typeface="Trebuchet MS" pitchFamily="34" charset="-122"/>
                 <a:cs typeface="Trebuchet MS" pitchFamily="34" charset="-120"/>
               </a:rPr>
-              <a:t>io</a:t>
+              <a:t>o</a:t>
             </a:r>
             <a:endParaRPr lang="en-US" sz="900" dirty="0"/>
           </a:p>
@@ -28226,57 +29867,18 @@
       </p:sp>
       <p:sp>
         <p:nvSpPr>
-          <p:cNvPr id="53" name="Text 51"/>
-          <p:cNvSpPr/>
-          <p:nvPr/>
-        </p:nvSpPr>
-        <p:spPr>
-          <a:xfrm>
-            <a:off x="6870192" y="4572000"/>
-            <a:ext cx="685800" cy="219456"/>
-          </a:xfrm>
-          <a:prstGeom prst="rect">
-            <a:avLst/>
-          </a:prstGeom>
-          <a:noFill/>
-          <a:ln/>
-        </p:spPr>
-        <p:txBody>
-          <a:bodyPr wrap="square" lIns="0" tIns="0" rIns="0" bIns="0" rtlCol="0" anchor="t"/>
-          <a:lstStyle/>
-          <a:p>
-            <a:pPr algn="ctr" indent="0" marL="0">
-              <a:buNone/>
-            </a:pPr>
-            <a:r>
-              <a:rPr lang="en-US" sz="750" i="1" dirty="0">
-                <a:solidFill>
-                  <a:srgbClr val="94A3B8"/>
-                </a:solidFill>
-                <a:latin typeface="Calibri" pitchFamily="34" charset="0"/>
-                <a:ea typeface="Calibri" pitchFamily="34" charset="-122"/>
-                <a:cs typeface="Calibri" pitchFamily="34" charset="-120"/>
-              </a:rPr>
-              <a:t>/sh/</a:t>
-            </a:r>
-            <a:endParaRPr lang="en-US" sz="750" dirty="0"/>
-          </a:p>
-        </p:txBody>
-      </p:sp>
-      <p:sp>
-        <p:nvSpPr>
-          <p:cNvPr id="54" name="Shape 52"/>
+          <p:cNvPr id="53" name="Shape 51"/>
           <p:cNvSpPr/>
           <p:nvPr/>
         </p:nvSpPr>
         <p:spPr>
           <a:xfrm>
             <a:off x="7677912" y="4169664"/>
-            <a:ext cx="685800" cy="384048"/>
+            <a:ext cx="685800" cy="475488"/>
           </a:xfrm>
           <a:prstGeom prst="rect">
             <a:avLst>
-              <a:gd name="adj" fmla="val 9524"/>
+              <a:gd name="adj" fmla="val 7692"/>
             </a:avLst>
           </a:prstGeom>
           <a:solidFill>
@@ -28292,14 +29894,14 @@
       </p:sp>
       <p:sp>
         <p:nvSpPr>
-          <p:cNvPr id="55" name="Text 53"/>
+          <p:cNvPr id="54" name="Text 52"/>
           <p:cNvSpPr/>
           <p:nvPr/>
         </p:nvSpPr>
         <p:spPr>
           <a:xfrm>
             <a:off x="7677912" y="4169664"/>
-            <a:ext cx="685800" cy="384048"/>
+            <a:ext cx="685800" cy="475488"/>
           </a:xfrm>
           <a:prstGeom prst="rect">
             <a:avLst/>
@@ -28615,7 +30217,7 @@
                 <a:ea typeface="Calibri" pitchFamily="34" charset="-122"/>
                 <a:cs typeface="Calibri" pitchFamily="34" charset="-120"/>
               </a:rPr>
-              <a:t>Word Labs  •  wordlabs.app  •  Root: 'press' = to push down or squeeze</a:t>
+              <a:t>Word Labs  •  wordlabs.app  •  Root: 'press' = press; push</a:t>
             </a:r>
             <a:endParaRPr lang="en-US" sz="800" dirty="0"/>
           </a:p>
@@ -28754,7 +30356,7 @@
                 <a:ea typeface="Trebuchet MS" pitchFamily="34" charset="-122"/>
                 <a:cs typeface="Trebuchet MS" pitchFamily="34" charset="-120"/>
               </a:rPr>
-              <a:t>depressed</a:t>
+              <a:t>oppression</a:t>
             </a:r>
             <a:endParaRPr lang="en-US" sz="2800" dirty="0"/>
           </a:p>
@@ -29442,7 +31044,7 @@
                 <a:ea typeface="Calibri" pitchFamily="34" charset="-122"/>
                 <a:cs typeface="Calibri" pitchFamily="34" charset="-120"/>
               </a:rPr>
-              <a:t>Word Labs  •  wordlabs.app  •  Root: 'press' = to push down or squeeze</a:t>
+              <a:t>Word Labs  •  wordlabs.app  •  Root: 'press' = press; push</a:t>
             </a:r>
             <a:endParaRPr lang="en-US" sz="800" dirty="0"/>
           </a:p>
@@ -29581,7 +31183,7 @@
                 <a:ea typeface="Trebuchet MS" pitchFamily="34" charset="-122"/>
                 <a:cs typeface="Trebuchet MS" pitchFamily="34" charset="-120"/>
               </a:rPr>
-              <a:t>depressed</a:t>
+              <a:t>oppression</a:t>
             </a:r>
             <a:endParaRPr lang="en-US" sz="2800" dirty="0"/>
           </a:p>
@@ -29720,7 +31322,7 @@
                 <a:ea typeface="Trebuchet MS" pitchFamily="34" charset="-122"/>
                 <a:cs typeface="Trebuchet MS" pitchFamily="34" charset="-120"/>
               </a:rPr>
-              <a:t>de</a:t>
+              <a:t>ob</a:t>
             </a:r>
             <a:endParaRPr lang="en-US" sz="1300" dirty="0"/>
           </a:p>
@@ -29759,7 +31361,7 @@
                 <a:ea typeface="Calibri" pitchFamily="34" charset="-122"/>
                 <a:cs typeface="Calibri" pitchFamily="34" charset="-120"/>
               </a:rPr>
-              <a:t>down</a:t>
+              <a:t>against; in the way of; towards</a:t>
             </a:r>
             <a:endParaRPr lang="en-US" sz="850" dirty="0"/>
           </a:p>
@@ -29871,7 +31473,7 @@
                 <a:ea typeface="Calibri" pitchFamily="34" charset="-122"/>
                 <a:cs typeface="Calibri" pitchFamily="34" charset="-120"/>
               </a:rPr>
-              <a:t>to push or squeeze</a:t>
+              <a:t>press; push</a:t>
             </a:r>
             <a:endParaRPr lang="en-US" sz="850" dirty="0"/>
           </a:p>
@@ -29944,7 +31546,7 @@
                 <a:ea typeface="Trebuchet MS" pitchFamily="34" charset="-122"/>
                 <a:cs typeface="Trebuchet MS" pitchFamily="34" charset="-120"/>
               </a:rPr>
-              <a:t>ed</a:t>
+              <a:t>ion</a:t>
             </a:r>
             <a:endParaRPr lang="en-US" sz="1300" dirty="0"/>
           </a:p>
@@ -29983,7 +31585,7 @@
                 <a:ea typeface="Calibri" pitchFamily="34" charset="-122"/>
                 <a:cs typeface="Calibri" pitchFamily="34" charset="-120"/>
               </a:rPr>
-              <a:t>past tense</a:t>
+              <a:t>act or result of</a:t>
             </a:r>
             <a:endParaRPr lang="en-US" sz="850" dirty="0"/>
           </a:p>
@@ -30539,7 +32141,7 @@
                 <a:ea typeface="Calibri" pitchFamily="34" charset="-122"/>
                 <a:cs typeface="Calibri" pitchFamily="34" charset="-120"/>
               </a:rPr>
-              <a:t>Word Labs  •  wordlabs.app  •  Root: 'press' = to push down or squeeze</a:t>
+              <a:t>Word Labs  •  wordlabs.app  •  Root: 'press' = press; push</a:t>
             </a:r>
             <a:endParaRPr lang="en-US" sz="800" dirty="0"/>
           </a:p>
@@ -30678,7 +32280,7 @@
                 <a:ea typeface="Trebuchet MS" pitchFamily="34" charset="-122"/>
                 <a:cs typeface="Trebuchet MS" pitchFamily="34" charset="-120"/>
               </a:rPr>
-              <a:t>depressed</a:t>
+              <a:t>oppression</a:t>
             </a:r>
             <a:endParaRPr lang="en-US" sz="2800" dirty="0"/>
           </a:p>
@@ -30817,7 +32419,7 @@
                 <a:ea typeface="Trebuchet MS" pitchFamily="34" charset="-122"/>
                 <a:cs typeface="Trebuchet MS" pitchFamily="34" charset="-120"/>
               </a:rPr>
-              <a:t>de</a:t>
+              <a:t>ob</a:t>
             </a:r>
             <a:endParaRPr lang="en-US" sz="1300" dirty="0"/>
           </a:p>
@@ -30856,7 +32458,7 @@
                 <a:ea typeface="Calibri" pitchFamily="34" charset="-122"/>
                 <a:cs typeface="Calibri" pitchFamily="34" charset="-120"/>
               </a:rPr>
-              <a:t>down</a:t>
+              <a:t>against; in the way of; towards</a:t>
             </a:r>
             <a:endParaRPr lang="en-US" sz="850" dirty="0"/>
           </a:p>
@@ -30968,7 +32570,7 @@
                 <a:ea typeface="Calibri" pitchFamily="34" charset="-122"/>
                 <a:cs typeface="Calibri" pitchFamily="34" charset="-120"/>
               </a:rPr>
-              <a:t>to push or squeeze</a:t>
+              <a:t>press; push</a:t>
             </a:r>
             <a:endParaRPr lang="en-US" sz="850" dirty="0"/>
           </a:p>
@@ -31041,7 +32643,7 @@
                 <a:ea typeface="Trebuchet MS" pitchFamily="34" charset="-122"/>
                 <a:cs typeface="Trebuchet MS" pitchFamily="34" charset="-120"/>
               </a:rPr>
-              <a:t>ed</a:t>
+              <a:t>ion</a:t>
             </a:r>
             <a:endParaRPr lang="en-US" sz="1300" dirty="0"/>
           </a:p>
@@ -31080,7 +32682,7 @@
                 <a:ea typeface="Calibri" pitchFamily="34" charset="-122"/>
                 <a:cs typeface="Calibri" pitchFamily="34" charset="-120"/>
               </a:rPr>
-              <a:t>past tense</a:t>
+              <a:t>act or result of</a:t>
             </a:r>
             <a:endParaRPr lang="en-US" sz="850" dirty="0"/>
           </a:p>
@@ -31187,7 +32789,7 @@
         </p:nvSpPr>
         <p:spPr>
           <a:xfrm>
-            <a:off x="2999232" y="3364992"/>
+            <a:off x="2313432" y="3364992"/>
             <a:ext cx="1645920" cy="475488"/>
           </a:xfrm>
           <a:prstGeom prst="rect">
@@ -31214,7 +32816,7 @@
         </p:nvSpPr>
         <p:spPr>
           <a:xfrm>
-            <a:off x="2999232" y="3364992"/>
+            <a:off x="2313432" y="3364992"/>
             <a:ext cx="1645920" cy="475488"/>
           </a:xfrm>
           <a:prstGeom prst="rect">
@@ -31239,7 +32841,7 @@
                 <a:ea typeface="Trebuchet MS" pitchFamily="34" charset="-122"/>
                 <a:cs typeface="Trebuchet MS" pitchFamily="34" charset="-120"/>
               </a:rPr>
-              <a:t>de</a:t>
+              <a:t>op</a:t>
             </a:r>
             <a:endParaRPr lang="en-US" sz="1400" dirty="0"/>
           </a:p>
@@ -31253,8 +32855,8 @@
         </p:nvSpPr>
         <p:spPr>
           <a:xfrm>
-            <a:off x="4645152" y="3364992"/>
-            <a:ext cx="1097280" cy="475488"/>
+            <a:off x="3959352" y="3364992"/>
+            <a:ext cx="411480" cy="475488"/>
           </a:xfrm>
           <a:prstGeom prst="rect">
             <a:avLst/>
@@ -31292,7 +32894,7 @@
         </p:nvSpPr>
         <p:spPr>
           <a:xfrm>
-            <a:off x="5742432" y="3364992"/>
+            <a:off x="4370832" y="3364992"/>
             <a:ext cx="1645920" cy="475488"/>
           </a:xfrm>
           <a:prstGeom prst="rect">
@@ -31319,7 +32921,7 @@
         </p:nvSpPr>
         <p:spPr>
           <a:xfrm>
-            <a:off x="5742432" y="3364992"/>
+            <a:off x="4370832" y="3364992"/>
             <a:ext cx="1645920" cy="475488"/>
           </a:xfrm>
           <a:prstGeom prst="rect">
@@ -31344,7 +32946,7 @@
                 <a:ea typeface="Trebuchet MS" pitchFamily="34" charset="-122"/>
                 <a:cs typeface="Trebuchet MS" pitchFamily="34" charset="-120"/>
               </a:rPr>
-              <a:t>pressed</a:t>
+              <a:t>pres</a:t>
             </a:r>
             <a:endParaRPr lang="en-US" sz="1400" dirty="0"/>
           </a:p>
@@ -31352,7 +32954,112 @@
       </p:sp>
       <p:sp>
         <p:nvSpPr>
-          <p:cNvPr id="33" name="Shape 31"/>
+          <p:cNvPr id="33" name="Text 31"/>
+          <p:cNvSpPr/>
+          <p:nvPr/>
+        </p:nvSpPr>
+        <p:spPr>
+          <a:xfrm>
+            <a:off x="6016752" y="3364992"/>
+            <a:ext cx="411480" cy="475488"/>
+          </a:xfrm>
+          <a:prstGeom prst="rect">
+            <a:avLst/>
+          </a:prstGeom>
+          <a:noFill/>
+          <a:ln/>
+        </p:spPr>
+        <p:txBody>
+          <a:bodyPr wrap="square" lIns="0" tIns="0" rIns="0" bIns="0" rtlCol="0" anchor="ctr"/>
+          <a:lstStyle/>
+          <a:p>
+            <a:pPr algn="ctr" indent="0" marL="0">
+              <a:buNone/>
+            </a:pPr>
+            <a:r>
+              <a:rPr lang="en-US" sz="1600" b="1" dirty="0">
+                <a:solidFill>
+                  <a:srgbClr val="0D9488"/>
+                </a:solidFill>
+                <a:latin typeface="Trebuchet MS" pitchFamily="34" charset="0"/>
+                <a:ea typeface="Trebuchet MS" pitchFamily="34" charset="-122"/>
+                <a:cs typeface="Trebuchet MS" pitchFamily="34" charset="-120"/>
+              </a:rPr>
+              <a:t>·</a:t>
+            </a:r>
+            <a:endParaRPr lang="en-US" sz="1600" dirty="0"/>
+          </a:p>
+        </p:txBody>
+      </p:sp>
+      <p:sp>
+        <p:nvSpPr>
+          <p:cNvPr id="34" name="Shape 32"/>
+          <p:cNvSpPr/>
+          <p:nvPr/>
+        </p:nvSpPr>
+        <p:spPr>
+          <a:xfrm>
+            <a:off x="6428232" y="3364992"/>
+            <a:ext cx="1645920" cy="475488"/>
+          </a:xfrm>
+          <a:prstGeom prst="rect">
+            <a:avLst>
+              <a:gd name="adj" fmla="val 9615"/>
+            </a:avLst>
+          </a:prstGeom>
+          <a:solidFill>
+            <a:srgbClr val="FFFFFF"/>
+          </a:solidFill>
+          <a:ln w="12700">
+            <a:solidFill>
+              <a:srgbClr val="0D9488"/>
+            </a:solidFill>
+            <a:prstDash val="solid"/>
+          </a:ln>
+        </p:spPr>
+      </p:sp>
+      <p:sp>
+        <p:nvSpPr>
+          <p:cNvPr id="35" name="Text 33"/>
+          <p:cNvSpPr/>
+          <p:nvPr/>
+        </p:nvSpPr>
+        <p:spPr>
+          <a:xfrm>
+            <a:off x="6428232" y="3364992"/>
+            <a:ext cx="1645920" cy="475488"/>
+          </a:xfrm>
+          <a:prstGeom prst="rect">
+            <a:avLst/>
+          </a:prstGeom>
+          <a:noFill/>
+          <a:ln/>
+        </p:spPr>
+        <p:txBody>
+          <a:bodyPr wrap="square" lIns="0" tIns="0" rIns="0" bIns="0" rtlCol="0" anchor="ctr"/>
+          <a:lstStyle/>
+          <a:p>
+            <a:pPr algn="ctr" indent="0" marL="0">
+              <a:buNone/>
+            </a:pPr>
+            <a:r>
+              <a:rPr lang="en-US" sz="1400" b="1" dirty="0">
+                <a:solidFill>
+                  <a:srgbClr val="0D9488"/>
+                </a:solidFill>
+                <a:latin typeface="Trebuchet MS" pitchFamily="34" charset="0"/>
+                <a:ea typeface="Trebuchet MS" pitchFamily="34" charset="-122"/>
+                <a:cs typeface="Trebuchet MS" pitchFamily="34" charset="-120"/>
+              </a:rPr>
+              <a:t>sion</a:t>
+            </a:r>
+            <a:endParaRPr lang="en-US" sz="1400" dirty="0"/>
+          </a:p>
+        </p:txBody>
+      </p:sp>
+      <p:sp>
+        <p:nvSpPr>
+          <p:cNvPr id="36" name="Shape 34"/>
           <p:cNvSpPr/>
           <p:nvPr/>
         </p:nvSpPr>
@@ -31379,7 +33086,7 @@
       </p:sp>
       <p:sp>
         <p:nvSpPr>
-          <p:cNvPr id="34" name="Text 32"/>
+          <p:cNvPr id="37" name="Text 35"/>
           <p:cNvSpPr/>
           <p:nvPr/>
         </p:nvSpPr>
@@ -31418,7 +33125,7 @@
       </p:sp>
       <p:sp>
         <p:nvSpPr>
-          <p:cNvPr id="35" name="Shape 33"/>
+          <p:cNvPr id="38" name="Shape 36"/>
           <p:cNvSpPr/>
           <p:nvPr/>
         </p:nvSpPr>
@@ -31445,7 +33152,7 @@
       </p:sp>
       <p:sp>
         <p:nvSpPr>
-          <p:cNvPr id="36" name="Text 34"/>
+          <p:cNvPr id="39" name="Text 37"/>
           <p:cNvSpPr/>
           <p:nvPr/>
         </p:nvSpPr>
@@ -31768,7 +33475,7 @@
                 <a:ea typeface="Calibri" pitchFamily="34" charset="-122"/>
                 <a:cs typeface="Calibri" pitchFamily="34" charset="-120"/>
               </a:rPr>
-              <a:t>Word Labs  •  wordlabs.app  •  Root: 'press' = to push down or squeeze</a:t>
+              <a:t>Word Labs  •  wordlabs.app  •  Root: 'press' = press; push</a:t>
             </a:r>
             <a:endParaRPr lang="en-US" sz="800" dirty="0"/>
           </a:p>
@@ -31907,7 +33614,7 @@
                 <a:ea typeface="Trebuchet MS" pitchFamily="34" charset="-122"/>
                 <a:cs typeface="Trebuchet MS" pitchFamily="34" charset="-120"/>
               </a:rPr>
-              <a:t>depressed</a:t>
+              <a:t>oppression</a:t>
             </a:r>
             <a:endParaRPr lang="en-US" sz="2800" dirty="0"/>
           </a:p>
@@ -32046,7 +33753,7 @@
                 <a:ea typeface="Trebuchet MS" pitchFamily="34" charset="-122"/>
                 <a:cs typeface="Trebuchet MS" pitchFamily="34" charset="-120"/>
               </a:rPr>
-              <a:t>de</a:t>
+              <a:t>ob</a:t>
             </a:r>
             <a:endParaRPr lang="en-US" sz="1300" dirty="0"/>
           </a:p>
@@ -32085,7 +33792,7 @@
                 <a:ea typeface="Calibri" pitchFamily="34" charset="-122"/>
                 <a:cs typeface="Calibri" pitchFamily="34" charset="-120"/>
               </a:rPr>
-              <a:t>down</a:t>
+              <a:t>against; in the way of; towards</a:t>
             </a:r>
             <a:endParaRPr lang="en-US" sz="850" dirty="0"/>
           </a:p>
@@ -32197,7 +33904,7 @@
                 <a:ea typeface="Calibri" pitchFamily="34" charset="-122"/>
                 <a:cs typeface="Calibri" pitchFamily="34" charset="-120"/>
               </a:rPr>
-              <a:t>to push or squeeze</a:t>
+              <a:t>press; push</a:t>
             </a:r>
             <a:endParaRPr lang="en-US" sz="850" dirty="0"/>
           </a:p>
@@ -32270,7 +33977,7 @@
                 <a:ea typeface="Trebuchet MS" pitchFamily="34" charset="-122"/>
                 <a:cs typeface="Trebuchet MS" pitchFamily="34" charset="-120"/>
               </a:rPr>
-              <a:t>ed</a:t>
+              <a:t>ion</a:t>
             </a:r>
             <a:endParaRPr lang="en-US" sz="1300" dirty="0"/>
           </a:p>
@@ -32309,7 +34016,7 @@
                 <a:ea typeface="Calibri" pitchFamily="34" charset="-122"/>
                 <a:cs typeface="Calibri" pitchFamily="34" charset="-120"/>
               </a:rPr>
-              <a:t>past tense</a:t>
+              <a:t>act or result of</a:t>
             </a:r>
             <a:endParaRPr lang="en-US" sz="850" dirty="0"/>
           </a:p>
@@ -32416,7 +34123,7 @@
         </p:nvSpPr>
         <p:spPr>
           <a:xfrm>
-            <a:off x="2999232" y="3364992"/>
+            <a:off x="2313432" y="3364992"/>
             <a:ext cx="1645920" cy="475488"/>
           </a:xfrm>
           <a:prstGeom prst="rect">
@@ -32443,7 +34150,7 @@
         </p:nvSpPr>
         <p:spPr>
           <a:xfrm>
-            <a:off x="2999232" y="3364992"/>
+            <a:off x="2313432" y="3364992"/>
             <a:ext cx="1645920" cy="475488"/>
           </a:xfrm>
           <a:prstGeom prst="rect">
@@ -32468,7 +34175,7 @@
                 <a:ea typeface="Trebuchet MS" pitchFamily="34" charset="-122"/>
                 <a:cs typeface="Trebuchet MS" pitchFamily="34" charset="-120"/>
               </a:rPr>
-              <a:t>de</a:t>
+              <a:t>op</a:t>
             </a:r>
             <a:endParaRPr lang="en-US" sz="1400" dirty="0"/>
           </a:p>
@@ -32482,8 +34189,8 @@
         </p:nvSpPr>
         <p:spPr>
           <a:xfrm>
-            <a:off x="4645152" y="3364992"/>
-            <a:ext cx="1097280" cy="475488"/>
+            <a:off x="3959352" y="3364992"/>
+            <a:ext cx="411480" cy="475488"/>
           </a:xfrm>
           <a:prstGeom prst="rect">
             <a:avLst/>
@@ -32521,7 +34228,7 @@
         </p:nvSpPr>
         <p:spPr>
           <a:xfrm>
-            <a:off x="5742432" y="3364992"/>
+            <a:off x="4370832" y="3364992"/>
             <a:ext cx="1645920" cy="475488"/>
           </a:xfrm>
           <a:prstGeom prst="rect">
@@ -32548,7 +34255,7 @@
         </p:nvSpPr>
         <p:spPr>
           <a:xfrm>
-            <a:off x="5742432" y="3364992"/>
+            <a:off x="4370832" y="3364992"/>
             <a:ext cx="1645920" cy="475488"/>
           </a:xfrm>
           <a:prstGeom prst="rect">
@@ -32573,7 +34280,7 @@
                 <a:ea typeface="Trebuchet MS" pitchFamily="34" charset="-122"/>
                 <a:cs typeface="Trebuchet MS" pitchFamily="34" charset="-120"/>
               </a:rPr>
-              <a:t>pressed</a:t>
+              <a:t>pres</a:t>
             </a:r>
             <a:endParaRPr lang="en-US" sz="1400" dirty="0"/>
           </a:p>
@@ -32581,7 +34288,112 @@
       </p:sp>
       <p:sp>
         <p:nvSpPr>
-          <p:cNvPr id="33" name="Shape 31"/>
+          <p:cNvPr id="33" name="Text 31"/>
+          <p:cNvSpPr/>
+          <p:nvPr/>
+        </p:nvSpPr>
+        <p:spPr>
+          <a:xfrm>
+            <a:off x="6016752" y="3364992"/>
+            <a:ext cx="411480" cy="475488"/>
+          </a:xfrm>
+          <a:prstGeom prst="rect">
+            <a:avLst/>
+          </a:prstGeom>
+          <a:noFill/>
+          <a:ln/>
+        </p:spPr>
+        <p:txBody>
+          <a:bodyPr wrap="square" lIns="0" tIns="0" rIns="0" bIns="0" rtlCol="0" anchor="ctr"/>
+          <a:lstStyle/>
+          <a:p>
+            <a:pPr algn="ctr" indent="0" marL="0">
+              <a:buNone/>
+            </a:pPr>
+            <a:r>
+              <a:rPr lang="en-US" sz="1600" b="1" dirty="0">
+                <a:solidFill>
+                  <a:srgbClr val="0D9488"/>
+                </a:solidFill>
+                <a:latin typeface="Trebuchet MS" pitchFamily="34" charset="0"/>
+                <a:ea typeface="Trebuchet MS" pitchFamily="34" charset="-122"/>
+                <a:cs typeface="Trebuchet MS" pitchFamily="34" charset="-120"/>
+              </a:rPr>
+              <a:t>·</a:t>
+            </a:r>
+            <a:endParaRPr lang="en-US" sz="1600" dirty="0"/>
+          </a:p>
+        </p:txBody>
+      </p:sp>
+      <p:sp>
+        <p:nvSpPr>
+          <p:cNvPr id="34" name="Shape 32"/>
+          <p:cNvSpPr/>
+          <p:nvPr/>
+        </p:nvSpPr>
+        <p:spPr>
+          <a:xfrm>
+            <a:off x="6428232" y="3364992"/>
+            <a:ext cx="1645920" cy="475488"/>
+          </a:xfrm>
+          <a:prstGeom prst="rect">
+            <a:avLst>
+              <a:gd name="adj" fmla="val 9615"/>
+            </a:avLst>
+          </a:prstGeom>
+          <a:solidFill>
+            <a:srgbClr val="FFFFFF"/>
+          </a:solidFill>
+          <a:ln w="12700">
+            <a:solidFill>
+              <a:srgbClr val="0D9488"/>
+            </a:solidFill>
+            <a:prstDash val="solid"/>
+          </a:ln>
+        </p:spPr>
+      </p:sp>
+      <p:sp>
+        <p:nvSpPr>
+          <p:cNvPr id="35" name="Text 33"/>
+          <p:cNvSpPr/>
+          <p:nvPr/>
+        </p:nvSpPr>
+        <p:spPr>
+          <a:xfrm>
+            <a:off x="6428232" y="3364992"/>
+            <a:ext cx="1645920" cy="475488"/>
+          </a:xfrm>
+          <a:prstGeom prst="rect">
+            <a:avLst/>
+          </a:prstGeom>
+          <a:noFill/>
+          <a:ln/>
+        </p:spPr>
+        <p:txBody>
+          <a:bodyPr wrap="square" lIns="0" tIns="0" rIns="0" bIns="0" rtlCol="0" anchor="ctr"/>
+          <a:lstStyle/>
+          <a:p>
+            <a:pPr algn="ctr" indent="0" marL="0">
+              <a:buNone/>
+            </a:pPr>
+            <a:r>
+              <a:rPr lang="en-US" sz="1400" b="1" dirty="0">
+                <a:solidFill>
+                  <a:srgbClr val="0D9488"/>
+                </a:solidFill>
+                <a:latin typeface="Trebuchet MS" pitchFamily="34" charset="0"/>
+                <a:ea typeface="Trebuchet MS" pitchFamily="34" charset="-122"/>
+                <a:cs typeface="Trebuchet MS" pitchFamily="34" charset="-120"/>
+              </a:rPr>
+              <a:t>sion</a:t>
+            </a:r>
+            <a:endParaRPr lang="en-US" sz="1400" dirty="0"/>
+          </a:p>
+        </p:txBody>
+      </p:sp>
+      <p:sp>
+        <p:nvSpPr>
+          <p:cNvPr id="36" name="Shape 34"/>
           <p:cNvSpPr/>
           <p:nvPr/>
         </p:nvSpPr>
@@ -32608,7 +34420,7 @@
       </p:sp>
       <p:sp>
         <p:nvSpPr>
-          <p:cNvPr id="34" name="Text 32"/>
+          <p:cNvPr id="37" name="Text 35"/>
           <p:cNvSpPr/>
           <p:nvPr/>
         </p:nvSpPr>
@@ -32647,7 +34459,7 @@
       </p:sp>
       <p:sp>
         <p:nvSpPr>
-          <p:cNvPr id="35" name="Shape 33"/>
+          <p:cNvPr id="38" name="Shape 36"/>
           <p:cNvSpPr/>
           <p:nvPr/>
         </p:nvSpPr>
@@ -32674,7 +34486,7 @@
       </p:sp>
       <p:sp>
         <p:nvSpPr>
-          <p:cNvPr id="36" name="Shape 34"/>
+          <p:cNvPr id="39" name="Shape 37"/>
           <p:cNvSpPr/>
           <p:nvPr/>
         </p:nvSpPr>
@@ -32701,7 +34513,7 @@
       </p:sp>
       <p:sp>
         <p:nvSpPr>
-          <p:cNvPr id="37" name="Text 35"/>
+          <p:cNvPr id="40" name="Text 38"/>
           <p:cNvSpPr/>
           <p:nvPr/>
         </p:nvSpPr>
@@ -32732,7 +34544,7 @@
                 <a:ea typeface="Trebuchet MS" pitchFamily="34" charset="-122"/>
                 <a:cs typeface="Trebuchet MS" pitchFamily="34" charset="-120"/>
               </a:rPr>
-              <a:t>d</a:t>
+              <a:t>o</a:t>
             </a:r>
             <a:endParaRPr lang="en-US" sz="900" dirty="0"/>
           </a:p>
@@ -32740,7 +34552,7 @@
       </p:sp>
       <p:sp>
         <p:nvSpPr>
-          <p:cNvPr id="38" name="Shape 36"/>
+          <p:cNvPr id="41" name="Shape 39"/>
           <p:cNvSpPr/>
           <p:nvPr/>
         </p:nvSpPr>
@@ -32767,7 +34579,7 @@
       </p:sp>
       <p:sp>
         <p:nvSpPr>
-          <p:cNvPr id="39" name="Text 37"/>
+          <p:cNvPr id="42" name="Text 40"/>
           <p:cNvSpPr/>
           <p:nvPr/>
         </p:nvSpPr>
@@ -32798,7 +34610,7 @@
                 <a:ea typeface="Trebuchet MS" pitchFamily="34" charset="-122"/>
                 <a:cs typeface="Trebuchet MS" pitchFamily="34" charset="-120"/>
               </a:rPr>
-              <a:t>e</a:t>
+              <a:t>pp</a:t>
             </a:r>
             <a:endParaRPr lang="en-US" sz="900" dirty="0"/>
           </a:p>
@@ -32806,7 +34618,7 @@
       </p:sp>
       <p:sp>
         <p:nvSpPr>
-          <p:cNvPr id="40" name="Shape 38"/>
+          <p:cNvPr id="43" name="Shape 41"/>
           <p:cNvSpPr/>
           <p:nvPr/>
         </p:nvSpPr>
@@ -32833,7 +34645,7 @@
       </p:sp>
       <p:sp>
         <p:nvSpPr>
-          <p:cNvPr id="41" name="Text 39"/>
+          <p:cNvPr id="44" name="Text 42"/>
           <p:cNvSpPr/>
           <p:nvPr/>
         </p:nvSpPr>
@@ -32864,7 +34676,7 @@
                 <a:ea typeface="Trebuchet MS" pitchFamily="34" charset="-122"/>
                 <a:cs typeface="Trebuchet MS" pitchFamily="34" charset="-120"/>
               </a:rPr>
-              <a:t>p</a:t>
+              <a:t>r</a:t>
             </a:r>
             <a:endParaRPr lang="en-US" sz="900" dirty="0"/>
           </a:p>
@@ -32872,7 +34684,7 @@
       </p:sp>
       <p:sp>
         <p:nvSpPr>
-          <p:cNvPr id="42" name="Shape 40"/>
+          <p:cNvPr id="45" name="Shape 43"/>
           <p:cNvSpPr/>
           <p:nvPr/>
         </p:nvSpPr>
@@ -32899,7 +34711,7 @@
       </p:sp>
       <p:sp>
         <p:nvSpPr>
-          <p:cNvPr id="43" name="Text 41"/>
+          <p:cNvPr id="46" name="Text 44"/>
           <p:cNvSpPr/>
           <p:nvPr/>
         </p:nvSpPr>
@@ -32930,7 +34742,7 @@
                 <a:ea typeface="Trebuchet MS" pitchFamily="34" charset="-122"/>
                 <a:cs typeface="Trebuchet MS" pitchFamily="34" charset="-120"/>
               </a:rPr>
-              <a:t>r</a:t>
+              <a:t>e</a:t>
             </a:r>
             <a:endParaRPr lang="en-US" sz="900" dirty="0"/>
           </a:p>
@@ -32938,7 +34750,7 @@
       </p:sp>
       <p:sp>
         <p:nvSpPr>
-          <p:cNvPr id="44" name="Shape 42"/>
+          <p:cNvPr id="47" name="Shape 45"/>
           <p:cNvSpPr/>
           <p:nvPr/>
         </p:nvSpPr>
@@ -32965,7 +34777,7 @@
       </p:sp>
       <p:sp>
         <p:nvSpPr>
-          <p:cNvPr id="45" name="Text 43"/>
+          <p:cNvPr id="48" name="Text 46"/>
           <p:cNvSpPr/>
           <p:nvPr/>
         </p:nvSpPr>
@@ -32996,7 +34808,7 @@
                 <a:ea typeface="Trebuchet MS" pitchFamily="34" charset="-122"/>
                 <a:cs typeface="Trebuchet MS" pitchFamily="34" charset="-120"/>
               </a:rPr>
-              <a:t>e</a:t>
+              <a:t>ssi</a:t>
             </a:r>
             <a:endParaRPr lang="en-US" sz="900" dirty="0"/>
           </a:p>
@@ -33004,7 +34816,7 @@
       </p:sp>
       <p:sp>
         <p:nvSpPr>
-          <p:cNvPr id="46" name="Shape 44"/>
+          <p:cNvPr id="49" name="Shape 47"/>
           <p:cNvSpPr/>
           <p:nvPr/>
         </p:nvSpPr>
@@ -33031,7 +34843,7 @@
       </p:sp>
       <p:sp>
         <p:nvSpPr>
-          <p:cNvPr id="47" name="Text 45"/>
+          <p:cNvPr id="50" name="Text 48"/>
           <p:cNvSpPr/>
           <p:nvPr/>
         </p:nvSpPr>
@@ -33062,7 +34874,7 @@
                 <a:ea typeface="Trebuchet MS" pitchFamily="34" charset="-122"/>
                 <a:cs typeface="Trebuchet MS" pitchFamily="34" charset="-120"/>
               </a:rPr>
-              <a:t>ss</a:t>
+              <a:t>o</a:t>
             </a:r>
             <a:endParaRPr lang="en-US" sz="900" dirty="0"/>
           </a:p>
@@ -33070,7 +34882,7 @@
       </p:sp>
       <p:sp>
         <p:nvSpPr>
-          <p:cNvPr id="48" name="Shape 46"/>
+          <p:cNvPr id="51" name="Shape 49"/>
           <p:cNvSpPr/>
           <p:nvPr/>
         </p:nvSpPr>
@@ -33097,7 +34909,7 @@
       </p:sp>
       <p:sp>
         <p:nvSpPr>
-          <p:cNvPr id="49" name="Text 47"/>
+          <p:cNvPr id="52" name="Text 50"/>
           <p:cNvSpPr/>
           <p:nvPr/>
         </p:nvSpPr>
@@ -33128,7 +34940,7 @@
                 <a:ea typeface="Trebuchet MS" pitchFamily="34" charset="-122"/>
                 <a:cs typeface="Trebuchet MS" pitchFamily="34" charset="-120"/>
               </a:rPr>
-              <a:t>ed</a:t>
+              <a:t>n</a:t>
             </a:r>
             <a:endParaRPr lang="en-US" sz="900" dirty="0"/>
           </a:p>
@@ -33420,7 +35232,7 @@
                 <a:ea typeface="Calibri" pitchFamily="34" charset="-122"/>
                 <a:cs typeface="Calibri" pitchFamily="34" charset="-120"/>
               </a:rPr>
-              <a:t>Word Labs  •  wordlabs.app  •  Root: 'press' = to push down or squeeze</a:t>
+              <a:t>Word Labs  •  wordlabs.app  •  Root: 'press' = press; push</a:t>
             </a:r>
             <a:endParaRPr lang="en-US" sz="800" dirty="0"/>
           </a:p>
@@ -34589,7 +36401,7 @@
                 <a:ea typeface="Calibri" pitchFamily="34" charset="-122"/>
                 <a:cs typeface="Calibri" pitchFamily="34" charset="-120"/>
               </a:rPr>
-              <a:t>Word Labs  •  wordlabs.app  •  Root: 'press' = to push down or squeeze</a:t>
+              <a:t>Word Labs  •  wordlabs.app  •  Root: 'press' = press; push</a:t>
             </a:r>
             <a:endParaRPr lang="en-US" sz="800" dirty="0"/>
           </a:p>
@@ -34890,7 +36702,7 @@
                 <a:ea typeface="Trebuchet MS" pitchFamily="34" charset="-122"/>
                 <a:cs typeface="Trebuchet MS" pitchFamily="34" charset="-120"/>
               </a:rPr>
-              <a:t>com-</a:t>
+              <a:t>con-</a:t>
             </a:r>
             <a:endParaRPr lang="en-US" sz="1300" dirty="0"/>
           </a:p>
@@ -35171,7 +36983,7 @@
                 <a:ea typeface="Trebuchet MS" pitchFamily="34" charset="-122"/>
                 <a:cs typeface="Trebuchet MS" pitchFamily="34" charset="-120"/>
               </a:rPr>
-              <a:t>-ing</a:t>
+              <a:t>-ion</a:t>
             </a:r>
             <a:endParaRPr lang="en-US" sz="1300" dirty="0"/>
           </a:p>
@@ -35235,7 +37047,7 @@
                 <a:ea typeface="Trebuchet MS" pitchFamily="34" charset="-122"/>
                 <a:cs typeface="Trebuchet MS" pitchFamily="34" charset="-120"/>
               </a:rPr>
-              <a:t>ex-</a:t>
+              <a:t>in-</a:t>
             </a:r>
             <a:endParaRPr lang="en-US" sz="1300" dirty="0"/>
           </a:p>
@@ -35324,7 +37136,7 @@
                 <a:ea typeface="Trebuchet MS" pitchFamily="34" charset="-122"/>
                 <a:cs typeface="Trebuchet MS" pitchFamily="34" charset="-120"/>
               </a:rPr>
-              <a:t>-ion</a:t>
+              <a:t>-or</a:t>
             </a:r>
             <a:endParaRPr lang="en-US" sz="1300" dirty="0"/>
           </a:p>
@@ -35388,7 +37200,7 @@
                 <a:ea typeface="Trebuchet MS" pitchFamily="34" charset="-122"/>
                 <a:cs typeface="Trebuchet MS" pitchFamily="34" charset="-120"/>
               </a:rPr>
-              <a:t>im-</a:t>
+              <a:t>ob-</a:t>
             </a:r>
             <a:endParaRPr lang="en-US" sz="1300" dirty="0"/>
           </a:p>
@@ -35541,7 +37353,7 @@
                 <a:ea typeface="Trebuchet MS" pitchFamily="34" charset="-122"/>
                 <a:cs typeface="Trebuchet MS" pitchFamily="34" charset="-120"/>
               </a:rPr>
-              <a:t>re-</a:t>
+              <a:t>sub-</a:t>
             </a:r>
             <a:endParaRPr lang="en-US" sz="1300" dirty="0"/>
           </a:p>
@@ -35630,7 +37442,7 @@
                 <a:ea typeface="Trebuchet MS" pitchFamily="34" charset="-122"/>
                 <a:cs typeface="Trebuchet MS" pitchFamily="34" charset="-120"/>
               </a:rPr>
-              <a:t>-ure</a:t>
+              <a:t>-es</a:t>
             </a:r>
             <a:endParaRPr lang="en-US" sz="1300" dirty="0"/>
           </a:p>
@@ -35638,37 +37450,151 @@
       </p:sp>
       <p:sp>
         <p:nvSpPr>
-          <p:cNvPr id="43" name="Text 41"/>
-          <p:cNvSpPr/>
-          <p:nvPr/>
-        </p:nvSpPr>
-        <p:spPr>
-          <a:xfrm>
-            <a:off x="365760" y="3611880"/>
-            <a:ext cx="1828800" cy="347472"/>
-          </a:xfrm>
-          <a:prstGeom prst="rect">
-            <a:avLst/>
-          </a:prstGeom>
-          <a:noFill/>
-          <a:ln/>
-        </p:spPr>
-        <p:txBody>
-          <a:bodyPr wrap="square" lIns="0" tIns="0" rIns="0" bIns="0" rtlCol="0" anchor="ctr"/>
-          <a:lstStyle/>
-          <a:p>
-            <a:pPr algn="l" indent="0" marL="0">
-              <a:buNone/>
-            </a:pPr>
-            <a:r>
-              <a:rPr lang="en-US" sz="1200" b="1" dirty="0">
-                <a:solidFill>
-                  <a:srgbClr val="0F172A"/>
+          <p:cNvPr id="43" name="Shape 41"/>
+          <p:cNvSpPr/>
+          <p:nvPr/>
+        </p:nvSpPr>
+        <p:spPr>
+          <a:xfrm>
+            <a:off x="365760" y="3666744"/>
+            <a:ext cx="2468880" cy="402336"/>
+          </a:xfrm>
+          <a:prstGeom prst="rect">
+            <a:avLst/>
+          </a:prstGeom>
+          <a:solidFill>
+            <a:srgbClr val="F1F5F9"/>
+          </a:solidFill>
+          <a:ln w="12700">
+            <a:solidFill>
+              <a:srgbClr val="E2E8F0"/>
+            </a:solidFill>
+            <a:prstDash val="solid"/>
+          </a:ln>
+        </p:spPr>
+      </p:sp>
+      <p:sp>
+        <p:nvSpPr>
+          <p:cNvPr id="44" name="Shape 42"/>
+          <p:cNvSpPr/>
+          <p:nvPr/>
+        </p:nvSpPr>
+        <p:spPr>
+          <a:xfrm>
+            <a:off x="2971800" y="3666744"/>
+            <a:ext cx="2834640" cy="402336"/>
+          </a:xfrm>
+          <a:prstGeom prst="rect">
+            <a:avLst/>
+          </a:prstGeom>
+          <a:solidFill>
+            <a:srgbClr val="F1F5F9"/>
+          </a:solidFill>
+          <a:ln w="12700">
+            <a:solidFill>
+              <a:srgbClr val="E2E8F0"/>
+            </a:solidFill>
+            <a:prstDash val="solid"/>
+          </a:ln>
+        </p:spPr>
+      </p:sp>
+      <p:sp>
+        <p:nvSpPr>
+          <p:cNvPr id="45" name="Shape 43"/>
+          <p:cNvSpPr/>
+          <p:nvPr/>
+        </p:nvSpPr>
+        <p:spPr>
+          <a:xfrm>
+            <a:off x="5943600" y="3666744"/>
+            <a:ext cx="2834640" cy="402336"/>
+          </a:xfrm>
+          <a:prstGeom prst="rect">
+            <a:avLst/>
+          </a:prstGeom>
+          <a:solidFill>
+            <a:srgbClr val="FCE7F3"/>
+          </a:solidFill>
+          <a:ln w="12700">
+            <a:solidFill>
+              <a:srgbClr val="E2E8F0"/>
+            </a:solidFill>
+            <a:prstDash val="solid"/>
+          </a:ln>
+        </p:spPr>
+      </p:sp>
+      <p:sp>
+        <p:nvSpPr>
+          <p:cNvPr id="46" name="Text 44"/>
+          <p:cNvSpPr/>
+          <p:nvPr/>
+        </p:nvSpPr>
+        <p:spPr>
+          <a:xfrm>
+            <a:off x="5943600" y="3666744"/>
+            <a:ext cx="2834640" cy="402336"/>
+          </a:xfrm>
+          <a:prstGeom prst="rect">
+            <a:avLst/>
+          </a:prstGeom>
+          <a:noFill/>
+          <a:ln/>
+        </p:spPr>
+        <p:txBody>
+          <a:bodyPr wrap="square" lIns="0" tIns="0" rIns="0" bIns="0" rtlCol="0" anchor="ctr"/>
+          <a:lstStyle/>
+          <a:p>
+            <a:pPr algn="ctr" indent="0" marL="0">
+              <a:buNone/>
+            </a:pPr>
+            <a:r>
+              <a:rPr lang="en-US" sz="1300" b="1" dirty="0">
+                <a:solidFill>
+                  <a:srgbClr val="9D174D"/>
                 </a:solidFill>
                 <a:latin typeface="Trebuchet MS" pitchFamily="34" charset="0"/>
                 <a:ea typeface="Trebuchet MS" pitchFamily="34" charset="-122"/>
                 <a:cs typeface="Trebuchet MS" pitchFamily="34" charset="-120"/>
               </a:rPr>
+              <a:t>-ing</a:t>
+            </a:r>
+            <a:endParaRPr lang="en-US" sz="1300" dirty="0"/>
+          </a:p>
+        </p:txBody>
+      </p:sp>
+      <p:sp>
+        <p:nvSpPr>
+          <p:cNvPr id="47" name="Text 45"/>
+          <p:cNvSpPr/>
+          <p:nvPr/>
+        </p:nvSpPr>
+        <p:spPr>
+          <a:xfrm>
+            <a:off x="365760" y="3611880"/>
+            <a:ext cx="1828800" cy="347472"/>
+          </a:xfrm>
+          <a:prstGeom prst="rect">
+            <a:avLst/>
+          </a:prstGeom>
+          <a:noFill/>
+          <a:ln/>
+        </p:spPr>
+        <p:txBody>
+          <a:bodyPr wrap="square" lIns="0" tIns="0" rIns="0" bIns="0" rtlCol="0" anchor="ctr"/>
+          <a:lstStyle/>
+          <a:p>
+            <a:pPr algn="l" indent="0" marL="0">
+              <a:buNone/>
+            </a:pPr>
+            <a:r>
+              <a:rPr lang="en-US" sz="1200" b="1" dirty="0">
+                <a:solidFill>
+                  <a:srgbClr val="0F172A"/>
+                </a:solidFill>
+                <a:latin typeface="Trebuchet MS" pitchFamily="34" charset="0"/>
+                <a:ea typeface="Trebuchet MS" pitchFamily="34" charset="-122"/>
+                <a:cs typeface="Trebuchet MS" pitchFamily="34" charset="-120"/>
+              </a:rPr>
               <a:t>Sample words:</a:t>
             </a:r>
             <a:endParaRPr lang="en-US" sz="1200" dirty="0"/>
@@ -35677,7 +37603,7 @@
       </p:sp>
       <p:sp>
         <p:nvSpPr>
-          <p:cNvPr id="44" name="Shape 42"/>
+          <p:cNvPr id="48" name="Shape 46"/>
           <p:cNvSpPr/>
           <p:nvPr/>
         </p:nvSpPr>
@@ -35704,7 +37630,7 @@
       </p:sp>
       <p:sp>
         <p:nvSpPr>
-          <p:cNvPr id="45" name="Text 43"/>
+          <p:cNvPr id="49" name="Text 47"/>
           <p:cNvSpPr/>
           <p:nvPr/>
         </p:nvSpPr>
@@ -35735,7 +37661,7 @@
                 <a:ea typeface="Trebuchet MS" pitchFamily="34" charset="-122"/>
                 <a:cs typeface="Trebuchet MS" pitchFamily="34" charset="-120"/>
               </a:rPr>
-              <a:t>compress</a:t>
+              <a:t>press</a:t>
             </a:r>
             <a:endParaRPr lang="en-US" sz="1200" dirty="0"/>
           </a:p>
@@ -35743,7 +37669,7 @@
       </p:sp>
       <p:sp>
         <p:nvSpPr>
-          <p:cNvPr id="46" name="Shape 44"/>
+          <p:cNvPr id="50" name="Shape 48"/>
           <p:cNvSpPr/>
           <p:nvPr/>
         </p:nvSpPr>
@@ -35770,7 +37696,7 @@
       </p:sp>
       <p:sp>
         <p:nvSpPr>
-          <p:cNvPr id="47" name="Text 45"/>
+          <p:cNvPr id="51" name="Text 49"/>
           <p:cNvSpPr/>
           <p:nvPr/>
         </p:nvSpPr>
@@ -35801,7 +37727,7 @@
                 <a:ea typeface="Trebuchet MS" pitchFamily="34" charset="-122"/>
                 <a:cs typeface="Trebuchet MS" pitchFamily="34" charset="-120"/>
               </a:rPr>
-              <a:t>depress</a:t>
+              <a:t>impress</a:t>
             </a:r>
             <a:endParaRPr lang="en-US" sz="1200" dirty="0"/>
           </a:p>
@@ -35809,7 +37735,7 @@
       </p:sp>
       <p:sp>
         <p:nvSpPr>
-          <p:cNvPr id="48" name="Shape 46"/>
+          <p:cNvPr id="52" name="Shape 50"/>
           <p:cNvSpPr/>
           <p:nvPr/>
         </p:nvSpPr>
@@ -35836,7 +37762,7 @@
       </p:sp>
       <p:sp>
         <p:nvSpPr>
-          <p:cNvPr id="49" name="Text 47"/>
+          <p:cNvPr id="53" name="Text 51"/>
           <p:cNvSpPr/>
           <p:nvPr/>
         </p:nvSpPr>
@@ -35867,7 +37793,7 @@
                 <a:ea typeface="Trebuchet MS" pitchFamily="34" charset="-122"/>
                 <a:cs typeface="Trebuchet MS" pitchFamily="34" charset="-120"/>
               </a:rPr>
-              <a:t>express</a:t>
+              <a:t>pressed</a:t>
             </a:r>
             <a:endParaRPr lang="en-US" sz="1200" dirty="0"/>
           </a:p>
@@ -35875,7 +37801,7 @@
       </p:sp>
       <p:sp>
         <p:nvSpPr>
-          <p:cNvPr id="50" name="Shape 48"/>
+          <p:cNvPr id="54" name="Shape 52"/>
           <p:cNvSpPr/>
           <p:nvPr/>
         </p:nvSpPr>
@@ -35902,7 +37828,7 @@
       </p:sp>
       <p:sp>
         <p:nvSpPr>
-          <p:cNvPr id="51" name="Text 49"/>
+          <p:cNvPr id="55" name="Text 53"/>
           <p:cNvSpPr/>
           <p:nvPr/>
         </p:nvSpPr>
@@ -35933,7 +37859,7 @@
                 <a:ea typeface="Trebuchet MS" pitchFamily="34" charset="-122"/>
                 <a:cs typeface="Trebuchet MS" pitchFamily="34" charset="-120"/>
               </a:rPr>
-              <a:t>impress</a:t>
+              <a:t>presses</a:t>
             </a:r>
             <a:endParaRPr lang="en-US" sz="1200" dirty="0"/>
           </a:p>
@@ -35941,7 +37867,7 @@
       </p:sp>
       <p:sp>
         <p:nvSpPr>
-          <p:cNvPr id="52" name="Shape 50"/>
+          <p:cNvPr id="56" name="Shape 54"/>
           <p:cNvSpPr/>
           <p:nvPr/>
         </p:nvSpPr>
@@ -35968,7 +37894,7 @@
       </p:sp>
       <p:sp>
         <p:nvSpPr>
-          <p:cNvPr id="53" name="Text 51"/>
+          <p:cNvPr id="57" name="Text 55"/>
           <p:cNvSpPr/>
           <p:nvPr/>
         </p:nvSpPr>
@@ -35999,7 +37925,7 @@
                 <a:ea typeface="Trebuchet MS" pitchFamily="34" charset="-122"/>
                 <a:cs typeface="Trebuchet MS" pitchFamily="34" charset="-120"/>
               </a:rPr>
-              <a:t>repress</a:t>
+              <a:t>compress</a:t>
             </a:r>
             <a:endParaRPr lang="en-US" sz="1200" dirty="0"/>
           </a:p>
@@ -36007,7 +37933,7 @@
       </p:sp>
       <p:sp>
         <p:nvSpPr>
-          <p:cNvPr id="54" name="Shape 52"/>
+          <p:cNvPr id="58" name="Shape 56"/>
           <p:cNvSpPr/>
           <p:nvPr/>
         </p:nvSpPr>
@@ -36034,7 +37960,7 @@
       </p:sp>
       <p:sp>
         <p:nvSpPr>
-          <p:cNvPr id="55" name="Text 53"/>
+          <p:cNvPr id="59" name="Text 57"/>
           <p:cNvSpPr/>
           <p:nvPr/>
         </p:nvSpPr>
@@ -36073,7 +37999,7 @@
       </p:sp>
       <p:sp>
         <p:nvSpPr>
-          <p:cNvPr id="56" name="Shape 54"/>
+          <p:cNvPr id="60" name="Shape 58"/>
           <p:cNvSpPr/>
           <p:nvPr/>
         </p:nvSpPr>
@@ -36100,7 +38026,7 @@
       </p:sp>
       <p:sp>
         <p:nvSpPr>
-          <p:cNvPr id="57" name="Text 55"/>
+          <p:cNvPr id="61" name="Text 59"/>
           <p:cNvSpPr/>
           <p:nvPr/>
         </p:nvSpPr>
@@ -36132,72 +38058,6 @@
                 <a:cs typeface="Trebuchet MS" pitchFamily="34" charset="-120"/>
               </a:rPr>
               <a:t>pressure</a:t>
-            </a:r>
-            <a:endParaRPr lang="en-US" sz="1200" dirty="0"/>
-          </a:p>
-        </p:txBody>
-      </p:sp>
-      <p:sp>
-        <p:nvSpPr>
-          <p:cNvPr id="58" name="Shape 56"/>
-          <p:cNvSpPr/>
-          <p:nvPr/>
-        </p:nvSpPr>
-        <p:spPr>
-          <a:xfrm>
-            <a:off x="6894576" y="4498848"/>
-            <a:ext cx="2011680" cy="402336"/>
-          </a:xfrm>
-          <a:prstGeom prst="rect">
-            <a:avLst>
-              <a:gd name="adj" fmla="val 13636"/>
-            </a:avLst>
-          </a:prstGeom>
-          <a:solidFill>
-            <a:srgbClr val="EEF2FF"/>
-          </a:solidFill>
-          <a:ln w="12700">
-            <a:solidFill>
-              <a:srgbClr val="6366F1"/>
-            </a:solidFill>
-            <a:prstDash val="solid"/>
-          </a:ln>
-        </p:spPr>
-      </p:sp>
-      <p:sp>
-        <p:nvSpPr>
-          <p:cNvPr id="59" name="Text 57"/>
-          <p:cNvSpPr/>
-          <p:nvPr/>
-        </p:nvSpPr>
-        <p:spPr>
-          <a:xfrm>
-            <a:off x="6894576" y="4498848"/>
-            <a:ext cx="2011680" cy="402336"/>
-          </a:xfrm>
-          <a:prstGeom prst="rect">
-            <a:avLst/>
-          </a:prstGeom>
-          <a:noFill/>
-          <a:ln/>
-        </p:spPr>
-        <p:txBody>
-          <a:bodyPr wrap="square" lIns="0" tIns="0" rIns="0" bIns="0" rtlCol="0" anchor="ctr"/>
-          <a:lstStyle/>
-          <a:p>
-            <a:pPr algn="ctr" indent="0" marL="0">
-              <a:buNone/>
-            </a:pPr>
-            <a:r>
-              <a:rPr lang="en-US" sz="1200" b="1" dirty="0">
-                <a:solidFill>
-                  <a:srgbClr val="4338CA"/>
-                </a:solidFill>
-                <a:latin typeface="Trebuchet MS" pitchFamily="34" charset="0"/>
-                <a:ea typeface="Trebuchet MS" pitchFamily="34" charset="-122"/>
-                <a:cs typeface="Trebuchet MS" pitchFamily="34" charset="-120"/>
-              </a:rPr>
-              <a:t>expression</a:t>
             </a:r>
             <a:endParaRPr lang="en-US" sz="1200" dirty="0"/>
           </a:p>
@@ -36489,7 +38349,7 @@
                 <a:ea typeface="Calibri" pitchFamily="34" charset="-122"/>
                 <a:cs typeface="Calibri" pitchFamily="34" charset="-120"/>
               </a:rPr>
-              <a:t>Word Labs  •  wordlabs.app  •  Root: 'press' = to push down or squeeze</a:t>
+              <a:t>Word Labs  •  wordlabs.app  •  Root: 'press' = press; push</a:t>
             </a:r>
             <a:endParaRPr lang="en-US" sz="800" dirty="0"/>
           </a:p>
@@ -36653,7 +38513,7 @@
                 <a:ea typeface="Calibri" pitchFamily="34" charset="-122"/>
                 <a:cs typeface="Calibri" pitchFamily="34" charset="-120"/>
               </a:rPr>
-              <a:t>The core part of a word carrying its basic meaning. For example, 'press' means 'to push down or squeeze'.</a:t>
+              <a:t>The core part of a word carrying its basic meaning. For example, 'press' means 'press; push'.</a:t>
             </a:r>
             <a:endParaRPr lang="en-US" sz="1350" dirty="0"/>
           </a:p>
@@ -37273,7 +39133,7 @@
                 <a:ea typeface="Calibri" pitchFamily="34" charset="-122"/>
                 <a:cs typeface="Calibri" pitchFamily="34" charset="-120"/>
               </a:rPr>
-              <a:t>Word Labs  •  wordlabs.app  •  Root: 'press' = to push down or squeeze</a:t>
+              <a:t>Word Labs  •  wordlabs.app  •  Root: 'press' = press; push</a:t>
             </a:r>
             <a:endParaRPr lang="en-US" sz="800" dirty="0"/>
           </a:p>
@@ -37385,7 +39245,7 @@
                 <a:ea typeface="Calibri" pitchFamily="34" charset="-122"/>
                 <a:cs typeface="Calibri" pitchFamily="34" charset="-120"/>
               </a:rPr>
-              <a:t>1.  The prefix 'com' in 'compress' means together, so compress means to push or squeeze together.</a:t>
+              <a:t>1.  'impress' means 'to squash something flat'.</a:t>
             </a:r>
             <a:endParaRPr lang="en-US" sz="1300" dirty="0"/>
           </a:p>
@@ -37408,11 +39268,11 @@
             </a:avLst>
           </a:prstGeom>
           <a:solidFill>
-            <a:srgbClr val="DCFCE7"/>
-          </a:solidFill>
-          <a:ln w="12700">
-            <a:solidFill>
-              <a:srgbClr val="16A34A"/>
+            <a:srgbClr val="FEE2E2"/>
+          </a:solidFill>
+          <a:ln w="12700">
+            <a:solidFill>
+              <a:srgbClr val="DC2626"/>
             </a:solidFill>
             <a:prstDash val="solid"/>
           </a:ln>
@@ -37445,13 +39305,13 @@
             <a:r>
               <a:rPr lang="en-US" sz="1100" b="1" dirty="0">
                 <a:solidFill>
-                  <a:srgbClr val="16A34A"/>
+                  <a:srgbClr val="DC2626"/>
                 </a:solidFill>
                 <a:latin typeface="Trebuchet MS" pitchFamily="34" charset="0"/>
                 <a:ea typeface="Trebuchet MS" pitchFamily="34" charset="-122"/>
                 <a:cs typeface="Trebuchet MS" pitchFamily="34" charset="-120"/>
               </a:rPr>
-              <a:t>TRUE</a:t>
+              <a:t>FALSE</a:t>
             </a:r>
             <a:endParaRPr lang="en-US" sz="1100" dirty="0"/>
           </a:p>
@@ -37524,7 +39384,7 @@
                 <a:ea typeface="Calibri" pitchFamily="34" charset="-122"/>
                 <a:cs typeface="Calibri" pitchFamily="34" charset="-120"/>
               </a:rPr>
-              <a:t>2.  The root 'press' is found in fewer than three common English words.</a:t>
+              <a:t>2.  'press' means 'to run as fast as possible'.</a:t>
             </a:r>
             <a:endParaRPr lang="en-US" sz="1300" dirty="0"/>
           </a:p>
@@ -37663,7 +39523,7 @@
                 <a:ea typeface="Calibri" pitchFamily="34" charset="-122"/>
                 <a:cs typeface="Calibri" pitchFamily="34" charset="-120"/>
               </a:rPr>
-              <a:t>3.  The root 'press' comes from a Latin word meaning to push or squeeze.</a:t>
+              <a:t>3.  'press' means 'to push down firmly on something'.</a:t>
             </a:r>
             <a:endParaRPr lang="en-US" sz="1300" dirty="0"/>
           </a:p>
@@ -37802,7 +39662,7 @@
                 <a:ea typeface="Calibri" pitchFamily="34" charset="-122"/>
                 <a:cs typeface="Calibri" pitchFamily="34" charset="-120"/>
               </a:rPr>
-              <a:t>4.  The word 'impressive' contains the root 'press'.</a:t>
+              <a:t>4.  'press' means 'press; push'.</a:t>
             </a:r>
             <a:endParaRPr lang="en-US" sz="1300" dirty="0"/>
           </a:p>
@@ -37941,7 +39801,7 @@
                 <a:ea typeface="Calibri" pitchFamily="34" charset="-122"/>
                 <a:cs typeface="Calibri" pitchFamily="34" charset="-120"/>
               </a:rPr>
-              <a:t>5.  The word 'express' has nothing to do with pushing or squeezing an idea out.</a:t>
+              <a:t>5.  'impress' means 'to make someone admire or feel respect for you'.</a:t>
             </a:r>
             <a:endParaRPr lang="en-US" sz="1300" dirty="0"/>
           </a:p>
@@ -37964,11 +39824,11 @@
             </a:avLst>
           </a:prstGeom>
           <a:solidFill>
-            <a:srgbClr val="FEE2E2"/>
-          </a:solidFill>
-          <a:ln w="12700">
-            <a:solidFill>
-              <a:srgbClr val="DC2626"/>
+            <a:srgbClr val="DCFCE7"/>
+          </a:solidFill>
+          <a:ln w="12700">
+            <a:solidFill>
+              <a:srgbClr val="16A34A"/>
             </a:solidFill>
             <a:prstDash val="solid"/>
           </a:ln>
@@ -38001,13 +39861,13 @@
             <a:r>
               <a:rPr lang="en-US" sz="1100" b="1" dirty="0">
                 <a:solidFill>
-                  <a:srgbClr val="DC2626"/>
+                  <a:srgbClr val="16A34A"/>
                 </a:solidFill>
                 <a:latin typeface="Trebuchet MS" pitchFamily="34" charset="0"/>
                 <a:ea typeface="Trebuchet MS" pitchFamily="34" charset="-122"/>
                 <a:cs typeface="Trebuchet MS" pitchFamily="34" charset="-120"/>
               </a:rPr>
-              <a:t>FALSE</a:t>
+              <a:t>TRUE</a:t>
             </a:r>
             <a:endParaRPr lang="en-US" sz="1100" dirty="0"/>
           </a:p>
@@ -38299,7 +40159,7 @@
                 <a:ea typeface="Calibri" pitchFamily="34" charset="-122"/>
                 <a:cs typeface="Calibri" pitchFamily="34" charset="-120"/>
               </a:rPr>
-              <a:t>Word Labs  •  wordlabs.app  •  Root: 'press' = to push down or squeeze</a:t>
+              <a:t>Word Labs  •  wordlabs.app  •  Root: 'press' = press; push</a:t>
             </a:r>
             <a:endParaRPr lang="en-US" sz="800" dirty="0"/>
           </a:p>
@@ -38436,7 +40296,7 @@
                 <a:ea typeface="Trebuchet MS" pitchFamily="34" charset="-122"/>
                 <a:cs typeface="Trebuchet MS" pitchFamily="34" charset="-120"/>
               </a:rPr>
-              <a:t>to push down or squeeze</a:t>
+              <a:t>press; push</a:t>
             </a:r>
             <a:endParaRPr lang="en-US" sz="2000" dirty="0"/>
           </a:p>
@@ -38475,7 +40335,7 @@
                 <a:ea typeface="Calibri" pitchFamily="34" charset="-122"/>
                 <a:cs typeface="Calibri" pitchFamily="34" charset="-120"/>
               </a:rPr>
-              <a:t>Origin: Latin: pressare</a:t>
+              <a:t>Origin: Latin root</a:t>
             </a:r>
             <a:endParaRPr lang="en-US" sz="1100" dirty="0"/>
           </a:p>
@@ -38580,7 +40440,7 @@
                 <a:ea typeface="Trebuchet MS" pitchFamily="34" charset="-122"/>
                 <a:cs typeface="Trebuchet MS" pitchFamily="34" charset="-120"/>
               </a:rPr>
-              <a:t>compress</a:t>
+              <a:t>press</a:t>
             </a:r>
             <a:endParaRPr lang="en-US" sz="1300" dirty="0"/>
           </a:p>
@@ -38646,7 +40506,7 @@
                 <a:ea typeface="Trebuchet MS" pitchFamily="34" charset="-122"/>
                 <a:cs typeface="Trebuchet MS" pitchFamily="34" charset="-120"/>
               </a:rPr>
-              <a:t>depress</a:t>
+              <a:t>impress</a:t>
             </a:r>
             <a:endParaRPr lang="en-US" sz="1300" dirty="0"/>
           </a:p>
@@ -38712,7 +40572,7 @@
                 <a:ea typeface="Trebuchet MS" pitchFamily="34" charset="-122"/>
                 <a:cs typeface="Trebuchet MS" pitchFamily="34" charset="-120"/>
               </a:rPr>
-              <a:t>express</a:t>
+              <a:t>pressed</a:t>
             </a:r>
             <a:endParaRPr lang="en-US" sz="1300" dirty="0"/>
           </a:p>
@@ -38778,7 +40638,7 @@
                 <a:ea typeface="Trebuchet MS" pitchFamily="34" charset="-122"/>
                 <a:cs typeface="Trebuchet MS" pitchFamily="34" charset="-120"/>
               </a:rPr>
-              <a:t>impress</a:t>
+              <a:t>presses</a:t>
             </a:r>
             <a:endParaRPr lang="en-US" sz="1300" dirty="0"/>
           </a:p>
@@ -38844,7 +40704,7 @@
                 <a:ea typeface="Trebuchet MS" pitchFamily="34" charset="-122"/>
                 <a:cs typeface="Trebuchet MS" pitchFamily="34" charset="-120"/>
               </a:rPr>
-              <a:t>repress</a:t>
+              <a:t>compress</a:t>
             </a:r>
             <a:endParaRPr lang="en-US" sz="1300" dirty="0"/>
           </a:p>
@@ -39268,7 +41128,7 @@
                 <a:ea typeface="Calibri" pitchFamily="34" charset="-122"/>
                 <a:cs typeface="Calibri" pitchFamily="34" charset="-120"/>
               </a:rPr>
-              <a:t>Word Labs  •  wordlabs.app  •  Root: 'press' = to push down or squeeze</a:t>
+              <a:t>Word Labs  •  wordlabs.app  •  Root: 'press' = press; push</a:t>
             </a:r>
             <a:endParaRPr lang="en-US" sz="800" dirty="0"/>
           </a:p>
@@ -39569,7 +41429,7 @@
                 <a:ea typeface="Trebuchet MS" pitchFamily="34" charset="-122"/>
                 <a:cs typeface="Trebuchet MS" pitchFamily="34" charset="-120"/>
               </a:rPr>
-              <a:t>com-</a:t>
+              <a:t>con-</a:t>
             </a:r>
             <a:endParaRPr lang="en-US" sz="1300" dirty="0"/>
           </a:p>
@@ -39850,7 +41710,7 @@
                 <a:ea typeface="Trebuchet MS" pitchFamily="34" charset="-122"/>
                 <a:cs typeface="Trebuchet MS" pitchFamily="34" charset="-120"/>
               </a:rPr>
-              <a:t>-ing</a:t>
+              <a:t>-ion</a:t>
             </a:r>
             <a:endParaRPr lang="en-US" sz="1300" dirty="0"/>
           </a:p>
@@ -39914,7 +41774,7 @@
                 <a:ea typeface="Trebuchet MS" pitchFamily="34" charset="-122"/>
                 <a:cs typeface="Trebuchet MS" pitchFamily="34" charset="-120"/>
               </a:rPr>
-              <a:t>ex-</a:t>
+              <a:t>in-</a:t>
             </a:r>
             <a:endParaRPr lang="en-US" sz="1300" dirty="0"/>
           </a:p>
@@ -40003,7 +41863,7 @@
                 <a:ea typeface="Trebuchet MS" pitchFamily="34" charset="-122"/>
                 <a:cs typeface="Trebuchet MS" pitchFamily="34" charset="-120"/>
               </a:rPr>
-              <a:t>-ion</a:t>
+              <a:t>-or</a:t>
             </a:r>
             <a:endParaRPr lang="en-US" sz="1300" dirty="0"/>
           </a:p>
@@ -40067,7 +41927,7 @@
                 <a:ea typeface="Trebuchet MS" pitchFamily="34" charset="-122"/>
                 <a:cs typeface="Trebuchet MS" pitchFamily="34" charset="-120"/>
               </a:rPr>
-              <a:t>im-</a:t>
+              <a:t>ob-</a:t>
             </a:r>
             <a:endParaRPr lang="en-US" sz="1300" dirty="0"/>
           </a:p>
@@ -40220,7 +42080,7 @@
                 <a:ea typeface="Trebuchet MS" pitchFamily="34" charset="-122"/>
                 <a:cs typeface="Trebuchet MS" pitchFamily="34" charset="-120"/>
               </a:rPr>
-              <a:t>re-</a:t>
+              <a:t>sub-</a:t>
             </a:r>
             <a:endParaRPr lang="en-US" sz="1300" dirty="0"/>
           </a:p>
@@ -40309,7 +42169,7 @@
                 <a:ea typeface="Trebuchet MS" pitchFamily="34" charset="-122"/>
                 <a:cs typeface="Trebuchet MS" pitchFamily="34" charset="-120"/>
               </a:rPr>
-              <a:t>-ure</a:t>
+              <a:t>-es</a:t>
             </a:r>
             <a:endParaRPr lang="en-US" sz="1300" dirty="0"/>
           </a:p>
@@ -40317,13 +42177,127 @@
       </p:sp>
       <p:sp>
         <p:nvSpPr>
-          <p:cNvPr id="43" name="Text 41"/>
-          <p:cNvSpPr/>
-          <p:nvPr/>
-        </p:nvSpPr>
-        <p:spPr>
-          <a:xfrm>
-            <a:off x="365760" y="4178808"/>
+          <p:cNvPr id="43" name="Shape 41"/>
+          <p:cNvSpPr/>
+          <p:nvPr/>
+        </p:nvSpPr>
+        <p:spPr>
+          <a:xfrm>
+            <a:off x="640080" y="4041648"/>
+            <a:ext cx="1463040" cy="420624"/>
+          </a:xfrm>
+          <a:prstGeom prst="rect">
+            <a:avLst/>
+          </a:prstGeom>
+          <a:solidFill>
+            <a:srgbClr val="F1F5F9"/>
+          </a:solidFill>
+          <a:ln w="12700">
+            <a:solidFill>
+              <a:srgbClr val="E5E7EB"/>
+            </a:solidFill>
+            <a:prstDash val="solid"/>
+          </a:ln>
+        </p:spPr>
+      </p:sp>
+      <p:sp>
+        <p:nvSpPr>
+          <p:cNvPr id="44" name="Shape 42"/>
+          <p:cNvSpPr/>
+          <p:nvPr/>
+        </p:nvSpPr>
+        <p:spPr>
+          <a:xfrm>
+            <a:off x="3291840" y="4041648"/>
+            <a:ext cx="1645920" cy="420624"/>
+          </a:xfrm>
+          <a:prstGeom prst="rect">
+            <a:avLst/>
+          </a:prstGeom>
+          <a:solidFill>
+            <a:srgbClr val="F1F5F9"/>
+          </a:solidFill>
+          <a:ln w="12700">
+            <a:solidFill>
+              <a:srgbClr val="E5E7EB"/>
+            </a:solidFill>
+            <a:prstDash val="solid"/>
+          </a:ln>
+        </p:spPr>
+      </p:sp>
+      <p:sp>
+        <p:nvSpPr>
+          <p:cNvPr id="45" name="Shape 43"/>
+          <p:cNvSpPr/>
+          <p:nvPr/>
+        </p:nvSpPr>
+        <p:spPr>
+          <a:xfrm>
+            <a:off x="5943600" y="4041648"/>
+            <a:ext cx="1463040" cy="420624"/>
+          </a:xfrm>
+          <a:prstGeom prst="rect">
+            <a:avLst/>
+          </a:prstGeom>
+          <a:solidFill>
+            <a:srgbClr val="FCE7F3"/>
+          </a:solidFill>
+          <a:ln w="12700">
+            <a:solidFill>
+              <a:srgbClr val="E5E7EB"/>
+            </a:solidFill>
+            <a:prstDash val="solid"/>
+          </a:ln>
+        </p:spPr>
+      </p:sp>
+      <p:sp>
+        <p:nvSpPr>
+          <p:cNvPr id="46" name="Text 44"/>
+          <p:cNvSpPr/>
+          <p:nvPr/>
+        </p:nvSpPr>
+        <p:spPr>
+          <a:xfrm>
+            <a:off x="5943600" y="4041648"/>
+            <a:ext cx="1463040" cy="420624"/>
+          </a:xfrm>
+          <a:prstGeom prst="rect">
+            <a:avLst/>
+          </a:prstGeom>
+          <a:noFill/>
+          <a:ln/>
+        </p:spPr>
+        <p:txBody>
+          <a:bodyPr wrap="square" lIns="0" tIns="0" rIns="0" bIns="0" rtlCol="0" anchor="ctr"/>
+          <a:lstStyle/>
+          <a:p>
+            <a:pPr algn="ctr" indent="0" marL="0">
+              <a:buNone/>
+            </a:pPr>
+            <a:r>
+              <a:rPr lang="en-US" sz="1300" b="1" dirty="0">
+                <a:solidFill>
+                  <a:srgbClr val="9D174D"/>
+                </a:solidFill>
+                <a:latin typeface="Trebuchet MS" pitchFamily="34" charset="0"/>
+                <a:ea typeface="Trebuchet MS" pitchFamily="34" charset="-122"/>
+                <a:cs typeface="Trebuchet MS" pitchFamily="34" charset="-120"/>
+              </a:rPr>
+              <a:t>-ing</a:t>
+            </a:r>
+            <a:endParaRPr lang="en-US" sz="1300" dirty="0"/>
+          </a:p>
+        </p:txBody>
+      </p:sp>
+      <p:sp>
+        <p:nvSpPr>
+          <p:cNvPr id="47" name="Text 45"/>
+          <p:cNvSpPr/>
+          <p:nvPr/>
+        </p:nvSpPr>
+        <p:spPr>
+          <a:xfrm>
+            <a:off x="365760" y="4636008"/>
             <a:ext cx="1097280" cy="420624"/>
           </a:xfrm>
           <a:prstGeom prst="rect">
@@ -40356,13 +42330,13 @@
       </p:sp>
       <p:sp>
         <p:nvSpPr>
-          <p:cNvPr id="44" name="Shape 42"/>
-          <p:cNvSpPr/>
-          <p:nvPr/>
-        </p:nvSpPr>
-        <p:spPr>
-          <a:xfrm>
-            <a:off x="1508760" y="4178808"/>
+          <p:cNvPr id="48" name="Shape 46"/>
+          <p:cNvSpPr/>
+          <p:nvPr/>
+        </p:nvSpPr>
+        <p:spPr>
+          <a:xfrm>
+            <a:off x="1508760" y="4636008"/>
             <a:ext cx="950976" cy="420624"/>
           </a:xfrm>
           <a:prstGeom prst="rect">
@@ -40390,13 +42364,13 @@
       </p:sp>
       <p:sp>
         <p:nvSpPr>
-          <p:cNvPr id="45" name="Text 43"/>
-          <p:cNvSpPr/>
-          <p:nvPr/>
-        </p:nvSpPr>
-        <p:spPr>
-          <a:xfrm>
-            <a:off x="1508760" y="4178808"/>
+          <p:cNvPr id="49" name="Text 47"/>
+          <p:cNvSpPr/>
+          <p:nvPr/>
+        </p:nvSpPr>
+        <p:spPr>
+          <a:xfrm>
+            <a:off x="1508760" y="4636008"/>
             <a:ext cx="950976" cy="420624"/>
           </a:xfrm>
           <a:prstGeom prst="rect">
@@ -40421,7 +42395,7 @@
                 <a:ea typeface="Trebuchet MS" pitchFamily="34" charset="-122"/>
                 <a:cs typeface="Trebuchet MS" pitchFamily="34" charset="-120"/>
               </a:rPr>
-              <a:t>com-</a:t>
+              <a:t>con-</a:t>
             </a:r>
             <a:endParaRPr lang="en-US" sz="1300" dirty="0"/>
           </a:p>
@@ -40429,13 +42403,13 @@
       </p:sp>
       <p:sp>
         <p:nvSpPr>
-          <p:cNvPr id="46" name="Text 44"/>
-          <p:cNvSpPr/>
-          <p:nvPr/>
-        </p:nvSpPr>
-        <p:spPr>
-          <a:xfrm>
-            <a:off x="2487168" y="4178808"/>
+          <p:cNvPr id="50" name="Text 48"/>
+          <p:cNvSpPr/>
+          <p:nvPr/>
+        </p:nvSpPr>
+        <p:spPr>
+          <a:xfrm>
+            <a:off x="2487168" y="4636008"/>
             <a:ext cx="320040" cy="420624"/>
           </a:xfrm>
           <a:prstGeom prst="rect">
@@ -40468,13 +42442,13 @@
       </p:sp>
       <p:sp>
         <p:nvSpPr>
-          <p:cNvPr id="47" name="Shape 45"/>
-          <p:cNvSpPr/>
-          <p:nvPr/>
-        </p:nvSpPr>
-        <p:spPr>
-          <a:xfrm>
-            <a:off x="2834640" y="4178808"/>
+          <p:cNvPr id="51" name="Shape 49"/>
+          <p:cNvSpPr/>
+          <p:nvPr/>
+        </p:nvSpPr>
+        <p:spPr>
+          <a:xfrm>
+            <a:off x="2834640" y="4636008"/>
             <a:ext cx="1389888" cy="420624"/>
           </a:xfrm>
           <a:prstGeom prst="rect">
@@ -40502,13 +42476,13 @@
       </p:sp>
       <p:sp>
         <p:nvSpPr>
-          <p:cNvPr id="48" name="Text 46"/>
-          <p:cNvSpPr/>
-          <p:nvPr/>
-        </p:nvSpPr>
-        <p:spPr>
-          <a:xfrm>
-            <a:off x="2834640" y="4178808"/>
+          <p:cNvPr id="52" name="Text 50"/>
+          <p:cNvSpPr/>
+          <p:nvPr/>
+        </p:nvSpPr>
+        <p:spPr>
+          <a:xfrm>
+            <a:off x="2834640" y="4636008"/>
             <a:ext cx="1389888" cy="420624"/>
           </a:xfrm>
           <a:prstGeom prst="rect">
@@ -40541,13 +42515,13 @@
       </p:sp>
       <p:sp>
         <p:nvSpPr>
-          <p:cNvPr id="49" name="Text 47"/>
-          <p:cNvSpPr/>
-          <p:nvPr/>
-        </p:nvSpPr>
-        <p:spPr>
-          <a:xfrm>
-            <a:off x="4251960" y="4178808"/>
+          <p:cNvPr id="53" name="Text 51"/>
+          <p:cNvSpPr/>
+          <p:nvPr/>
+        </p:nvSpPr>
+        <p:spPr>
+          <a:xfrm>
+            <a:off x="4251960" y="4636008"/>
             <a:ext cx="320040" cy="420624"/>
           </a:xfrm>
           <a:prstGeom prst="rect">
@@ -40580,13 +42554,13 @@
       </p:sp>
       <p:sp>
         <p:nvSpPr>
-          <p:cNvPr id="50" name="Shape 48"/>
-          <p:cNvSpPr/>
-          <p:nvPr/>
-        </p:nvSpPr>
-        <p:spPr>
-          <a:xfrm>
-            <a:off x="4599432" y="4178808"/>
+          <p:cNvPr id="54" name="Shape 52"/>
+          <p:cNvSpPr/>
+          <p:nvPr/>
+        </p:nvSpPr>
+        <p:spPr>
+          <a:xfrm>
+            <a:off x="4599432" y="4636008"/>
             <a:ext cx="822960" cy="420624"/>
           </a:xfrm>
           <a:prstGeom prst="rect">
@@ -40614,13 +42588,13 @@
       </p:sp>
       <p:sp>
         <p:nvSpPr>
-          <p:cNvPr id="51" name="Text 49"/>
-          <p:cNvSpPr/>
-          <p:nvPr/>
-        </p:nvSpPr>
-        <p:spPr>
-          <a:xfrm>
-            <a:off x="4599432" y="4178808"/>
+          <p:cNvPr id="55" name="Text 53"/>
+          <p:cNvSpPr/>
+          <p:nvPr/>
+        </p:nvSpPr>
+        <p:spPr>
+          <a:xfrm>
+            <a:off x="4599432" y="4636008"/>
             <a:ext cx="822960" cy="420624"/>
           </a:xfrm>
           <a:prstGeom prst="rect">
@@ -40653,13 +42627,13 @@
       </p:sp>
       <p:sp>
         <p:nvSpPr>
-          <p:cNvPr id="52" name="Text 50"/>
-          <p:cNvSpPr/>
-          <p:nvPr/>
-        </p:nvSpPr>
-        <p:spPr>
-          <a:xfrm>
-            <a:off x="5495544" y="4178808"/>
+          <p:cNvPr id="56" name="Text 54"/>
+          <p:cNvSpPr/>
+          <p:nvPr/>
+        </p:nvSpPr>
+        <p:spPr>
+          <a:xfrm>
+            <a:off x="5495544" y="4636008"/>
             <a:ext cx="365760" cy="420624"/>
           </a:xfrm>
           <a:prstGeom prst="rect">
@@ -40692,13 +42666,13 @@
       </p:sp>
       <p:sp>
         <p:nvSpPr>
-          <p:cNvPr id="53" name="Shape 51"/>
-          <p:cNvSpPr/>
-          <p:nvPr/>
-        </p:nvSpPr>
-        <p:spPr>
-          <a:xfrm>
-            <a:off x="5907024" y="4178808"/>
+          <p:cNvPr id="57" name="Shape 55"/>
+          <p:cNvSpPr/>
+          <p:nvPr/>
+        </p:nvSpPr>
+        <p:spPr>
+          <a:xfrm>
+            <a:off x="5907024" y="4636008"/>
             <a:ext cx="2194560" cy="420624"/>
           </a:xfrm>
           <a:prstGeom prst="rect">
@@ -40719,13 +42693,13 @@
       </p:sp>
       <p:sp>
         <p:nvSpPr>
-          <p:cNvPr id="54" name="Text 52"/>
-          <p:cNvSpPr/>
-          <p:nvPr/>
-        </p:nvSpPr>
-        <p:spPr>
-          <a:xfrm>
-            <a:off x="5907024" y="4178808"/>
+          <p:cNvPr id="58" name="Text 56"/>
+          <p:cNvSpPr/>
+          <p:nvPr/>
+        </p:nvSpPr>
+        <p:spPr>
+          <a:xfrm>
+            <a:off x="5907024" y="4636008"/>
             <a:ext cx="2194560" cy="420624"/>
           </a:xfrm>
           <a:prstGeom prst="rect">
@@ -40750,7 +42724,7 @@
                 <a:ea typeface="Trebuchet MS" pitchFamily="34" charset="-122"/>
                 <a:cs typeface="Trebuchet MS" pitchFamily="34" charset="-120"/>
               </a:rPr>
-              <a:t>compress</a:t>
+              <a:t>press</a:t>
             </a:r>
             <a:endParaRPr lang="en-US" sz="1400" dirty="0"/>
           </a:p>
@@ -41042,7 +43016,7 @@
                 <a:ea typeface="Calibri" pitchFamily="34" charset="-122"/>
                 <a:cs typeface="Calibri" pitchFamily="34" charset="-120"/>
               </a:rPr>
-              <a:t>Word Labs  •  wordlabs.app  •  Root: 'press' = to push down or squeeze</a:t>
+              <a:t>Word Labs  •  wordlabs.app  •  Root: 'press' = press; push</a:t>
             </a:r>
             <a:endParaRPr lang="en-US" sz="800" dirty="0"/>
           </a:p>
@@ -41154,7 +43128,7 @@
                 <a:ea typeface="Trebuchet MS" pitchFamily="34" charset="-122"/>
                 <a:cs typeface="Trebuchet MS" pitchFamily="34" charset="-120"/>
               </a:rPr>
-              <a:t>compress</a:t>
+              <a:t>press</a:t>
             </a:r>
             <a:endParaRPr lang="en-US" sz="1200" dirty="0"/>
           </a:p>
@@ -41220,7 +43194,7 @@
                 <a:ea typeface="Calibri" pitchFamily="34" charset="-122"/>
                 <a:cs typeface="Calibri" pitchFamily="34" charset="-120"/>
               </a:rPr>
-              <a:t>To show or share your feelings, thoughts or ideas with others.</a:t>
+              <a:t>pushed down firmly on something</a:t>
             </a:r>
             <a:endParaRPr lang="en-US" sz="1200" dirty="0"/>
           </a:p>
@@ -41293,7 +43267,7 @@
                 <a:ea typeface="Trebuchet MS" pitchFamily="34" charset="-122"/>
                 <a:cs typeface="Trebuchet MS" pitchFamily="34" charset="-120"/>
               </a:rPr>
-              <a:t>depress</a:t>
+              <a:t>impress</a:t>
             </a:r>
             <a:endParaRPr lang="en-US" sz="1200" dirty="0"/>
           </a:p>
@@ -41359,7 +43333,7 @@
                 <a:ea typeface="Calibri" pitchFamily="34" charset="-122"/>
                 <a:cs typeface="Calibri" pitchFamily="34" charset="-120"/>
               </a:rPr>
-              <a:t>To hold back or push down a feeling so it doesn't come out.</a:t>
+              <a:t>to squeeze or press something so it takes up less space</a:t>
             </a:r>
             <a:endParaRPr lang="en-US" sz="1200" dirty="0"/>
           </a:p>
@@ -41432,7 +43406,7 @@
                 <a:ea typeface="Trebuchet MS" pitchFamily="34" charset="-122"/>
                 <a:cs typeface="Trebuchet MS" pitchFamily="34" charset="-120"/>
               </a:rPr>
-              <a:t>express</a:t>
+              <a:t>pressed</a:t>
             </a:r>
             <a:endParaRPr lang="en-US" sz="1200" dirty="0"/>
           </a:p>
@@ -41498,7 +43472,7 @@
                 <a:ea typeface="Calibri" pitchFamily="34" charset="-122"/>
                 <a:cs typeface="Calibri" pitchFamily="34" charset="-120"/>
               </a:rPr>
-              <a:t>To squeeze something together to make it smaller, like squashing a sponge.</a:t>
+              <a:t>to push down firmly on something</a:t>
             </a:r>
             <a:endParaRPr lang="en-US" sz="1200" dirty="0"/>
           </a:p>
@@ -41571,7 +43545,7 @@
                 <a:ea typeface="Trebuchet MS" pitchFamily="34" charset="-122"/>
                 <a:cs typeface="Trebuchet MS" pitchFamily="34" charset="-120"/>
               </a:rPr>
-              <a:t>impress</a:t>
+              <a:t>presses</a:t>
             </a:r>
             <a:endParaRPr lang="en-US" sz="1200" dirty="0"/>
           </a:p>
@@ -41637,7 +43611,7 @@
                 <a:ea typeface="Calibri" pitchFamily="34" charset="-122"/>
                 <a:cs typeface="Calibri" pitchFamily="34" charset="-120"/>
               </a:rPr>
-              <a:t>Something that is very urgent and needs to be dealt with straight away.</a:t>
+              <a:t>pushing down firmly on something</a:t>
             </a:r>
             <a:endParaRPr lang="en-US" sz="1200" dirty="0"/>
           </a:p>
@@ -41710,7 +43684,7 @@
                 <a:ea typeface="Trebuchet MS" pitchFamily="34" charset="-122"/>
                 <a:cs typeface="Trebuchet MS" pitchFamily="34" charset="-120"/>
               </a:rPr>
-              <a:t>repress</a:t>
+              <a:t>compress</a:t>
             </a:r>
             <a:endParaRPr lang="en-US" sz="1200" dirty="0"/>
           </a:p>
@@ -41776,7 +43750,7 @@
                 <a:ea typeface="Calibri" pitchFamily="34" charset="-122"/>
                 <a:cs typeface="Calibri" pitchFamily="34" charset="-120"/>
               </a:rPr>
-              <a:t>A pushing force on something, or the feeling of stress when you must do something.</a:t>
+              <a:t>a force pushing on something, or a feeling of strain from expectations</a:t>
             </a:r>
             <a:endParaRPr lang="en-US" sz="1200" dirty="0"/>
           </a:p>
@@ -41915,7 +43889,7 @@
                 <a:ea typeface="Calibri" pitchFamily="34" charset="-122"/>
                 <a:cs typeface="Calibri" pitchFamily="34" charset="-120"/>
               </a:rPr>
-              <a:t>To make someone think you are really good or amazing at something.</a:t>
+              <a:t>pushes down firmly on something</a:t>
             </a:r>
             <a:endParaRPr lang="en-US" sz="1200" dirty="0"/>
           </a:p>
@@ -42054,7 +44028,7 @@
                 <a:ea typeface="Calibri" pitchFamily="34" charset="-122"/>
                 <a:cs typeface="Calibri" pitchFamily="34" charset="-120"/>
               </a:rPr>
-              <a:t>To push something down, or to make someone feel very sad and hopeless.</a:t>
+              <a:t>to make someone admire or feel respect for you</a:t>
             </a:r>
             <a:endParaRPr lang="en-US" sz="1200" dirty="0"/>
           </a:p>
@@ -42346,7 +44320,7 @@
                 <a:ea typeface="Calibri" pitchFamily="34" charset="-122"/>
                 <a:cs typeface="Calibri" pitchFamily="34" charset="-120"/>
               </a:rPr>
-              <a:t>Word Labs  •  wordlabs.app  •  Root: 'press' = to push down or squeeze</a:t>
+              <a:t>Word Labs  •  wordlabs.app  •  Root: 'press' = press; push</a:t>
             </a:r>
             <a:endParaRPr lang="en-US" sz="800" dirty="0"/>
           </a:p>
@@ -42549,7 +44523,7 @@
                 <a:ea typeface="Calibri" pitchFamily="34" charset="-122"/>
                 <a:cs typeface="Calibri" pitchFamily="34" charset="-120"/>
               </a:rPr>
-              <a:t>The scientist used a machine to compress the gas into a tiny container.</a:t>
+              <a:t>Press the button to switch on the light.</a:t>
             </a:r>
             <a:endParaRPr lang="en-US" sz="1500" dirty="0"/>
           </a:p>
@@ -42713,7 +44687,7 @@
                 <a:ea typeface="Calibri" pitchFamily="34" charset="-122"/>
                 <a:cs typeface="Calibri" pitchFamily="34" charset="-120"/>
               </a:rPr>
-              <a:t>She could express her feelings clearly by writing them down in her journal.</a:t>
+              <a:t>She tried to impress the judges with her dance routine.</a:t>
             </a:r>
             <a:endParaRPr lang="en-US" sz="1500" dirty="0"/>
           </a:p>
@@ -42877,7 +44851,7 @@
                 <a:ea typeface="Calibri" pitchFamily="34" charset="-122"/>
                 <a:cs typeface="Calibri" pitchFamily="34" charset="-120"/>
               </a:rPr>
-              <a:t>The pressure of the heavy rock slowly crushed the leaves underneath it.</a:t>
+              <a:t>She pressed the doorbell and waited for someone to answer.</a:t>
             </a:r>
             <a:endParaRPr lang="en-US" sz="1500" dirty="0"/>
           </a:p>
